--- a/slides/Lecture_Chapter07.pptx
+++ b/slides/Lecture_Chapter07.pptx
@@ -318,7 +318,7 @@
           <a:p>
             <a:fld id="{3E22BF2E-04DA-469E-97C5-BB68A0368813}" type="datetimeFigureOut">
               <a:rPr lang="en-US" smtClean="0"/>
-              <a:t>3/30/2026</a:t>
+              <a:t>10/5/2026</a:t>
             </a:fld>
             <a:endParaRPr lang="en-US"/>
           </a:p>
@@ -516,7 +516,7 @@
           <a:p>
             <a:fld id="{3E22BF2E-04DA-469E-97C5-BB68A0368813}" type="datetimeFigureOut">
               <a:rPr lang="en-US" smtClean="0"/>
-              <a:t>3/30/2026</a:t>
+              <a:t>10/5/2026</a:t>
             </a:fld>
             <a:endParaRPr lang="en-US"/>
           </a:p>
@@ -724,7 +724,7 @@
           <a:p>
             <a:fld id="{3E22BF2E-04DA-469E-97C5-BB68A0368813}" type="datetimeFigureOut">
               <a:rPr lang="en-US" smtClean="0"/>
-              <a:t>3/30/2026</a:t>
+              <a:t>10/5/2026</a:t>
             </a:fld>
             <a:endParaRPr lang="en-US"/>
           </a:p>
@@ -932,7 +932,7 @@
           <a:p>
             <a:fld id="{3E22BF2E-04DA-469E-97C5-BB68A0368813}" type="datetimeFigureOut">
               <a:rPr lang="en-US" smtClean="0"/>
-              <a:t>3/30/2026</a:t>
+              <a:t>10/5/2026</a:t>
             </a:fld>
             <a:endParaRPr lang="en-US"/>
           </a:p>
@@ -1207,7 +1207,7 @@
           <a:p>
             <a:fld id="{3E22BF2E-04DA-469E-97C5-BB68A0368813}" type="datetimeFigureOut">
               <a:rPr lang="en-US" smtClean="0"/>
-              <a:t>3/30/2026</a:t>
+              <a:t>10/5/2026</a:t>
             </a:fld>
             <a:endParaRPr lang="en-US"/>
           </a:p>
@@ -1472,7 +1472,7 @@
           <a:p>
             <a:fld id="{3E22BF2E-04DA-469E-97C5-BB68A0368813}" type="datetimeFigureOut">
               <a:rPr lang="en-US" smtClean="0"/>
-              <a:t>3/30/2026</a:t>
+              <a:t>10/5/2026</a:t>
             </a:fld>
             <a:endParaRPr lang="en-US"/>
           </a:p>
@@ -1884,7 +1884,7 @@
           <a:p>
             <a:fld id="{3E22BF2E-04DA-469E-97C5-BB68A0368813}" type="datetimeFigureOut">
               <a:rPr lang="en-US" smtClean="0"/>
-              <a:t>3/30/2026</a:t>
+              <a:t>10/5/2026</a:t>
             </a:fld>
             <a:endParaRPr lang="en-US"/>
           </a:p>
@@ -2025,7 +2025,7 @@
           <a:p>
             <a:fld id="{3E22BF2E-04DA-469E-97C5-BB68A0368813}" type="datetimeFigureOut">
               <a:rPr lang="en-US" smtClean="0"/>
-              <a:t>3/30/2026</a:t>
+              <a:t>10/5/2026</a:t>
             </a:fld>
             <a:endParaRPr lang="en-US"/>
           </a:p>
@@ -2138,7 +2138,7 @@
           <a:p>
             <a:fld id="{3E22BF2E-04DA-469E-97C5-BB68A0368813}" type="datetimeFigureOut">
               <a:rPr lang="en-US" smtClean="0"/>
-              <a:t>3/30/2026</a:t>
+              <a:t>10/5/2026</a:t>
             </a:fld>
             <a:endParaRPr lang="en-US"/>
           </a:p>
@@ -2449,7 +2449,7 @@
           <a:p>
             <a:fld id="{3E22BF2E-04DA-469E-97C5-BB68A0368813}" type="datetimeFigureOut">
               <a:rPr lang="en-US" smtClean="0"/>
-              <a:t>3/30/2026</a:t>
+              <a:t>10/5/2026</a:t>
             </a:fld>
             <a:endParaRPr lang="en-US"/>
           </a:p>
@@ -2737,7 +2737,7 @@
           <a:p>
             <a:fld id="{3E22BF2E-04DA-469E-97C5-BB68A0368813}" type="datetimeFigureOut">
               <a:rPr lang="en-US" smtClean="0"/>
-              <a:t>3/30/2026</a:t>
+              <a:t>10/5/2026</a:t>
             </a:fld>
             <a:endParaRPr lang="en-US"/>
           </a:p>
@@ -2978,7 +2978,7 @@
           <a:p>
             <a:fld id="{3E22BF2E-04DA-469E-97C5-BB68A0368813}" type="datetimeFigureOut">
               <a:rPr lang="en-US" smtClean="0"/>
-              <a:t>3/30/2026</a:t>
+              <a:t>10/5/2026</a:t>
             </a:fld>
             <a:endParaRPr lang="en-US"/>
           </a:p>
@@ -4500,7 +4500,7 @@
                     <m:d>
                       <m:dPr>
                         <m:ctrlPr>
-                          <a:rPr lang="en-US" b="0" i="1" dirty="0" smtClean="0">
+                          <a:rPr lang="en-US" i="1">
                             <a:latin typeface="Cambria Math" panose="02040503050406030204" pitchFamily="18" charset="0"/>
                             <a:ea typeface="Cambria Math" panose="02040503050406030204" pitchFamily="18" charset="0"/>
                           </a:rPr>
@@ -4685,7 +4685,7 @@
                     <m:sSub>
                       <m:sSubPr>
                         <m:ctrlPr>
-                          <a:rPr lang="en-US" b="0" i="1" smtClean="0">
+                          <a:rPr lang="en-US" b="0" i="0" smtClean="0">
                             <a:latin typeface="Cambria Math" panose="02040503050406030204" pitchFamily="18" charset="0"/>
                           </a:rPr>
                         </m:ctrlPr>
@@ -4717,6 +4717,7 @@
                         <m:ctrlPr>
                           <a:rPr lang="en-US" b="0" i="1" smtClean="0">
                             <a:latin typeface="Cambria Math" panose="02040503050406030204" pitchFamily="18" charset="0"/>
+                            <a:ea typeface="Cambria Math" panose="02040503050406030204" pitchFamily="18" charset="0"/>
                           </a:rPr>
                         </m:ctrlPr>
                       </m:dPr>
@@ -4724,7 +4725,7 @@
                         <m:sSub>
                           <m:sSubPr>
                             <m:ctrlPr>
-                              <a:rPr lang="en-US" b="0" i="1" smtClean="0">
+                              <a:rPr lang="en-US" i="1">
                                 <a:latin typeface="Cambria Math" panose="02040503050406030204" pitchFamily="18" charset="0"/>
                                 <a:ea typeface="Cambria Math" panose="02040503050406030204" pitchFamily="18" charset="0"/>
                               </a:rPr>
@@ -4767,7 +4768,6 @@
                             <m:ctrlPr>
                               <a:rPr lang="en-US" i="1">
                                 <a:latin typeface="Cambria Math" panose="02040503050406030204" pitchFamily="18" charset="0"/>
-                                <a:ea typeface="Cambria Math" panose="02040503050406030204" pitchFamily="18" charset="0"/>
                               </a:rPr>
                             </m:ctrlPr>
                           </m:dPr>
@@ -4797,7 +4797,7 @@
                     <m:sSub>
                       <m:sSubPr>
                         <m:ctrlPr>
-                          <a:rPr lang="en-US" b="0" i="1" smtClean="0">
+                          <a:rPr lang="en-US" i="1" smtClean="0">
                             <a:latin typeface="Cambria Math" panose="02040503050406030204" pitchFamily="18" charset="0"/>
                             <a:ea typeface="Cambria Math" panose="02040503050406030204" pitchFamily="18" charset="0"/>
                           </a:rPr>
@@ -4837,7 +4837,7 @@
                         <m:sSub>
                           <m:sSubPr>
                             <m:ctrlPr>
-                              <a:rPr lang="en-US" b="0" i="1" smtClean="0">
+                              <a:rPr lang="en-US" i="1">
                                 <a:latin typeface="Cambria Math" panose="02040503050406030204" pitchFamily="18" charset="0"/>
                                 <a:ea typeface="Cambria Math" panose="02040503050406030204" pitchFamily="18" charset="0"/>
                               </a:rPr>
@@ -4880,7 +4880,6 @@
                             <m:ctrlPr>
                               <a:rPr lang="en-US" i="1">
                                 <a:latin typeface="Cambria Math" panose="02040503050406030204" pitchFamily="18" charset="0"/>
-                                <a:ea typeface="Cambria Math" panose="02040503050406030204" pitchFamily="18" charset="0"/>
                               </a:rPr>
                             </m:ctrlPr>
                           </m:dPr>
@@ -4931,7 +4930,7 @@
                         <m:d>
                           <m:dPr>
                             <m:ctrlPr>
-                              <a:rPr lang="en-US" b="0" i="1" smtClean="0">
+                              <a:rPr lang="en-US" b="0" i="0" smtClean="0">
                                 <a:latin typeface="Cambria Math" panose="02040503050406030204" pitchFamily="18" charset="0"/>
                                 <a:ea typeface="Cambria Math" panose="02040503050406030204" pitchFamily="18" charset="0"/>
                               </a:rPr>
@@ -4992,7 +4991,7 @@
                         <m:begChr m:val="["/>
                         <m:endChr m:val="]"/>
                         <m:ctrlPr>
-                          <a:rPr lang="en-US" i="1" smtClean="0">
+                          <a:rPr lang="en-US" b="0" i="1" smtClean="0">
                             <a:latin typeface="Cambria Math" panose="02040503050406030204" pitchFamily="18" charset="0"/>
                             <a:ea typeface="Cambria Math" panose="02040503050406030204" pitchFamily="18" charset="0"/>
                           </a:rPr>
@@ -5002,7 +5001,7 @@
                         <m:sSub>
                           <m:sSubPr>
                             <m:ctrlPr>
-                              <a:rPr lang="en-US" b="0" i="1" smtClean="0">
+                              <a:rPr lang="en-US" i="1">
                                 <a:latin typeface="Cambria Math" panose="02040503050406030204" pitchFamily="18" charset="0"/>
                                 <a:ea typeface="Cambria Math" panose="02040503050406030204" pitchFamily="18" charset="0"/>
                               </a:rPr>
@@ -5045,7 +5044,6 @@
                             <m:ctrlPr>
                               <a:rPr lang="en-US" i="1">
                                 <a:latin typeface="Cambria Math" panose="02040503050406030204" pitchFamily="18" charset="0"/>
-                                <a:ea typeface="Cambria Math" panose="02040503050406030204" pitchFamily="18" charset="0"/>
                               </a:rPr>
                             </m:ctrlPr>
                           </m:dPr>
@@ -5145,7 +5143,7 @@
                     <m:sSub>
                       <m:sSubPr>
                         <m:ctrlPr>
-                          <a:rPr lang="en-US" b="0" i="1" smtClean="0">
+                          <a:rPr lang="en-US" b="0" i="0" smtClean="0">
                             <a:latin typeface="Cambria Math" panose="02040503050406030204" pitchFamily="18" charset="0"/>
                           </a:rPr>
                         </m:ctrlPr>
@@ -5175,8 +5173,9 @@
                         <m:begChr m:val="["/>
                         <m:endChr m:val="]"/>
                         <m:ctrlPr>
-                          <a:rPr lang="en-US" i="1">
-                            <a:latin typeface="Cambria Math" panose="02040503050406030204" pitchFamily="18" charset="0"/>
+                          <a:rPr lang="en-US" b="0" i="1" smtClean="0">
+                            <a:latin typeface="Cambria Math" panose="02040503050406030204" pitchFamily="18" charset="0"/>
+                            <a:ea typeface="Cambria Math" panose="02040503050406030204" pitchFamily="18" charset="0"/>
                           </a:rPr>
                         </m:ctrlPr>
                       </m:dPr>
@@ -5184,7 +5183,7 @@
                         <m:sSub>
                           <m:sSubPr>
                             <m:ctrlPr>
-                              <a:rPr lang="en-US" b="0" i="1" smtClean="0">
+                              <a:rPr lang="en-US" i="1">
                                 <a:latin typeface="Cambria Math" panose="02040503050406030204" pitchFamily="18" charset="0"/>
                                 <a:ea typeface="Cambria Math" panose="02040503050406030204" pitchFamily="18" charset="0"/>
                               </a:rPr>
@@ -5227,7 +5226,6 @@
                             <m:ctrlPr>
                               <a:rPr lang="en-US" i="1">
                                 <a:latin typeface="Cambria Math" panose="02040503050406030204" pitchFamily="18" charset="0"/>
-                                <a:ea typeface="Cambria Math" panose="02040503050406030204" pitchFamily="18" charset="0"/>
                               </a:rPr>
                             </m:ctrlPr>
                           </m:dPr>
@@ -5251,7 +5249,7 @@
                     <m:sSub>
                       <m:sSubPr>
                         <m:ctrlPr>
-                          <a:rPr lang="en-US" b="0" i="1" smtClean="0">
+                          <a:rPr lang="en-US" i="1">
                             <a:latin typeface="Cambria Math" panose="02040503050406030204" pitchFamily="18" charset="0"/>
                             <a:ea typeface="Cambria Math" panose="02040503050406030204" pitchFamily="18" charset="0"/>
                           </a:rPr>
@@ -5281,7 +5279,7 @@
                         <m:begChr m:val="["/>
                         <m:endChr m:val="]"/>
                         <m:ctrlPr>
-                          <a:rPr lang="en-US" i="1" smtClean="0">
+                          <a:rPr lang="en-US" i="1">
                             <a:latin typeface="Cambria Math" panose="02040503050406030204" pitchFamily="18" charset="0"/>
                             <a:ea typeface="Cambria Math" panose="02040503050406030204" pitchFamily="18" charset="0"/>
                           </a:rPr>
@@ -5341,7 +5339,7 @@
                                     <m:begChr m:val="["/>
                                     <m:endChr m:val="]"/>
                                     <m:ctrlPr>
-                                      <a:rPr lang="en-US" i="1">
+                                      <a:rPr lang="en-US" b="0" i="1" smtClean="0">
                                         <a:latin typeface="Cambria Math" panose="02040503050406030204" pitchFamily="18" charset="0"/>
                                         <a:ea typeface="Cambria Math" panose="02040503050406030204" pitchFamily="18" charset="0"/>
                                       </a:rPr>
@@ -5351,7 +5349,7 @@
                                     <m:sSub>
                                       <m:sSubPr>
                                         <m:ctrlPr>
-                                          <a:rPr lang="en-US" b="0" i="1" smtClean="0">
+                                          <a:rPr lang="en-US" i="1">
                                             <a:latin typeface="Cambria Math" panose="02040503050406030204" pitchFamily="18" charset="0"/>
                                             <a:ea typeface="Cambria Math" panose="02040503050406030204" pitchFamily="18" charset="0"/>
                                           </a:rPr>
@@ -5394,7 +5392,6 @@
                                         <m:ctrlPr>
                                           <a:rPr lang="en-US" i="1">
                                             <a:latin typeface="Cambria Math" panose="02040503050406030204" pitchFamily="18" charset="0"/>
-                                            <a:ea typeface="Cambria Math" panose="02040503050406030204" pitchFamily="18" charset="0"/>
                                           </a:rPr>
                                         </m:ctrlPr>
                                       </m:dPr>
@@ -5419,7 +5416,7 @@
                                 <m:sSub>
                                   <m:sSubPr>
                                     <m:ctrlPr>
-                                      <a:rPr lang="en-US" b="0" i="1" smtClean="0">
+                                      <a:rPr lang="en-US" i="1">
                                         <a:latin typeface="Cambria Math" panose="02040503050406030204" pitchFamily="18" charset="0"/>
                                         <a:ea typeface="Cambria Math" panose="02040503050406030204" pitchFamily="18" charset="0"/>
                                       </a:rPr>
@@ -5462,7 +5459,6 @@
                                     <m:ctrlPr>
                                       <a:rPr lang="en-US" i="1">
                                         <a:latin typeface="Cambria Math" panose="02040503050406030204" pitchFamily="18" charset="0"/>
-                                        <a:ea typeface="Cambria Math" panose="02040503050406030204" pitchFamily="18" charset="0"/>
                                       </a:rPr>
                                     </m:ctrlPr>
                                   </m:dPr>
@@ -5515,7 +5511,16 @@
                       <a:rPr lang="en-US" i="0" dirty="0" smtClean="0">
                         <a:latin typeface="Cambria Math" panose="02040503050406030204" pitchFamily="18" charset="0"/>
                       </a:rPr>
-                      <m:t>Total</m:t>
+                      <m:t>Total </m:t>
+                    </m:r>
+                    <m:r>
+                      <m:rPr>
+                        <m:nor/>
+                      </m:rPr>
+                      <a:rPr lang="en-US" b="0" i="0" dirty="0" smtClean="0">
+                        <a:latin typeface="Cambria Math" panose="02040503050406030204" pitchFamily="18" charset="0"/>
+                      </a:rPr>
+                      <m:t>E</m:t>
                     </m:r>
                     <m:r>
                       <m:rPr>
@@ -5524,7 +5529,13 @@
                       <a:rPr lang="en-US" i="0" dirty="0" smtClean="0">
                         <a:latin typeface="Cambria Math" panose="02040503050406030204" pitchFamily="18" charset="0"/>
                       </a:rPr>
-                      <m:t> </m:t>
+                      <m:t>rror </m:t>
+                    </m:r>
+                    <m:r>
+                      <a:rPr lang="en-US" i="1" dirty="0" smtClean="0">
+                        <a:latin typeface="Cambria Math" panose="02040503050406030204" pitchFamily="18" charset="0"/>
+                      </a:rPr>
+                      <m:t>= </m:t>
                     </m:r>
                     <m:r>
                       <m:rPr>
@@ -5533,7 +5544,7 @@
                       <a:rPr lang="en-US" b="0" i="0" dirty="0" smtClean="0">
                         <a:latin typeface="Cambria Math" panose="02040503050406030204" pitchFamily="18" charset="0"/>
                       </a:rPr>
-                      <m:t>E</m:t>
+                      <m:t>B</m:t>
                     </m:r>
                     <m:r>
                       <m:rPr>
@@ -5542,45 +5553,12 @@
                       <a:rPr lang="en-US" i="0" dirty="0" smtClean="0">
                         <a:latin typeface="Cambria Math" panose="02040503050406030204" pitchFamily="18" charset="0"/>
                       </a:rPr>
-                      <m:t>rror</m:t>
-                    </m:r>
-                    <m:r>
-                      <m:rPr>
-                        <m:nor/>
-                      </m:rPr>
-                      <a:rPr lang="en-US" i="0" dirty="0" smtClean="0">
-                        <a:latin typeface="Cambria Math" panose="02040503050406030204" pitchFamily="18" charset="0"/>
-                      </a:rPr>
-                      <m:t> </m:t>
-                    </m:r>
-                    <m:r>
-                      <a:rPr lang="en-US" i="1" dirty="0" smtClean="0">
-                        <a:latin typeface="Cambria Math" panose="02040503050406030204" pitchFamily="18" charset="0"/>
-                      </a:rPr>
-                      <m:t>= </m:t>
-                    </m:r>
-                    <m:r>
-                      <m:rPr>
-                        <m:nor/>
-                      </m:rPr>
-                      <a:rPr lang="en-US" b="0" i="0" dirty="0" smtClean="0">
-                        <a:latin typeface="Cambria Math" panose="02040503050406030204" pitchFamily="18" charset="0"/>
-                      </a:rPr>
-                      <m:t>B</m:t>
-                    </m:r>
-                    <m:r>
-                      <m:rPr>
-                        <m:nor/>
-                      </m:rPr>
-                      <a:rPr lang="en-US" i="0" dirty="0" smtClean="0">
-                        <a:latin typeface="Cambria Math" panose="02040503050406030204" pitchFamily="18" charset="0"/>
-                      </a:rPr>
                       <m:t>ia</m:t>
                     </m:r>
                     <m:sSup>
                       <m:sSupPr>
                         <m:ctrlPr>
-                          <a:rPr lang="en-US" i="1" dirty="0" smtClean="0">
+                          <a:rPr lang="en-US" i="0" dirty="0" smtClean="0">
                             <a:latin typeface="Cambria Math" panose="02040503050406030204" pitchFamily="18" charset="0"/>
                           </a:rPr>
                         </m:ctrlPr>
@@ -5663,16 +5641,7 @@
                       <a:rPr lang="en-US" i="0" dirty="0" smtClean="0">
                         <a:latin typeface="Cambria Math" panose="02040503050406030204" pitchFamily="18" charset="0"/>
                       </a:rPr>
-                      <m:t>rreducible</m:t>
-                    </m:r>
-                    <m:r>
-                      <m:rPr>
-                        <m:nor/>
-                      </m:rPr>
-                      <a:rPr lang="en-US" i="0" dirty="0" smtClean="0">
-                        <a:latin typeface="Cambria Math" panose="02040503050406030204" pitchFamily="18" charset="0"/>
-                      </a:rPr>
-                      <m:t> </m:t>
+                      <m:t>rreducible </m:t>
                     </m:r>
                     <m:r>
                       <m:rPr>
@@ -6405,7 +6374,7 @@
                     <m:sSub>
                       <m:sSubPr>
                         <m:ctrlPr>
-                          <a:rPr lang="en-US" sz="1600" b="0" i="1" smtClean="0">
+                          <a:rPr lang="en-US" sz="1600" i="1" smtClean="0">
                             <a:latin typeface="Cambria Math" panose="02040503050406030204" pitchFamily="18" charset="0"/>
                             <a:ea typeface="Cambria Math" panose="02040503050406030204" pitchFamily="18" charset="0"/>
                           </a:rPr>
@@ -6416,7 +6385,7 @@
                           <m:accPr>
                             <m:chr m:val="̂"/>
                             <m:ctrlPr>
-                              <a:rPr lang="en-US" sz="1600" i="1" smtClean="0">
+                              <a:rPr lang="en-US" sz="1600" i="1">
                                 <a:latin typeface="Cambria Math" panose="02040503050406030204" pitchFamily="18" charset="0"/>
                                 <a:ea typeface="Cambria Math" panose="02040503050406030204" pitchFamily="18" charset="0"/>
                               </a:rPr>
@@ -6448,7 +6417,6 @@
                         <m:ctrlPr>
                           <a:rPr lang="en-US" sz="1600" i="1">
                             <a:latin typeface="Cambria Math" panose="02040503050406030204" pitchFamily="18" charset="0"/>
-                            <a:ea typeface="Cambria Math" panose="02040503050406030204" pitchFamily="18" charset="0"/>
                           </a:rPr>
                         </m:ctrlPr>
                       </m:dPr>
@@ -6630,7 +6598,6 @@
                         <m:ctrlPr>
                           <a:rPr lang="en-US" sz="1600" i="1">
                             <a:latin typeface="Cambria Math" panose="02040503050406030204" pitchFamily="18" charset="0"/>
-                            <a:ea typeface="Cambria Math" panose="02040503050406030204" pitchFamily="18" charset="0"/>
                           </a:rPr>
                         </m:ctrlPr>
                       </m:dPr>
@@ -7687,10 +7654,7 @@
                 </a:pPr>
                 <a14:m>
                   <m:oMathPara xmlns:m="http://schemas.openxmlformats.org/officeDocument/2006/math">
-                    <m:oMathParaPr>
-                      <m:jc m:val="centerGroup"/>
-                    </m:oMathParaPr>
-                    <m:oMath xmlns:m="http://schemas.openxmlformats.org/officeDocument/2006/math">
+                    <m:oMath>
                       <m:sSub>
                         <m:sSubPr>
                           <m:ctrlPr>
@@ -8044,10 +8008,7 @@
                 </a:pPr>
                 <a14:m>
                   <m:oMathPara xmlns:m="http://schemas.openxmlformats.org/officeDocument/2006/math">
-                    <m:oMathParaPr>
-                      <m:jc m:val="centerGroup"/>
-                    </m:oMathParaPr>
-                    <m:oMath xmlns:m="http://schemas.openxmlformats.org/officeDocument/2006/math">
+                    <m:oMath>
                       <m:r>
                         <a:rPr lang="en-US" b="0" i="1" smtClean="0">
                           <a:latin typeface="Cambria Math" panose="02040503050406030204" pitchFamily="18" charset="0"/>
@@ -8835,10 +8796,7 @@
                   <a:pPr/>
                   <a14:m>
                     <m:oMathPara xmlns:m="http://schemas.openxmlformats.org/officeDocument/2006/math">
-                      <m:oMathParaPr>
-                        <m:jc m:val="centerGroup"/>
-                      </m:oMathParaPr>
-                      <m:oMath xmlns:m="http://schemas.openxmlformats.org/officeDocument/2006/math">
+                      <m:oMath>
                         <m:r>
                           <m:rPr>
                             <m:sty m:val="p"/>
@@ -8883,19 +8841,7 @@
                             </a:solidFill>
                             <a:latin typeface="Cambria Math" panose="02040503050406030204" pitchFamily="18" charset="0"/>
                           </a:rPr>
-                          <m:t>−</m:t>
-                        </m:r>
-                        <m:r>
-                          <m:rPr>
-                            <m:nor/>
-                          </m:rPr>
-                          <a:rPr lang="en-US" sz="1200" b="0" i="0" smtClean="0">
-                            <a:solidFill>
-                              <a:schemeClr val="accent3"/>
-                            </a:solidFill>
-                            <a:latin typeface="Cambria Math" panose="02040503050406030204" pitchFamily="18" charset="0"/>
-                          </a:rPr>
-                          <m:t>greedy</m:t>
+                          <m:t>−greedy</m:t>
                         </m:r>
                         <m:r>
                           <a:rPr lang="en-US" sz="1200" b="0" i="1" smtClean="0">
@@ -10612,10 +10558,7 @@
                 </a:pPr>
                 <a14:m>
                   <m:oMathPara xmlns:m="http://schemas.openxmlformats.org/officeDocument/2006/math">
-                    <m:oMathParaPr>
-                      <m:jc m:val="centerGroup"/>
-                    </m:oMathParaPr>
-                    <m:oMath xmlns:m="http://schemas.openxmlformats.org/officeDocument/2006/math">
+                    <m:oMath>
                       <m:sSub>
                         <m:sSubPr>
                           <m:ctrlPr>
@@ -10937,10 +10880,7 @@
                 </a:pPr>
                 <a14:m>
                   <m:oMathPara xmlns:m="http://schemas.openxmlformats.org/officeDocument/2006/math">
-                    <m:oMathParaPr>
-                      <m:jc m:val="centerGroup"/>
-                    </m:oMathParaPr>
-                    <m:oMath xmlns:m="http://schemas.openxmlformats.org/officeDocument/2006/math">
+                    <m:oMath>
                       <m:sSub>
                         <m:sSubPr>
                           <m:ctrlPr>
@@ -10974,7 +10914,7 @@
                             <a:rPr lang="en-US" b="0" i="1" smtClean="0">
                               <a:latin typeface="Cambria Math" panose="02040503050406030204" pitchFamily="18" charset="0"/>
                             </a:rPr>
-                            <m:t>h</m:t>
+                            <m:t>ℎ</m:t>
                           </m:r>
                         </m:sub>
                       </m:sSub>
@@ -11036,7 +10976,7 @@
                             <a:rPr lang="en-US" b="0" i="1" smtClean="0">
                               <a:latin typeface="Cambria Math" panose="02040503050406030204" pitchFamily="18" charset="0"/>
                             </a:rPr>
-                            <m:t>h</m:t>
+                            <m:t>ℎ</m:t>
                           </m:r>
                           <m:r>
                             <a:rPr lang="en-US" b="0" i="1" smtClean="0">
@@ -11375,16 +11315,7 @@
                       <a:rPr lang="en-US" b="0" i="0" smtClean="0">
                         <a:latin typeface="Cambria Math" panose="02040503050406030204" pitchFamily="18" charset="0"/>
                       </a:rPr>
-                      <m:t>−</m:t>
-                    </m:r>
-                    <m:r>
-                      <m:rPr>
-                        <m:nor/>
-                      </m:rPr>
-                      <a:rPr lang="en-US" b="0" i="0" smtClean="0">
-                        <a:latin typeface="Cambria Math" panose="02040503050406030204" pitchFamily="18" charset="0"/>
-                      </a:rPr>
-                      <m:t>greedy</m:t>
+                      <m:t>−greedy</m:t>
                     </m:r>
                     <m:r>
                       <a:rPr lang="en-US" b="0" i="1" smtClean="0">
@@ -12466,16 +12397,7 @@
                       <a:rPr lang="en-US" sz="1600" b="0" i="0" smtClean="0">
                         <a:latin typeface="Cambria Math" panose="02040503050406030204" pitchFamily="18" charset="0"/>
                       </a:rPr>
-                      <m:t>−</m:t>
-                    </m:r>
-                    <m:r>
-                      <m:rPr>
-                        <m:nor/>
-                      </m:rPr>
-                      <a:rPr lang="en-US" sz="1600" b="0" i="0" smtClean="0">
-                        <a:latin typeface="Cambria Math" panose="02040503050406030204" pitchFamily="18" charset="0"/>
-                      </a:rPr>
-                      <m:t>greedy</m:t>
+                      <m:t>−greedy</m:t>
                     </m:r>
                     <m:r>
                       <a:rPr lang="en-US" sz="1600" b="0" i="1" smtClean="0">
@@ -13622,7 +13544,7 @@
                     <m:sSub>
                       <m:sSubPr>
                         <m:ctrlPr>
-                          <a:rPr lang="en-US" sz="1200" i="1" dirty="0" smtClean="0">
+                          <a:rPr lang="en-US" sz="1200" i="1" dirty="0">
                             <a:latin typeface="Cambria Math" panose="02040503050406030204" pitchFamily="18" charset="0"/>
                           </a:rPr>
                         </m:ctrlPr>
@@ -13722,7 +13644,7 @@
                             </a:solidFill>
                             <a:latin typeface="Cambria Math" panose="02040503050406030204" pitchFamily="18" charset="0"/>
                           </a:rPr>
-                          <m:t>h</m:t>
+                          <m:t>ℎ</m:t>
                         </m:r>
                       </m:sub>
                     </m:sSub>
@@ -13766,7 +13688,7 @@
                         </a:solidFill>
                         <a:latin typeface="Cambria Math" panose="02040503050406030204" pitchFamily="18" charset="0"/>
                       </a:rPr>
-                      <m:t>h</m:t>
+                      <m:t>ℎ</m:t>
                     </m:r>
                   </m:oMath>
                 </a14:m>
@@ -15077,7 +14999,7 @@
                     <m:sSub>
                       <m:sSubPr>
                         <m:ctrlPr>
-                          <a:rPr lang="en-US" sz="1200" i="1" dirty="0">
+                          <a:rPr lang="en-US" sz="1200" dirty="0">
                             <a:latin typeface="Cambria Math" panose="02040503050406030204" pitchFamily="18" charset="0"/>
                           </a:rPr>
                         </m:ctrlPr>
@@ -15566,7 +15488,7 @@
                     <m:sSup>
                       <m:sSupPr>
                         <m:ctrlPr>
-                          <a:rPr lang="en-US" sz="1200" b="0" i="1" dirty="0" smtClean="0">
+                          <a:rPr lang="en-US" sz="1200" i="1" dirty="0">
                             <a:latin typeface="Cambria Math" panose="02040503050406030204" pitchFamily="18" charset="0"/>
                             <a:ea typeface="Cambria Math" panose="02040503050406030204" pitchFamily="18" charset="0"/>
                           </a:rPr>
@@ -15731,7 +15653,7 @@
                     <m:sSub>
                       <m:sSubPr>
                         <m:ctrlPr>
-                          <a:rPr lang="en-US" sz="1200" b="0" i="1" dirty="0" smtClean="0">
+                          <a:rPr lang="en-US" sz="1200" i="1" dirty="0" smtClean="0">
                             <a:latin typeface="Cambria Math" panose="02040503050406030204" pitchFamily="18" charset="0"/>
                           </a:rPr>
                         </m:ctrlPr>
@@ -15783,7 +15705,7 @@
                     <m:sSub>
                       <m:sSubPr>
                         <m:ctrlPr>
-                          <a:rPr lang="en-US" sz="1200" b="0" i="1" dirty="0" smtClean="0">
+                          <a:rPr lang="en-US" sz="1200" i="1" dirty="0" smtClean="0">
                             <a:latin typeface="Cambria Math" panose="02040503050406030204" pitchFamily="18" charset="0"/>
                           </a:rPr>
                         </m:ctrlPr>
@@ -15835,7 +15757,7 @@
                     <m:sSub>
                       <m:sSubPr>
                         <m:ctrlPr>
-                          <a:rPr lang="en-US" sz="1200" b="0" i="1" dirty="0" smtClean="0">
+                          <a:rPr lang="en-US" sz="1200" i="1" dirty="0" smtClean="0">
                             <a:latin typeface="Cambria Math" panose="02040503050406030204" pitchFamily="18" charset="0"/>
                           </a:rPr>
                         </m:ctrlPr>
@@ -16957,7 +16879,7 @@
                     <m:sSub>
                       <m:sSubPr>
                         <m:ctrlPr>
-                          <a:rPr lang="en-US" sz="1200" i="1" dirty="0">
+                          <a:rPr lang="en-US" sz="1200" b="0" i="1" dirty="0" smtClean="0">
                             <a:solidFill>
                               <a:schemeClr val="tx1"/>
                             </a:solidFill>
@@ -17350,8 +17272,8 @@
           </p:sp>
         </mc:Fallback>
       </mc:AlternateContent>
-      <mc:AlternateContent xmlns:mc="http://schemas.openxmlformats.org/markup-compatibility/2006" xmlns:a14="http://schemas.microsoft.com/office/drawing/2010/main">
-        <mc:Choice Requires="a14">
+      <mc:AlternateContent xmlns:mc="http://schemas.openxmlformats.org/markup-compatibility/2006">
+        <mc:Choice xmlns:a14="http://schemas.microsoft.com/office/drawing/2010/main" Requires="a14">
           <p:sp>
             <p:nvSpPr>
               <p:cNvPr id="3" name="Content Placeholder 2">
@@ -17370,8 +17292,8 @@
             </p:nvSpPr>
             <p:spPr>
               <a:xfrm>
-                <a:off x="838200" y="1192292"/>
-                <a:ext cx="10515600" cy="1831065"/>
+                <a:off x="838200" y="1048821"/>
+                <a:ext cx="10515600" cy="2034665"/>
               </a:xfrm>
             </p:spPr>
             <p:txBody>
@@ -17389,7 +17311,14 @@
                 </a:r>
                 <a:r>
                   <a:rPr lang="en-US" sz="1800" dirty="0"/>
-                  <a:t>: How far ahead in the sampled episode do we look to estimate the return?</a:t>
+                  <a:t>: How far ahead in the sampled episode do we look to estimate the return? </a:t>
+                </a:r>
+                <a:br>
+                  <a:rPr lang="en-US" sz="1800" dirty="0"/>
+                </a:br>
+                <a:r>
+                  <a:rPr lang="en-US" sz="1800" dirty="0"/>
+                  <a:t>This is a question of bias and variance of the estimate.</a:t>
                 </a:r>
                 <a:endParaRPr lang="en-US" sz="1800" b="1" dirty="0"/>
               </a:p>
@@ -17406,7 +17335,7 @@
                 </a:r>
                 <a:r>
                   <a:rPr lang="en-US" sz="1800" dirty="0"/>
-                  <a:t>We use the whole episode.</a:t>
+                  <a:t>We use the whole episode. No bias, but high variance.</a:t>
                 </a:r>
                 <a:endParaRPr lang="en-US" sz="1800" b="1" dirty="0"/>
               </a:p>
@@ -17425,7 +17354,7 @@
                 </a:r>
                 <a:r>
                   <a:rPr lang="en-US" sz="1800" dirty="0"/>
-                  <a:t>and its reward. The remaining return is </a:t>
+                  <a:t>and its reward (reduces variance). The remaining return is </a:t>
                 </a:r>
                 <a:r>
                   <a:rPr lang="en-US" sz="1800" b="1" dirty="0"/>
@@ -17447,52 +17376,20 @@
                 </a:r>
                 <a:r>
                   <a:rPr lang="en-US" sz="1800" b="1" dirty="0"/>
-                  <a:t>propagates state value errors</a:t>
+                  <a:t>propagates state value errors (= bias)</a:t>
                 </a:r>
                 <a:r>
                   <a:rPr lang="en-US" sz="1800" dirty="0"/>
                   <a:t>!</a:t>
                 </a:r>
                 <a:endParaRPr lang="en-US" sz="1800" i="1" dirty="0">
-                  <a:latin typeface="Cambria Math" panose="02040503050406030204" pitchFamily="18" charset="0"/>
-                </a:endParaRPr>
-              </a:p>
-              <a:p>
-                <a:pPr marL="0" indent="0">
-                  <a:buNone/>
-                </a:pPr>
-                <a:endParaRPr lang="en-US" sz="1600" b="1" i="1" dirty="0">
-                  <a:latin typeface="Cambria Math" panose="02040503050406030204" pitchFamily="18" charset="0"/>
-                </a:endParaRPr>
-              </a:p>
-              <a:p>
-                <a:pPr marL="0" indent="0">
-                  <a:buNone/>
-                </a:pPr>
-                <a:endParaRPr lang="en-US" sz="1600" b="1" i="1" dirty="0">
-                  <a:latin typeface="Cambria Math" panose="02040503050406030204" pitchFamily="18" charset="0"/>
-                </a:endParaRPr>
-              </a:p>
-              <a:p>
-                <a:pPr marL="0" indent="0">
-                  <a:buNone/>
-                </a:pPr>
-                <a:endParaRPr lang="en-US" sz="1600" b="1" i="1" dirty="0">
-                  <a:latin typeface="Cambria Math" panose="02040503050406030204" pitchFamily="18" charset="0"/>
-                </a:endParaRPr>
-              </a:p>
-              <a:p>
-                <a:pPr marL="0" indent="0">
-                  <a:buNone/>
-                </a:pPr>
-                <a:endParaRPr lang="en-US" sz="1600" b="1" i="1" dirty="0">
                   <a:latin typeface="Cambria Math" panose="02040503050406030204" pitchFamily="18" charset="0"/>
                 </a:endParaRPr>
               </a:p>
             </p:txBody>
           </p:sp>
         </mc:Choice>
-        <mc:Fallback xmlns="">
+        <mc:Fallback>
           <p:sp>
             <p:nvSpPr>
               <p:cNvPr id="3" name="Content Placeholder 2">
@@ -17511,13 +17408,13 @@
             </p:nvSpPr>
             <p:spPr>
               <a:xfrm>
-                <a:off x="838200" y="1192292"/>
-                <a:ext cx="10515600" cy="1831065"/>
+                <a:off x="838200" y="1048821"/>
+                <a:ext cx="10515600" cy="2034665"/>
               </a:xfrm>
               <a:blipFill>
                 <a:blip r:embed="rId3"/>
                 <a:stretch>
-                  <a:fillRect l="-522" t="-3333"/>
+                  <a:fillRect l="-522" t="-2695" b="-1198"/>
                 </a:stretch>
               </a:blipFill>
             </p:spPr>
@@ -17536,8 +17433,8 @@
           </p:sp>
         </mc:Fallback>
       </mc:AlternateContent>
-      <mc:AlternateContent xmlns:mc="http://schemas.openxmlformats.org/markup-compatibility/2006" xmlns:a14="http://schemas.microsoft.com/office/drawing/2010/main">
-        <mc:Choice Requires="a14">
+      <mc:AlternateContent xmlns:mc="http://schemas.openxmlformats.org/markup-compatibility/2006">
+        <mc:Choice xmlns:a14="http://schemas.microsoft.com/office/drawing/2010/main" Requires="a14">
           <p:sp>
             <p:nvSpPr>
               <p:cNvPr id="32" name="TextBox 31">
@@ -17552,7 +17449,7 @@
             </p:nvSpPr>
             <p:spPr>
               <a:xfrm>
-                <a:off x="942099" y="4644434"/>
+                <a:off x="838200" y="4194044"/>
                 <a:ext cx="10610054" cy="1200329"/>
               </a:xfrm>
               <a:prstGeom prst="rect">
@@ -17610,8 +17507,13 @@
                 </a:r>
                 <a:r>
                   <a:rPr lang="en-US" b="1" dirty="0"/>
-                  <a:t>reduce the bootstrapping error.</a:t>
-                </a:r>
+                  <a:t>reduce the bootstrapping error (bias), </a:t>
+                </a:r>
+                <a:r>
+                  <a:rPr lang="en-US" dirty="0"/>
+                  <a:t>but increases variance.</a:t>
+                </a:r>
+                <a:endParaRPr lang="en-US" b="1" dirty="0"/>
               </a:p>
               <a:p>
                 <a:pPr marL="742950" lvl="1" indent="-285750">
@@ -17626,7 +17528,7 @@
             </p:txBody>
           </p:sp>
         </mc:Choice>
-        <mc:Fallback xmlns="">
+        <mc:Fallback>
           <p:sp>
             <p:nvSpPr>
               <p:cNvPr id="32" name="TextBox 31">
@@ -17643,7 +17545,7 @@
             </p:nvSpPr>
             <p:spPr>
               <a:xfrm>
-                <a:off x="942099" y="4644434"/>
+                <a:off x="838200" y="4194044"/>
                 <a:ext cx="10610054" cy="1200329"/>
               </a:xfrm>
               <a:prstGeom prst="rect">
@@ -17652,7 +17554,7 @@
               <a:blipFill>
                 <a:blip r:embed="rId4"/>
                 <a:stretch>
-                  <a:fillRect l="-402" t="-2538" b="-7614"/>
+                  <a:fillRect l="-402" t="-2030" b="-7614"/>
                 </a:stretch>
               </a:blipFill>
             </p:spPr>
@@ -17685,7 +17587,7 @@
         </p:nvGrpSpPr>
         <p:grpSpPr>
           <a:xfrm>
-            <a:off x="2745815" y="3029566"/>
+            <a:off x="2745815" y="2845053"/>
             <a:ext cx="5965095" cy="1634100"/>
             <a:chOff x="2637816" y="2832616"/>
             <a:chExt cx="5965095" cy="1634100"/>
@@ -17825,10 +17727,7 @@
                     <a:pPr/>
                     <a14:m>
                       <m:oMathPara xmlns:m="http://schemas.openxmlformats.org/officeDocument/2006/math">
-                        <m:oMathParaPr>
-                          <m:jc m:val="centerGroup"/>
-                        </m:oMathParaPr>
-                        <m:oMath xmlns:m="http://schemas.openxmlformats.org/officeDocument/2006/math">
+                        <m:oMath>
                           <m:r>
                             <a:rPr lang="en-US" sz="1200" i="1" smtClean="0">
                               <a:latin typeface="Cambria Math" panose="02040503050406030204" pitchFamily="18" charset="0"/>
@@ -17958,10 +17857,7 @@
                     <a:pPr/>
                     <a14:m>
                       <m:oMathPara xmlns:m="http://schemas.openxmlformats.org/officeDocument/2006/math">
-                        <m:oMathParaPr>
-                          <m:jc m:val="centerGroup"/>
-                        </m:oMathParaPr>
-                        <m:oMath xmlns:m="http://schemas.openxmlformats.org/officeDocument/2006/math">
+                        <m:oMath>
                           <m:r>
                             <a:rPr lang="en-US" sz="1200" i="1" smtClean="0">
                               <a:latin typeface="Cambria Math" panose="02040503050406030204" pitchFamily="18" charset="0"/>
@@ -18390,10 +18286,10 @@
       </p:grpSp>
       <p:grpSp>
         <p:nvGrpSpPr>
-          <p:cNvPr id="17" name="Group 16">
+          <p:cNvPr id="18" name="Group 17">
             <a:extLst>
               <a:ext uri="{FF2B5EF4-FFF2-40B4-BE49-F238E27FC236}">
-                <a16:creationId xmlns:a16="http://schemas.microsoft.com/office/drawing/2014/main" id="{11C9C314-988F-0A98-1955-8D7377802AD9}"/>
+                <a16:creationId xmlns:a16="http://schemas.microsoft.com/office/drawing/2014/main" id="{9B9C8751-262A-9AFB-0431-0FA4A253A1C0}"/>
               </a:ext>
             </a:extLst>
           </p:cNvPr>
@@ -18402,18 +18298,18 @@
         </p:nvGrpSpPr>
         <p:grpSpPr>
           <a:xfrm>
-            <a:off x="3541531" y="5788233"/>
-            <a:ext cx="5623139" cy="893096"/>
-            <a:chOff x="2888293" y="5522210"/>
-            <a:chExt cx="5623139" cy="893096"/>
+            <a:off x="3461835" y="5469206"/>
+            <a:ext cx="5815969" cy="1035725"/>
+            <a:chOff x="3541531" y="5788233"/>
+            <a:chExt cx="5815969" cy="1035725"/>
           </a:xfrm>
         </p:grpSpPr>
         <p:grpSp>
           <p:nvGrpSpPr>
-            <p:cNvPr id="15" name="Group 14">
+            <p:cNvPr id="17" name="Group 16">
               <a:extLst>
                 <a:ext uri="{FF2B5EF4-FFF2-40B4-BE49-F238E27FC236}">
-                  <a16:creationId xmlns:a16="http://schemas.microsoft.com/office/drawing/2014/main" id="{EB9E5956-B033-E66C-9244-F254E34930E3}"/>
+                  <a16:creationId xmlns:a16="http://schemas.microsoft.com/office/drawing/2014/main" id="{11C9C314-988F-0A98-1955-8D7377802AD9}"/>
                 </a:ext>
               </a:extLst>
             </p:cNvPr>
@@ -18422,10 +18318,10 @@
           </p:nvGrpSpPr>
           <p:grpSpPr>
             <a:xfrm>
-              <a:off x="2888293" y="5522210"/>
-              <a:ext cx="5623139" cy="893096"/>
-              <a:chOff x="3048836" y="5722125"/>
-              <a:chExt cx="5623139" cy="893096"/>
+              <a:off x="3541531" y="5788233"/>
+              <a:ext cx="5067252" cy="477986"/>
+              <a:chOff x="2888293" y="5522210"/>
+              <a:chExt cx="5067252" cy="477986"/>
             </a:xfrm>
           </p:grpSpPr>
           <p:grpSp>
@@ -18442,7 +18338,7 @@
             </p:nvGrpSpPr>
             <p:grpSpPr>
               <a:xfrm>
-                <a:off x="3048836" y="5722125"/>
+                <a:off x="2888293" y="5522210"/>
                 <a:ext cx="5067252" cy="477986"/>
                 <a:chOff x="2659667" y="2782204"/>
                 <a:chExt cx="5659631" cy="631088"/>
@@ -18652,136 +18548,184 @@
               </p:txBody>
             </p:sp>
           </p:grpSp>
-          <p:sp>
-            <p:nvSpPr>
-              <p:cNvPr id="14" name="TextBox 13">
-                <a:extLst>
-                  <a:ext uri="{FF2B5EF4-FFF2-40B4-BE49-F238E27FC236}">
-                    <a16:creationId xmlns:a16="http://schemas.microsoft.com/office/drawing/2014/main" id="{578BFD95-D1AF-D3B0-1498-24CDC947051F}"/>
-                  </a:ext>
-                </a:extLst>
-              </p:cNvPr>
-              <p:cNvSpPr txBox="1"/>
-              <p:nvPr/>
-            </p:nvSpPr>
-            <p:spPr>
-              <a:xfrm>
-                <a:off x="6822540" y="6245889"/>
-                <a:ext cx="1849435" cy="369332"/>
-              </a:xfrm>
-              <a:prstGeom prst="rect">
-                <a:avLst/>
-              </a:prstGeom>
-              <a:noFill/>
-            </p:spPr>
-            <p:txBody>
-              <a:bodyPr wrap="square">
-                <a:spAutoFit/>
-              </a:bodyPr>
-              <a:lstStyle/>
-              <a:p>
-                <a:pPr algn="ctr"/>
-                <a:r>
-                  <a:rPr lang="en-US" dirty="0"/>
-                  <a:t>(whole episode)</a:t>
-                </a:r>
-              </a:p>
-            </p:txBody>
-          </p:sp>
+          <mc:AlternateContent xmlns:mc="http://schemas.openxmlformats.org/markup-compatibility/2006" xmlns:a14="http://schemas.microsoft.com/office/drawing/2010/main">
+            <mc:Choice Requires="a14">
+              <p:sp>
+                <p:nvSpPr>
+                  <p:cNvPr id="16" name="TextBox 15">
+                    <a:extLst>
+                      <a:ext uri="{FF2B5EF4-FFF2-40B4-BE49-F238E27FC236}">
+                        <a16:creationId xmlns:a16="http://schemas.microsoft.com/office/drawing/2014/main" id="{5A8B58D0-D9D0-BAF2-8636-E6875C7D5815}"/>
+                      </a:ext>
+                    </a:extLst>
+                  </p:cNvPr>
+                  <p:cNvSpPr txBox="1"/>
+                  <p:nvPr/>
+                </p:nvSpPr>
+                <p:spPr>
+                  <a:xfrm>
+                    <a:off x="5171964" y="5534292"/>
+                    <a:ext cx="1246582" cy="369332"/>
+                  </a:xfrm>
+                  <a:prstGeom prst="rect">
+                    <a:avLst/>
+                  </a:prstGeom>
+                  <a:noFill/>
+                </p:spPr>
+                <p:txBody>
+                  <a:bodyPr wrap="square">
+                    <a:spAutoFit/>
+                  </a:bodyPr>
+                  <a:lstStyle/>
+                  <a:p>
+                    <a14:m>
+                      <m:oMath xmlns:m="http://schemas.openxmlformats.org/officeDocument/2006/math">
+                        <m:r>
+                          <a:rPr lang="en-US" i="1" dirty="0" smtClean="0">
+                            <a:latin typeface="Cambria Math" panose="02040503050406030204" pitchFamily="18" charset="0"/>
+                          </a:rPr>
+                          <m:t>𝑛</m:t>
+                        </m:r>
+                      </m:oMath>
+                    </a14:m>
+                    <a:r>
+                      <a:rPr lang="en-US" dirty="0"/>
+                      <a:t>-step TD </a:t>
+                    </a:r>
+                  </a:p>
+                </p:txBody>
+              </p:sp>
+            </mc:Choice>
+            <mc:Fallback xmlns="">
+              <p:sp>
+                <p:nvSpPr>
+                  <p:cNvPr id="16" name="TextBox 15">
+                    <a:extLst>
+                      <a:ext uri="{FF2B5EF4-FFF2-40B4-BE49-F238E27FC236}">
+                        <a16:creationId xmlns:a16="http://schemas.microsoft.com/office/drawing/2014/main" id="{5A8B58D0-D9D0-BAF2-8636-E6875C7D5815}"/>
+                      </a:ext>
+                    </a:extLst>
+                  </p:cNvPr>
+                  <p:cNvSpPr txBox="1">
+                    <a:spLocks noRot="1" noChangeAspect="1" noMove="1" noResize="1" noEditPoints="1" noAdjustHandles="1" noChangeArrowheads="1" noChangeShapeType="1" noTextEdit="1"/>
+                  </p:cNvSpPr>
+                  <p:nvPr/>
+                </p:nvSpPr>
+                <p:spPr>
+                  <a:xfrm>
+                    <a:off x="5171964" y="5534292"/>
+                    <a:ext cx="1246582" cy="369332"/>
+                  </a:xfrm>
+                  <a:prstGeom prst="rect">
+                    <a:avLst/>
+                  </a:prstGeom>
+                  <a:blipFill>
+                    <a:blip r:embed="rId9"/>
+                    <a:stretch>
+                      <a:fillRect t="-6557" b="-26230"/>
+                    </a:stretch>
+                  </a:blipFill>
+                </p:spPr>
+                <p:txBody>
+                  <a:bodyPr/>
+                  <a:lstStyle/>
+                  <a:p>
+                    <a:r>
+                      <a:rPr lang="en-US">
+                        <a:noFill/>
+                      </a:rPr>
+                      <a:t> </a:t>
+                    </a:r>
+                  </a:p>
+                </p:txBody>
+              </p:sp>
+            </mc:Fallback>
+          </mc:AlternateContent>
         </p:grpSp>
-        <mc:AlternateContent xmlns:mc="http://schemas.openxmlformats.org/markup-compatibility/2006" xmlns:a14="http://schemas.microsoft.com/office/drawing/2010/main">
-          <mc:Choice Requires="a14">
-            <p:sp>
-              <p:nvSpPr>
-                <p:cNvPr id="16" name="TextBox 15">
-                  <a:extLst>
-                    <a:ext uri="{FF2B5EF4-FFF2-40B4-BE49-F238E27FC236}">
-                      <a16:creationId xmlns:a16="http://schemas.microsoft.com/office/drawing/2014/main" id="{5A8B58D0-D9D0-BAF2-8636-E6875C7D5815}"/>
-                    </a:ext>
-                  </a:extLst>
-                </p:cNvPr>
-                <p:cNvSpPr txBox="1"/>
-                <p:nvPr/>
-              </p:nvSpPr>
-              <p:spPr>
-                <a:xfrm>
-                  <a:off x="5171964" y="5534292"/>
-                  <a:ext cx="1246582" cy="369332"/>
-                </a:xfrm>
-                <a:prstGeom prst="rect">
-                  <a:avLst/>
-                </a:prstGeom>
-                <a:noFill/>
-              </p:spPr>
-              <p:txBody>
-                <a:bodyPr wrap="square">
-                  <a:spAutoFit/>
-                </a:bodyPr>
-                <a:lstStyle/>
-                <a:p>
-                  <a14:m>
-                    <m:oMath xmlns:m="http://schemas.openxmlformats.org/officeDocument/2006/math">
-                      <m:r>
-                        <a:rPr lang="en-US" i="1" dirty="0" smtClean="0">
-                          <a:latin typeface="Cambria Math" panose="02040503050406030204" pitchFamily="18" charset="0"/>
-                        </a:rPr>
-                        <m:t>𝑛</m:t>
-                      </m:r>
-                    </m:oMath>
-                  </a14:m>
-                  <a:r>
-                    <a:rPr lang="en-US" dirty="0"/>
-                    <a:t>-step TD </a:t>
-                  </a:r>
-                </a:p>
-              </p:txBody>
-            </p:sp>
-          </mc:Choice>
-          <mc:Fallback xmlns="">
-            <p:sp>
-              <p:nvSpPr>
-                <p:cNvPr id="16" name="TextBox 15">
-                  <a:extLst>
-                    <a:ext uri="{FF2B5EF4-FFF2-40B4-BE49-F238E27FC236}">
-                      <a16:creationId xmlns:a16="http://schemas.microsoft.com/office/drawing/2014/main" id="{5A8B58D0-D9D0-BAF2-8636-E6875C7D5815}"/>
-                    </a:ext>
-                  </a:extLst>
-                </p:cNvPr>
-                <p:cNvSpPr txBox="1">
-                  <a:spLocks noRot="1" noChangeAspect="1" noMove="1" noResize="1" noEditPoints="1" noAdjustHandles="1" noChangeArrowheads="1" noChangeShapeType="1" noTextEdit="1"/>
-                </p:cNvSpPr>
-                <p:nvPr/>
-              </p:nvSpPr>
-              <p:spPr>
-                <a:xfrm>
-                  <a:off x="5171964" y="5534292"/>
-                  <a:ext cx="1246582" cy="369332"/>
-                </a:xfrm>
-                <a:prstGeom prst="rect">
-                  <a:avLst/>
-                </a:prstGeom>
-                <a:blipFill>
-                  <a:blip r:embed="rId9"/>
-                  <a:stretch>
-                    <a:fillRect t="-6557" b="-26230"/>
-                  </a:stretch>
-                </a:blipFill>
-              </p:spPr>
-              <p:txBody>
-                <a:bodyPr/>
-                <a:lstStyle/>
-                <a:p>
-                  <a:r>
-                    <a:rPr lang="en-US">
-                      <a:noFill/>
-                    </a:rPr>
-                    <a:t> </a:t>
-                  </a:r>
-                </a:p>
-              </p:txBody>
-            </p:sp>
-          </mc:Fallback>
-        </mc:AlternateContent>
+        <p:sp>
+          <p:nvSpPr>
+            <p:cNvPr id="11" name="TextBox 10">
+              <a:extLst>
+                <a:ext uri="{FF2B5EF4-FFF2-40B4-BE49-F238E27FC236}">
+                  <a16:creationId xmlns:a16="http://schemas.microsoft.com/office/drawing/2014/main" id="{32AF54B1-52B7-51E1-9344-4E55FBE98E14}"/>
+                </a:ext>
+              </a:extLst>
+            </p:cNvPr>
+            <p:cNvSpPr txBox="1"/>
+            <p:nvPr/>
+          </p:nvSpPr>
+          <p:spPr>
+            <a:xfrm>
+              <a:off x="3746518" y="6239183"/>
+              <a:ext cx="1497435" cy="584775"/>
+            </a:xfrm>
+            <a:prstGeom prst="rect">
+              <a:avLst/>
+            </a:prstGeom>
+            <a:noFill/>
+          </p:spPr>
+          <p:txBody>
+            <a:bodyPr wrap="square" rtlCol="0">
+              <a:spAutoFit/>
+            </a:bodyPr>
+            <a:lstStyle/>
+            <a:p>
+              <a:r>
+                <a:rPr lang="en-US" sz="1600" dirty="0"/>
+                <a:t>High bias, </a:t>
+              </a:r>
+              <a:br>
+                <a:rPr lang="en-US" sz="1600" dirty="0"/>
+              </a:br>
+              <a:r>
+                <a:rPr lang="en-US" sz="1600" dirty="0"/>
+                <a:t>low variance</a:t>
+              </a:r>
+            </a:p>
+          </p:txBody>
+        </p:sp>
+        <p:sp>
+          <p:nvSpPr>
+            <p:cNvPr id="13" name="TextBox 12">
+              <a:extLst>
+                <a:ext uri="{FF2B5EF4-FFF2-40B4-BE49-F238E27FC236}">
+                  <a16:creationId xmlns:a16="http://schemas.microsoft.com/office/drawing/2014/main" id="{68F3A082-7E28-E820-2EC2-EAE87E843084}"/>
+                </a:ext>
+              </a:extLst>
+            </p:cNvPr>
+            <p:cNvSpPr txBox="1"/>
+            <p:nvPr/>
+          </p:nvSpPr>
+          <p:spPr>
+            <a:xfrm>
+              <a:off x="7860065" y="6230068"/>
+              <a:ext cx="1497435" cy="584775"/>
+            </a:xfrm>
+            <a:prstGeom prst="rect">
+              <a:avLst/>
+            </a:prstGeom>
+            <a:noFill/>
+          </p:spPr>
+          <p:txBody>
+            <a:bodyPr wrap="square" rtlCol="0">
+              <a:spAutoFit/>
+            </a:bodyPr>
+            <a:lstStyle/>
+            <a:p>
+              <a:r>
+                <a:rPr lang="en-US" sz="1600" dirty="0"/>
+                <a:t>no bias, </a:t>
+              </a:r>
+              <a:br>
+                <a:rPr lang="en-US" sz="1600" dirty="0"/>
+              </a:br>
+              <a:r>
+                <a:rPr lang="en-US" sz="1600" dirty="0"/>
+                <a:t>high variance</a:t>
+              </a:r>
+            </a:p>
+          </p:txBody>
+        </p:sp>
       </p:grpSp>
     </p:spTree>
     <p:extLst>
@@ -18847,15 +18791,33 @@
                                   </p:childTnLst>
                                 </p:cTn>
                               </p:par>
+                            </p:childTnLst>
+                          </p:cTn>
+                        </p:par>
+                      </p:childTnLst>
+                    </p:cTn>
+                  </p:par>
+                  <p:par>
+                    <p:cTn id="7" fill="hold">
+                      <p:stCondLst>
+                        <p:cond delay="indefinite"/>
+                      </p:stCondLst>
+                      <p:childTnLst>
+                        <p:par>
+                          <p:cTn id="8" fill="hold">
+                            <p:stCondLst>
+                              <p:cond delay="0"/>
+                            </p:stCondLst>
+                            <p:childTnLst>
                               <p:par>
-                                <p:cTn id="7" presetID="1" presetClass="entr" presetSubtype="0" fill="hold" nodeType="withEffect">
+                                <p:cTn id="9" presetID="1" presetClass="entr" presetSubtype="0" fill="hold" nodeType="clickEffect">
                                   <p:stCondLst>
                                     <p:cond delay="0"/>
                                   </p:stCondLst>
                                   <p:childTnLst>
                                     <p:set>
                                       <p:cBhvr>
-                                        <p:cTn id="8" dur="1" fill="hold">
+                                        <p:cTn id="10" dur="1" fill="hold">
                                           <p:stCondLst>
                                             <p:cond delay="0"/>
                                           </p:stCondLst>
@@ -18885,26 +18847,26 @@
                     </p:cTn>
                   </p:par>
                   <p:par>
-                    <p:cTn id="9" fill="hold">
+                    <p:cTn id="11" fill="hold">
                       <p:stCondLst>
                         <p:cond delay="indefinite"/>
                       </p:stCondLst>
                       <p:childTnLst>
                         <p:par>
-                          <p:cTn id="10" fill="hold">
+                          <p:cTn id="12" fill="hold">
                             <p:stCondLst>
                               <p:cond delay="0"/>
                             </p:stCondLst>
                             <p:childTnLst>
                               <p:par>
-                                <p:cTn id="11" presetID="1" presetClass="entr" presetSubtype="0" fill="hold" nodeType="clickEffect">
+                                <p:cTn id="13" presetID="1" presetClass="entr" presetSubtype="0" fill="hold" nodeType="clickEffect">
                                   <p:stCondLst>
                                     <p:cond delay="0"/>
                                   </p:stCondLst>
                                   <p:childTnLst>
                                     <p:set>
                                       <p:cBhvr>
-                                        <p:cTn id="12" dur="1" fill="hold">
+                                        <p:cTn id="14" dur="1" fill="hold">
                                           <p:stCondLst>
                                             <p:cond delay="0"/>
                                           </p:stCondLst>
@@ -18928,14 +18890,14 @@
                                 </p:cTn>
                               </p:par>
                               <p:par>
-                                <p:cTn id="13" presetID="1" presetClass="entr" presetSubtype="0" fill="hold" nodeType="withEffect">
+                                <p:cTn id="15" presetID="1" presetClass="entr" presetSubtype="0" fill="hold" nodeType="withEffect">
                                   <p:stCondLst>
                                     <p:cond delay="0"/>
                                   </p:stCondLst>
                                   <p:childTnLst>
                                     <p:set>
                                       <p:cBhvr>
-                                        <p:cTn id="14" dur="1" fill="hold">
+                                        <p:cTn id="16" dur="1" fill="hold">
                                           <p:stCondLst>
                                             <p:cond delay="0"/>
                                           </p:stCondLst>
@@ -18961,50 +18923,19 @@
                     </p:cTn>
                   </p:par>
                   <p:par>
-                    <p:cTn id="15" fill="hold">
+                    <p:cTn id="17" fill="hold">
                       <p:stCondLst>
                         <p:cond delay="indefinite"/>
                       </p:stCondLst>
                       <p:childTnLst>
                         <p:par>
-                          <p:cTn id="16" fill="hold">
+                          <p:cTn id="18" fill="hold">
                             <p:stCondLst>
                               <p:cond delay="0"/>
                             </p:stCondLst>
                             <p:childTnLst>
                               <p:par>
-                                <p:cTn id="17" presetID="1" presetClass="entr" presetSubtype="0" fill="hold" nodeType="clickEffect">
-                                  <p:stCondLst>
-                                    <p:cond delay="0"/>
-                                  </p:stCondLst>
-                                  <p:childTnLst>
-                                    <p:set>
-                                      <p:cBhvr>
-                                        <p:cTn id="18" dur="1" fill="hold">
-                                          <p:stCondLst>
-                                            <p:cond delay="0"/>
-                                          </p:stCondLst>
-                                        </p:cTn>
-                                        <p:tgtEl>
-                                          <p:spTgt spid="32">
-                                            <p:txEl>
-                                              <p:pRg st="0" end="0"/>
-                                            </p:txEl>
-                                          </p:spTgt>
-                                        </p:tgtEl>
-                                        <p:attrNameLst>
-                                          <p:attrName>style.visibility</p:attrName>
-                                        </p:attrNameLst>
-                                      </p:cBhvr>
-                                      <p:to>
-                                        <p:strVal val="visible"/>
-                                      </p:to>
-                                    </p:set>
-                                  </p:childTnLst>
-                                </p:cTn>
-                              </p:par>
-                              <p:par>
-                                <p:cTn id="19" presetID="1" presetClass="entr" presetSubtype="0" fill="hold" nodeType="withEffect">
+                                <p:cTn id="19" presetID="1" presetClass="entr" presetSubtype="0" fill="hold" nodeType="clickEffect">
                                   <p:stCondLst>
                                     <p:cond delay="0"/>
                                   </p:stCondLst>
@@ -19019,7 +18950,7 @@
                                         <p:tgtEl>
                                           <p:spTgt spid="32">
                                             <p:txEl>
-                                              <p:pRg st="1" end="1"/>
+                                              <p:pRg st="0" end="0"/>
                                             </p:txEl>
                                           </p:spTgt>
                                         </p:tgtEl>
@@ -19050,7 +18981,7 @@
                                         <p:tgtEl>
                                           <p:spTgt spid="32">
                                             <p:txEl>
-                                              <p:pRg st="2" end="2"/>
+                                              <p:pRg st="1" end="1"/>
                                             </p:txEl>
                                           </p:spTgt>
                                         </p:tgtEl>
@@ -19079,7 +19010,38 @@
                                           </p:stCondLst>
                                         </p:cTn>
                                         <p:tgtEl>
-                                          <p:spTgt spid="17"/>
+                                          <p:spTgt spid="32">
+                                            <p:txEl>
+                                              <p:pRg st="2" end="2"/>
+                                            </p:txEl>
+                                          </p:spTgt>
+                                        </p:tgtEl>
+                                        <p:attrNameLst>
+                                          <p:attrName>style.visibility</p:attrName>
+                                        </p:attrNameLst>
+                                      </p:cBhvr>
+                                      <p:to>
+                                        <p:strVal val="visible"/>
+                                      </p:to>
+                                    </p:set>
+                                  </p:childTnLst>
+                                </p:cTn>
+                              </p:par>
+                              <p:par>
+                                <p:cTn id="25" presetID="1" presetClass="entr" presetSubtype="0" fill="hold" nodeType="withEffect">
+                                  <p:stCondLst>
+                                    <p:cond delay="0"/>
+                                  </p:stCondLst>
+                                  <p:childTnLst>
+                                    <p:set>
+                                      <p:cBhvr>
+                                        <p:cTn id="26" dur="1" fill="hold">
+                                          <p:stCondLst>
+                                            <p:cond delay="0"/>
+                                          </p:stCondLst>
+                                        </p:cTn>
+                                        <p:tgtEl>
+                                          <p:spTgt spid="18"/>
                                         </p:tgtEl>
                                         <p:attrNameLst>
                                           <p:attrName>style.visibility</p:attrName>
@@ -19939,10 +19901,7 @@
                   <a:pPr/>
                   <a14:m>
                     <m:oMathPara xmlns:m="http://schemas.openxmlformats.org/officeDocument/2006/math">
-                      <m:oMathParaPr>
-                        <m:jc m:val="centerGroup"/>
-                      </m:oMathParaPr>
-                      <m:oMath xmlns:m="http://schemas.openxmlformats.org/officeDocument/2006/math">
+                      <m:oMath>
                         <m:sSub>
                           <m:sSubPr>
                             <m:ctrlPr>
@@ -20060,10 +20019,7 @@
                   <a:pPr/>
                   <a14:m>
                     <m:oMathPara xmlns:m="http://schemas.openxmlformats.org/officeDocument/2006/math">
-                      <m:oMathParaPr>
-                        <m:jc m:val="centerGroup"/>
-                      </m:oMathParaPr>
-                      <m:oMath xmlns:m="http://schemas.openxmlformats.org/officeDocument/2006/math">
+                      <m:oMath>
                         <m:r>
                           <a:rPr lang="en-US" sz="1200" i="1">
                             <a:latin typeface="Cambria Math" panose="02040503050406030204" pitchFamily="18" charset="0"/>
@@ -20199,10 +20155,7 @@
                   <a:pPr/>
                   <a14:m>
                     <m:oMathPara xmlns:m="http://schemas.openxmlformats.org/officeDocument/2006/math">
-                      <m:oMathParaPr>
-                        <m:jc m:val="centerGroup"/>
-                      </m:oMathParaPr>
-                      <m:oMath xmlns:m="http://schemas.openxmlformats.org/officeDocument/2006/math">
+                      <m:oMath>
                         <m:r>
                           <a:rPr lang="en-US" sz="1200" i="1" smtClean="0">
                             <a:latin typeface="Cambria Math" panose="02040503050406030204" pitchFamily="18" charset="0"/>
@@ -21995,8 +21948,8 @@
           </p:sp>
         </mc:Fallback>
       </mc:AlternateContent>
-      <mc:AlternateContent xmlns:mc="http://schemas.openxmlformats.org/markup-compatibility/2006" xmlns:a14="http://schemas.microsoft.com/office/drawing/2010/main">
-        <mc:Choice Requires="a14">
+      <mc:AlternateContent xmlns:mc="http://schemas.openxmlformats.org/markup-compatibility/2006">
+        <mc:Choice xmlns:a14="http://schemas.microsoft.com/office/drawing/2010/main" Requires="a14">
           <p:sp>
             <p:nvSpPr>
               <p:cNvPr id="26" name="TextBox 25">
@@ -22011,7 +21964,7 @@
             </p:nvSpPr>
             <p:spPr>
               <a:xfrm>
-                <a:off x="8837705" y="4141820"/>
+                <a:off x="8755198" y="4068173"/>
                 <a:ext cx="2362349" cy="1384995"/>
               </a:xfrm>
               <a:prstGeom prst="rect">
@@ -22052,7 +22005,7 @@
                     <m:sSub>
                       <m:sSubPr>
                         <m:ctrlPr>
-                          <a:rPr lang="en-US" sz="1400" i="1" smtClean="0">
+                          <a:rPr lang="en-US" sz="1400" i="1">
                             <a:latin typeface="Cambria Math" panose="02040503050406030204" pitchFamily="18" charset="0"/>
                           </a:rPr>
                         </m:ctrlPr>
@@ -22148,7 +22101,7 @@
             </p:txBody>
           </p:sp>
         </mc:Choice>
-        <mc:Fallback xmlns="">
+        <mc:Fallback>
           <p:sp>
             <p:nvSpPr>
               <p:cNvPr id="26" name="TextBox 25">
@@ -22165,7 +22118,7 @@
             </p:nvSpPr>
             <p:spPr>
               <a:xfrm>
-                <a:off x="8837705" y="4141820"/>
+                <a:off x="8755198" y="4068173"/>
                 <a:ext cx="2362349" cy="1384995"/>
               </a:xfrm>
               <a:prstGeom prst="rect">
@@ -22174,7 +22127,7 @@
               <a:blipFill>
                 <a:blip r:embed="rId10"/>
                 <a:stretch>
-                  <a:fillRect l="-513" r="-1026" b="-2597"/>
+                  <a:fillRect l="-512" r="-767" b="-2597"/>
                 </a:stretch>
               </a:blipFill>
             </p:spPr>
@@ -22374,6 +22327,69 @@
           </p:sp>
         </mc:Fallback>
       </mc:AlternateContent>
+      <p:sp>
+        <p:nvSpPr>
+          <p:cNvPr id="5" name="TextBox 4">
+            <a:extLst>
+              <a:ext uri="{FF2B5EF4-FFF2-40B4-BE49-F238E27FC236}">
+                <a16:creationId xmlns:a16="http://schemas.microsoft.com/office/drawing/2014/main" id="{F0AA742C-5A0A-0CE4-1F94-BD3DCEAF2274}"/>
+              </a:ext>
+            </a:extLst>
+          </p:cNvPr>
+          <p:cNvSpPr txBox="1"/>
+          <p:nvPr/>
+        </p:nvSpPr>
+        <p:spPr>
+          <a:xfrm>
+            <a:off x="8277187" y="5661877"/>
+            <a:ext cx="3277772" cy="830997"/>
+          </a:xfrm>
+          <a:prstGeom prst="rect">
+            <a:avLst/>
+          </a:prstGeom>
+        </p:spPr>
+        <p:style>
+          <a:lnRef idx="2">
+            <a:schemeClr val="accent3">
+              <a:shade val="15000"/>
+            </a:schemeClr>
+          </a:lnRef>
+          <a:fillRef idx="1">
+            <a:schemeClr val="accent3"/>
+          </a:fillRef>
+          <a:effectRef idx="0">
+            <a:schemeClr val="accent3"/>
+          </a:effectRef>
+          <a:fontRef idx="minor">
+            <a:schemeClr val="lt1"/>
+          </a:fontRef>
+        </p:style>
+        <p:txBody>
+          <a:bodyPr wrap="square" rtlCol="0">
+            <a:spAutoFit/>
+          </a:bodyPr>
+          <a:lstStyle/>
+          <a:p>
+            <a:r>
+              <a:rPr lang="en-US" sz="1600" b="1" dirty="0"/>
+              <a:t>Error sources</a:t>
+            </a:r>
+          </a:p>
+          <a:p>
+            <a:r>
+              <a:rPr lang="en-US" sz="1600" dirty="0"/>
+              <a:t>Variance: Observed rewards</a:t>
+            </a:r>
+            <a:br>
+              <a:rPr lang="en-US" sz="1600" dirty="0"/>
+            </a:br>
+            <a:r>
+              <a:rPr lang="en-US" sz="1600" dirty="0"/>
+              <a:t>Bias: Value function estimates</a:t>
+            </a:r>
+          </a:p>
+        </p:txBody>
+      </p:sp>
     </p:spTree>
     <p:extLst>
       <p:ext uri="{BB962C8B-B14F-4D97-AF65-F5344CB8AC3E}">
@@ -22558,6 +22574,51 @@
                       </p:childTnLst>
                     </p:cTn>
                   </p:par>
+                  <p:par>
+                    <p:cTn id="17" fill="hold">
+                      <p:stCondLst>
+                        <p:cond delay="indefinite"/>
+                      </p:stCondLst>
+                      <p:childTnLst>
+                        <p:par>
+                          <p:cTn id="18" fill="hold">
+                            <p:stCondLst>
+                              <p:cond delay="0"/>
+                            </p:stCondLst>
+                            <p:childTnLst>
+                              <p:par>
+                                <p:cTn id="19" presetID="1" presetClass="entr" presetSubtype="0" fill="hold" grpId="0" nodeType="clickEffect">
+                                  <p:stCondLst>
+                                    <p:cond delay="0"/>
+                                  </p:stCondLst>
+                                  <p:childTnLst>
+                                    <p:set>
+                                      <p:cBhvr>
+                                        <p:cTn id="20" dur="1" fill="hold">
+                                          <p:stCondLst>
+                                            <p:cond delay="0"/>
+                                          </p:stCondLst>
+                                        </p:cTn>
+                                        <p:tgtEl>
+                                          <p:spTgt spid="5"/>
+                                        </p:tgtEl>
+                                        <p:attrNameLst>
+                                          <p:attrName>style.visibility</p:attrName>
+                                        </p:attrNameLst>
+                                      </p:cBhvr>
+                                      <p:to>
+                                        <p:strVal val="visible"/>
+                                      </p:to>
+                                    </p:set>
+                                  </p:childTnLst>
+                                </p:cTn>
+                              </p:par>
+                            </p:childTnLst>
+                          </p:cTn>
+                        </p:par>
+                      </p:childTnLst>
+                    </p:cTn>
+                  </p:par>
                 </p:childTnLst>
               </p:cTn>
               <p:prevCondLst>
@@ -22582,6 +22643,7 @@
     <p:bldLst>
       <p:bldP spid="14" grpId="0" animBg="1"/>
       <p:bldP spid="27" grpId="0" animBg="1"/>
+      <p:bldP spid="5" grpId="0" animBg="1"/>
     </p:bldLst>
   </p:timing>
 </p:sld>
@@ -23414,10 +23476,7 @@
                     <a:pPr/>
                     <a14:m>
                       <m:oMathPara xmlns:m="http://schemas.openxmlformats.org/officeDocument/2006/math">
-                        <m:oMathParaPr>
-                          <m:jc m:val="centerGroup"/>
-                        </m:oMathParaPr>
-                        <m:oMath xmlns:m="http://schemas.openxmlformats.org/officeDocument/2006/math">
+                        <m:oMath>
                           <m:r>
                             <a:rPr lang="en-US" b="0" i="1" smtClean="0">
                               <a:latin typeface="Cambria Math" panose="02040503050406030204" pitchFamily="18" charset="0"/>
@@ -23510,10 +23569,7 @@
                     <a:pPr/>
                     <a14:m>
                       <m:oMathPara xmlns:m="http://schemas.openxmlformats.org/officeDocument/2006/math">
-                        <m:oMathParaPr>
-                          <m:jc m:val="centerGroup"/>
-                        </m:oMathParaPr>
-                        <m:oMath xmlns:m="http://schemas.openxmlformats.org/officeDocument/2006/math">
+                        <m:oMath>
                           <m:r>
                             <a:rPr lang="en-US" b="0" i="1" smtClean="0">
                               <a:latin typeface="Cambria Math" panose="02040503050406030204" pitchFamily="18" charset="0"/>
@@ -24558,10 +24614,7 @@
                 </a:pPr>
                 <a14:m>
                   <m:oMathPara xmlns:m="http://schemas.openxmlformats.org/officeDocument/2006/math">
-                    <m:oMathParaPr>
-                      <m:jc m:val="centerGroup"/>
-                    </m:oMathParaPr>
-                    <m:oMath xmlns:m="http://schemas.openxmlformats.org/officeDocument/2006/math">
+                    <m:oMath>
                       <m:func>
                         <m:funcPr>
                           <m:ctrlPr>
@@ -24574,7 +24627,7 @@
                           <m:limLow>
                             <m:limLowPr>
                               <m:ctrlPr>
-                                <a:rPr lang="en-US" sz="2000" i="1" smtClean="0">
+                                <a:rPr lang="en-US" sz="2000" i="0" smtClean="0">
                                   <a:latin typeface="Cambria Math" panose="02040503050406030204" pitchFamily="18" charset="0"/>
                                 </a:rPr>
                               </m:ctrlPr>
@@ -24606,8 +24659,9 @@
                               <m:begChr m:val="|"/>
                               <m:endChr m:val="|"/>
                               <m:ctrlPr>
-                                <a:rPr lang="en-US" sz="2000" i="1" smtClean="0">
+                                <a:rPr lang="en-US" sz="2000" b="0" i="1" smtClean="0">
                                   <a:latin typeface="Cambria Math" panose="02040503050406030204" pitchFamily="18" charset="0"/>
+                                  <a:ea typeface="Cambria Math" panose="02040503050406030204" pitchFamily="18" charset="0"/>
                                 </a:rPr>
                               </m:ctrlPr>
                             </m:dPr>
@@ -24615,7 +24669,7 @@
                               <m:sSub>
                                 <m:sSubPr>
                                   <m:ctrlPr>
-                                    <a:rPr lang="en-US" sz="2000" b="0" i="1" smtClean="0">
+                                    <a:rPr lang="en-US" sz="2000" i="1" smtClean="0">
                                       <a:latin typeface="Cambria Math" panose="02040503050406030204" pitchFamily="18" charset="0"/>
                                       <a:ea typeface="Cambria Math" panose="02040503050406030204" pitchFamily="18" charset="0"/>
                                     </a:rPr>
@@ -24853,7 +24907,7 @@
                               <m:limLow>
                                 <m:limLowPr>
                                   <m:ctrlPr>
-                                    <a:rPr lang="en-US" sz="2000" i="1">
+                                    <a:rPr lang="en-US" sz="2000">
                                       <a:latin typeface="Cambria Math" panose="02040503050406030204" pitchFamily="18" charset="0"/>
                                     </a:rPr>
                                   </m:ctrlPr>
@@ -24885,8 +24939,9 @@
                                   <m:begChr m:val="|"/>
                                   <m:endChr m:val="|"/>
                                   <m:ctrlPr>
-                                    <a:rPr lang="en-US" sz="2000" i="1">
+                                    <a:rPr lang="en-US" sz="2000" b="0" i="1" smtClean="0">
                                       <a:latin typeface="Cambria Math" panose="02040503050406030204" pitchFamily="18" charset="0"/>
+                                      <a:ea typeface="Cambria Math" panose="02040503050406030204" pitchFamily="18" charset="0"/>
                                     </a:rPr>
                                   </m:ctrlPr>
                                 </m:dPr>

--- a/slides/Lecture_Chapter07.pptx
+++ b/slides/Lecture_Chapter07.pptx
@@ -22,7 +22,8 @@
     <p:sldId id="389" r:id="rId16"/>
     <p:sldId id="390" r:id="rId17"/>
     <p:sldId id="395" r:id="rId18"/>
-    <p:sldId id="397" r:id="rId19"/>
+    <p:sldId id="481" r:id="rId19"/>
+    <p:sldId id="397" r:id="rId20"/>
   </p:sldIdLst>
   <p:sldSz cx="12192000" cy="6858000"/>
   <p:notesSz cx="6858000" cy="9144000"/>
@@ -159,6 +160,7 @@
             <p14:sldId id="389"/>
             <p14:sldId id="390"/>
             <p14:sldId id="395"/>
+            <p14:sldId id="481"/>
             <p14:sldId id="397"/>
           </p14:sldIdLst>
         </p14:section>
@@ -318,7 +320,7 @@
           <a:p>
             <a:fld id="{3E22BF2E-04DA-469E-97C5-BB68A0368813}" type="datetimeFigureOut">
               <a:rPr lang="en-US" smtClean="0"/>
-              <a:t>10/5/2026</a:t>
+              <a:t>10/7/2026</a:t>
             </a:fld>
             <a:endParaRPr lang="en-US"/>
           </a:p>
@@ -516,7 +518,7 @@
           <a:p>
             <a:fld id="{3E22BF2E-04DA-469E-97C5-BB68A0368813}" type="datetimeFigureOut">
               <a:rPr lang="en-US" smtClean="0"/>
-              <a:t>10/5/2026</a:t>
+              <a:t>10/7/2026</a:t>
             </a:fld>
             <a:endParaRPr lang="en-US"/>
           </a:p>
@@ -724,7 +726,7 @@
           <a:p>
             <a:fld id="{3E22BF2E-04DA-469E-97C5-BB68A0368813}" type="datetimeFigureOut">
               <a:rPr lang="en-US" smtClean="0"/>
-              <a:t>10/5/2026</a:t>
+              <a:t>10/7/2026</a:t>
             </a:fld>
             <a:endParaRPr lang="en-US"/>
           </a:p>
@@ -932,7 +934,7 @@
           <a:p>
             <a:fld id="{3E22BF2E-04DA-469E-97C5-BB68A0368813}" type="datetimeFigureOut">
               <a:rPr lang="en-US" smtClean="0"/>
-              <a:t>10/5/2026</a:t>
+              <a:t>10/7/2026</a:t>
             </a:fld>
             <a:endParaRPr lang="en-US"/>
           </a:p>
@@ -1207,7 +1209,7 @@
           <a:p>
             <a:fld id="{3E22BF2E-04DA-469E-97C5-BB68A0368813}" type="datetimeFigureOut">
               <a:rPr lang="en-US" smtClean="0"/>
-              <a:t>10/5/2026</a:t>
+              <a:t>10/7/2026</a:t>
             </a:fld>
             <a:endParaRPr lang="en-US"/>
           </a:p>
@@ -1472,7 +1474,7 @@
           <a:p>
             <a:fld id="{3E22BF2E-04DA-469E-97C5-BB68A0368813}" type="datetimeFigureOut">
               <a:rPr lang="en-US" smtClean="0"/>
-              <a:t>10/5/2026</a:t>
+              <a:t>10/7/2026</a:t>
             </a:fld>
             <a:endParaRPr lang="en-US"/>
           </a:p>
@@ -1884,7 +1886,7 @@
           <a:p>
             <a:fld id="{3E22BF2E-04DA-469E-97C5-BB68A0368813}" type="datetimeFigureOut">
               <a:rPr lang="en-US" smtClean="0"/>
-              <a:t>10/5/2026</a:t>
+              <a:t>10/7/2026</a:t>
             </a:fld>
             <a:endParaRPr lang="en-US"/>
           </a:p>
@@ -2025,7 +2027,7 @@
           <a:p>
             <a:fld id="{3E22BF2E-04DA-469E-97C5-BB68A0368813}" type="datetimeFigureOut">
               <a:rPr lang="en-US" smtClean="0"/>
-              <a:t>10/5/2026</a:t>
+              <a:t>10/7/2026</a:t>
             </a:fld>
             <a:endParaRPr lang="en-US"/>
           </a:p>
@@ -2138,7 +2140,7 @@
           <a:p>
             <a:fld id="{3E22BF2E-04DA-469E-97C5-BB68A0368813}" type="datetimeFigureOut">
               <a:rPr lang="en-US" smtClean="0"/>
-              <a:t>10/5/2026</a:t>
+              <a:t>10/7/2026</a:t>
             </a:fld>
             <a:endParaRPr lang="en-US"/>
           </a:p>
@@ -2449,7 +2451,7 @@
           <a:p>
             <a:fld id="{3E22BF2E-04DA-469E-97C5-BB68A0368813}" type="datetimeFigureOut">
               <a:rPr lang="en-US" smtClean="0"/>
-              <a:t>10/5/2026</a:t>
+              <a:t>10/7/2026</a:t>
             </a:fld>
             <a:endParaRPr lang="en-US"/>
           </a:p>
@@ -2737,7 +2739,7 @@
           <a:p>
             <a:fld id="{3E22BF2E-04DA-469E-97C5-BB68A0368813}" type="datetimeFigureOut">
               <a:rPr lang="en-US" smtClean="0"/>
-              <a:t>10/5/2026</a:t>
+              <a:t>10/7/2026</a:t>
             </a:fld>
             <a:endParaRPr lang="en-US"/>
           </a:p>
@@ -2978,7 +2980,7 @@
           <a:p>
             <a:fld id="{3E22BF2E-04DA-469E-97C5-BB68A0368813}" type="datetimeFigureOut">
               <a:rPr lang="en-US" smtClean="0"/>
-              <a:t>10/5/2026</a:t>
+              <a:t>10/7/2026</a:t>
             </a:fld>
             <a:endParaRPr lang="en-US"/>
           </a:p>
@@ -4715,7 +4717,7 @@
                         <m:begChr m:val="["/>
                         <m:endChr m:val="]"/>
                         <m:ctrlPr>
-                          <a:rPr lang="en-US" b="0" i="1" smtClean="0">
+                          <a:rPr lang="en-US" i="1">
                             <a:latin typeface="Cambria Math" panose="02040503050406030204" pitchFamily="18" charset="0"/>
                             <a:ea typeface="Cambria Math" panose="02040503050406030204" pitchFamily="18" charset="0"/>
                           </a:rPr>
@@ -4827,7 +4829,7 @@
                         <m:begChr m:val="["/>
                         <m:endChr m:val="]"/>
                         <m:ctrlPr>
-                          <a:rPr lang="en-US" b="0" i="1" smtClean="0">
+                          <a:rPr lang="en-US" i="1">
                             <a:latin typeface="Cambria Math" panose="02040503050406030204" pitchFamily="18" charset="0"/>
                             <a:ea typeface="Cambria Math" panose="02040503050406030204" pitchFamily="18" charset="0"/>
                           </a:rPr>
@@ -4991,7 +4993,7 @@
                         <m:begChr m:val="["/>
                         <m:endChr m:val="]"/>
                         <m:ctrlPr>
-                          <a:rPr lang="en-US" b="0" i="1" smtClean="0">
+                          <a:rPr lang="en-US" i="1">
                             <a:latin typeface="Cambria Math" panose="02040503050406030204" pitchFamily="18" charset="0"/>
                             <a:ea typeface="Cambria Math" panose="02040503050406030204" pitchFamily="18" charset="0"/>
                           </a:rPr>
@@ -5173,7 +5175,7 @@
                         <m:begChr m:val="["/>
                         <m:endChr m:val="]"/>
                         <m:ctrlPr>
-                          <a:rPr lang="en-US" b="0" i="1" smtClean="0">
+                          <a:rPr lang="en-US" i="1">
                             <a:latin typeface="Cambria Math" panose="02040503050406030204" pitchFamily="18" charset="0"/>
                             <a:ea typeface="Cambria Math" panose="02040503050406030204" pitchFamily="18" charset="0"/>
                           </a:rPr>
@@ -5339,7 +5341,7 @@
                                     <m:begChr m:val="["/>
                                     <m:endChr m:val="]"/>
                                     <m:ctrlPr>
-                                      <a:rPr lang="en-US" b="0" i="1" smtClean="0">
+                                      <a:rPr lang="en-US" i="1">
                                         <a:latin typeface="Cambria Math" panose="02040503050406030204" pitchFamily="18" charset="0"/>
                                         <a:ea typeface="Cambria Math" panose="02040503050406030204" pitchFamily="18" charset="0"/>
                                       </a:rPr>
@@ -6374,7 +6376,7 @@
                     <m:sSub>
                       <m:sSubPr>
                         <m:ctrlPr>
-                          <a:rPr lang="en-US" sz="1600" i="1" smtClean="0">
+                          <a:rPr lang="en-US" sz="1600" i="1">
                             <a:latin typeface="Cambria Math" panose="02040503050406030204" pitchFamily="18" charset="0"/>
                             <a:ea typeface="Cambria Math" panose="02040503050406030204" pitchFamily="18" charset="0"/>
                           </a:rPr>
@@ -9794,7 +9796,7 @@
           <a:lstStyle/>
           <a:p>
             <a:pPr algn="ctr"/>
-            <a:endParaRPr lang="en-US"/>
+            <a:endParaRPr lang="en-US" dirty="0"/>
           </a:p>
         </p:txBody>
       </p:sp>
@@ -12489,6 +12491,873 @@
 <file path=ppt/slides/slide18.xml><?xml version="1.0" encoding="utf-8"?>
 <p:sld xmlns:a="http://schemas.openxmlformats.org/drawingml/2006/main" xmlns:r="http://schemas.openxmlformats.org/officeDocument/2006/relationships" xmlns:p="http://schemas.openxmlformats.org/presentationml/2006/main">
   <p:cSld>
+    <p:spTree>
+      <p:nvGrpSpPr>
+        <p:cNvPr id="1" name=""/>
+        <p:cNvGrpSpPr/>
+        <p:nvPr/>
+      </p:nvGrpSpPr>
+      <p:grpSpPr>
+        <a:xfrm>
+          <a:off x="0" y="0"/>
+          <a:ext cx="0" cy="0"/>
+          <a:chOff x="0" y="0"/>
+          <a:chExt cx="0" cy="0"/>
+        </a:xfrm>
+      </p:grpSpPr>
+      <mc:AlternateContent xmlns:mc="http://schemas.openxmlformats.org/markup-compatibility/2006" xmlns:a14="http://schemas.microsoft.com/office/drawing/2010/main">
+        <mc:Choice Requires="a14">
+          <p:sp>
+            <p:nvSpPr>
+              <p:cNvPr id="2" name="Title 1">
+                <a:extLst>
+                  <a:ext uri="{FF2B5EF4-FFF2-40B4-BE49-F238E27FC236}">
+                    <a16:creationId xmlns:a16="http://schemas.microsoft.com/office/drawing/2014/main" id="{FDA87B64-32A5-338D-6776-2AC3654F00AC}"/>
+                  </a:ext>
+                </a:extLst>
+              </p:cNvPr>
+              <p:cNvSpPr>
+                <a:spLocks noGrp="1"/>
+              </p:cNvSpPr>
+              <p:nvPr>
+                <p:ph type="title"/>
+              </p:nvPr>
+            </p:nvSpPr>
+            <p:spPr/>
+            <p:txBody>
+              <a:bodyPr/>
+              <a:lstStyle/>
+              <a:p>
+                <a14:m>
+                  <m:oMath xmlns:m="http://schemas.openxmlformats.org/officeDocument/2006/math">
+                    <m:r>
+                      <a:rPr lang="en-US" b="0" i="1" dirty="0" smtClean="0">
+                        <a:latin typeface="Cambria Math" panose="02040503050406030204" pitchFamily="18" charset="0"/>
+                      </a:rPr>
+                      <m:t>𝑛</m:t>
+                    </m:r>
+                  </m:oMath>
+                </a14:m>
+                <a:r>
+                  <a:rPr lang="en-US" dirty="0"/>
+                  <a:t>-Step Q-Learning</a:t>
+                </a:r>
+              </a:p>
+            </p:txBody>
+          </p:sp>
+        </mc:Choice>
+        <mc:Fallback xmlns="">
+          <p:sp>
+            <p:nvSpPr>
+              <p:cNvPr id="2" name="Title 1">
+                <a:extLst>
+                  <a:ext uri="{FF2B5EF4-FFF2-40B4-BE49-F238E27FC236}">
+                    <a16:creationId xmlns:a16="http://schemas.microsoft.com/office/drawing/2014/main" id="{FDA87B64-32A5-338D-6776-2AC3654F00AC}"/>
+                  </a:ext>
+                </a:extLst>
+              </p:cNvPr>
+              <p:cNvSpPr>
+                <a:spLocks noGrp="1" noRot="1" noChangeAspect="1" noMove="1" noResize="1" noEditPoints="1" noAdjustHandles="1" noChangeArrowheads="1" noChangeShapeType="1" noTextEdit="1"/>
+              </p:cNvSpPr>
+              <p:nvPr>
+                <p:ph type="title"/>
+              </p:nvPr>
+            </p:nvSpPr>
+            <p:spPr>
+              <a:blipFill>
+                <a:blip r:embed="rId2"/>
+                <a:stretch>
+                  <a:fillRect t="-20161" b="-35484"/>
+                </a:stretch>
+              </a:blipFill>
+            </p:spPr>
+            <p:txBody>
+              <a:bodyPr/>
+              <a:lstStyle/>
+              <a:p>
+                <a:r>
+                  <a:rPr lang="en-US">
+                    <a:noFill/>
+                  </a:rPr>
+                  <a:t> </a:t>
+                </a:r>
+              </a:p>
+            </p:txBody>
+          </p:sp>
+        </mc:Fallback>
+      </mc:AlternateContent>
+      <mc:AlternateContent xmlns:mc="http://schemas.openxmlformats.org/markup-compatibility/2006" xmlns:a14="http://schemas.microsoft.com/office/drawing/2010/main">
+        <mc:Choice Requires="a14">
+          <p:sp>
+            <p:nvSpPr>
+              <p:cNvPr id="3" name="Content Placeholder 2">
+                <a:extLst>
+                  <a:ext uri="{FF2B5EF4-FFF2-40B4-BE49-F238E27FC236}">
+                    <a16:creationId xmlns:a16="http://schemas.microsoft.com/office/drawing/2014/main" id="{89A5D9A4-5700-5EBA-0E79-41C2AA003632}"/>
+                  </a:ext>
+                </a:extLst>
+              </p:cNvPr>
+              <p:cNvSpPr>
+                <a:spLocks noGrp="1"/>
+              </p:cNvSpPr>
+              <p:nvPr>
+                <p:ph idx="1"/>
+              </p:nvPr>
+            </p:nvSpPr>
+            <p:spPr/>
+            <p:txBody>
+              <a:bodyPr>
+                <a:normAutofit lnSpcReduction="10000"/>
+              </a:bodyPr>
+              <a:lstStyle/>
+              <a:p>
+                <a:pPr marL="0" indent="0">
+                  <a:buNone/>
+                </a:pPr>
+                <a14:m>
+                  <m:oMath xmlns:m="http://schemas.openxmlformats.org/officeDocument/2006/math">
+                    <m:r>
+                      <a:rPr lang="en-US" i="1" dirty="0">
+                        <a:latin typeface="Cambria Math" panose="02040503050406030204" pitchFamily="18" charset="0"/>
+                      </a:rPr>
+                      <m:t>𝑛</m:t>
+                    </m:r>
+                  </m:oMath>
+                </a14:m>
+                <a:r>
+                  <a:rPr lang="en-US" dirty="0"/>
+                  <a:t>-step return estimate used as the target:</a:t>
+                </a:r>
+              </a:p>
+              <a:p>
+                <a:pPr marL="0" indent="0">
+                  <a:buNone/>
+                </a:pPr>
+                <a:endParaRPr lang="en-US" dirty="0"/>
+              </a:p>
+              <a:p>
+                <a:pPr marL="0" indent="0">
+                  <a:buNone/>
+                </a:pPr>
+                <a14:m>
+                  <m:oMathPara xmlns:m="http://schemas.openxmlformats.org/officeDocument/2006/math">
+                    <m:oMath>
+                      <m:sSub>
+                        <m:sSubPr>
+                          <m:ctrlPr>
+                            <a:rPr lang="en-US" i="1">
+                              <a:latin typeface="Cambria Math" panose="02040503050406030204" pitchFamily="18" charset="0"/>
+                            </a:rPr>
+                          </m:ctrlPr>
+                        </m:sSubPr>
+                        <m:e>
+                          <m:r>
+                            <a:rPr lang="en-US" i="1">
+                              <a:latin typeface="Cambria Math" panose="02040503050406030204" pitchFamily="18" charset="0"/>
+                            </a:rPr>
+                            <m:t>𝐺</m:t>
+                          </m:r>
+                        </m:e>
+                        <m:sub>
+                          <m:r>
+                            <a:rPr lang="en-US" i="1">
+                              <a:latin typeface="Cambria Math" panose="02040503050406030204" pitchFamily="18" charset="0"/>
+                            </a:rPr>
+                            <m:t>𝑡</m:t>
+                          </m:r>
+                          <m:r>
+                            <a:rPr lang="en-US" i="1">
+                              <a:latin typeface="Cambria Math" panose="02040503050406030204" pitchFamily="18" charset="0"/>
+                            </a:rPr>
+                            <m:t>:</m:t>
+                          </m:r>
+                          <m:r>
+                            <a:rPr lang="en-US" i="1">
+                              <a:latin typeface="Cambria Math" panose="02040503050406030204" pitchFamily="18" charset="0"/>
+                            </a:rPr>
+                            <m:t>𝑡</m:t>
+                          </m:r>
+                          <m:r>
+                            <a:rPr lang="en-US" i="1">
+                              <a:latin typeface="Cambria Math" panose="02040503050406030204" pitchFamily="18" charset="0"/>
+                            </a:rPr>
+                            <m:t>+</m:t>
+                          </m:r>
+                          <m:r>
+                            <a:rPr lang="en-US" i="1">
+                              <a:latin typeface="Cambria Math" panose="02040503050406030204" pitchFamily="18" charset="0"/>
+                            </a:rPr>
+                            <m:t>𝑛</m:t>
+                          </m:r>
+                        </m:sub>
+                      </m:sSub>
+                      <m:r>
+                        <a:rPr lang="en-US" i="1">
+                          <a:latin typeface="Cambria Math" panose="02040503050406030204" pitchFamily="18" charset="0"/>
+                        </a:rPr>
+                        <m:t>=</m:t>
+                      </m:r>
+                      <m:sSub>
+                        <m:sSubPr>
+                          <m:ctrlPr>
+                            <a:rPr lang="en-US" i="1">
+                              <a:latin typeface="Cambria Math" panose="02040503050406030204" pitchFamily="18" charset="0"/>
+                            </a:rPr>
+                          </m:ctrlPr>
+                        </m:sSubPr>
+                        <m:e>
+                          <m:r>
+                            <a:rPr lang="en-US" i="1">
+                              <a:latin typeface="Cambria Math" panose="02040503050406030204" pitchFamily="18" charset="0"/>
+                            </a:rPr>
+                            <m:t>𝑅</m:t>
+                          </m:r>
+                        </m:e>
+                        <m:sub>
+                          <m:r>
+                            <a:rPr lang="en-US" i="1">
+                              <a:latin typeface="Cambria Math" panose="02040503050406030204" pitchFamily="18" charset="0"/>
+                            </a:rPr>
+                            <m:t>𝑡</m:t>
+                          </m:r>
+                          <m:r>
+                            <a:rPr lang="en-US" i="1">
+                              <a:latin typeface="Cambria Math" panose="02040503050406030204" pitchFamily="18" charset="0"/>
+                            </a:rPr>
+                            <m:t>+1</m:t>
+                          </m:r>
+                        </m:sub>
+                      </m:sSub>
+                      <m:r>
+                        <a:rPr lang="en-US" i="1">
+                          <a:latin typeface="Cambria Math" panose="02040503050406030204" pitchFamily="18" charset="0"/>
+                        </a:rPr>
+                        <m:t>+</m:t>
+                      </m:r>
+                      <m:r>
+                        <a:rPr lang="en-US" i="1">
+                          <a:latin typeface="Cambria Math" panose="02040503050406030204" pitchFamily="18" charset="0"/>
+                        </a:rPr>
+                        <m:t>𝛾</m:t>
+                      </m:r>
+                      <m:sSub>
+                        <m:sSubPr>
+                          <m:ctrlPr>
+                            <a:rPr lang="en-US" i="1">
+                              <a:latin typeface="Cambria Math" panose="02040503050406030204" pitchFamily="18" charset="0"/>
+                            </a:rPr>
+                          </m:ctrlPr>
+                        </m:sSubPr>
+                        <m:e>
+                          <m:r>
+                            <a:rPr lang="en-US" i="1">
+                              <a:latin typeface="Cambria Math" panose="02040503050406030204" pitchFamily="18" charset="0"/>
+                            </a:rPr>
+                            <m:t>𝑅</m:t>
+                          </m:r>
+                        </m:e>
+                        <m:sub>
+                          <m:r>
+                            <a:rPr lang="en-US" i="1">
+                              <a:latin typeface="Cambria Math" panose="02040503050406030204" pitchFamily="18" charset="0"/>
+                            </a:rPr>
+                            <m:t>𝑡</m:t>
+                          </m:r>
+                          <m:r>
+                            <a:rPr lang="en-US" i="1">
+                              <a:latin typeface="Cambria Math" panose="02040503050406030204" pitchFamily="18" charset="0"/>
+                            </a:rPr>
+                            <m:t>+2</m:t>
+                          </m:r>
+                        </m:sub>
+                      </m:sSub>
+                      <m:r>
+                        <a:rPr lang="en-US" i="1">
+                          <a:latin typeface="Cambria Math" panose="02040503050406030204" pitchFamily="18" charset="0"/>
+                        </a:rPr>
+                        <m:t>+…+</m:t>
+                      </m:r>
+                      <m:sSup>
+                        <m:sSupPr>
+                          <m:ctrlPr>
+                            <a:rPr lang="en-US" i="1">
+                              <a:latin typeface="Cambria Math" panose="02040503050406030204" pitchFamily="18" charset="0"/>
+                            </a:rPr>
+                          </m:ctrlPr>
+                        </m:sSupPr>
+                        <m:e>
+                          <m:r>
+                            <a:rPr lang="en-US" i="1">
+                              <a:latin typeface="Cambria Math" panose="02040503050406030204" pitchFamily="18" charset="0"/>
+                            </a:rPr>
+                            <m:t>𝛾</m:t>
+                          </m:r>
+                        </m:e>
+                        <m:sup>
+                          <m:r>
+                            <a:rPr lang="en-US" i="1">
+                              <a:latin typeface="Cambria Math" panose="02040503050406030204" pitchFamily="18" charset="0"/>
+                            </a:rPr>
+                            <m:t>𝑛</m:t>
+                          </m:r>
+                          <m:r>
+                            <a:rPr lang="en-US" i="1">
+                              <a:latin typeface="Cambria Math" panose="02040503050406030204" pitchFamily="18" charset="0"/>
+                            </a:rPr>
+                            <m:t>−1</m:t>
+                          </m:r>
+                        </m:sup>
+                      </m:sSup>
+                      <m:sSub>
+                        <m:sSubPr>
+                          <m:ctrlPr>
+                            <a:rPr lang="en-US" i="1">
+                              <a:latin typeface="Cambria Math" panose="02040503050406030204" pitchFamily="18" charset="0"/>
+                            </a:rPr>
+                          </m:ctrlPr>
+                        </m:sSubPr>
+                        <m:e>
+                          <m:r>
+                            <a:rPr lang="en-US" i="1">
+                              <a:latin typeface="Cambria Math" panose="02040503050406030204" pitchFamily="18" charset="0"/>
+                            </a:rPr>
+                            <m:t>𝑅</m:t>
+                          </m:r>
+                        </m:e>
+                        <m:sub>
+                          <m:r>
+                            <a:rPr lang="en-US" i="1">
+                              <a:latin typeface="Cambria Math" panose="02040503050406030204" pitchFamily="18" charset="0"/>
+                            </a:rPr>
+                            <m:t>𝑡</m:t>
+                          </m:r>
+                          <m:r>
+                            <a:rPr lang="en-US" i="1">
+                              <a:latin typeface="Cambria Math" panose="02040503050406030204" pitchFamily="18" charset="0"/>
+                            </a:rPr>
+                            <m:t>+</m:t>
+                          </m:r>
+                          <m:r>
+                            <a:rPr lang="en-US" i="1">
+                              <a:latin typeface="Cambria Math" panose="02040503050406030204" pitchFamily="18" charset="0"/>
+                            </a:rPr>
+                            <m:t>𝑛</m:t>
+                          </m:r>
+                        </m:sub>
+                      </m:sSub>
+                      <m:r>
+                        <a:rPr lang="en-US" i="1">
+                          <a:latin typeface="Cambria Math" panose="02040503050406030204" pitchFamily="18" charset="0"/>
+                        </a:rPr>
+                        <m:t>+</m:t>
+                      </m:r>
+                      <m:sSup>
+                        <m:sSupPr>
+                          <m:ctrlPr>
+                            <a:rPr lang="en-US" i="1">
+                              <a:latin typeface="Cambria Math" panose="02040503050406030204" pitchFamily="18" charset="0"/>
+                            </a:rPr>
+                          </m:ctrlPr>
+                        </m:sSupPr>
+                        <m:e>
+                          <m:r>
+                            <a:rPr lang="en-US" i="1">
+                              <a:latin typeface="Cambria Math" panose="02040503050406030204" pitchFamily="18" charset="0"/>
+                            </a:rPr>
+                            <m:t>𝛾</m:t>
+                          </m:r>
+                        </m:e>
+                        <m:sup>
+                          <m:r>
+                            <a:rPr lang="en-US" i="1">
+                              <a:latin typeface="Cambria Math" panose="02040503050406030204" pitchFamily="18" charset="0"/>
+                            </a:rPr>
+                            <m:t>𝑛</m:t>
+                          </m:r>
+                        </m:sup>
+                      </m:sSup>
+                      <m:r>
+                        <a:rPr lang="en-US" i="1">
+                          <a:latin typeface="Cambria Math" panose="02040503050406030204" pitchFamily="18" charset="0"/>
+                        </a:rPr>
+                        <m:t>𝑄</m:t>
+                      </m:r>
+                      <m:d>
+                        <m:dPr>
+                          <m:ctrlPr>
+                            <a:rPr lang="en-US" i="1">
+                              <a:latin typeface="Cambria Math" panose="02040503050406030204" pitchFamily="18" charset="0"/>
+                            </a:rPr>
+                          </m:ctrlPr>
+                        </m:dPr>
+                        <m:e>
+                          <m:sSub>
+                            <m:sSubPr>
+                              <m:ctrlPr>
+                                <a:rPr lang="en-US" i="1">
+                                  <a:latin typeface="Cambria Math" panose="02040503050406030204" pitchFamily="18" charset="0"/>
+                                </a:rPr>
+                              </m:ctrlPr>
+                            </m:sSubPr>
+                            <m:e>
+                              <m:r>
+                                <a:rPr lang="en-US" i="1">
+                                  <a:latin typeface="Cambria Math" panose="02040503050406030204" pitchFamily="18" charset="0"/>
+                                </a:rPr>
+                                <m:t>𝑆</m:t>
+                              </m:r>
+                            </m:e>
+                            <m:sub>
+                              <m:r>
+                                <a:rPr lang="en-US" i="1">
+                                  <a:latin typeface="Cambria Math" panose="02040503050406030204" pitchFamily="18" charset="0"/>
+                                </a:rPr>
+                                <m:t>𝑡</m:t>
+                              </m:r>
+                              <m:r>
+                                <a:rPr lang="en-US" i="1">
+                                  <a:latin typeface="Cambria Math" panose="02040503050406030204" pitchFamily="18" charset="0"/>
+                                </a:rPr>
+                                <m:t>+</m:t>
+                              </m:r>
+                              <m:r>
+                                <a:rPr lang="en-US" i="1">
+                                  <a:latin typeface="Cambria Math" panose="02040503050406030204" pitchFamily="18" charset="0"/>
+                                </a:rPr>
+                                <m:t>𝑛</m:t>
+                              </m:r>
+                            </m:sub>
+                          </m:sSub>
+                          <m:r>
+                            <a:rPr lang="en-US" i="1">
+                              <a:latin typeface="Cambria Math" panose="02040503050406030204" pitchFamily="18" charset="0"/>
+                            </a:rPr>
+                            <m:t>,</m:t>
+                          </m:r>
+                          <m:sSub>
+                            <m:sSubPr>
+                              <m:ctrlPr>
+                                <a:rPr lang="en-US" i="1">
+                                  <a:latin typeface="Cambria Math" panose="02040503050406030204" pitchFamily="18" charset="0"/>
+                                </a:rPr>
+                              </m:ctrlPr>
+                            </m:sSubPr>
+                            <m:e>
+                              <m:r>
+                                <a:rPr lang="en-US" i="1">
+                                  <a:latin typeface="Cambria Math" panose="02040503050406030204" pitchFamily="18" charset="0"/>
+                                </a:rPr>
+                                <m:t>𝐴</m:t>
+                              </m:r>
+                            </m:e>
+                            <m:sub>
+                              <m:r>
+                                <a:rPr lang="en-US" i="1">
+                                  <a:latin typeface="Cambria Math" panose="02040503050406030204" pitchFamily="18" charset="0"/>
+                                </a:rPr>
+                                <m:t>𝑡</m:t>
+                              </m:r>
+                              <m:r>
+                                <a:rPr lang="en-US" i="1">
+                                  <a:latin typeface="Cambria Math" panose="02040503050406030204" pitchFamily="18" charset="0"/>
+                                </a:rPr>
+                                <m:t>+</m:t>
+                              </m:r>
+                              <m:r>
+                                <a:rPr lang="en-US" i="1">
+                                  <a:latin typeface="Cambria Math" panose="02040503050406030204" pitchFamily="18" charset="0"/>
+                                </a:rPr>
+                                <m:t>𝑛</m:t>
+                              </m:r>
+                            </m:sub>
+                          </m:sSub>
+                        </m:e>
+                      </m:d>
+                    </m:oMath>
+                  </m:oMathPara>
+                </a14:m>
+                <a:endParaRPr lang="en-US" dirty="0"/>
+              </a:p>
+              <a:p>
+                <a:endParaRPr lang="en-US" dirty="0"/>
+              </a:p>
+              <a:p>
+                <a:endParaRPr lang="en-US" dirty="0"/>
+              </a:p>
+              <a:p>
+                <a:pPr marL="0" indent="0">
+                  <a:buNone/>
+                </a:pPr>
+                <a:endParaRPr lang="en-US" dirty="0"/>
+              </a:p>
+              <a:p>
+                <a:r>
+                  <a:rPr lang="en-US" dirty="0"/>
+                  <a:t>Q-Learning needs a return estimate for the target policy. Mixing rewards form the behavior policy with a bootstrapped Q-value from the target policy is an issue!</a:t>
+                </a:r>
+              </a:p>
+              <a:p>
+                <a:r>
+                  <a:rPr lang="en-US" dirty="0"/>
+                  <a:t>We would still need importance sampling to fix the rewards.</a:t>
+                </a:r>
+              </a:p>
+              <a:p>
+                <a:r>
+                  <a:rPr lang="en-US" dirty="0"/>
+                  <a:t>Most applications stick with </a:t>
+                </a:r>
+                <a14:m>
+                  <m:oMath xmlns:m="http://schemas.openxmlformats.org/officeDocument/2006/math">
+                    <m:r>
+                      <a:rPr lang="en-US" i="1" dirty="0" smtClean="0">
+                        <a:latin typeface="Cambria Math" panose="02040503050406030204" pitchFamily="18" charset="0"/>
+                      </a:rPr>
+                      <m:t>𝑛</m:t>
+                    </m:r>
+                  </m:oMath>
+                </a14:m>
+                <a:r>
+                  <a:rPr lang="en-US" dirty="0"/>
+                  <a:t>-step Sarsa.</a:t>
+                </a:r>
+              </a:p>
+              <a:p>
+                <a:pPr marL="0" indent="0">
+                  <a:buNone/>
+                </a:pPr>
+                <a:endParaRPr lang="en-US" dirty="0"/>
+              </a:p>
+            </p:txBody>
+          </p:sp>
+        </mc:Choice>
+        <mc:Fallback xmlns="">
+          <p:sp>
+            <p:nvSpPr>
+              <p:cNvPr id="3" name="Content Placeholder 2">
+                <a:extLst>
+                  <a:ext uri="{FF2B5EF4-FFF2-40B4-BE49-F238E27FC236}">
+                    <a16:creationId xmlns:a16="http://schemas.microsoft.com/office/drawing/2014/main" id="{89A5D9A4-5700-5EBA-0E79-41C2AA003632}"/>
+                  </a:ext>
+                </a:extLst>
+              </p:cNvPr>
+              <p:cNvSpPr>
+                <a:spLocks noGrp="1" noRot="1" noChangeAspect="1" noMove="1" noResize="1" noEditPoints="1" noAdjustHandles="1" noChangeArrowheads="1" noChangeShapeType="1" noTextEdit="1"/>
+              </p:cNvSpPr>
+              <p:nvPr>
+                <p:ph idx="1"/>
+              </p:nvPr>
+            </p:nvSpPr>
+            <p:spPr>
+              <a:blipFill>
+                <a:blip r:embed="rId3"/>
+                <a:stretch>
+                  <a:fillRect l="-1043" t="-2806" b="-3827"/>
+                </a:stretch>
+              </a:blipFill>
+            </p:spPr>
+            <p:txBody>
+              <a:bodyPr/>
+              <a:lstStyle/>
+              <a:p>
+                <a:r>
+                  <a:rPr lang="en-US">
+                    <a:noFill/>
+                  </a:rPr>
+                  <a:t> </a:t>
+                </a:r>
+              </a:p>
+            </p:txBody>
+          </p:sp>
+        </mc:Fallback>
+      </mc:AlternateContent>
+      <mc:AlternateContent xmlns:mc="http://schemas.openxmlformats.org/markup-compatibility/2006" xmlns:a14="http://schemas.microsoft.com/office/drawing/2010/main">
+        <mc:Choice Requires="a14">
+          <p:sp>
+            <p:nvSpPr>
+              <p:cNvPr id="4" name="Speech Bubble: Rectangle with Corners Rounded 3">
+                <a:extLst>
+                  <a:ext uri="{FF2B5EF4-FFF2-40B4-BE49-F238E27FC236}">
+                    <a16:creationId xmlns:a16="http://schemas.microsoft.com/office/drawing/2014/main" id="{0D4CA94F-E4A3-E0CE-BA8F-9A0C9D18CFA5}"/>
+                  </a:ext>
+                </a:extLst>
+              </p:cNvPr>
+              <p:cNvSpPr/>
+              <p:nvPr/>
+            </p:nvSpPr>
+            <p:spPr>
+              <a:xfrm>
+                <a:off x="8829413" y="3120221"/>
+                <a:ext cx="2797728" cy="666925"/>
+              </a:xfrm>
+              <a:prstGeom prst="wedgeRoundRectCallout">
+                <a:avLst>
+                  <a:gd name="adj1" fmla="val -8920"/>
+                  <a:gd name="adj2" fmla="val -111835"/>
+                  <a:gd name="adj3" fmla="val 16667"/>
+                </a:avLst>
+              </a:prstGeom>
+            </p:spPr>
+            <p:style>
+              <a:lnRef idx="2">
+                <a:schemeClr val="accent1">
+                  <a:shade val="15000"/>
+                </a:schemeClr>
+              </a:lnRef>
+              <a:fillRef idx="1">
+                <a:schemeClr val="accent1"/>
+              </a:fillRef>
+              <a:effectRef idx="0">
+                <a:schemeClr val="accent1"/>
+              </a:effectRef>
+              <a:fontRef idx="minor">
+                <a:schemeClr val="lt1"/>
+              </a:fontRef>
+            </p:style>
+            <p:txBody>
+              <a:bodyPr rtlCol="0" anchor="ctr"/>
+              <a:lstStyle/>
+              <a:p>
+                <a:pPr algn="ctr"/>
+                <a:r>
+                  <a:rPr lang="en-US" dirty="0"/>
+                  <a:t>Choose this action using the target policy </a:t>
+                </a:r>
+                <a14:m>
+                  <m:oMath xmlns:m="http://schemas.openxmlformats.org/officeDocument/2006/math">
+                    <m:r>
+                      <a:rPr lang="en-US" b="0" i="1" smtClean="0">
+                        <a:latin typeface="Cambria Math" panose="02040503050406030204" pitchFamily="18" charset="0"/>
+                      </a:rPr>
+                      <m:t>𝜋</m:t>
+                    </m:r>
+                  </m:oMath>
+                </a14:m>
+                <a:endParaRPr lang="en-US" dirty="0"/>
+              </a:p>
+            </p:txBody>
+          </p:sp>
+        </mc:Choice>
+        <mc:Fallback xmlns="">
+          <p:sp>
+            <p:nvSpPr>
+              <p:cNvPr id="4" name="Speech Bubble: Rectangle with Corners Rounded 3">
+                <a:extLst>
+                  <a:ext uri="{FF2B5EF4-FFF2-40B4-BE49-F238E27FC236}">
+                    <a16:creationId xmlns:a16="http://schemas.microsoft.com/office/drawing/2014/main" id="{0D4CA94F-E4A3-E0CE-BA8F-9A0C9D18CFA5}"/>
+                  </a:ext>
+                </a:extLst>
+              </p:cNvPr>
+              <p:cNvSpPr>
+                <a:spLocks noRot="1" noChangeAspect="1" noMove="1" noResize="1" noEditPoints="1" noAdjustHandles="1" noChangeArrowheads="1" noChangeShapeType="1" noTextEdit="1"/>
+              </p:cNvSpPr>
+              <p:nvPr/>
+            </p:nvSpPr>
+            <p:spPr>
+              <a:xfrm>
+                <a:off x="8829413" y="3120221"/>
+                <a:ext cx="2797728" cy="666925"/>
+              </a:xfrm>
+              <a:prstGeom prst="wedgeRoundRectCallout">
+                <a:avLst>
+                  <a:gd name="adj1" fmla="val -8920"/>
+                  <a:gd name="adj2" fmla="val -111835"/>
+                  <a:gd name="adj3" fmla="val 16667"/>
+                </a:avLst>
+              </a:prstGeom>
+              <a:blipFill>
+                <a:blip r:embed="rId4"/>
+                <a:stretch>
+                  <a:fillRect b="-7182"/>
+                </a:stretch>
+              </a:blipFill>
+            </p:spPr>
+            <p:txBody>
+              <a:bodyPr/>
+              <a:lstStyle/>
+              <a:p>
+                <a:r>
+                  <a:rPr lang="en-US">
+                    <a:noFill/>
+                  </a:rPr>
+                  <a:t> </a:t>
+                </a:r>
+              </a:p>
+            </p:txBody>
+          </p:sp>
+        </mc:Fallback>
+      </mc:AlternateContent>
+      <p:cxnSp>
+        <p:nvCxnSpPr>
+          <p:cNvPr id="6" name="Straight Connector 5">
+            <a:extLst>
+              <a:ext uri="{FF2B5EF4-FFF2-40B4-BE49-F238E27FC236}">
+                <a16:creationId xmlns:a16="http://schemas.microsoft.com/office/drawing/2014/main" id="{4E9E15BC-F019-9127-131F-E9E17173C224}"/>
+              </a:ext>
+            </a:extLst>
+          </p:cNvPr>
+          <p:cNvCxnSpPr/>
+          <p:nvPr/>
+        </p:nvCxnSpPr>
+        <p:spPr>
+          <a:xfrm>
+            <a:off x="4102217" y="2701255"/>
+            <a:ext cx="3754073" cy="0"/>
+          </a:xfrm>
+          <a:prstGeom prst="line">
+            <a:avLst/>
+          </a:prstGeom>
+        </p:spPr>
+        <p:style>
+          <a:lnRef idx="2">
+            <a:schemeClr val="accent2"/>
+          </a:lnRef>
+          <a:fillRef idx="0">
+            <a:schemeClr val="accent2"/>
+          </a:fillRef>
+          <a:effectRef idx="1">
+            <a:schemeClr val="accent2"/>
+          </a:effectRef>
+          <a:fontRef idx="minor">
+            <a:schemeClr val="tx1"/>
+          </a:fontRef>
+        </p:style>
+      </p:cxnSp>
+      <mc:AlternateContent xmlns:mc="http://schemas.openxmlformats.org/markup-compatibility/2006" xmlns:a14="http://schemas.microsoft.com/office/drawing/2010/main">
+        <mc:Choice Requires="a14">
+          <p:sp>
+            <p:nvSpPr>
+              <p:cNvPr id="8" name="Speech Bubble: Rectangle with Corners Rounded 7">
+                <a:extLst>
+                  <a:ext uri="{FF2B5EF4-FFF2-40B4-BE49-F238E27FC236}">
+                    <a16:creationId xmlns:a16="http://schemas.microsoft.com/office/drawing/2014/main" id="{CCDB4F50-B100-9216-5C41-BCC29A59BE3B}"/>
+                  </a:ext>
+                </a:extLst>
+              </p:cNvPr>
+              <p:cNvSpPr/>
+              <p:nvPr/>
+            </p:nvSpPr>
+            <p:spPr>
+              <a:xfrm>
+                <a:off x="3956807" y="3226481"/>
+                <a:ext cx="3094140" cy="666925"/>
+              </a:xfrm>
+              <a:prstGeom prst="wedgeRoundRectCallout">
+                <a:avLst>
+                  <a:gd name="adj1" fmla="val -8920"/>
+                  <a:gd name="adj2" fmla="val -111835"/>
+                  <a:gd name="adj3" fmla="val 16667"/>
+                </a:avLst>
+              </a:prstGeom>
+            </p:spPr>
+            <p:style>
+              <a:lnRef idx="2">
+                <a:schemeClr val="accent2">
+                  <a:shade val="15000"/>
+                </a:schemeClr>
+              </a:lnRef>
+              <a:fillRef idx="1">
+                <a:schemeClr val="accent2"/>
+              </a:fillRef>
+              <a:effectRef idx="0">
+                <a:schemeClr val="accent2"/>
+              </a:effectRef>
+              <a:fontRef idx="minor">
+                <a:schemeClr val="lt1"/>
+              </a:fontRef>
+            </p:style>
+            <p:txBody>
+              <a:bodyPr rtlCol="0" anchor="ctr"/>
+              <a:lstStyle/>
+              <a:p>
+                <a:pPr algn="ctr"/>
+                <a:r>
+                  <a:rPr lang="en-US" dirty="0"/>
+                  <a:t>These were sampled using the behavioral policy </a:t>
+                </a:r>
+                <a14:m>
+                  <m:oMath xmlns:m="http://schemas.openxmlformats.org/officeDocument/2006/math">
+                    <m:r>
+                      <m:rPr>
+                        <m:sty m:val="p"/>
+                      </m:rPr>
+                      <a:rPr lang="en-US" b="0" i="0" smtClean="0">
+                        <a:latin typeface="Cambria Math" panose="02040503050406030204" pitchFamily="18" charset="0"/>
+                      </a:rPr>
+                      <m:t>b</m:t>
+                    </m:r>
+                  </m:oMath>
+                </a14:m>
+                <a:endParaRPr lang="en-US" dirty="0"/>
+              </a:p>
+            </p:txBody>
+          </p:sp>
+        </mc:Choice>
+        <mc:Fallback xmlns="">
+          <p:sp>
+            <p:nvSpPr>
+              <p:cNvPr id="8" name="Speech Bubble: Rectangle with Corners Rounded 7">
+                <a:extLst>
+                  <a:ext uri="{FF2B5EF4-FFF2-40B4-BE49-F238E27FC236}">
+                    <a16:creationId xmlns:a16="http://schemas.microsoft.com/office/drawing/2014/main" id="{CCDB4F50-B100-9216-5C41-BCC29A59BE3B}"/>
+                  </a:ext>
+                </a:extLst>
+              </p:cNvPr>
+              <p:cNvSpPr>
+                <a:spLocks noRot="1" noChangeAspect="1" noMove="1" noResize="1" noEditPoints="1" noAdjustHandles="1" noChangeArrowheads="1" noChangeShapeType="1" noTextEdit="1"/>
+              </p:cNvSpPr>
+              <p:nvPr/>
+            </p:nvSpPr>
+            <p:spPr>
+              <a:xfrm>
+                <a:off x="3956807" y="3226481"/>
+                <a:ext cx="3094140" cy="666925"/>
+              </a:xfrm>
+              <a:prstGeom prst="wedgeRoundRectCallout">
+                <a:avLst>
+                  <a:gd name="adj1" fmla="val -8920"/>
+                  <a:gd name="adj2" fmla="val -111835"/>
+                  <a:gd name="adj3" fmla="val 16667"/>
+                </a:avLst>
+              </a:prstGeom>
+              <a:blipFill>
+                <a:blip r:embed="rId5"/>
+                <a:stretch>
+                  <a:fillRect b="-6593"/>
+                </a:stretch>
+              </a:blipFill>
+            </p:spPr>
+            <p:txBody>
+              <a:bodyPr/>
+              <a:lstStyle/>
+              <a:p>
+                <a:r>
+                  <a:rPr lang="en-US">
+                    <a:noFill/>
+                  </a:rPr>
+                  <a:t> </a:t>
+                </a:r>
+              </a:p>
+            </p:txBody>
+          </p:sp>
+        </mc:Fallback>
+      </mc:AlternateContent>
+    </p:spTree>
+    <p:extLst>
+      <p:ext uri="{BB962C8B-B14F-4D97-AF65-F5344CB8AC3E}">
+        <p14:creationId xmlns:p14="http://schemas.microsoft.com/office/powerpoint/2010/main" val="563198691"/>
+      </p:ext>
+    </p:extLst>
+  </p:cSld>
+  <p:clrMapOvr>
+    <a:masterClrMapping/>
+  </p:clrMapOvr>
+</p:sld>
+</file>
+
+<file path=ppt/slides/slide19.xml><?xml version="1.0" encoding="utf-8"?>
+<p:sld xmlns:a="http://schemas.openxmlformats.org/drawingml/2006/main" xmlns:r="http://schemas.openxmlformats.org/officeDocument/2006/relationships" xmlns:p="http://schemas.openxmlformats.org/presentationml/2006/main">
+  <p:cSld>
     <p:bg>
       <p:bgPr>
         <a:solidFill>
@@ -12645,7 +13514,7 @@
         </p:blipFill>
         <p:spPr bwMode="auto">
           <a:xfrm>
-            <a:off x="-1" y="10"/>
+            <a:off x="-56272" y="-3"/>
             <a:ext cx="6096001" cy="4114790"/>
           </a:xfrm>
           <a:prstGeom prst="rect">
@@ -12663,8 +13532,8 @@
           </a:extLst>
         </p:spPr>
       </p:pic>
-      <mc:AlternateContent xmlns:mc="http://schemas.openxmlformats.org/markup-compatibility/2006" xmlns:a14="http://schemas.microsoft.com/office/drawing/2010/main">
-        <mc:Choice Requires="a14">
+      <mc:AlternateContent xmlns:mc="http://schemas.openxmlformats.org/markup-compatibility/2006">
+        <mc:Choice xmlns:a14="http://schemas.microsoft.com/office/drawing/2010/main" Requires="a14">
           <p:sp>
             <p:nvSpPr>
               <p:cNvPr id="3" name="Content Placeholder 2">
@@ -12689,14 +13558,18 @@
             </p:spPr>
             <p:txBody>
               <a:bodyPr anchor="ctr">
-                <a:normAutofit fontScale="92500" lnSpcReduction="10000"/>
+                <a:normAutofit fontScale="92500"/>
               </a:bodyPr>
               <a:lstStyle/>
               <a:p>
+                <a:r>
+                  <a:rPr lang="en-US" sz="1800" dirty="0"/>
+                  <a:t>Advantage of </a:t>
+                </a:r>
                 <a14:m>
                   <m:oMath xmlns:m="http://schemas.openxmlformats.org/officeDocument/2006/math">
                     <m:r>
-                      <a:rPr lang="en-US" sz="1800" b="0" i="1">
+                      <a:rPr lang="en-US" sz="1800" b="0" i="1" smtClean="0">
                         <a:latin typeface="Cambria Math" panose="02040503050406030204" pitchFamily="18" charset="0"/>
                       </a:rPr>
                       <m:t>𝑛</m:t>
@@ -12705,7 +13578,74 @@
                 </a14:m>
                 <a:r>
                   <a:rPr lang="en-US" sz="1800" dirty="0"/>
-                  <a:t>-step methods let us choose the amount of bootstrapping from 1-step to no bootstrapping (MC).</a:t>
+                  <a:t>-step over one-step methods: </a:t>
+                </a:r>
+              </a:p>
+              <a:p>
+                <a:pPr lvl="1"/>
+                <a:r>
+                  <a:rPr lang="en-US" sz="1800" b="1" dirty="0"/>
+                  <a:t>Learning</a:t>
+                </a:r>
+                <a:r>
+                  <a:rPr lang="en-US" sz="1800" dirty="0"/>
+                  <a:t>: Looking more steps ahead speeds up learning, especially for sparse rewards.</a:t>
+                </a:r>
+              </a:p>
+              <a:p>
+                <a:pPr lvl="1"/>
+                <a:r>
+                  <a:rPr lang="en-US" sz="1800" b="1" dirty="0"/>
+                  <a:t>Error reduction</a:t>
+                </a:r>
+                <a:r>
+                  <a:rPr lang="en-US" sz="1800" dirty="0"/>
+                  <a:t>: Significantly reduces the bootstrapping error (</a:t>
+                </a:r>
+                <a:r>
+                  <a:rPr lang="en-US" sz="1800" b="1" dirty="0"/>
+                  <a:t>bias</a:t>
+                </a:r>
+                <a:r>
+                  <a:rPr lang="en-US" sz="1800" dirty="0"/>
+                  <a:t>) at the cost of increased </a:t>
+                </a:r>
+                <a:r>
+                  <a:rPr lang="en-US" sz="1800" b="1" dirty="0"/>
+                  <a:t>variance</a:t>
+                </a:r>
+                <a:r>
+                  <a:rPr lang="en-US" sz="1800" dirty="0"/>
+                  <a:t>. </a:t>
+                </a:r>
+              </a:p>
+              <a:p>
+                <a:pPr lvl="1"/>
+                <a:r>
+                  <a:rPr lang="en-US" sz="1800" dirty="0"/>
+                  <a:t>An intermediate amount of bootstrapping typically </a:t>
+                </a:r>
+                <a:r>
+                  <a:rPr lang="en-US" sz="1800" b="1" dirty="0"/>
+                  <a:t>performs better</a:t>
+                </a:r>
+                <a:r>
+                  <a:rPr lang="en-US" sz="1800" dirty="0"/>
+                  <a:t> in terms of the variance/bias tradeoff than the one-step and MC extremes. </a:t>
+                </a:r>
+                <a14:m>
+                  <m:oMath xmlns:m="http://schemas.openxmlformats.org/officeDocument/2006/math">
+                    <m:r>
+                      <a:rPr lang="en-US" sz="1800" b="0" i="1">
+                        <a:latin typeface="Cambria Math" panose="02040503050406030204" pitchFamily="18" charset="0"/>
+                      </a:rPr>
+                      <m:t>𝑛</m:t>
+                    </m:r>
+                  </m:oMath>
+                </a14:m>
+                <a:r>
+                  <a:rPr lang="en-US" sz="1800" dirty="0"/>
+                  <a:t> is application-dependent and can be tuned.</a:t>
                 </a:r>
               </a:p>
               <a:p>
@@ -12714,108 +13654,46 @@
               <a:p>
                 <a:r>
                   <a:rPr lang="en-US" sz="1800" dirty="0"/>
-                  <a:t>Advantage over one-step methods: </a:t>
+                  <a:t>Drawbacks:</a:t>
                 </a:r>
               </a:p>
               <a:p>
                 <a:pPr lvl="1"/>
                 <a:r>
                   <a:rPr lang="en-US" sz="1800" b="1" dirty="0"/>
-                  <a:t>Learning</a:t>
+                  <a:t>Delay</a:t>
                 </a:r>
                 <a:r>
                   <a:rPr lang="en-US" sz="1800" dirty="0"/>
-                  <a:t>: Looking more steps ahead speeds up learning, especially for sparse rewards.</a:t>
-                </a:r>
-              </a:p>
-              <a:p>
-                <a:pPr lvl="1"/>
-                <a:r>
-                  <a:rPr lang="en-US" sz="1800" b="1" dirty="0"/>
-                  <a:t>Error reduction</a:t>
+                  <a:t>: </a:t>
+                </a:r>
+                <a:r>
+                  <a:rPr lang="en-US" sz="1800" dirty="0" err="1"/>
+                  <a:t>Updat</a:t>
                 </a:r>
                 <a:r>
                   <a:rPr lang="en-US" sz="1800" dirty="0"/>
-                  <a:t>: Significantly reduces the bootstrapping error (</a:t>
-                </a:r>
-                <a:r>
-                  <a:rPr lang="en-US" sz="1800" b="1" dirty="0"/>
-                  <a:t>bias</a:t>
-                </a:r>
-                <a:r>
-                  <a:rPr lang="en-US" sz="1800" dirty="0"/>
-                  <a:t>) at the cost of increased </a:t>
-                </a:r>
-                <a:r>
-                  <a:rPr lang="en-US" sz="1800" b="1" dirty="0"/>
-                  <a:t>variance</a:t>
-                </a:r>
-                <a:r>
-                  <a:rPr lang="en-US" sz="1800" dirty="0"/>
-                  <a:t>. </a:t>
-                </a:r>
-              </a:p>
-              <a:p>
-                <a:pPr lvl="1"/>
-                <a:r>
-                  <a:rPr lang="en-US" sz="1800" dirty="0"/>
-                  <a:t>An intermediate amount of bootstrapping typically </a:t>
-                </a:r>
-                <a:r>
-                  <a:rPr lang="en-US" sz="1800" b="1" dirty="0"/>
-                  <a:t>performs better</a:t>
-                </a:r>
-                <a:r>
-                  <a:rPr lang="en-US" sz="1800" dirty="0"/>
-                  <a:t> in terms of the variance/bias tradeoff than the one-step and MC extremes. </a:t>
+                  <a:t>es are delayed </a:t>
                 </a:r>
                 <a14:m>
                   <m:oMath xmlns:m="http://schemas.openxmlformats.org/officeDocument/2006/math">
                     <m:r>
-                      <a:rPr lang="en-US" sz="1800" b="0" i="1">
+                      <a:rPr lang="en-US" sz="1800" i="1">
                         <a:latin typeface="Cambria Math" panose="02040503050406030204" pitchFamily="18" charset="0"/>
                       </a:rPr>
                       <m:t>𝑛</m:t>
+                    </m:r>
+                    <m:r>
+                      <a:rPr lang="en-US" sz="1800" b="0" i="0" smtClean="0">
+                        <a:latin typeface="Cambria Math" panose="02040503050406030204" pitchFamily="18" charset="0"/>
+                      </a:rPr>
+                      <m:t> </m:t>
                     </m:r>
                   </m:oMath>
                 </a14:m>
                 <a:r>
                   <a:rPr lang="en-US" sz="1800" dirty="0"/>
-                  <a:t> is application-dependent and can be tuned.</a:t>
-                </a:r>
-              </a:p>
-              <a:p>
-                <a:endParaRPr lang="en-US" sz="1800" dirty="0"/>
-              </a:p>
-              <a:p>
-                <a:r>
-                  <a:rPr lang="en-US" sz="1800" dirty="0"/>
-                  <a:t>Drawback:</a:t>
-                </a:r>
-              </a:p>
-              <a:p>
-                <a:pPr lvl="1"/>
-                <a:r>
-                  <a:rPr lang="en-US" sz="1800" b="1" dirty="0"/>
-                  <a:t>Delay</a:t>
-                </a:r>
-                <a:r>
-                  <a:rPr lang="en-US" sz="1800" dirty="0"/>
-                  <a:t>: Updates are delayed </a:t>
-                </a:r>
-                <a14:m>
-                  <m:oMath xmlns:m="http://schemas.openxmlformats.org/officeDocument/2006/math">
-                    <m:r>
-                      <a:rPr lang="en-US" sz="1800" i="1">
-                        <a:latin typeface="Cambria Math" panose="02040503050406030204" pitchFamily="18" charset="0"/>
-                      </a:rPr>
-                      <m:t>𝑛</m:t>
-                    </m:r>
-                  </m:oMath>
-                </a14:m>
-                <a:r>
-                  <a:rPr lang="en-US" sz="1800" dirty="0"/>
-                  <a:t>-step since future events (rewards and states) are needed.</a:t>
+                  <a:t>steps since future events (rewards and states) are needed.</a:t>
                 </a:r>
               </a:p>
               <a:p>
@@ -12834,9 +13712,6 @@
                 <a:endParaRPr lang="en-US" sz="1800" dirty="0"/>
               </a:p>
               <a:p>
-                <a:pPr marL="0" indent="0">
-                  <a:buNone/>
-                </a:pPr>
                 <a:r>
                   <a:rPr lang="en-US" sz="1800" b="1" dirty="0"/>
                   <a:t>Eligibility traces </a:t>
@@ -12847,12 +13722,37 @@
                 </a:r>
               </a:p>
               <a:p>
-                <a:endParaRPr lang="en-US" sz="1400" dirty="0"/>
+                <a:r>
+                  <a:rPr lang="en-US" sz="1800" dirty="0"/>
+                  <a:t>Modern </a:t>
+                </a:r>
+                <a:r>
+                  <a:rPr lang="en-US" sz="1800" b="1" dirty="0"/>
+                  <a:t>Deep Reinforcement Learning </a:t>
+                </a:r>
+                <a:r>
+                  <a:rPr lang="en-US" sz="1800" dirty="0"/>
+                  <a:t>cannot use eligibility traces and goes back to </a:t>
+                </a:r>
+                <a14:m>
+                  <m:oMath xmlns:m="http://schemas.openxmlformats.org/officeDocument/2006/math">
+                    <m:r>
+                      <a:rPr lang="en-US" sz="1800" b="0" i="1" smtClean="0">
+                        <a:latin typeface="Cambria Math" panose="02040503050406030204" pitchFamily="18" charset="0"/>
+                      </a:rPr>
+                      <m:t>𝑛</m:t>
+                    </m:r>
+                  </m:oMath>
+                </a14:m>
+                <a:r>
+                  <a:rPr lang="en-US" sz="1800" dirty="0"/>
+                  <a:t>-step methods.</a:t>
+                </a:r>
               </a:p>
             </p:txBody>
           </p:sp>
         </mc:Choice>
-        <mc:Fallback xmlns="">
+        <mc:Fallback>
           <p:sp>
             <p:nvSpPr>
               <p:cNvPr id="3" name="Content Placeholder 2">
@@ -12877,7 +13777,7 @@
               <a:blipFill>
                 <a:blip r:embed="rId3"/>
                 <a:stretch>
-                  <a:fillRect l="-649" t="-919"/>
+                  <a:fillRect l="-541" b="-715"/>
                 </a:stretch>
               </a:blipFill>
             </p:spPr>
@@ -12942,7 +13842,7 @@
                                         <p:tgtEl>
                                           <p:spTgt spid="3">
                                             <p:txEl>
-                                              <p:pRg st="2" end="2"/>
+                                              <p:pRg st="0" end="0"/>
                                             </p:txEl>
                                           </p:spTgt>
                                         </p:tgtEl>
@@ -12973,7 +13873,7 @@
                                         <p:tgtEl>
                                           <p:spTgt spid="3">
                                             <p:txEl>
-                                              <p:pRg st="3" end="3"/>
+                                              <p:pRg st="1" end="1"/>
                                             </p:txEl>
                                           </p:spTgt>
                                         </p:tgtEl>
@@ -13004,7 +13904,7 @@
                                         <p:tgtEl>
                                           <p:spTgt spid="3">
                                             <p:txEl>
-                                              <p:pRg st="4" end="4"/>
+                                              <p:pRg st="2" end="2"/>
                                             </p:txEl>
                                           </p:spTgt>
                                         </p:tgtEl>
@@ -13035,7 +13935,7 @@
                                         <p:tgtEl>
                                           <p:spTgt spid="3">
                                             <p:txEl>
-                                              <p:pRg st="5" end="5"/>
+                                              <p:pRg st="3" end="3"/>
                                             </p:txEl>
                                           </p:spTgt>
                                         </p:tgtEl>
@@ -13084,7 +13984,7 @@
                                         <p:tgtEl>
                                           <p:spTgt spid="3">
                                             <p:txEl>
-                                              <p:pRg st="7" end="7"/>
+                                              <p:pRg st="5" end="5"/>
                                             </p:txEl>
                                           </p:spTgt>
                                         </p:tgtEl>
@@ -13115,7 +14015,7 @@
                                         <p:tgtEl>
                                           <p:spTgt spid="3">
                                             <p:txEl>
-                                              <p:pRg st="8" end="8"/>
+                                              <p:pRg st="6" end="6"/>
                                             </p:txEl>
                                           </p:spTgt>
                                         </p:tgtEl>
@@ -13146,7 +14046,7 @@
                                         <p:tgtEl>
                                           <p:spTgt spid="3">
                                             <p:txEl>
-                                              <p:pRg st="9" end="9"/>
+                                              <p:pRg st="7" end="7"/>
                                             </p:txEl>
                                           </p:spTgt>
                                         </p:tgtEl>
@@ -13195,7 +14095,38 @@
                                         <p:tgtEl>
                                           <p:spTgt spid="3">
                                             <p:txEl>
-                                              <p:pRg st="11" end="11"/>
+                                              <p:pRg st="9" end="9"/>
+                                            </p:txEl>
+                                          </p:spTgt>
+                                        </p:tgtEl>
+                                        <p:attrNameLst>
+                                          <p:attrName>style.visibility</p:attrName>
+                                        </p:attrNameLst>
+                                      </p:cBhvr>
+                                      <p:to>
+                                        <p:strVal val="visible"/>
+                                      </p:to>
+                                    </p:set>
+                                  </p:childTnLst>
+                                </p:cTn>
+                              </p:par>
+                              <p:par>
+                                <p:cTn id="25" presetID="1" presetClass="entr" presetSubtype="0" fill="hold" nodeType="withEffect">
+                                  <p:stCondLst>
+                                    <p:cond delay="0"/>
+                                  </p:stCondLst>
+                                  <p:childTnLst>
+                                    <p:set>
+                                      <p:cBhvr>
+                                        <p:cTn id="26" dur="1" fill="hold">
+                                          <p:stCondLst>
+                                            <p:cond delay="0"/>
+                                          </p:stCondLst>
+                                        </p:cTn>
+                                        <p:tgtEl>
+                                          <p:spTgt spid="3">
+                                            <p:txEl>
+                                              <p:pRg st="10" end="10"/>
                                             </p:txEl>
                                           </p:spTgt>
                                         </p:tgtEl>
@@ -17272,8 +18203,8 @@
           </p:sp>
         </mc:Fallback>
       </mc:AlternateContent>
-      <mc:AlternateContent xmlns:mc="http://schemas.openxmlformats.org/markup-compatibility/2006">
-        <mc:Choice xmlns:a14="http://schemas.microsoft.com/office/drawing/2010/main" Requires="a14">
+      <mc:AlternateContent xmlns:mc="http://schemas.openxmlformats.org/markup-compatibility/2006" xmlns:a14="http://schemas.microsoft.com/office/drawing/2010/main">
+        <mc:Choice Requires="a14">
           <p:sp>
             <p:nvSpPr>
               <p:cNvPr id="3" name="Content Placeholder 2">
@@ -17389,7 +18320,7 @@
             </p:txBody>
           </p:sp>
         </mc:Choice>
-        <mc:Fallback>
+        <mc:Fallback xmlns="">
           <p:sp>
             <p:nvSpPr>
               <p:cNvPr id="3" name="Content Placeholder 2">
@@ -17433,8 +18364,8 @@
           </p:sp>
         </mc:Fallback>
       </mc:AlternateContent>
-      <mc:AlternateContent xmlns:mc="http://schemas.openxmlformats.org/markup-compatibility/2006">
-        <mc:Choice xmlns:a14="http://schemas.microsoft.com/office/drawing/2010/main" Requires="a14">
+      <mc:AlternateContent xmlns:mc="http://schemas.openxmlformats.org/markup-compatibility/2006" xmlns:a14="http://schemas.microsoft.com/office/drawing/2010/main">
+        <mc:Choice Requires="a14">
           <p:sp>
             <p:nvSpPr>
               <p:cNvPr id="32" name="TextBox 31">
@@ -17528,7 +18459,7 @@
             </p:txBody>
           </p:sp>
         </mc:Choice>
-        <mc:Fallback>
+        <mc:Fallback xmlns="">
           <p:sp>
             <p:nvSpPr>
               <p:cNvPr id="32" name="TextBox 31">
@@ -21948,8 +22879,8 @@
           </p:sp>
         </mc:Fallback>
       </mc:AlternateContent>
-      <mc:AlternateContent xmlns:mc="http://schemas.openxmlformats.org/markup-compatibility/2006">
-        <mc:Choice xmlns:a14="http://schemas.microsoft.com/office/drawing/2010/main" Requires="a14">
+      <mc:AlternateContent xmlns:mc="http://schemas.openxmlformats.org/markup-compatibility/2006" xmlns:a14="http://schemas.microsoft.com/office/drawing/2010/main">
+        <mc:Choice Requires="a14">
           <p:sp>
             <p:nvSpPr>
               <p:cNvPr id="26" name="TextBox 25">
@@ -22101,7 +23032,7 @@
             </p:txBody>
           </p:sp>
         </mc:Choice>
-        <mc:Fallback>
+        <mc:Fallback xmlns="">
           <p:sp>
             <p:nvSpPr>
               <p:cNvPr id="26" name="TextBox 25">
@@ -23968,12 +24899,14 @@
         </p:nvSpPr>
         <p:spPr/>
         <p:txBody>
-          <a:bodyPr/>
+          <a:bodyPr>
+            <a:normAutofit/>
+          </a:bodyPr>
           <a:lstStyle/>
           <a:p>
             <a:r>
               <a:rPr lang="en-US" dirty="0"/>
-              <a:t>Convergence Guarantee</a:t>
+              <a:t>Error Reduction Property and Convergence</a:t>
             </a:r>
           </a:p>
         </p:txBody>
@@ -23999,7 +24932,7 @@
             <p:spPr>
               <a:xfrm>
                 <a:off x="770466" y="3606799"/>
-                <a:ext cx="10515600" cy="2844801"/>
+                <a:ext cx="10515600" cy="1888979"/>
               </a:xfrm>
             </p:spPr>
             <p:txBody>
@@ -24012,19 +24945,19 @@
                   <a:buNone/>
                 </a:pPr>
                 <a:r>
-                  <a:rPr lang="en-US" sz="2000" b="1" dirty="0"/>
+                  <a:rPr lang="en-US" sz="1800" b="1" dirty="0"/>
                   <a:t>Explanation</a:t>
                 </a:r>
                 <a:r>
-                  <a:rPr lang="en-US" sz="2000" dirty="0"/>
-                  <a:t>: </a:t>
+                  <a:rPr lang="en-US" sz="1800" dirty="0"/>
+                  <a:t> 	</a:t>
                 </a:r>
                 <a14:m>
                   <m:oMath xmlns:m="http://schemas.openxmlformats.org/officeDocument/2006/math">
                     <m:sSub>
                       <m:sSubPr>
                         <m:ctrlPr>
-                          <a:rPr lang="en-US" sz="2000" i="1">
+                          <a:rPr lang="en-US" sz="1800" i="1">
                             <a:latin typeface="Cambria Math" panose="02040503050406030204" pitchFamily="18" charset="0"/>
                             <a:ea typeface="Cambria Math" panose="02040503050406030204" pitchFamily="18" charset="0"/>
                           </a:rPr>
@@ -24032,7 +24965,7 @@
                       </m:sSubPr>
                       <m:e>
                         <m:r>
-                          <a:rPr lang="en-US" sz="2000" i="1">
+                          <a:rPr lang="en-US" sz="1800" i="1">
                             <a:latin typeface="Cambria Math" panose="02040503050406030204" pitchFamily="18" charset="0"/>
                             <a:ea typeface="Cambria Math" panose="02040503050406030204" pitchFamily="18" charset="0"/>
                           </a:rPr>
@@ -24041,35 +24974,35 @@
                       </m:e>
                       <m:sub>
                         <m:r>
-                          <a:rPr lang="en-US" sz="2000" i="1">
+                          <a:rPr lang="en-US" sz="1800" i="1">
                             <a:latin typeface="Cambria Math" panose="02040503050406030204" pitchFamily="18" charset="0"/>
                             <a:ea typeface="Cambria Math" panose="02040503050406030204" pitchFamily="18" charset="0"/>
                           </a:rPr>
                           <m:t>𝑡</m:t>
                         </m:r>
                         <m:r>
-                          <a:rPr lang="en-US" sz="2000" i="1">
+                          <a:rPr lang="en-US" sz="1800" i="1">
                             <a:latin typeface="Cambria Math" panose="02040503050406030204" pitchFamily="18" charset="0"/>
                             <a:ea typeface="Cambria Math" panose="02040503050406030204" pitchFamily="18" charset="0"/>
                           </a:rPr>
                           <m:t>:</m:t>
                         </m:r>
                         <m:r>
-                          <a:rPr lang="en-US" sz="2000" i="1">
+                          <a:rPr lang="en-US" sz="1800" i="1">
                             <a:latin typeface="Cambria Math" panose="02040503050406030204" pitchFamily="18" charset="0"/>
                             <a:ea typeface="Cambria Math" panose="02040503050406030204" pitchFamily="18" charset="0"/>
                           </a:rPr>
                           <m:t>𝑡</m:t>
                         </m:r>
                         <m:r>
-                          <a:rPr lang="en-US" sz="2000" i="1">
+                          <a:rPr lang="en-US" sz="1800" i="1">
                             <a:latin typeface="Cambria Math" panose="02040503050406030204" pitchFamily="18" charset="0"/>
                             <a:ea typeface="Cambria Math" panose="02040503050406030204" pitchFamily="18" charset="0"/>
                           </a:rPr>
                           <m:t>+</m:t>
                         </m:r>
                         <m:r>
-                          <a:rPr lang="en-US" sz="2000" i="1">
+                          <a:rPr lang="en-US" sz="1800" i="1">
                             <a:latin typeface="Cambria Math" panose="02040503050406030204" pitchFamily="18" charset="0"/>
                             <a:ea typeface="Cambria Math" panose="02040503050406030204" pitchFamily="18" charset="0"/>
                           </a:rPr>
@@ -24078,7 +25011,7 @@
                       </m:sub>
                     </m:sSub>
                     <m:r>
-                      <a:rPr lang="en-US" sz="2000" i="1">
+                      <a:rPr lang="en-US" sz="1800" i="1">
                         <a:latin typeface="Cambria Math" panose="02040503050406030204" pitchFamily="18" charset="0"/>
                       </a:rPr>
                       <m:t>=</m:t>
@@ -24086,14 +25019,14 @@
                     <m:sSub>
                       <m:sSubPr>
                         <m:ctrlPr>
-                          <a:rPr lang="en-US" sz="2000" i="1">
+                          <a:rPr lang="en-US" sz="1800" i="1">
                             <a:latin typeface="Cambria Math" panose="02040503050406030204" pitchFamily="18" charset="0"/>
                           </a:rPr>
                         </m:ctrlPr>
                       </m:sSubPr>
                       <m:e>
                         <m:r>
-                          <a:rPr lang="en-US" sz="2000" i="1">
+                          <a:rPr lang="en-US" sz="1800" i="1">
                             <a:latin typeface="Cambria Math" panose="02040503050406030204" pitchFamily="18" charset="0"/>
                           </a:rPr>
                           <m:t>𝑅</m:t>
@@ -24101,13 +25034,13 @@
                       </m:e>
                       <m:sub>
                         <m:r>
-                          <a:rPr lang="en-US" sz="2000" i="1">
+                          <a:rPr lang="en-US" sz="1800" i="1">
                             <a:latin typeface="Cambria Math" panose="02040503050406030204" pitchFamily="18" charset="0"/>
                           </a:rPr>
                           <m:t>𝑡</m:t>
                         </m:r>
                         <m:r>
-                          <a:rPr lang="en-US" sz="2000" i="1">
+                          <a:rPr lang="en-US" sz="1800" i="1">
                             <a:latin typeface="Cambria Math" panose="02040503050406030204" pitchFamily="18" charset="0"/>
                           </a:rPr>
                           <m:t>+1</m:t>
@@ -24115,13 +25048,13 @@
                       </m:sub>
                     </m:sSub>
                     <m:r>
-                      <a:rPr lang="en-US" sz="2000" i="1">
+                      <a:rPr lang="en-US" sz="1800" i="1">
                         <a:latin typeface="Cambria Math" panose="02040503050406030204" pitchFamily="18" charset="0"/>
                       </a:rPr>
                       <m:t>+</m:t>
                     </m:r>
                     <m:r>
-                      <a:rPr lang="en-US" sz="2000" i="1">
+                      <a:rPr lang="en-US" sz="1800" i="1">
                         <a:latin typeface="Cambria Math" panose="02040503050406030204" pitchFamily="18" charset="0"/>
                       </a:rPr>
                       <m:t>𝛾</m:t>
@@ -24129,14 +25062,14 @@
                     <m:sSub>
                       <m:sSubPr>
                         <m:ctrlPr>
-                          <a:rPr lang="en-US" sz="2000" i="1">
+                          <a:rPr lang="en-US" sz="1800" i="1">
                             <a:latin typeface="Cambria Math" panose="02040503050406030204" pitchFamily="18" charset="0"/>
                           </a:rPr>
                         </m:ctrlPr>
                       </m:sSubPr>
                       <m:e>
                         <m:r>
-                          <a:rPr lang="en-US" sz="2000" i="1">
+                          <a:rPr lang="en-US" sz="1800" i="1">
                             <a:latin typeface="Cambria Math" panose="02040503050406030204" pitchFamily="18" charset="0"/>
                           </a:rPr>
                           <m:t>𝑅</m:t>
@@ -24144,13 +25077,13 @@
                       </m:e>
                       <m:sub>
                         <m:r>
-                          <a:rPr lang="en-US" sz="2000" i="1">
+                          <a:rPr lang="en-US" sz="1800" i="1">
                             <a:latin typeface="Cambria Math" panose="02040503050406030204" pitchFamily="18" charset="0"/>
                           </a:rPr>
                           <m:t>𝑡</m:t>
                         </m:r>
                         <m:r>
-                          <a:rPr lang="en-US" sz="2000" i="1">
+                          <a:rPr lang="en-US" sz="1800" i="1">
                             <a:latin typeface="Cambria Math" panose="02040503050406030204" pitchFamily="18" charset="0"/>
                           </a:rPr>
                           <m:t>+2</m:t>
@@ -24158,7 +25091,7 @@
                       </m:sub>
                     </m:sSub>
                     <m:r>
-                      <a:rPr lang="en-US" sz="2000" i="1">
+                      <a:rPr lang="en-US" sz="1800" i="1">
                         <a:latin typeface="Cambria Math" panose="02040503050406030204" pitchFamily="18" charset="0"/>
                       </a:rPr>
                       <m:t>+…+</m:t>
@@ -24166,14 +25099,14 @@
                     <m:sSup>
                       <m:sSupPr>
                         <m:ctrlPr>
-                          <a:rPr lang="en-US" sz="2000" i="1">
+                          <a:rPr lang="en-US" sz="1800" i="1">
                             <a:latin typeface="Cambria Math" panose="02040503050406030204" pitchFamily="18" charset="0"/>
                           </a:rPr>
                         </m:ctrlPr>
                       </m:sSupPr>
                       <m:e>
                         <m:r>
-                          <a:rPr lang="en-US" sz="2000" i="1">
+                          <a:rPr lang="en-US" sz="1800" i="1">
                             <a:latin typeface="Cambria Math" panose="02040503050406030204" pitchFamily="18" charset="0"/>
                           </a:rPr>
                           <m:t>𝛾</m:t>
@@ -24181,13 +25114,13 @@
                       </m:e>
                       <m:sup>
                         <m:r>
-                          <a:rPr lang="en-US" sz="2000" i="1">
+                          <a:rPr lang="en-US" sz="1800" i="1">
                             <a:latin typeface="Cambria Math" panose="02040503050406030204" pitchFamily="18" charset="0"/>
                           </a:rPr>
                           <m:t>𝑛</m:t>
                         </m:r>
                         <m:r>
-                          <a:rPr lang="en-US" sz="2000" i="1">
+                          <a:rPr lang="en-US" sz="1800" i="1">
                             <a:latin typeface="Cambria Math" panose="02040503050406030204" pitchFamily="18" charset="0"/>
                           </a:rPr>
                           <m:t>−1</m:t>
@@ -24197,14 +25130,14 @@
                     <m:sSub>
                       <m:sSubPr>
                         <m:ctrlPr>
-                          <a:rPr lang="en-US" sz="2000" i="1">
+                          <a:rPr lang="en-US" sz="1800" i="1">
                             <a:latin typeface="Cambria Math" panose="02040503050406030204" pitchFamily="18" charset="0"/>
                           </a:rPr>
                         </m:ctrlPr>
                       </m:sSubPr>
                       <m:e>
                         <m:r>
-                          <a:rPr lang="en-US" sz="2000" i="1">
+                          <a:rPr lang="en-US" sz="1800" i="1">
                             <a:latin typeface="Cambria Math" panose="02040503050406030204" pitchFamily="18" charset="0"/>
                           </a:rPr>
                           <m:t>𝑅</m:t>
@@ -24212,19 +25145,19 @@
                       </m:e>
                       <m:sub>
                         <m:r>
-                          <a:rPr lang="en-US" sz="2000" i="1">
+                          <a:rPr lang="en-US" sz="1800" i="1">
                             <a:latin typeface="Cambria Math" panose="02040503050406030204" pitchFamily="18" charset="0"/>
                           </a:rPr>
                           <m:t>𝑡</m:t>
                         </m:r>
                         <m:r>
-                          <a:rPr lang="en-US" sz="2000" i="1">
+                          <a:rPr lang="en-US" sz="1800" i="1">
                             <a:latin typeface="Cambria Math" panose="02040503050406030204" pitchFamily="18" charset="0"/>
                           </a:rPr>
                           <m:t>+</m:t>
                         </m:r>
                         <m:r>
-                          <a:rPr lang="en-US" sz="2000" i="1">
+                          <a:rPr lang="en-US" sz="1800" i="1">
                             <a:latin typeface="Cambria Math" panose="02040503050406030204" pitchFamily="18" charset="0"/>
                           </a:rPr>
                           <m:t>𝑛</m:t>
@@ -24232,7 +25165,7 @@
                       </m:sub>
                     </m:sSub>
                     <m:r>
-                      <a:rPr lang="en-US" sz="2000" i="1">
+                      <a:rPr lang="en-US" sz="1800" i="1">
                         <a:latin typeface="Cambria Math" panose="02040503050406030204" pitchFamily="18" charset="0"/>
                       </a:rPr>
                       <m:t>+</m:t>
@@ -24240,14 +25173,14 @@
                     <m:sSup>
                       <m:sSupPr>
                         <m:ctrlPr>
-                          <a:rPr lang="en-US" sz="2000" i="1">
+                          <a:rPr lang="en-US" sz="1800" i="1">
                             <a:latin typeface="Cambria Math" panose="02040503050406030204" pitchFamily="18" charset="0"/>
                           </a:rPr>
                         </m:ctrlPr>
                       </m:sSupPr>
                       <m:e>
                         <m:r>
-                          <a:rPr lang="en-US" sz="2000" i="1">
+                          <a:rPr lang="en-US" sz="1800" i="1">
                             <a:latin typeface="Cambria Math" panose="02040503050406030204" pitchFamily="18" charset="0"/>
                           </a:rPr>
                           <m:t>𝛾</m:t>
@@ -24255,7 +25188,7 @@
                       </m:e>
                       <m:sup>
                         <m:r>
-                          <a:rPr lang="en-US" sz="2000" i="1">
+                          <a:rPr lang="en-US" sz="1800" i="1">
                             <a:latin typeface="Cambria Math" panose="02040503050406030204" pitchFamily="18" charset="0"/>
                           </a:rPr>
                           <m:t>𝑛</m:t>
@@ -24263,7 +25196,7 @@
                       </m:sup>
                     </m:sSup>
                     <m:r>
-                      <a:rPr lang="en-US" sz="2000" i="1">
+                      <a:rPr lang="en-US" sz="1800" i="1">
                         <a:latin typeface="Cambria Math" panose="02040503050406030204" pitchFamily="18" charset="0"/>
                       </a:rPr>
                       <m:t>𝑉</m:t>
@@ -24271,7 +25204,7 @@
                     <m:d>
                       <m:dPr>
                         <m:ctrlPr>
-                          <a:rPr lang="en-US" sz="2000" i="1">
+                          <a:rPr lang="en-US" sz="1800" i="1">
                             <a:latin typeface="Cambria Math" panose="02040503050406030204" pitchFamily="18" charset="0"/>
                           </a:rPr>
                         </m:ctrlPr>
@@ -24280,14 +25213,14 @@
                         <m:sSub>
                           <m:sSubPr>
                             <m:ctrlPr>
-                              <a:rPr lang="en-US" sz="2000" i="1">
+                              <a:rPr lang="en-US" sz="1800" i="1">
                                 <a:latin typeface="Cambria Math" panose="02040503050406030204" pitchFamily="18" charset="0"/>
                               </a:rPr>
                             </m:ctrlPr>
                           </m:sSubPr>
                           <m:e>
                             <m:r>
-                              <a:rPr lang="en-US" sz="2000" i="1">
+                              <a:rPr lang="en-US" sz="1800" i="1">
                                 <a:latin typeface="Cambria Math" panose="02040503050406030204" pitchFamily="18" charset="0"/>
                               </a:rPr>
                               <m:t>𝑆</m:t>
@@ -24295,19 +25228,19 @@
                           </m:e>
                           <m:sub>
                             <m:r>
-                              <a:rPr lang="en-US" sz="2000" i="1">
+                              <a:rPr lang="en-US" sz="1800" i="1">
                                 <a:latin typeface="Cambria Math" panose="02040503050406030204" pitchFamily="18" charset="0"/>
                               </a:rPr>
                               <m:t>𝑡</m:t>
                             </m:r>
                             <m:r>
-                              <a:rPr lang="en-US" sz="2000" i="1">
+                              <a:rPr lang="en-US" sz="1800" i="1">
                                 <a:latin typeface="Cambria Math" panose="02040503050406030204" pitchFamily="18" charset="0"/>
                               </a:rPr>
                               <m:t>+</m:t>
                             </m:r>
                             <m:r>
-                              <a:rPr lang="en-US" sz="2000" i="1">
+                              <a:rPr lang="en-US" sz="1800" i="1">
                                 <a:latin typeface="Cambria Math" panose="02040503050406030204" pitchFamily="18" charset="0"/>
                               </a:rPr>
                               <m:t>𝑛</m:t>
@@ -24318,25 +25251,23 @@
                     </m:d>
                   </m:oMath>
                 </a14:m>
-                <a:endParaRPr lang="en-US" sz="2000" dirty="0"/>
+                <a:endParaRPr lang="en-US" sz="1800" dirty="0"/>
               </a:p>
               <a:p>
-                <a:pPr lvl="1"/>
-                <a:r>
-                  <a:rPr lang="en-US" sz="1600" dirty="0"/>
-                  <a:t>Observed rewards have in expectation no error.</a:t>
+                <a:r>
+                  <a:rPr lang="en-US" sz="1800" dirty="0"/>
+                  <a:t>The averages of observed rewards have in expectation no error (are unbiased).</a:t>
                 </a:r>
               </a:p>
               <a:p>
-                <a:pPr lvl="1"/>
-                <a:r>
-                  <a:rPr lang="en-US" sz="1600" dirty="0"/>
-                  <a:t>The error-prone bootstrap estimate is smaller because it is </a:t>
+                <a:r>
+                  <a:rPr lang="en-US" sz="1800" dirty="0"/>
+                  <a:t>The impact of the error-prone bootstrap estimate is smaller because it is </a:t>
                 </a:r>
                 <a14:m>
                   <m:oMath xmlns:m="http://schemas.openxmlformats.org/officeDocument/2006/math">
                     <m:r>
-                      <a:rPr lang="en-US" sz="1600" b="0" i="1" smtClean="0">
+                      <a:rPr lang="en-US" sz="1800" b="0" i="1" smtClean="0">
                         <a:latin typeface="Cambria Math" panose="02040503050406030204" pitchFamily="18" charset="0"/>
                       </a:rPr>
                       <m:t>𝑛</m:t>
@@ -24344,80 +25275,61 @@
                   </m:oMath>
                 </a14:m>
                 <a:r>
-                  <a:rPr lang="en-US" sz="1600" dirty="0"/>
-                  <a:t> time steps away and thus discounted.</a:t>
+                  <a:rPr lang="en-US" sz="1800" dirty="0"/>
+                  <a:t> time steps away and thus discounted by </a:t>
+                </a:r>
+                <a14:m>
+                  <m:oMath xmlns:m="http://schemas.openxmlformats.org/officeDocument/2006/math">
+                    <m:sSup>
+                      <m:sSupPr>
+                        <m:ctrlPr>
+                          <a:rPr lang="en-US" sz="1800" b="0" i="1" smtClean="0">
+                            <a:latin typeface="Cambria Math" panose="02040503050406030204" pitchFamily="18" charset="0"/>
+                          </a:rPr>
+                        </m:ctrlPr>
+                      </m:sSupPr>
+                      <m:e>
+                        <m:r>
+                          <a:rPr lang="en-US" sz="1800" b="0" i="1" smtClean="0">
+                            <a:latin typeface="Cambria Math" panose="02040503050406030204" pitchFamily="18" charset="0"/>
+                          </a:rPr>
+                          <m:t>𝛾</m:t>
+                        </m:r>
+                      </m:e>
+                      <m:sup>
+                        <m:r>
+                          <a:rPr lang="en-US" sz="1800" b="0" i="1" smtClean="0">
+                            <a:latin typeface="Cambria Math" panose="02040503050406030204" pitchFamily="18" charset="0"/>
+                          </a:rPr>
+                          <m:t>𝑛</m:t>
+                        </m:r>
+                      </m:sup>
+                    </m:sSup>
+                  </m:oMath>
+                </a14:m>
+                <a:r>
+                  <a:rPr lang="en-US" sz="1800" dirty="0"/>
+                  <a:t> (related to </a:t>
+                </a:r>
+                <a14:m>
+                  <m:oMath xmlns:m="http://schemas.openxmlformats.org/officeDocument/2006/math">
+                    <m:r>
+                      <a:rPr lang="en-US" sz="1800" b="0" i="1" smtClean="0">
+                        <a:latin typeface="Cambria Math" panose="02040503050406030204" pitchFamily="18" charset="0"/>
+                      </a:rPr>
+                      <m:t>𝛾</m:t>
+                    </m:r>
+                  </m:oMath>
+                </a14:m>
+                <a:r>
+                  <a:rPr lang="en-US" sz="1800" dirty="0"/>
+                  <a:t>-contracting property of Bellman updates).</a:t>
                 </a:r>
               </a:p>
               <a:p>
-                <a:pPr lvl="1"/>
-                <a:r>
-                  <a:rPr lang="en-US" sz="1600" dirty="0"/>
-                  <a:t>Increasing </a:t>
-                </a:r>
-                <a14:m>
-                  <m:oMath xmlns:m="http://schemas.openxmlformats.org/officeDocument/2006/math">
-                    <m:r>
-                      <a:rPr lang="en-US" sz="1600" b="0" i="1" smtClean="0">
-                        <a:latin typeface="Cambria Math" panose="02040503050406030204" pitchFamily="18" charset="0"/>
-                      </a:rPr>
-                      <m:t>𝑛</m:t>
-                    </m:r>
-                  </m:oMath>
-                </a14:m>
-                <a:r>
-                  <a:rPr lang="en-US" sz="1600" dirty="0"/>
-                  <a:t> adds more observed rewards decreases the impact of the bootstrapping error. </a:t>
-                </a:r>
-              </a:p>
-              <a:p>
-                <a:pPr marL="0" indent="0" algn="ctr">
-                  <a:buNone/>
-                </a:pPr>
-                <a:endParaRPr lang="en-US" sz="2000" dirty="0"/>
-              </a:p>
-              <a:p>
-                <a:pPr marL="0" indent="0">
-                  <a:buNone/>
-                </a:pPr>
-                <a:r>
-                  <a:rPr lang="en-US" sz="2000" b="1" dirty="0"/>
-                  <a:t>Note</a:t>
-                </a:r>
-                <a:r>
-                  <a:rPr lang="en-US" sz="2000" dirty="0"/>
-                  <a:t>: This also means that every update is guaranteed to reduce the expected error and moves the estimate closer to the true value function. </a:t>
-                </a:r>
-                <a:br>
-                  <a:rPr lang="en-US" sz="2000" dirty="0"/>
-                </a:br>
-                <a:br>
-                  <a:rPr lang="en-US" sz="2000" dirty="0"/>
-                </a:br>
-                <a:r>
-                  <a:rPr lang="en-US" sz="2000" dirty="0"/>
-                  <a:t>		</a:t>
-                </a:r>
-                <a:r>
-                  <a:rPr lang="en-US" sz="2000" b="1" dirty="0"/>
-                  <a:t>All </a:t>
-                </a:r>
-                <a14:m>
-                  <m:oMath xmlns:m="http://schemas.openxmlformats.org/officeDocument/2006/math">
-                    <m:r>
-                      <a:rPr lang="en-US" sz="2000" b="1" i="1" dirty="0">
-                        <a:latin typeface="Cambria Math" panose="02040503050406030204" pitchFamily="18" charset="0"/>
-                      </a:rPr>
-                      <m:t>𝒏</m:t>
-                    </m:r>
-                  </m:oMath>
-                </a14:m>
-                <a:r>
-                  <a:rPr lang="en-US" sz="2000" b="1" dirty="0"/>
-                  <a:t>-step methods (including 1-step and MC) converge</a:t>
-                </a:r>
-                <a:r>
-                  <a:rPr lang="en-US" sz="2000" dirty="0"/>
-                  <a:t>!</a:t>
+                <a:r>
+                  <a:rPr lang="en-US" sz="1800" dirty="0"/>
+                  <a:t>Expectation just means we need many estimates (= use many episodes)</a:t>
                 </a:r>
               </a:p>
             </p:txBody>
@@ -24443,12 +25355,12 @@
             <p:spPr>
               <a:xfrm>
                 <a:off x="770466" y="3606799"/>
-                <a:ext cx="10515600" cy="2844801"/>
+                <a:ext cx="10515600" cy="1888979"/>
               </a:xfrm>
               <a:blipFill>
                 <a:blip r:embed="rId2"/>
                 <a:stretch>
-                  <a:fillRect l="-580" t="-2146" r="-986" b="-4077"/>
+                  <a:fillRect l="-464" t="-2903"/>
                 </a:stretch>
               </a:blipFill>
             </p:spPr>
@@ -24483,8 +25395,8 @@
             </p:nvSpPr>
             <p:spPr>
               <a:xfrm>
-                <a:off x="2142066" y="1252872"/>
-                <a:ext cx="7467483" cy="2033827"/>
+                <a:off x="2072082" y="1252872"/>
+                <a:ext cx="7743038" cy="2033827"/>
               </a:xfrm>
               <a:prstGeom prst="rect">
                 <a:avLst/>
@@ -24540,69 +25452,7 @@
               <a:p>
                 <a:r>
                   <a:rPr lang="en-US" sz="2000" dirty="0"/>
-                  <a:t>The worst error of the expected </a:t>
-                </a:r>
-                <a14:m>
-                  <m:oMath xmlns:m="http://schemas.openxmlformats.org/officeDocument/2006/math">
-                    <m:r>
-                      <a:rPr lang="en-US" sz="2000" i="1" dirty="0" smtClean="0">
-                        <a:latin typeface="Cambria Math" panose="02040503050406030204" pitchFamily="18" charset="0"/>
-                      </a:rPr>
-                      <m:t>𝑛</m:t>
-                    </m:r>
-                  </m:oMath>
-                </a14:m>
-                <a:r>
-                  <a:rPr lang="en-US" sz="2000" dirty="0"/>
-                  <a:t>-step return is guaranteed to be less than or equal to </a:t>
-                </a:r>
-                <a14:m>
-                  <m:oMath xmlns:m="http://schemas.openxmlformats.org/officeDocument/2006/math">
-                    <m:sSup>
-                      <m:sSupPr>
-                        <m:ctrlPr>
-                          <a:rPr lang="en-US" sz="2000" b="0" i="1" smtClean="0">
-                            <a:latin typeface="Cambria Math" panose="02040503050406030204" pitchFamily="18" charset="0"/>
-                          </a:rPr>
-                        </m:ctrlPr>
-                      </m:sSupPr>
-                      <m:e>
-                        <m:r>
-                          <a:rPr lang="en-US" sz="2000" b="0" i="1" smtClean="0">
-                            <a:latin typeface="Cambria Math" panose="02040503050406030204" pitchFamily="18" charset="0"/>
-                          </a:rPr>
-                          <m:t>𝛾</m:t>
-                        </m:r>
-                      </m:e>
-                      <m:sup>
-                        <m:r>
-                          <a:rPr lang="en-US" sz="2000" b="0" i="1" smtClean="0">
-                            <a:latin typeface="Cambria Math" panose="02040503050406030204" pitchFamily="18" charset="0"/>
-                          </a:rPr>
-                          <m:t>𝑛</m:t>
-                        </m:r>
-                      </m:sup>
-                    </m:sSup>
-                  </m:oMath>
-                </a14:m>
-                <a:r>
-                  <a:rPr lang="en-US" sz="2000" dirty="0"/>
-                  <a:t> times the worst error of using </a:t>
-                </a:r>
-                <a14:m>
-                  <m:oMath xmlns:m="http://schemas.openxmlformats.org/officeDocument/2006/math">
-                    <m:r>
-                      <a:rPr lang="en-US" sz="2000" b="0" i="1" smtClean="0">
-                        <a:latin typeface="Cambria Math" panose="02040503050406030204" pitchFamily="18" charset="0"/>
-                        <a:ea typeface="Cambria Math" panose="02040503050406030204" pitchFamily="18" charset="0"/>
-                      </a:rPr>
-                      <m:t>𝑉</m:t>
-                    </m:r>
-                  </m:oMath>
-                </a14:m>
-                <a:r>
-                  <a:rPr lang="en-US" sz="2000" dirty="0"/>
-                  <a:t>.</a:t>
+                  <a:t>The expected value of n-step returns is always better than the current approximation (for the worst state).</a:t>
                 </a:r>
               </a:p>
               <a:p>
@@ -24659,7 +25509,7 @@
                               <m:begChr m:val="|"/>
                               <m:endChr m:val="|"/>
                               <m:ctrlPr>
-                                <a:rPr lang="en-US" sz="2000" b="0" i="1" smtClean="0">
+                                <a:rPr lang="en-US" sz="2000" i="1" smtClean="0">
                                   <a:latin typeface="Cambria Math" panose="02040503050406030204" pitchFamily="18" charset="0"/>
                                   <a:ea typeface="Cambria Math" panose="02040503050406030204" pitchFamily="18" charset="0"/>
                                 </a:rPr>
@@ -25059,8 +25909,8 @@
             </p:nvSpPr>
             <p:spPr>
               <a:xfrm>
-                <a:off x="2142066" y="1252872"/>
-                <a:ext cx="7467483" cy="2033827"/>
+                <a:off x="2072082" y="1252872"/>
+                <a:ext cx="7743038" cy="2033827"/>
               </a:xfrm>
               <a:prstGeom prst="rect">
                 <a:avLst/>
@@ -25068,7 +25918,121 @@
               <a:blipFill>
                 <a:blip r:embed="rId3"/>
                 <a:stretch>
-                  <a:fillRect l="-733" t="-1190"/>
+                  <a:fillRect l="-786" t="-1190" r="-943"/>
+                </a:stretch>
+              </a:blipFill>
+            </p:spPr>
+            <p:txBody>
+              <a:bodyPr/>
+              <a:lstStyle/>
+              <a:p>
+                <a:r>
+                  <a:rPr lang="en-US">
+                    <a:noFill/>
+                  </a:rPr>
+                  <a:t> </a:t>
+                </a:r>
+              </a:p>
+            </p:txBody>
+          </p:sp>
+        </mc:Fallback>
+      </mc:AlternateContent>
+      <mc:AlternateContent xmlns:mc="http://schemas.openxmlformats.org/markup-compatibility/2006" xmlns:a14="http://schemas.microsoft.com/office/drawing/2010/main">
+        <mc:Choice Requires="a14">
+          <p:sp>
+            <p:nvSpPr>
+              <p:cNvPr id="6" name="TextBox 5">
+                <a:extLst>
+                  <a:ext uri="{FF2B5EF4-FFF2-40B4-BE49-F238E27FC236}">
+                    <a16:creationId xmlns:a16="http://schemas.microsoft.com/office/drawing/2014/main" id="{9D5E86A9-F4CE-EE45-120B-538532B55D95}"/>
+                  </a:ext>
+                </a:extLst>
+              </p:cNvPr>
+              <p:cNvSpPr txBox="1"/>
+              <p:nvPr/>
+            </p:nvSpPr>
+            <p:spPr>
+              <a:xfrm>
+                <a:off x="2072082" y="5689862"/>
+                <a:ext cx="7743038" cy="400110"/>
+              </a:xfrm>
+              <a:prstGeom prst="rect">
+                <a:avLst/>
+              </a:prstGeom>
+            </p:spPr>
+            <p:style>
+              <a:lnRef idx="2">
+                <a:schemeClr val="accent2">
+                  <a:shade val="15000"/>
+                </a:schemeClr>
+              </a:lnRef>
+              <a:fillRef idx="1">
+                <a:schemeClr val="accent2"/>
+              </a:fillRef>
+              <a:effectRef idx="0">
+                <a:schemeClr val="accent2"/>
+              </a:effectRef>
+              <a:fontRef idx="minor">
+                <a:schemeClr val="lt1"/>
+              </a:fontRef>
+            </p:style>
+            <p:txBody>
+              <a:bodyPr wrap="square">
+                <a:spAutoFit/>
+              </a:bodyPr>
+              <a:lstStyle/>
+              <a:p>
+                <a:pPr algn="ctr"/>
+                <a:r>
+                  <a:rPr lang="en-US" sz="2000" dirty="0"/>
+                  <a:t>Implication: All </a:t>
+                </a:r>
+                <a14:m>
+                  <m:oMath xmlns:m="http://schemas.openxmlformats.org/officeDocument/2006/math">
+                    <m:r>
+                      <a:rPr lang="en-US" sz="2000" b="0" i="1" dirty="0">
+                        <a:latin typeface="Cambria Math" panose="02040503050406030204" pitchFamily="18" charset="0"/>
+                      </a:rPr>
+                      <m:t>𝑛</m:t>
+                    </m:r>
+                  </m:oMath>
+                </a14:m>
+                <a:r>
+                  <a:rPr lang="en-US" sz="2000" dirty="0"/>
+                  <a:t>-step methods (including 1-step and MC) converge!</a:t>
+                </a:r>
+                <a:endParaRPr lang="en-US" dirty="0"/>
+              </a:p>
+            </p:txBody>
+          </p:sp>
+        </mc:Choice>
+        <mc:Fallback xmlns="">
+          <p:sp>
+            <p:nvSpPr>
+              <p:cNvPr id="6" name="TextBox 5">
+                <a:extLst>
+                  <a:ext uri="{FF2B5EF4-FFF2-40B4-BE49-F238E27FC236}">
+                    <a16:creationId xmlns:a16="http://schemas.microsoft.com/office/drawing/2014/main" id="{9D5E86A9-F4CE-EE45-120B-538532B55D95}"/>
+                  </a:ext>
+                </a:extLst>
+              </p:cNvPr>
+              <p:cNvSpPr txBox="1">
+                <a:spLocks noRot="1" noChangeAspect="1" noMove="1" noResize="1" noEditPoints="1" noAdjustHandles="1" noChangeArrowheads="1" noChangeShapeType="1" noTextEdit="1"/>
+              </p:cNvSpPr>
+              <p:nvPr/>
+            </p:nvSpPr>
+            <p:spPr>
+              <a:xfrm>
+                <a:off x="2072082" y="5689862"/>
+                <a:ext cx="7743038" cy="400110"/>
+              </a:xfrm>
+              <a:prstGeom prst="rect">
+                <a:avLst/>
+              </a:prstGeom>
+              <a:blipFill>
+                <a:blip r:embed="rId4"/>
+                <a:stretch>
+                  <a:fillRect t="-4348" b="-23188"/>
                 </a:stretch>
               </a:blipFill>
             </p:spPr>
@@ -25097,6 +26061,280 @@
   <p:clrMapOvr>
     <a:masterClrMapping/>
   </p:clrMapOvr>
+  <p:timing>
+    <p:tnLst>
+      <p:par>
+        <p:cTn id="1" dur="indefinite" restart="never" nodeType="tmRoot">
+          <p:childTnLst>
+            <p:seq concurrent="1" nextAc="seek">
+              <p:cTn id="2" dur="indefinite" nodeType="mainSeq">
+                <p:childTnLst>
+                  <p:par>
+                    <p:cTn id="3" fill="hold">
+                      <p:stCondLst>
+                        <p:cond delay="indefinite"/>
+                      </p:stCondLst>
+                      <p:childTnLst>
+                        <p:par>
+                          <p:cTn id="4" fill="hold">
+                            <p:stCondLst>
+                              <p:cond delay="0"/>
+                            </p:stCondLst>
+                            <p:childTnLst>
+                              <p:par>
+                                <p:cTn id="5" presetID="1" presetClass="entr" presetSubtype="0" fill="hold" nodeType="clickEffect">
+                                  <p:stCondLst>
+                                    <p:cond delay="0"/>
+                                  </p:stCondLst>
+                                  <p:childTnLst>
+                                    <p:set>
+                                      <p:cBhvr>
+                                        <p:cTn id="6" dur="1" fill="hold">
+                                          <p:stCondLst>
+                                            <p:cond delay="0"/>
+                                          </p:stCondLst>
+                                        </p:cTn>
+                                        <p:tgtEl>
+                                          <p:spTgt spid="3">
+                                            <p:txEl>
+                                              <p:pRg st="0" end="0"/>
+                                            </p:txEl>
+                                          </p:spTgt>
+                                        </p:tgtEl>
+                                        <p:attrNameLst>
+                                          <p:attrName>style.visibility</p:attrName>
+                                        </p:attrNameLst>
+                                      </p:cBhvr>
+                                      <p:to>
+                                        <p:strVal val="visible"/>
+                                      </p:to>
+                                    </p:set>
+                                  </p:childTnLst>
+                                </p:cTn>
+                              </p:par>
+                            </p:childTnLst>
+                          </p:cTn>
+                        </p:par>
+                      </p:childTnLst>
+                    </p:cTn>
+                  </p:par>
+                  <p:par>
+                    <p:cTn id="7" fill="hold">
+                      <p:stCondLst>
+                        <p:cond delay="indefinite"/>
+                      </p:stCondLst>
+                      <p:childTnLst>
+                        <p:par>
+                          <p:cTn id="8" fill="hold">
+                            <p:stCondLst>
+                              <p:cond delay="0"/>
+                            </p:stCondLst>
+                            <p:childTnLst>
+                              <p:par>
+                                <p:cTn id="9" presetID="1" presetClass="entr" presetSubtype="0" fill="hold" nodeType="clickEffect">
+                                  <p:stCondLst>
+                                    <p:cond delay="0"/>
+                                  </p:stCondLst>
+                                  <p:childTnLst>
+                                    <p:set>
+                                      <p:cBhvr>
+                                        <p:cTn id="10" dur="1" fill="hold">
+                                          <p:stCondLst>
+                                            <p:cond delay="0"/>
+                                          </p:stCondLst>
+                                        </p:cTn>
+                                        <p:tgtEl>
+                                          <p:spTgt spid="3">
+                                            <p:txEl>
+                                              <p:pRg st="1" end="1"/>
+                                            </p:txEl>
+                                          </p:spTgt>
+                                        </p:tgtEl>
+                                        <p:attrNameLst>
+                                          <p:attrName>style.visibility</p:attrName>
+                                        </p:attrNameLst>
+                                      </p:cBhvr>
+                                      <p:to>
+                                        <p:strVal val="visible"/>
+                                      </p:to>
+                                    </p:set>
+                                  </p:childTnLst>
+                                </p:cTn>
+                              </p:par>
+                            </p:childTnLst>
+                          </p:cTn>
+                        </p:par>
+                      </p:childTnLst>
+                    </p:cTn>
+                  </p:par>
+                  <p:par>
+                    <p:cTn id="11" fill="hold">
+                      <p:stCondLst>
+                        <p:cond delay="indefinite"/>
+                      </p:stCondLst>
+                      <p:childTnLst>
+                        <p:par>
+                          <p:cTn id="12" fill="hold">
+                            <p:stCondLst>
+                              <p:cond delay="0"/>
+                            </p:stCondLst>
+                            <p:childTnLst>
+                              <p:par>
+                                <p:cTn id="13" presetID="1" presetClass="entr" presetSubtype="0" fill="hold" nodeType="clickEffect">
+                                  <p:stCondLst>
+                                    <p:cond delay="0"/>
+                                  </p:stCondLst>
+                                  <p:childTnLst>
+                                    <p:set>
+                                      <p:cBhvr>
+                                        <p:cTn id="14" dur="1" fill="hold">
+                                          <p:stCondLst>
+                                            <p:cond delay="0"/>
+                                          </p:stCondLst>
+                                        </p:cTn>
+                                        <p:tgtEl>
+                                          <p:spTgt spid="3">
+                                            <p:txEl>
+                                              <p:pRg st="2" end="2"/>
+                                            </p:txEl>
+                                          </p:spTgt>
+                                        </p:tgtEl>
+                                        <p:attrNameLst>
+                                          <p:attrName>style.visibility</p:attrName>
+                                        </p:attrNameLst>
+                                      </p:cBhvr>
+                                      <p:to>
+                                        <p:strVal val="visible"/>
+                                      </p:to>
+                                    </p:set>
+                                  </p:childTnLst>
+                                </p:cTn>
+                              </p:par>
+                            </p:childTnLst>
+                          </p:cTn>
+                        </p:par>
+                      </p:childTnLst>
+                    </p:cTn>
+                  </p:par>
+                  <p:par>
+                    <p:cTn id="15" fill="hold">
+                      <p:stCondLst>
+                        <p:cond delay="indefinite"/>
+                      </p:stCondLst>
+                      <p:childTnLst>
+                        <p:par>
+                          <p:cTn id="16" fill="hold">
+                            <p:stCondLst>
+                              <p:cond delay="0"/>
+                            </p:stCondLst>
+                            <p:childTnLst>
+                              <p:par>
+                                <p:cTn id="17" presetID="1" presetClass="entr" presetSubtype="0" fill="hold" nodeType="clickEffect">
+                                  <p:stCondLst>
+                                    <p:cond delay="0"/>
+                                  </p:stCondLst>
+                                  <p:childTnLst>
+                                    <p:set>
+                                      <p:cBhvr>
+                                        <p:cTn id="18" dur="1" fill="hold">
+                                          <p:stCondLst>
+                                            <p:cond delay="0"/>
+                                          </p:stCondLst>
+                                        </p:cTn>
+                                        <p:tgtEl>
+                                          <p:spTgt spid="3">
+                                            <p:txEl>
+                                              <p:pRg st="3" end="3"/>
+                                            </p:txEl>
+                                          </p:spTgt>
+                                        </p:tgtEl>
+                                        <p:attrNameLst>
+                                          <p:attrName>style.visibility</p:attrName>
+                                        </p:attrNameLst>
+                                      </p:cBhvr>
+                                      <p:to>
+                                        <p:strVal val="visible"/>
+                                      </p:to>
+                                    </p:set>
+                                  </p:childTnLst>
+                                </p:cTn>
+                              </p:par>
+                            </p:childTnLst>
+                          </p:cTn>
+                        </p:par>
+                      </p:childTnLst>
+                    </p:cTn>
+                  </p:par>
+                  <p:par>
+                    <p:cTn id="19" fill="hold">
+                      <p:stCondLst>
+                        <p:cond delay="indefinite"/>
+                      </p:stCondLst>
+                      <p:childTnLst>
+                        <p:par>
+                          <p:cTn id="20" fill="hold">
+                            <p:stCondLst>
+                              <p:cond delay="0"/>
+                            </p:stCondLst>
+                            <p:childTnLst>
+                              <p:par>
+                                <p:cTn id="21" presetID="1" presetClass="entr" presetSubtype="0" fill="hold" grpId="0" nodeType="clickEffect">
+                                  <p:stCondLst>
+                                    <p:cond delay="0"/>
+                                  </p:stCondLst>
+                                  <p:childTnLst>
+                                    <p:set>
+                                      <p:cBhvr>
+                                        <p:cTn id="22" dur="1" fill="hold">
+                                          <p:stCondLst>
+                                            <p:cond delay="0"/>
+                                          </p:stCondLst>
+                                        </p:cTn>
+                                        <p:tgtEl>
+                                          <p:spTgt spid="6"/>
+                                        </p:tgtEl>
+                                        <p:attrNameLst>
+                                          <p:attrName>style.visibility</p:attrName>
+                                        </p:attrNameLst>
+                                      </p:cBhvr>
+                                      <p:to>
+                                        <p:strVal val="visible"/>
+                                      </p:to>
+                                    </p:set>
+                                  </p:childTnLst>
+                                </p:cTn>
+                              </p:par>
+                            </p:childTnLst>
+                          </p:cTn>
+                        </p:par>
+                      </p:childTnLst>
+                    </p:cTn>
+                  </p:par>
+                </p:childTnLst>
+              </p:cTn>
+              <p:prevCondLst>
+                <p:cond evt="onPrev" delay="0">
+                  <p:tgtEl>
+                    <p:sldTgt/>
+                  </p:tgtEl>
+                </p:cond>
+              </p:prevCondLst>
+              <p:nextCondLst>
+                <p:cond evt="onNext" delay="0">
+                  <p:tgtEl>
+                    <p:sldTgt/>
+                  </p:tgtEl>
+                </p:cond>
+              </p:nextCondLst>
+            </p:seq>
+          </p:childTnLst>
+        </p:cTn>
+      </p:par>
+    </p:tnLst>
+    <p:bldLst>
+      <p:bldP spid="6" grpId="0" animBg="1"/>
+    </p:bldLst>
+  </p:timing>
 </p:sld>
 </file>
 

--- a/slides/Lecture_Chapter07.pptx
+++ b/slides/Lecture_Chapter07.pptx
@@ -318,7 +318,7 @@
           <a:p>
             <a:fld id="{3E22BF2E-04DA-469E-97C5-BB68A0368813}" type="datetimeFigureOut">
               <a:rPr lang="en-US" smtClean="0"/>
-              <a:t>10/16/2026</a:t>
+              <a:t>10/19/2026</a:t>
             </a:fld>
             <a:endParaRPr lang="en-US"/>
           </a:p>
@@ -516,7 +516,7 @@
           <a:p>
             <a:fld id="{3E22BF2E-04DA-469E-97C5-BB68A0368813}" type="datetimeFigureOut">
               <a:rPr lang="en-US" smtClean="0"/>
-              <a:t>10/16/2026</a:t>
+              <a:t>10/19/2026</a:t>
             </a:fld>
             <a:endParaRPr lang="en-US"/>
           </a:p>
@@ -724,7 +724,7 @@
           <a:p>
             <a:fld id="{3E22BF2E-04DA-469E-97C5-BB68A0368813}" type="datetimeFigureOut">
               <a:rPr lang="en-US" smtClean="0"/>
-              <a:t>10/16/2026</a:t>
+              <a:t>10/19/2026</a:t>
             </a:fld>
             <a:endParaRPr lang="en-US"/>
           </a:p>
@@ -932,7 +932,7 @@
           <a:p>
             <a:fld id="{3E22BF2E-04DA-469E-97C5-BB68A0368813}" type="datetimeFigureOut">
               <a:rPr lang="en-US" smtClean="0"/>
-              <a:t>10/16/2026</a:t>
+              <a:t>10/19/2026</a:t>
             </a:fld>
             <a:endParaRPr lang="en-US"/>
           </a:p>
@@ -1207,7 +1207,7 @@
           <a:p>
             <a:fld id="{3E22BF2E-04DA-469E-97C5-BB68A0368813}" type="datetimeFigureOut">
               <a:rPr lang="en-US" smtClean="0"/>
-              <a:t>10/16/2026</a:t>
+              <a:t>10/19/2026</a:t>
             </a:fld>
             <a:endParaRPr lang="en-US"/>
           </a:p>
@@ -1472,7 +1472,7 @@
           <a:p>
             <a:fld id="{3E22BF2E-04DA-469E-97C5-BB68A0368813}" type="datetimeFigureOut">
               <a:rPr lang="en-US" smtClean="0"/>
-              <a:t>10/16/2026</a:t>
+              <a:t>10/19/2026</a:t>
             </a:fld>
             <a:endParaRPr lang="en-US"/>
           </a:p>
@@ -1884,7 +1884,7 @@
           <a:p>
             <a:fld id="{3E22BF2E-04DA-469E-97C5-BB68A0368813}" type="datetimeFigureOut">
               <a:rPr lang="en-US" smtClean="0"/>
-              <a:t>10/16/2026</a:t>
+              <a:t>10/19/2026</a:t>
             </a:fld>
             <a:endParaRPr lang="en-US"/>
           </a:p>
@@ -2025,7 +2025,7 @@
           <a:p>
             <a:fld id="{3E22BF2E-04DA-469E-97C5-BB68A0368813}" type="datetimeFigureOut">
               <a:rPr lang="en-US" smtClean="0"/>
-              <a:t>10/16/2026</a:t>
+              <a:t>10/19/2026</a:t>
             </a:fld>
             <a:endParaRPr lang="en-US"/>
           </a:p>
@@ -2138,7 +2138,7 @@
           <a:p>
             <a:fld id="{3E22BF2E-04DA-469E-97C5-BB68A0368813}" type="datetimeFigureOut">
               <a:rPr lang="en-US" smtClean="0"/>
-              <a:t>10/16/2026</a:t>
+              <a:t>10/19/2026</a:t>
             </a:fld>
             <a:endParaRPr lang="en-US"/>
           </a:p>
@@ -2449,7 +2449,7 @@
           <a:p>
             <a:fld id="{3E22BF2E-04DA-469E-97C5-BB68A0368813}" type="datetimeFigureOut">
               <a:rPr lang="en-US" smtClean="0"/>
-              <a:t>10/16/2026</a:t>
+              <a:t>10/19/2026</a:t>
             </a:fld>
             <a:endParaRPr lang="en-US"/>
           </a:p>
@@ -2737,7 +2737,7 @@
           <a:p>
             <a:fld id="{3E22BF2E-04DA-469E-97C5-BB68A0368813}" type="datetimeFigureOut">
               <a:rPr lang="en-US" smtClean="0"/>
-              <a:t>10/16/2026</a:t>
+              <a:t>10/19/2026</a:t>
             </a:fld>
             <a:endParaRPr lang="en-US"/>
           </a:p>
@@ -2978,7 +2978,7 @@
           <a:p>
             <a:fld id="{3E22BF2E-04DA-469E-97C5-BB68A0368813}" type="datetimeFigureOut">
               <a:rPr lang="en-US" smtClean="0"/>
-              <a:t>10/16/2026</a:t>
+              <a:t>10/19/2026</a:t>
             </a:fld>
             <a:endParaRPr lang="en-US"/>
           </a:p>
@@ -6967,10 +6967,10 @@
         </p:nvGrpSpPr>
         <p:grpSpPr>
           <a:xfrm>
-            <a:off x="391291" y="1125097"/>
-            <a:ext cx="5818255" cy="4814496"/>
+            <a:off x="357140" y="1070568"/>
+            <a:ext cx="5818255" cy="4810301"/>
             <a:chOff x="391291" y="1125097"/>
-            <a:chExt cx="5818255" cy="4814496"/>
+            <a:chExt cx="5818255" cy="4810301"/>
           </a:xfrm>
         </p:grpSpPr>
         <p:pic>
@@ -7003,8 +7003,8 @@
             </a:prstGeom>
           </p:spPr>
         </p:pic>
-        <mc:AlternateContent xmlns:mc="http://schemas.openxmlformats.org/markup-compatibility/2006" xmlns:a14="http://schemas.microsoft.com/office/drawing/2010/main">
-          <mc:Choice Requires="a14">
+        <mc:AlternateContent xmlns:mc="http://schemas.openxmlformats.org/markup-compatibility/2006">
+          <mc:Choice xmlns:a14="http://schemas.microsoft.com/office/drawing/2010/main" Requires="a14">
             <p:sp>
               <p:nvSpPr>
                 <p:cNvPr id="6" name="Speech Bubble: Rectangle with Corners Rounded 5" descr="pi is given">
@@ -7019,7 +7019,7 @@
               </p:nvSpPr>
               <p:spPr>
                 <a:xfrm>
-                  <a:off x="3635495" y="1125097"/>
+                  <a:off x="3488688" y="1125097"/>
                   <a:ext cx="1724099" cy="543806"/>
                 </a:xfrm>
                 <a:prstGeom prst="wedgeRoundRectCallout">
@@ -7069,7 +7069,7 @@
               </p:txBody>
             </p:sp>
           </mc:Choice>
-          <mc:Fallback xmlns="">
+          <mc:Fallback>
             <p:sp>
               <p:nvSpPr>
                 <p:cNvPr id="6" name="Speech Bubble: Rectangle with Corners Rounded 5" descr="pi is given">
@@ -7086,7 +7086,7 @@
               </p:nvSpPr>
               <p:spPr>
                 <a:xfrm>
-                  <a:off x="3635495" y="1125097"/>
+                  <a:off x="3488688" y="1125097"/>
                   <a:ext cx="1724099" cy="543806"/>
                 </a:xfrm>
                 <a:prstGeom prst="wedgeRoundRectCallout">
@@ -7097,7 +7097,7 @@
                   </a:avLst>
                 </a:prstGeom>
                 <a:blipFill>
-                  <a:blip r:embed="rId5"/>
+                  <a:blip r:embed="rId4"/>
                   <a:stretch>
                     <a:fillRect/>
                   </a:stretch>
@@ -7118,8 +7118,8 @@
             </p:sp>
           </mc:Fallback>
         </mc:AlternateContent>
-        <mc:AlternateContent xmlns:mc="http://schemas.openxmlformats.org/markup-compatibility/2006" xmlns:a14="http://schemas.microsoft.com/office/drawing/2010/main">
-          <mc:Choice Requires="a14">
+        <mc:AlternateContent xmlns:mc="http://schemas.openxmlformats.org/markup-compatibility/2006">
+          <mc:Choice xmlns:a14="http://schemas.microsoft.com/office/drawing/2010/main" Requires="a14">
             <p:sp>
               <p:nvSpPr>
                 <p:cNvPr id="7" name="Speech Bubble: Rectangle with Corners Rounded 6" descr="Update V">
@@ -7134,7 +7134,7 @@
               </p:nvSpPr>
               <p:spPr>
                 <a:xfrm>
-                  <a:off x="3145721" y="5395787"/>
+                  <a:off x="2715506" y="5391592"/>
                   <a:ext cx="1724099" cy="543806"/>
                 </a:xfrm>
                 <a:prstGeom prst="wedgeRoundRectCallout">
@@ -7185,7 +7185,7 @@
               </p:txBody>
             </p:sp>
           </mc:Choice>
-          <mc:Fallback xmlns="">
+          <mc:Fallback>
             <p:sp>
               <p:nvSpPr>
                 <p:cNvPr id="7" name="Speech Bubble: Rectangle with Corners Rounded 6" descr="Update V">
@@ -7202,7 +7202,7 @@
               </p:nvSpPr>
               <p:spPr>
                 <a:xfrm>
-                  <a:off x="3145721" y="5395787"/>
+                  <a:off x="2715506" y="5391592"/>
                   <a:ext cx="1724099" cy="543806"/>
                 </a:xfrm>
                 <a:prstGeom prst="wedgeRoundRectCallout">
@@ -7213,7 +7213,7 @@
                   </a:avLst>
                 </a:prstGeom>
                 <a:blipFill>
-                  <a:blip r:embed="rId6"/>
+                  <a:blip r:embed="rId5"/>
                   <a:stretch>
                     <a:fillRect/>
                   </a:stretch>
@@ -7252,15 +7252,16 @@
           </p:nvPr>
         </p:nvPicPr>
         <p:blipFill>
-          <a:blip r:embed="rId7"/>
+          <a:blip r:embed="rId6"/>
+          <a:srcRect l="1142" t="1505" b="-1"/>
           <a:stretch>
             <a:fillRect/>
           </a:stretch>
         </p:blipFill>
         <p:spPr>
           <a:xfrm>
-            <a:off x="6209546" y="1397000"/>
-            <a:ext cx="5681934" cy="4779963"/>
+            <a:off x="5356370" y="1195437"/>
+            <a:ext cx="6535109" cy="5477561"/>
           </a:xfrm>
           <a:prstGeom prst="rect">
             <a:avLst/>
@@ -7284,7 +7285,7 @@
         </p:nvSpPr>
         <p:spPr>
           <a:xfrm>
-            <a:off x="5866228" y="3287652"/>
+            <a:off x="4849022" y="2486510"/>
             <a:ext cx="618335" cy="767817"/>
           </a:xfrm>
           <a:prstGeom prst="rightArrow">
@@ -7330,14 +7331,14 @@
         </p:nvGrpSpPr>
         <p:grpSpPr>
           <a:xfrm>
-            <a:off x="9856838" y="4018671"/>
-            <a:ext cx="2264824" cy="2702997"/>
-            <a:chOff x="9856838" y="4018671"/>
-            <a:chExt cx="2264824" cy="2702997"/>
+            <a:off x="3761602" y="4158915"/>
+            <a:ext cx="7944649" cy="2316214"/>
+            <a:chOff x="4162379" y="5264674"/>
+            <a:chExt cx="7944649" cy="2316214"/>
           </a:xfrm>
         </p:grpSpPr>
-        <mc:AlternateContent xmlns:mc="http://schemas.openxmlformats.org/markup-compatibility/2006" xmlns:a14="http://schemas.microsoft.com/office/drawing/2010/main">
-          <mc:Choice Requires="a14">
+        <mc:AlternateContent xmlns:mc="http://schemas.openxmlformats.org/markup-compatibility/2006">
+          <mc:Choice xmlns:a14="http://schemas.microsoft.com/office/drawing/2010/main" Requires="a14">
             <p:sp>
               <p:nvSpPr>
                 <p:cNvPr id="4" name="Speech Bubble: Rectangle with Corners Rounded 3" descr="Update Q and pi">
@@ -7352,13 +7353,13 @@
               </p:nvSpPr>
               <p:spPr>
                 <a:xfrm>
-                  <a:off x="10030478" y="6177862"/>
+                  <a:off x="4162379" y="7037082"/>
                   <a:ext cx="1724099" cy="543806"/>
                 </a:xfrm>
                 <a:prstGeom prst="wedgeRoundRectCallout">
                   <a:avLst>
-                    <a:gd name="adj1" fmla="val -54354"/>
-                    <a:gd name="adj2" fmla="val -121679"/>
+                    <a:gd name="adj1" fmla="val 88698"/>
+                    <a:gd name="adj2" fmla="val -52260"/>
                     <a:gd name="adj3" fmla="val 16667"/>
                   </a:avLst>
                 </a:prstGeom>
@@ -7417,7 +7418,7 @@
               </p:txBody>
             </p:sp>
           </mc:Choice>
-          <mc:Fallback xmlns="">
+          <mc:Fallback>
             <p:sp>
               <p:nvSpPr>
                 <p:cNvPr id="4" name="Speech Bubble: Rectangle with Corners Rounded 3" descr="Update Q and pi">
@@ -7434,18 +7435,18 @@
               </p:nvSpPr>
               <p:spPr>
                 <a:xfrm>
-                  <a:off x="10030478" y="6177862"/>
+                  <a:off x="4162379" y="7037082"/>
                   <a:ext cx="1724099" cy="543806"/>
                 </a:xfrm>
                 <a:prstGeom prst="wedgeRoundRectCallout">
                   <a:avLst>
-                    <a:gd name="adj1" fmla="val -54354"/>
-                    <a:gd name="adj2" fmla="val -121679"/>
+                    <a:gd name="adj1" fmla="val 88698"/>
+                    <a:gd name="adj2" fmla="val -52260"/>
                     <a:gd name="adj3" fmla="val 16667"/>
                   </a:avLst>
                 </a:prstGeom>
                 <a:blipFill>
-                  <a:blip r:embed="rId8"/>
+                  <a:blip r:embed="rId7"/>
                   <a:stretch>
                     <a:fillRect/>
                   </a:stretch>
@@ -7466,8 +7467,8 @@
             </p:sp>
           </mc:Fallback>
         </mc:AlternateContent>
-        <mc:AlternateContent xmlns:mc="http://schemas.openxmlformats.org/markup-compatibility/2006" xmlns:a14="http://schemas.microsoft.com/office/drawing/2010/main">
-          <mc:Choice Requires="a14">
+        <mc:AlternateContent xmlns:mc="http://schemas.openxmlformats.org/markup-compatibility/2006">
+          <mc:Choice xmlns:a14="http://schemas.microsoft.com/office/drawing/2010/main" Requires="a14">
             <p:sp>
               <p:nvSpPr>
                 <p:cNvPr id="9" name="Speech Bubble: Rectangle with Corners Rounded 8" descr="On-policy: Select next action from the current pi">
@@ -7482,7 +7483,7 @@
               </p:nvSpPr>
               <p:spPr>
                 <a:xfrm>
-                  <a:off x="9856838" y="4018671"/>
+                  <a:off x="9842204" y="5264674"/>
                   <a:ext cx="2264824" cy="449306"/>
                 </a:xfrm>
                 <a:prstGeom prst="wedgeRoundRectCallout">
@@ -7533,7 +7534,7 @@
               </p:txBody>
             </p:sp>
           </mc:Choice>
-          <mc:Fallback xmlns="">
+          <mc:Fallback>
             <p:sp>
               <p:nvSpPr>
                 <p:cNvPr id="9" name="Speech Bubble: Rectangle with Corners Rounded 8" descr="On-policy: Select next action from the current pi">
@@ -7550,7 +7551,7 @@
               </p:nvSpPr>
               <p:spPr>
                 <a:xfrm>
-                  <a:off x="9856838" y="4018671"/>
+                  <a:off x="9842204" y="5264674"/>
                   <a:ext cx="2264824" cy="449306"/>
                 </a:xfrm>
                 <a:prstGeom prst="wedgeRoundRectCallout">
@@ -7561,7 +7562,7 @@
                   </a:avLst>
                 </a:prstGeom>
                 <a:blipFill>
-                  <a:blip r:embed="rId9"/>
+                  <a:blip r:embed="rId8"/>
                   <a:stretch>
                     <a:fillRect t="-6250"/>
                   </a:stretch>
@@ -7600,8 +7601,8 @@
         </p:nvSpPr>
         <p:spPr>
           <a:xfrm>
-            <a:off x="7029133" y="1960277"/>
-            <a:ext cx="2264769" cy="188064"/>
+            <a:off x="6223790" y="1787509"/>
+            <a:ext cx="2647568" cy="188064"/>
           </a:xfrm>
           <a:prstGeom prst="rect">
             <a:avLst/>
@@ -7657,8 +7658,8 @@
         </p:nvSpPr>
         <p:spPr>
           <a:xfrm>
-            <a:off x="7157803" y="4497050"/>
-            <a:ext cx="2872675" cy="188064"/>
+            <a:off x="6393007" y="4716389"/>
+            <a:ext cx="3283694" cy="223159"/>
           </a:xfrm>
           <a:prstGeom prst="rect">
             <a:avLst/>
@@ -7714,8 +7715,8 @@
         </p:nvSpPr>
         <p:spPr>
           <a:xfrm>
-            <a:off x="8694038" y="5573658"/>
-            <a:ext cx="2466140" cy="188064"/>
+            <a:off x="6175394" y="5766610"/>
+            <a:ext cx="3354499" cy="223159"/>
           </a:xfrm>
           <a:prstGeom prst="rect">
             <a:avLst/>
@@ -9165,6 +9166,11 @@
             <a:avLst/>
           </a:prstGeom>
           <a:noFill/>
+          <a:ln>
+            <a:solidFill>
+              <a:schemeClr val="accent2"/>
+            </a:solidFill>
+          </a:ln>
         </p:spPr>
         <p:style>
           <a:lnRef idx="2">
@@ -9215,6 +9221,11 @@
             <a:avLst/>
           </a:prstGeom>
           <a:noFill/>
+          <a:ln>
+            <a:solidFill>
+              <a:schemeClr val="accent2"/>
+            </a:solidFill>
+          </a:ln>
         </p:spPr>
         <p:style>
           <a:lnRef idx="2">
@@ -9265,6 +9276,11 @@
             <a:avLst/>
           </a:prstGeom>
           <a:noFill/>
+          <a:ln>
+            <a:solidFill>
+              <a:schemeClr val="accent2"/>
+            </a:solidFill>
+          </a:ln>
         </p:spPr>
         <p:style>
           <a:lnRef idx="2">
@@ -9305,10 +9321,10 @@
         </p:nvGrpSpPr>
         <p:grpSpPr>
           <a:xfrm>
-            <a:off x="5659709" y="1062757"/>
-            <a:ext cx="6430496" cy="5089359"/>
-            <a:chOff x="5659709" y="1062757"/>
-            <a:chExt cx="6430496" cy="5089359"/>
+            <a:off x="4723002" y="1086409"/>
+            <a:ext cx="7429581" cy="5625404"/>
+            <a:chOff x="5721298" y="1204864"/>
+            <a:chExt cx="6368907" cy="4947252"/>
           </a:xfrm>
         </p:grpSpPr>
         <p:grpSp>
@@ -9325,10 +9341,10 @@
           </p:nvGrpSpPr>
           <p:grpSpPr>
             <a:xfrm>
-              <a:off x="5659709" y="1062757"/>
-              <a:ext cx="6430496" cy="5089359"/>
-              <a:chOff x="5659709" y="1062757"/>
-              <a:chExt cx="6430496" cy="5089359"/>
+              <a:off x="5721298" y="1204864"/>
+              <a:ext cx="6368907" cy="4947252"/>
+              <a:chOff x="5721298" y="1204864"/>
+              <a:chExt cx="6368907" cy="4947252"/>
             </a:xfrm>
           </p:grpSpPr>
           <p:pic>
@@ -9347,14 +9363,15 @@
             </p:nvPicPr>
             <p:blipFill>
               <a:blip r:embed="rId3"/>
+              <a:srcRect l="1036"/>
               <a:stretch>
                 <a:fillRect/>
               </a:stretch>
             </p:blipFill>
             <p:spPr>
               <a:xfrm>
-                <a:off x="5659709" y="1334660"/>
-                <a:ext cx="5945915" cy="4817456"/>
+                <a:off x="5721298" y="1334660"/>
+                <a:ext cx="5884326" cy="4817456"/>
               </a:xfrm>
               <a:prstGeom prst="rect">
                 <a:avLst/>
@@ -9375,13 +9392,13 @@
             </p:nvSpPr>
             <p:spPr>
               <a:xfrm>
-                <a:off x="9881525" y="1062757"/>
-                <a:ext cx="1724099" cy="543806"/>
+                <a:off x="9881525" y="1204864"/>
+                <a:ext cx="1724099" cy="327952"/>
               </a:xfrm>
               <a:prstGeom prst="wedgeRoundRectCallout">
                 <a:avLst>
-                  <a:gd name="adj1" fmla="val -75002"/>
-                  <a:gd name="adj2" fmla="val 68289"/>
+                  <a:gd name="adj1" fmla="val -70622"/>
+                  <a:gd name="adj2" fmla="val 95284"/>
                   <a:gd name="adj3" fmla="val 16667"/>
                 </a:avLst>
               </a:prstGeom>
@@ -9438,6 +9455,11 @@
                 <a:avLst/>
               </a:prstGeom>
               <a:noFill/>
+              <a:ln>
+                <a:solidFill>
+                  <a:schemeClr val="accent2"/>
+                </a:solidFill>
+              </a:ln>
             </p:spPr>
             <p:style>
               <a:lnRef idx="2">
@@ -9541,6 +9563,11 @@
                 <a:avLst/>
               </a:prstGeom>
               <a:noFill/>
+              <a:ln>
+                <a:solidFill>
+                  <a:schemeClr val="accent2"/>
+                </a:solidFill>
+              </a:ln>
             </p:spPr>
             <p:style>
               <a:lnRef idx="2">
@@ -9591,6 +9618,11 @@
                 <a:avLst/>
               </a:prstGeom>
               <a:noFill/>
+              <a:ln>
+                <a:solidFill>
+                  <a:schemeClr val="accent2"/>
+                </a:solidFill>
+              </a:ln>
             </p:spPr>
             <p:style>
               <a:lnRef idx="2">
@@ -9642,6 +9674,11 @@
               <a:avLst/>
             </a:prstGeom>
             <a:noFill/>
+            <a:ln>
+              <a:solidFill>
+                <a:schemeClr val="accent2"/>
+              </a:solidFill>
+            </a:ln>
           </p:spPr>
           <p:style>
             <a:lnRef idx="2">
@@ -9692,6 +9729,11 @@
               <a:avLst/>
             </a:prstGeom>
             <a:noFill/>
+            <a:ln>
+              <a:solidFill>
+                <a:schemeClr val="accent2"/>
+              </a:solidFill>
+            </a:ln>
           </p:spPr>
           <p:style>
             <a:lnRef idx="2">
@@ -9714,7 +9756,7 @@
             <a:lstStyle/>
             <a:p>
               <a:pPr algn="ctr"/>
-              <a:endParaRPr lang="en-US"/>
+              <a:endParaRPr lang="en-US" dirty="0"/>
             </a:p>
           </p:txBody>
         </p:sp>
@@ -9736,7 +9778,7 @@
         </p:nvSpPr>
         <p:spPr>
           <a:xfrm>
-            <a:off x="5326967" y="3245771"/>
+            <a:off x="4435926" y="2975571"/>
             <a:ext cx="561924" cy="767817"/>
           </a:xfrm>
           <a:prstGeom prst="rightArrow">
@@ -9782,7 +9824,7 @@
         </p:nvSpPr>
         <p:spPr>
           <a:xfrm>
-            <a:off x="10711542" y="1852972"/>
+            <a:off x="10452426" y="1827649"/>
             <a:ext cx="1378663" cy="543806"/>
           </a:xfrm>
           <a:prstGeom prst="wedgeRoundRectCallout">
@@ -9872,8 +9914,8 @@
           </a:p>
         </p:txBody>
       </p:sp>
-      <mc:AlternateContent xmlns:mc="http://schemas.openxmlformats.org/markup-compatibility/2006" xmlns:a14="http://schemas.microsoft.com/office/drawing/2010/main">
-        <mc:Choice Requires="a14">
+      <mc:AlternateContent xmlns:mc="http://schemas.openxmlformats.org/markup-compatibility/2006">
+        <mc:Choice xmlns:a14="http://schemas.microsoft.com/office/drawing/2010/main" Requires="a14">
           <p:sp>
             <p:nvSpPr>
               <p:cNvPr id="22" name="Speech Bubble: Rectangle with Corners Rounded 21" descr="We could update b equals epsilon minus greedy(pi)">
@@ -9888,13 +9930,13 @@
             </p:nvSpPr>
             <p:spPr>
               <a:xfrm>
-                <a:off x="10193311" y="2655934"/>
+                <a:off x="10025531" y="2688903"/>
                 <a:ext cx="1896894" cy="670576"/>
               </a:xfrm>
               <a:prstGeom prst="wedgeRoundRectCallout">
                 <a:avLst>
-                  <a:gd name="adj1" fmla="val -193450"/>
-                  <a:gd name="adj2" fmla="val -31317"/>
+                  <a:gd name="adj1" fmla="val -159618"/>
+                  <a:gd name="adj2" fmla="val 24353"/>
                   <a:gd name="adj3" fmla="val 16667"/>
                 </a:avLst>
               </a:prstGeom>
@@ -9922,63 +9964,104 @@
                 <a:pPr algn="ctr"/>
                 <a:r>
                   <a:rPr lang="en-US" sz="1600" dirty="0"/>
-                  <a:t>We could update </a:t>
+                  <a:t>P</a:t>
                 </a:r>
                 <a14:m>
                   <m:oMath xmlns:m="http://schemas.openxmlformats.org/officeDocument/2006/math">
                     <m:r>
-                      <a:rPr lang="en-US" sz="1600" b="0" i="1" smtClean="0">
-                        <a:latin typeface="Cambria Math" panose="02040503050406030204" pitchFamily="18" charset="0"/>
-                      </a:rPr>
-                      <m:t>𝑏</m:t>
-                    </m:r>
-                    <m:r>
-                      <a:rPr lang="en-US" sz="1600" b="0" i="1" smtClean="0">
-                        <a:latin typeface="Cambria Math" panose="02040503050406030204" pitchFamily="18" charset="0"/>
-                      </a:rPr>
-                      <m:t>=</m:t>
-                    </m:r>
-                    <m:r>
-                      <a:rPr lang="en-US" sz="1600" b="0" i="1" smtClean="0">
-                        <a:latin typeface="Cambria Math" panose="02040503050406030204" pitchFamily="18" charset="0"/>
-                      </a:rPr>
-                      <m:t>𝜖</m:t>
-                    </m:r>
-                    <m:r>
                       <m:rPr>
-                        <m:nor/>
+                        <m:sty m:val="p"/>
                       </m:rPr>
                       <a:rPr lang="en-US" sz="1600" b="0" i="0" smtClean="0">
                         <a:latin typeface="Cambria Math" panose="02040503050406030204" pitchFamily="18" charset="0"/>
                       </a:rPr>
-                      <m:t>−greedy</m:t>
-                    </m:r>
-                    <m:r>
-                      <a:rPr lang="en-US" sz="1600" b="0" i="1" smtClean="0">
-                        <a:latin typeface="Cambria Math" panose="02040503050406030204" pitchFamily="18" charset="0"/>
-                      </a:rPr>
-                      <m:t>(</m:t>
-                    </m:r>
-                    <m:r>
-                      <a:rPr lang="en-US" sz="1600" b="0" i="1" smtClean="0">
-                        <a:latin typeface="Cambria Math" panose="02040503050406030204" pitchFamily="18" charset="0"/>
-                      </a:rPr>
-                      <m:t>𝜋</m:t>
-                    </m:r>
-                    <m:r>
-                      <a:rPr lang="en-US" sz="1600" b="0" i="1" smtClean="0">
-                        <a:latin typeface="Cambria Math" panose="02040503050406030204" pitchFamily="18" charset="0"/>
-                      </a:rPr>
-                      <m:t>)</m:t>
+                      <m:t>opular</m:t>
+                    </m:r>
+                    <m:r>
+                      <a:rPr lang="en-US" sz="1600" b="0" i="0" smtClean="0">
+                        <a:latin typeface="Cambria Math" panose="02040503050406030204" pitchFamily="18" charset="0"/>
+                      </a:rPr>
+                      <m:t> </m:t>
+                    </m:r>
+                    <m:r>
+                      <m:rPr>
+                        <m:sty m:val="p"/>
+                      </m:rPr>
+                      <a:rPr lang="en-US" sz="1600" b="0" i="0" smtClean="0">
+                        <a:latin typeface="Cambria Math" panose="02040503050406030204" pitchFamily="18" charset="0"/>
+                      </a:rPr>
+                      <m:t>choice</m:t>
                     </m:r>
                   </m:oMath>
+                </a14:m>
+                <a:r>
+                  <a:rPr lang="en-US" sz="1600" b="0" i="0" dirty="0">
+                    <a:latin typeface="Cambria Math" panose="02040503050406030204" pitchFamily="18" charset="0"/>
+                  </a:rPr>
+                  <a:t>:</a:t>
+                </a:r>
+                <a:br>
+                  <a:rPr lang="en-US" sz="1600" b="0" i="0" dirty="0">
+                    <a:latin typeface="Cambria Math" panose="02040503050406030204" pitchFamily="18" charset="0"/>
+                  </a:rPr>
+                </a:br>
+                <a14:m>
+                  <m:oMathPara xmlns:m="http://schemas.openxmlformats.org/officeDocument/2006/math">
+                    <m:oMath>
+                      <m:r>
+                        <a:rPr lang="en-US" sz="1600" b="0" i="1" smtClean="0">
+                          <a:latin typeface="Cambria Math" panose="02040503050406030204" pitchFamily="18" charset="0"/>
+                        </a:rPr>
+                        <m:t>𝑏</m:t>
+                      </m:r>
+                      <m:r>
+                        <a:rPr lang="en-US" sz="1600" b="0" i="1" smtClean="0">
+                          <a:latin typeface="Cambria Math" panose="02040503050406030204" pitchFamily="18" charset="0"/>
+                        </a:rPr>
+                        <m:t>=</m:t>
+                      </m:r>
+                      <m:r>
+                        <a:rPr lang="en-US" sz="1600" b="0" i="1" smtClean="0">
+                          <a:latin typeface="Cambria Math" panose="02040503050406030204" pitchFamily="18" charset="0"/>
+                        </a:rPr>
+                        <m:t>𝜖</m:t>
+                      </m:r>
+                      <m:r>
+                        <m:rPr>
+                          <m:nor/>
+                        </m:rPr>
+                        <a:rPr lang="en-US" sz="1600" b="0" i="0" smtClean="0">
+                          <a:latin typeface="Cambria Math" panose="02040503050406030204" pitchFamily="18" charset="0"/>
+                        </a:rPr>
+                        <m:t>−greedy</m:t>
+                      </m:r>
+                      <m:r>
+                        <a:rPr lang="en-US" sz="1600" b="0" i="1" smtClean="0">
+                          <a:latin typeface="Cambria Math" panose="02040503050406030204" pitchFamily="18" charset="0"/>
+                        </a:rPr>
+                        <m:t>(</m:t>
+                      </m:r>
+                      <m:r>
+                        <a:rPr lang="en-US" sz="1600" b="0" i="1" smtClean="0">
+                          <a:latin typeface="Cambria Math" panose="02040503050406030204" pitchFamily="18" charset="0"/>
+                        </a:rPr>
+                        <m:t>𝜋</m:t>
+                      </m:r>
+                      <m:r>
+                        <a:rPr lang="en-US" sz="1600" b="0" i="1" smtClean="0">
+                          <a:latin typeface="Cambria Math" panose="02040503050406030204" pitchFamily="18" charset="0"/>
+                        </a:rPr>
+                        <m:t>)</m:t>
+                      </m:r>
+                    </m:oMath>
+                  </m:oMathPara>
                 </a14:m>
                 <a:endParaRPr lang="en-US" sz="1600" dirty="0"/>
               </a:p>
             </p:txBody>
           </p:sp>
         </mc:Choice>
-        <mc:Fallback xmlns="">
+        <mc:Fallback>
           <p:sp>
             <p:nvSpPr>
               <p:cNvPr id="22" name="Speech Bubble: Rectangle with Corners Rounded 21" descr="We could update b equals epsilon minus greedy(pi)">
@@ -9995,13 +10078,13 @@
             </p:nvSpPr>
             <p:spPr>
               <a:xfrm>
-                <a:off x="10193311" y="2655934"/>
+                <a:off x="10025531" y="2688903"/>
                 <a:ext cx="1896894" cy="670576"/>
               </a:xfrm>
               <a:prstGeom prst="wedgeRoundRectCallout">
                 <a:avLst>
-                  <a:gd name="adj1" fmla="val -193450"/>
-                  <a:gd name="adj2" fmla="val -31317"/>
+                  <a:gd name="adj1" fmla="val -159618"/>
+                  <a:gd name="adj2" fmla="val 24353"/>
                   <a:gd name="adj3" fmla="val 16667"/>
                 </a:avLst>
               </a:prstGeom>
@@ -10217,8 +10300,8 @@
           </a:extLst>
         </p:spPr>
       </p:pic>
-      <mc:AlternateContent xmlns:mc="http://schemas.openxmlformats.org/markup-compatibility/2006" xmlns:a14="http://schemas.microsoft.com/office/drawing/2010/main">
-        <mc:Choice Requires="a14">
+      <mc:AlternateContent xmlns:mc="http://schemas.openxmlformats.org/markup-compatibility/2006">
+        <mc:Choice xmlns:a14="http://schemas.microsoft.com/office/drawing/2010/main" Requires="a14">
           <p:sp>
             <p:nvSpPr>
               <p:cNvPr id="3" name="Content Placeholder 2" descr="n -step methods let us choose the amount of bootstrapping from 1-step to no bootstrapping (MC). Advantage over one-step methods:. Learning: Looking more steps ahead speeds up learning, especially for sparse rewards. Error reduction: Significantly reduces the bootstrapping error (bias) at the cost of increased variance. An intermediate amount of bootstrapping typically performs better in terms of the variance/bias tradeoff than the one-step and MC extremes. n is application-dependent and can be tuned. Drawback:. Delay: Updates are delayed n -step since future events (rewards and states) are needed. Computation: More computation per time step and higher memory needs than one-step methods. Eligibility traces address the delay and computation drawbacks. We will cover these methods later">
@@ -10247,6 +10330,9 @@
               </a:bodyPr>
               <a:lstStyle/>
               <a:p>
+                <a:pPr marL="0" indent="0">
+                  <a:buNone/>
+                </a:pPr>
                 <a14:m>
                   <m:oMath xmlns:m="http://schemas.openxmlformats.org/officeDocument/2006/math">
                     <m:r>
@@ -10339,6 +10425,31 @@
                 </a:r>
               </a:p>
               <a:p>
+                <a:pPr lvl="1"/>
+                <a:r>
+                  <a:rPr lang="en-US" sz="1800" b="1" dirty="0"/>
+                  <a:t>DRL</a:t>
+                </a:r>
+                <a:r>
+                  <a:rPr lang="en-US" sz="1800" dirty="0"/>
+                  <a:t>: </a:t>
+                </a:r>
+                <a14:m>
+                  <m:oMath xmlns:m="http://schemas.openxmlformats.org/officeDocument/2006/math">
+                    <m:r>
+                      <a:rPr lang="en-US" sz="1800" i="1" dirty="0">
+                        <a:latin typeface="Cambria Math" panose="02040503050406030204" pitchFamily="18" charset="0"/>
+                      </a:rPr>
+                      <m:t>𝑛</m:t>
+                    </m:r>
+                  </m:oMath>
+                </a14:m>
+                <a:r>
+                  <a:rPr lang="en-US" sz="1800" dirty="0"/>
+                  <a:t>-step methods are popular for deep RL!</a:t>
+                </a:r>
+              </a:p>
+              <a:p>
                 <a:endParaRPr lang="en-US" sz="1800" dirty="0"/>
               </a:p>
               <a:p>
@@ -10351,11 +10462,15 @@
                 <a:pPr lvl="1"/>
                 <a:r>
                   <a:rPr lang="en-US" sz="1800" b="1" dirty="0"/>
-                  <a:t>Delay</a:t>
-                </a:r>
-                <a:r>
-                  <a:rPr lang="en-US" sz="1800" dirty="0"/>
-                  <a:t>: Updates are delayed </a:t>
+                  <a:t>Delayed </a:t>
+                </a:r>
+                <a:r>
+                  <a:rPr lang="en-US" sz="1800" b="1"/>
+                  <a:t>Updates</a:t>
+                </a:r>
+                <a:r>
+                  <a:rPr lang="en-US" sz="1800"/>
+                  <a:t>: delayed </a:t>
                 </a:r>
                 <a14:m>
                   <m:oMath xmlns:m="http://schemas.openxmlformats.org/officeDocument/2006/math">
@@ -10369,7 +10484,7 @@
                 </a14:m>
                 <a:r>
                   <a:rPr lang="en-US" sz="1800" dirty="0"/>
-                  <a:t>-step since future events (rewards and states) are needed.</a:t>
+                  <a:t>-steps since future events (rewards and states) are needed.</a:t>
                 </a:r>
               </a:p>
               <a:p>
@@ -10382,23 +10497,26 @@
                   <a:rPr lang="en-US" sz="1800" dirty="0"/>
                   <a:t>: More computation per time step and higher memory needs than one-step methods.</a:t>
                 </a:r>
+                <a:br>
+                  <a:rPr lang="en-US" sz="1800" dirty="0"/>
+                </a:br>
+                <a:br>
+                  <a:rPr lang="en-US" sz="1800" dirty="0"/>
+                </a:br>
+                <a:r>
+                  <a:rPr lang="en-US" sz="1700" b="1" dirty="0"/>
+                  <a:t>Eligibility traces </a:t>
+                </a:r>
+                <a:r>
+                  <a:rPr lang="en-US" sz="1700" dirty="0"/>
+                  <a:t>address the delay and computation drawbacks, but they don’t work well with DRL. We will cover these methods later.</a:t>
+                </a:r>
               </a:p>
               <a:p>
-                <a:pPr lvl="1"/>
-                <a:endParaRPr lang="en-US" sz="1800" dirty="0"/>
-              </a:p>
-              <a:p>
-                <a:pPr marL="0" indent="0">
+                <a:pPr marL="457200" lvl="1" indent="0">
                   <a:buNone/>
                 </a:pPr>
-                <a:r>
-                  <a:rPr lang="en-US" sz="1800" b="1" dirty="0"/>
-                  <a:t>Eligibility traces </a:t>
-                </a:r>
-                <a:r>
-                  <a:rPr lang="en-US" sz="1800" dirty="0"/>
-                  <a:t>address the delay and computation drawbacks. We will cover these methods later.</a:t>
-                </a:r>
+                <a:endParaRPr lang="en-US" sz="1700" dirty="0"/>
               </a:p>
               <a:p>
                 <a:endParaRPr lang="en-US" sz="1400" dirty="0"/>
@@ -10406,7 +10524,7 @@
             </p:txBody>
           </p:sp>
         </mc:Choice>
-        <mc:Fallback xmlns="">
+        <mc:Fallback>
           <p:sp>
             <p:nvSpPr>
               <p:cNvPr id="3" name="Content Placeholder 2" descr="n -step methods let us choose the amount of bootstrapping from 1-step to no bootstrapping (MC). Advantage over one-step methods:. Learning: Looking more steps ahead speeds up learning, especially for sparse rewards. Error reduction: Significantly reduces the bootstrapping error (bias) at the cost of increased variance. An intermediate amount of bootstrapping typically performs better in terms of the variance/bias tradeoff than the one-step and MC extremes. n is application-dependent and can be tuned. Drawback:. Delay: Updates are delayed n -step since future events (rewards and states) are needed. Computation: More computation per time step and higher memory needs than one-step methods. Eligibility traces address the delay and computation drawbacks. We will cover these methods later">
@@ -10431,7 +10549,7 @@
               <a:blipFill>
                 <a:blip r:embed="rId3"/>
                 <a:stretch>
-                  <a:fillRect l="-649" t="-919"/>
+                  <a:fillRect l="-649" t="-5209"/>
                 </a:stretch>
               </a:blipFill>
             </p:spPr>
@@ -10604,33 +10722,15 @@
                                   </p:childTnLst>
                                 </p:cTn>
                               </p:par>
-                            </p:childTnLst>
-                          </p:cTn>
-                        </p:par>
-                      </p:childTnLst>
-                    </p:cTn>
-                  </p:par>
-                  <p:par>
-                    <p:cTn id="13" fill="hold">
-                      <p:stCondLst>
-                        <p:cond delay="indefinite"/>
-                      </p:stCondLst>
-                      <p:childTnLst>
-                        <p:par>
-                          <p:cTn id="14" fill="hold">
-                            <p:stCondLst>
-                              <p:cond delay="0"/>
-                            </p:stCondLst>
-                            <p:childTnLst>
                               <p:par>
-                                <p:cTn id="15" presetID="1" presetClass="entr" presetSubtype="0" fill="hold" nodeType="clickEffect">
+                                <p:cTn id="13" presetID="1" presetClass="entr" presetSubtype="0" fill="hold" nodeType="withEffect">
                                   <p:stCondLst>
                                     <p:cond delay="0"/>
                                   </p:stCondLst>
                                   <p:childTnLst>
                                     <p:set>
                                       <p:cBhvr>
-                                        <p:cTn id="16" dur="1" fill="hold">
+                                        <p:cTn id="14" dur="1" fill="hold">
                                           <p:stCondLst>
                                             <p:cond delay="0"/>
                                           </p:stCondLst>
@@ -10638,7 +10738,7 @@
                                         <p:tgtEl>
                                           <p:spTgt spid="3">
                                             <p:txEl>
-                                              <p:pRg st="7" end="7"/>
+                                              <p:pRg st="6" end="6"/>
                                             </p:txEl>
                                           </p:spTgt>
                                         </p:tgtEl>
@@ -10653,8 +10753,26 @@
                                   </p:childTnLst>
                                 </p:cTn>
                               </p:par>
+                            </p:childTnLst>
+                          </p:cTn>
+                        </p:par>
+                      </p:childTnLst>
+                    </p:cTn>
+                  </p:par>
+                  <p:par>
+                    <p:cTn id="15" fill="hold">
+                      <p:stCondLst>
+                        <p:cond delay="indefinite"/>
+                      </p:stCondLst>
+                      <p:childTnLst>
+                        <p:par>
+                          <p:cTn id="16" fill="hold">
+                            <p:stCondLst>
+                              <p:cond delay="0"/>
+                            </p:stCondLst>
+                            <p:childTnLst>
                               <p:par>
-                                <p:cTn id="17" presetID="1" presetClass="entr" presetSubtype="0" fill="hold" nodeType="withEffect">
+                                <p:cTn id="17" presetID="1" presetClass="entr" presetSubtype="0" fill="hold" nodeType="clickEffect">
                                   <p:stCondLst>
                                     <p:cond delay="0"/>
                                   </p:stCondLst>
@@ -10715,33 +10833,15 @@
                                   </p:childTnLst>
                                 </p:cTn>
                               </p:par>
-                            </p:childTnLst>
-                          </p:cTn>
-                        </p:par>
-                      </p:childTnLst>
-                    </p:cTn>
-                  </p:par>
-                  <p:par>
-                    <p:cTn id="21" fill="hold">
-                      <p:stCondLst>
-                        <p:cond delay="indefinite"/>
-                      </p:stCondLst>
-                      <p:childTnLst>
-                        <p:par>
-                          <p:cTn id="22" fill="hold">
-                            <p:stCondLst>
-                              <p:cond delay="0"/>
-                            </p:stCondLst>
-                            <p:childTnLst>
                               <p:par>
-                                <p:cTn id="23" presetID="1" presetClass="entr" presetSubtype="0" fill="hold" nodeType="clickEffect">
+                                <p:cTn id="21" presetID="1" presetClass="entr" presetSubtype="0" fill="hold" nodeType="withEffect">
                                   <p:stCondLst>
                                     <p:cond delay="0"/>
                                   </p:stCondLst>
                                   <p:childTnLst>
                                     <p:set>
                                       <p:cBhvr>
-                                        <p:cTn id="24" dur="1" fill="hold">
+                                        <p:cTn id="22" dur="1" fill="hold">
                                           <p:stCondLst>
                                             <p:cond delay="0"/>
                                           </p:stCondLst>
@@ -10749,7 +10849,7 @@
                                         <p:tgtEl>
                                           <p:spTgt spid="3">
                                             <p:txEl>
-                                              <p:pRg st="11" end="11"/>
+                                              <p:pRg st="10" end="10"/>
                                             </p:txEl>
                                           </p:spTgt>
                                         </p:tgtEl>
@@ -20196,8 +20296,8 @@
         </p:blipFill>
         <p:spPr>
           <a:xfrm>
-            <a:off x="2213110" y="1311069"/>
-            <a:ext cx="7765780" cy="5181805"/>
+            <a:off x="2720643" y="1128393"/>
+            <a:ext cx="8045837" cy="5368676"/>
           </a:xfrm>
           <a:prstGeom prst="rect">
             <a:avLst/>
@@ -20218,7 +20318,7 @@
         </p:nvSpPr>
         <p:spPr>
           <a:xfrm>
-            <a:off x="4424253" y="4954746"/>
+            <a:off x="4982115" y="4958940"/>
             <a:ext cx="3664581" cy="338554"/>
           </a:xfrm>
           <a:prstGeom prst="rect">
@@ -20256,7 +20356,7 @@
         </p:nvSpPr>
         <p:spPr>
           <a:xfrm>
-            <a:off x="383152" y="3720372"/>
+            <a:off x="941014" y="3724566"/>
             <a:ext cx="1829957" cy="588954"/>
           </a:xfrm>
           <a:prstGeom prst="wedgeRoundRectCallout">
@@ -20295,8 +20395,8 @@
           </a:p>
         </p:txBody>
       </p:sp>
-      <mc:AlternateContent xmlns:mc="http://schemas.openxmlformats.org/markup-compatibility/2006" xmlns:a14="http://schemas.microsoft.com/office/drawing/2010/main">
-        <mc:Choice Requires="a14">
+      <mc:AlternateContent xmlns:mc="http://schemas.openxmlformats.org/markup-compatibility/2006">
+        <mc:Choice xmlns:a14="http://schemas.microsoft.com/office/drawing/2010/main" Requires="a14">
           <p:sp>
             <p:nvSpPr>
               <p:cNvPr id="12" name="Speech Bubble: Rectangle with Corners Rounded 11">
@@ -20314,7 +20414,7 @@
             </p:nvSpPr>
             <p:spPr>
               <a:xfrm>
-                <a:off x="209406" y="4760687"/>
+                <a:off x="767268" y="4764881"/>
                 <a:ext cx="2003704" cy="786244"/>
               </a:xfrm>
               <a:prstGeom prst="wedgeRoundRectCallout">
@@ -20377,7 +20477,7 @@
             </p:txBody>
           </p:sp>
         </mc:Choice>
-        <mc:Fallback xmlns="">
+        <mc:Fallback>
           <p:sp>
             <p:nvSpPr>
               <p:cNvPr id="12" name="Speech Bubble: Rectangle with Corners Rounded 11">
@@ -20397,7 +20497,7 @@
             </p:nvSpPr>
             <p:spPr>
               <a:xfrm>
-                <a:off x="209406" y="4760687"/>
+                <a:off x="767268" y="4764881"/>
                 <a:ext cx="2003704" cy="786244"/>
               </a:xfrm>
               <a:prstGeom prst="wedgeRoundRectCallout">
@@ -20429,8 +20529,8 @@
           </p:sp>
         </mc:Fallback>
       </mc:AlternateContent>
-      <mc:AlternateContent xmlns:mc="http://schemas.openxmlformats.org/markup-compatibility/2006" xmlns:a14="http://schemas.microsoft.com/office/drawing/2010/main">
-        <mc:Choice Requires="a14">
+      <mc:AlternateContent xmlns:mc="http://schemas.openxmlformats.org/markup-compatibility/2006">
+        <mc:Choice xmlns:a14="http://schemas.microsoft.com/office/drawing/2010/main" Requires="a14">
           <p:sp>
             <p:nvSpPr>
               <p:cNvPr id="13" name="Speech Bubble: Rectangle with Corners Rounded 12">
@@ -20448,13 +20548,13 @@
             </p:nvSpPr>
             <p:spPr>
               <a:xfrm>
-                <a:off x="7425988" y="5293300"/>
+                <a:off x="8510446" y="5498908"/>
                 <a:ext cx="2329544" cy="1258502"/>
               </a:xfrm>
               <a:prstGeom prst="wedgeRoundRectCallout">
                 <a:avLst>
-                  <a:gd name="adj1" fmla="val -73081"/>
-                  <a:gd name="adj2" fmla="val -20962"/>
+                  <a:gd name="adj1" fmla="val -86945"/>
+                  <a:gd name="adj2" fmla="val -41293"/>
                   <a:gd name="adj3" fmla="val 16667"/>
                 </a:avLst>
               </a:prstGeom>
@@ -20628,7 +20728,7 @@
             </p:txBody>
           </p:sp>
         </mc:Choice>
-        <mc:Fallback xmlns="">
+        <mc:Fallback>
           <p:sp>
             <p:nvSpPr>
               <p:cNvPr id="13" name="Speech Bubble: Rectangle with Corners Rounded 12">
@@ -20648,20 +20748,20 @@
             </p:nvSpPr>
             <p:spPr>
               <a:xfrm>
-                <a:off x="7425988" y="5293300"/>
+                <a:off x="8510446" y="5498908"/>
                 <a:ext cx="2329544" cy="1258502"/>
               </a:xfrm>
               <a:prstGeom prst="wedgeRoundRectCallout">
                 <a:avLst>
-                  <a:gd name="adj1" fmla="val -73081"/>
-                  <a:gd name="adj2" fmla="val -20962"/>
+                  <a:gd name="adj1" fmla="val -86945"/>
+                  <a:gd name="adj2" fmla="val -41293"/>
                   <a:gd name="adj3" fmla="val 16667"/>
                 </a:avLst>
               </a:prstGeom>
               <a:blipFill>
                 <a:blip r:embed="rId5"/>
                 <a:stretch>
-                  <a:fillRect t="-2970" b="-7921"/>
+                  <a:fillRect t="-2871" b="-7656"/>
                 </a:stretch>
               </a:blipFill>
             </p:spPr>
@@ -20680,8 +20780,8 @@
           </p:sp>
         </mc:Fallback>
       </mc:AlternateContent>
-      <mc:AlternateContent xmlns:mc="http://schemas.openxmlformats.org/markup-compatibility/2006" xmlns:a14="http://schemas.microsoft.com/office/drawing/2010/main">
-        <mc:Choice Requires="a14">
+      <mc:AlternateContent xmlns:mc="http://schemas.openxmlformats.org/markup-compatibility/2006">
+        <mc:Choice xmlns:a14="http://schemas.microsoft.com/office/drawing/2010/main" Requires="a14">
           <p:sp>
             <p:nvSpPr>
               <p:cNvPr id="14" name="Speech Bubble: Rectangle with Corners Rounded 13">
@@ -20699,7 +20799,7 @@
             </p:nvSpPr>
             <p:spPr>
               <a:xfrm>
-                <a:off x="292308" y="5702958"/>
+                <a:off x="850170" y="5707152"/>
                 <a:ext cx="1920802" cy="645376"/>
               </a:xfrm>
               <a:prstGeom prst="wedgeRoundRectCallout">
@@ -20753,7 +20853,7 @@
             </p:txBody>
           </p:sp>
         </mc:Choice>
-        <mc:Fallback xmlns="">
+        <mc:Fallback>
           <p:sp>
             <p:nvSpPr>
               <p:cNvPr id="14" name="Speech Bubble: Rectangle with Corners Rounded 13">
@@ -20773,7 +20873,7 @@
             </p:nvSpPr>
             <p:spPr>
               <a:xfrm>
-                <a:off x="292308" y="5702958"/>
+                <a:off x="850170" y="5707152"/>
                 <a:ext cx="1920802" cy="645376"/>
               </a:xfrm>
               <a:prstGeom prst="wedgeRoundRectCallout">
@@ -20786,7 +20886,7 @@
               <a:blipFill>
                 <a:blip r:embed="rId6"/>
                 <a:stretch>
-                  <a:fillRect b="-5660"/>
+                  <a:fillRect b="-5505"/>
                 </a:stretch>
               </a:blipFill>
             </p:spPr>
@@ -20807,13 +20907,10 @@
       </mc:AlternateContent>
       <p:grpSp>
         <p:nvGrpSpPr>
-          <p:cNvPr id="20" name="Group 19">
+          <p:cNvPr id="4" name="Group 3">
             <a:extLst>
               <a:ext uri="{FF2B5EF4-FFF2-40B4-BE49-F238E27FC236}">
-                <a16:creationId xmlns:a16="http://schemas.microsoft.com/office/drawing/2014/main" id="{DE859F95-A5C2-CE37-B3D7-5DC8E7DDC4E6}"/>
-              </a:ext>
-              <a:ext uri="{C183D7F6-B498-43B3-948B-1728B52AA6E4}">
-                <adec:decorative xmlns:adec="http://schemas.microsoft.com/office/drawing/2017/decorative" val="1"/>
+                <a16:creationId xmlns:a16="http://schemas.microsoft.com/office/drawing/2014/main" id="{AF682137-4399-D068-602B-53B27612B383}"/>
               </a:ext>
             </a:extLst>
           </p:cNvPr>
@@ -20822,18 +20919,21 @@
         </p:nvGrpSpPr>
         <p:grpSpPr>
           <a:xfrm>
-            <a:off x="9986271" y="4309326"/>
-            <a:ext cx="2365690" cy="1216727"/>
-            <a:chOff x="9986271" y="4309326"/>
-            <a:chExt cx="2365690" cy="1216727"/>
+            <a:off x="7688504" y="2753168"/>
+            <a:ext cx="2587176" cy="1328076"/>
+            <a:chOff x="7130642" y="2748974"/>
+            <a:chExt cx="2587176" cy="1328076"/>
           </a:xfrm>
         </p:grpSpPr>
         <p:grpSp>
           <p:nvGrpSpPr>
-            <p:cNvPr id="18" name="Group 17" descr="Time line: an arrow with tau on the left and t on the right, with a brace over the n steps between them.">
+            <p:cNvPr id="20" name="Group 19">
               <a:extLst>
                 <a:ext uri="{FF2B5EF4-FFF2-40B4-BE49-F238E27FC236}">
-                  <a16:creationId xmlns:a16="http://schemas.microsoft.com/office/drawing/2014/main" id="{6BD81C03-2FFC-3430-6A96-CC215F8CB002}"/>
+                  <a16:creationId xmlns:a16="http://schemas.microsoft.com/office/drawing/2014/main" id="{DE859F95-A5C2-CE37-B3D7-5DC8E7DDC4E6}"/>
+                </a:ext>
+                <a:ext uri="{C183D7F6-B498-43B3-948B-1728B52AA6E4}">
+                  <adec:decorative xmlns:adec="http://schemas.microsoft.com/office/drawing/2017/decorative" val="1"/>
                 </a:ext>
               </a:extLst>
             </p:cNvPr>
@@ -20842,65 +20942,412 @@
           </p:nvGrpSpPr>
           <p:grpSpPr>
             <a:xfrm>
-              <a:off x="9986271" y="4309326"/>
-              <a:ext cx="1996323" cy="913879"/>
-              <a:chOff x="10044440" y="1032968"/>
-              <a:chExt cx="1996323" cy="913879"/>
+              <a:off x="7352128" y="2748974"/>
+              <a:ext cx="2365690" cy="1216727"/>
+              <a:chOff x="9986271" y="4309326"/>
+              <a:chExt cx="2365690" cy="1216727"/>
             </a:xfrm>
           </p:grpSpPr>
-          <p:cxnSp>
-            <p:nvCxnSpPr>
-              <p:cNvPr id="7" name="Straight Connector 6">
+          <p:grpSp>
+            <p:nvGrpSpPr>
+              <p:cNvPr id="18" name="Group 17" descr="Time line: an arrow with tau on the left and t on the right, with a brace over the n steps between them.">
                 <a:extLst>
                   <a:ext uri="{FF2B5EF4-FFF2-40B4-BE49-F238E27FC236}">
-                    <a16:creationId xmlns:a16="http://schemas.microsoft.com/office/drawing/2014/main" id="{D8B9856B-B3C4-5BCC-42AC-811D84A88D50}"/>
-                  </a:ext>
-                  <a:ext uri="{C183D7F6-B498-43B3-948B-1728B52AA6E4}">
-                    <adec:decorative xmlns:adec="http://schemas.microsoft.com/office/drawing/2017/decorative" val="1"/>
+                    <a16:creationId xmlns:a16="http://schemas.microsoft.com/office/drawing/2014/main" id="{6BD81C03-2FFC-3430-6A96-CC215F8CB002}"/>
                   </a:ext>
                 </a:extLst>
               </p:cNvPr>
-              <p:cNvCxnSpPr>
-                <a:cxnSpLocks/>
-              </p:cNvCxnSpPr>
+              <p:cNvGrpSpPr/>
               <p:nvPr/>
-            </p:nvCxnSpPr>
-            <p:spPr>
-              <a:xfrm flipH="1">
-                <a:off x="10044440" y="1577515"/>
-                <a:ext cx="1996323" cy="0"/>
+            </p:nvGrpSpPr>
+            <p:grpSpPr>
+              <a:xfrm>
+                <a:off x="9986271" y="4309326"/>
+                <a:ext cx="1996323" cy="913879"/>
+                <a:chOff x="10044440" y="1032968"/>
+                <a:chExt cx="1996323" cy="913879"/>
               </a:xfrm>
-              <a:prstGeom prst="line">
-                <a:avLst/>
-              </a:prstGeom>
-              <a:ln>
-                <a:headEnd type="triangle" w="med" len="med"/>
-                <a:tailEnd type="none" w="med" len="med"/>
-              </a:ln>
-            </p:spPr>
-            <p:style>
-              <a:lnRef idx="2">
-                <a:schemeClr val="accent1"/>
-              </a:lnRef>
-              <a:fillRef idx="0">
-                <a:schemeClr val="accent1"/>
-              </a:fillRef>
-              <a:effectRef idx="1">
-                <a:schemeClr val="accent1"/>
-              </a:effectRef>
-              <a:fontRef idx="minor">
-                <a:schemeClr val="tx1"/>
-              </a:fontRef>
-            </p:style>
-          </p:cxnSp>
+            </p:grpSpPr>
+            <p:cxnSp>
+              <p:nvCxnSpPr>
+                <p:cNvPr id="7" name="Straight Connector 6">
+                  <a:extLst>
+                    <a:ext uri="{FF2B5EF4-FFF2-40B4-BE49-F238E27FC236}">
+                      <a16:creationId xmlns:a16="http://schemas.microsoft.com/office/drawing/2014/main" id="{D8B9856B-B3C4-5BCC-42AC-811D84A88D50}"/>
+                    </a:ext>
+                    <a:ext uri="{C183D7F6-B498-43B3-948B-1728B52AA6E4}">
+                      <adec:decorative xmlns:adec="http://schemas.microsoft.com/office/drawing/2017/decorative" val="1"/>
+                    </a:ext>
+                  </a:extLst>
+                </p:cNvPr>
+                <p:cNvCxnSpPr>
+                  <a:cxnSpLocks/>
+                </p:cNvCxnSpPr>
+                <p:nvPr/>
+              </p:nvCxnSpPr>
+              <p:spPr>
+                <a:xfrm flipH="1">
+                  <a:off x="10044440" y="1577515"/>
+                  <a:ext cx="1996323" cy="0"/>
+                </a:xfrm>
+                <a:prstGeom prst="line">
+                  <a:avLst/>
+                </a:prstGeom>
+                <a:ln>
+                  <a:headEnd type="triangle" w="med" len="med"/>
+                  <a:tailEnd type="none" w="med" len="med"/>
+                </a:ln>
+              </p:spPr>
+              <p:style>
+                <a:lnRef idx="2">
+                  <a:schemeClr val="accent1"/>
+                </a:lnRef>
+                <a:fillRef idx="0">
+                  <a:schemeClr val="accent1"/>
+                </a:fillRef>
+                <a:effectRef idx="1">
+                  <a:schemeClr val="accent1"/>
+                </a:effectRef>
+                <a:fontRef idx="minor">
+                  <a:schemeClr val="tx1"/>
+                </a:fontRef>
+              </p:style>
+            </p:cxnSp>
+            <mc:AlternateContent xmlns:mc="http://schemas.openxmlformats.org/markup-compatibility/2006" xmlns:a14="http://schemas.microsoft.com/office/drawing/2010/main">
+              <mc:Choice Requires="a14">
+                <p:sp>
+                  <p:nvSpPr>
+                    <p:cNvPr id="8" name="TextBox 7" descr="Equation: t">
+                      <a:extLst>
+                        <a:ext uri="{FF2B5EF4-FFF2-40B4-BE49-F238E27FC236}">
+                          <a16:creationId xmlns:a16="http://schemas.microsoft.com/office/drawing/2014/main" id="{44A9B8B8-C293-91A1-01EB-1F759EBE74C9}"/>
+                        </a:ext>
+                      </a:extLst>
+                    </p:cNvPr>
+                    <p:cNvSpPr txBox="1"/>
+                    <p:nvPr/>
+                  </p:nvSpPr>
+                  <p:spPr>
+                    <a:xfrm>
+                      <a:off x="11437576" y="1577515"/>
+                      <a:ext cx="376929" cy="369332"/>
+                    </a:xfrm>
+                    <a:prstGeom prst="rect">
+                      <a:avLst/>
+                    </a:prstGeom>
+                    <a:noFill/>
+                  </p:spPr>
+                  <p:txBody>
+                    <a:bodyPr wrap="square" rtlCol="0">
+                      <a:spAutoFit/>
+                    </a:bodyPr>
+                    <a:lstStyle/>
+                    <a:p>
+                      <a:pPr/>
+                      <a14:m>
+                        <m:oMathPara xmlns:m="http://schemas.openxmlformats.org/officeDocument/2006/math">
+                          <m:oMath>
+                            <m:r>
+                              <a:rPr lang="en-US" b="0" i="1" smtClean="0">
+                                <a:latin typeface="Cambria Math" panose="02040503050406030204" pitchFamily="18" charset="0"/>
+                              </a:rPr>
+                              <m:t>𝑡</m:t>
+                            </m:r>
+                          </m:oMath>
+                        </m:oMathPara>
+                      </a14:m>
+                      <a:endParaRPr lang="en-US" dirty="0"/>
+                    </a:p>
+                  </p:txBody>
+                </p:sp>
+              </mc:Choice>
+              <mc:Fallback xmlns="">
+                <p:sp>
+                  <p:nvSpPr>
+                    <p:cNvPr id="8" name="TextBox 7" descr="Equation: t">
+                      <a:extLst>
+                        <a:ext uri="{FF2B5EF4-FFF2-40B4-BE49-F238E27FC236}">
+                          <a16:creationId xmlns:a16="http://schemas.microsoft.com/office/drawing/2014/main" id="{44A9B8B8-C293-91A1-01EB-1F759EBE74C9}"/>
+                        </a:ext>
+                      </a:extLst>
+                    </p:cNvPr>
+                    <p:cNvSpPr txBox="1">
+                      <a:spLocks noRot="1" noChangeAspect="1" noMove="1" noResize="1" noEditPoints="1" noAdjustHandles="1" noChangeArrowheads="1" noChangeShapeType="1" noTextEdit="1"/>
+                    </p:cNvSpPr>
+                    <p:nvPr/>
+                  </p:nvSpPr>
+                  <p:spPr>
+                    <a:xfrm>
+                      <a:off x="11437576" y="1577515"/>
+                      <a:ext cx="376929" cy="369332"/>
+                    </a:xfrm>
+                    <a:prstGeom prst="rect">
+                      <a:avLst/>
+                    </a:prstGeom>
+                    <a:blipFill>
+                      <a:blip r:embed="rId7"/>
+                      <a:stretch>
+                        <a:fillRect/>
+                      </a:stretch>
+                    </a:blipFill>
+                  </p:spPr>
+                  <p:txBody>
+                    <a:bodyPr/>
+                    <a:lstStyle/>
+                    <a:p>
+                      <a:r>
+                        <a:rPr lang="en-US">
+                          <a:noFill/>
+                        </a:rPr>
+                        <a:t> </a:t>
+                      </a:r>
+                    </a:p>
+                  </p:txBody>
+                </p:sp>
+              </mc:Fallback>
+            </mc:AlternateContent>
+            <mc:AlternateContent xmlns:mc="http://schemas.openxmlformats.org/markup-compatibility/2006" xmlns:a14="http://schemas.microsoft.com/office/drawing/2010/main">
+              <mc:Choice Requires="a14">
+                <p:sp>
+                  <p:nvSpPr>
+                    <p:cNvPr id="11" name="TextBox 10" descr="Equation: tau">
+                      <a:extLst>
+                        <a:ext uri="{FF2B5EF4-FFF2-40B4-BE49-F238E27FC236}">
+                          <a16:creationId xmlns:a16="http://schemas.microsoft.com/office/drawing/2014/main" id="{D60D0466-EF57-5F71-0C88-02AB91FDD90D}"/>
+                        </a:ext>
+                      </a:extLst>
+                    </p:cNvPr>
+                    <p:cNvSpPr txBox="1"/>
+                    <p:nvPr/>
+                  </p:nvSpPr>
+                  <p:spPr>
+                    <a:xfrm>
+                      <a:off x="10044440" y="1577515"/>
+                      <a:ext cx="376929" cy="369332"/>
+                    </a:xfrm>
+                    <a:prstGeom prst="rect">
+                      <a:avLst/>
+                    </a:prstGeom>
+                    <a:noFill/>
+                  </p:spPr>
+                  <p:txBody>
+                    <a:bodyPr wrap="square" rtlCol="0">
+                      <a:spAutoFit/>
+                    </a:bodyPr>
+                    <a:lstStyle/>
+                    <a:p>
+                      <a:pPr/>
+                      <a14:m>
+                        <m:oMathPara xmlns:m="http://schemas.openxmlformats.org/officeDocument/2006/math">
+                          <m:oMath>
+                            <m:r>
+                              <a:rPr lang="en-US" b="0" i="1" smtClean="0">
+                                <a:latin typeface="Cambria Math" panose="02040503050406030204" pitchFamily="18" charset="0"/>
+                              </a:rPr>
+                              <m:t>𝜏</m:t>
+                            </m:r>
+                          </m:oMath>
+                        </m:oMathPara>
+                      </a14:m>
+                      <a:endParaRPr lang="en-US" dirty="0"/>
+                    </a:p>
+                  </p:txBody>
+                </p:sp>
+              </mc:Choice>
+              <mc:Fallback xmlns="">
+                <p:sp>
+                  <p:nvSpPr>
+                    <p:cNvPr id="11" name="TextBox 10" descr="Equation: tau">
+                      <a:extLst>
+                        <a:ext uri="{FF2B5EF4-FFF2-40B4-BE49-F238E27FC236}">
+                          <a16:creationId xmlns:a16="http://schemas.microsoft.com/office/drawing/2014/main" id="{D60D0466-EF57-5F71-0C88-02AB91FDD90D}"/>
+                        </a:ext>
+                      </a:extLst>
+                    </p:cNvPr>
+                    <p:cNvSpPr txBox="1">
+                      <a:spLocks noRot="1" noChangeAspect="1" noMove="1" noResize="1" noEditPoints="1" noAdjustHandles="1" noChangeArrowheads="1" noChangeShapeType="1" noTextEdit="1"/>
+                    </p:cNvSpPr>
+                    <p:nvPr/>
+                  </p:nvSpPr>
+                  <p:spPr>
+                    <a:xfrm>
+                      <a:off x="10044440" y="1577515"/>
+                      <a:ext cx="376929" cy="369332"/>
+                    </a:xfrm>
+                    <a:prstGeom prst="rect">
+                      <a:avLst/>
+                    </a:prstGeom>
+                    <a:blipFill>
+                      <a:blip r:embed="rId8"/>
+                      <a:stretch>
+                        <a:fillRect/>
+                      </a:stretch>
+                    </a:blipFill>
+                  </p:spPr>
+                  <p:txBody>
+                    <a:bodyPr/>
+                    <a:lstStyle/>
+                    <a:p>
+                      <a:r>
+                        <a:rPr lang="en-US">
+                          <a:noFill/>
+                        </a:rPr>
+                        <a:t> </a:t>
+                      </a:r>
+                    </a:p>
+                  </p:txBody>
+                </p:sp>
+              </mc:Fallback>
+            </mc:AlternateContent>
+            <mc:AlternateContent xmlns:mc="http://schemas.openxmlformats.org/markup-compatibility/2006" xmlns:a14="http://schemas.microsoft.com/office/drawing/2010/main">
+              <mc:Choice Requires="a14">
+                <p:sp>
+                  <p:nvSpPr>
+                    <p:cNvPr id="15" name="TextBox 14" descr="n steps">
+                      <a:extLst>
+                        <a:ext uri="{FF2B5EF4-FFF2-40B4-BE49-F238E27FC236}">
+                          <a16:creationId xmlns:a16="http://schemas.microsoft.com/office/drawing/2014/main" id="{CA6A7031-056F-EB6D-642F-809EE4320E9D}"/>
+                        </a:ext>
+                      </a:extLst>
+                    </p:cNvPr>
+                    <p:cNvSpPr txBox="1"/>
+                    <p:nvPr/>
+                  </p:nvSpPr>
+                  <p:spPr>
+                    <a:xfrm>
+                      <a:off x="10416206" y="1032968"/>
+                      <a:ext cx="1111291" cy="369332"/>
+                    </a:xfrm>
+                    <a:prstGeom prst="rect">
+                      <a:avLst/>
+                    </a:prstGeom>
+                    <a:noFill/>
+                  </p:spPr>
+                  <p:txBody>
+                    <a:bodyPr wrap="square" rtlCol="0">
+                      <a:spAutoFit/>
+                    </a:bodyPr>
+                    <a:lstStyle/>
+                    <a:p>
+                      <a14:m>
+                        <m:oMath xmlns:m="http://schemas.openxmlformats.org/officeDocument/2006/math">
+                          <m:r>
+                            <a:rPr lang="en-US" b="0" i="1" smtClean="0">
+                              <a:latin typeface="Cambria Math" panose="02040503050406030204" pitchFamily="18" charset="0"/>
+                            </a:rPr>
+                            <m:t>𝑛</m:t>
+                          </m:r>
+                        </m:oMath>
+                      </a14:m>
+                      <a:r>
+                        <a:rPr lang="en-US" dirty="0"/>
+                        <a:t> steps</a:t>
+                      </a:r>
+                    </a:p>
+                  </p:txBody>
+                </p:sp>
+              </mc:Choice>
+              <mc:Fallback xmlns="">
+                <p:sp>
+                  <p:nvSpPr>
+                    <p:cNvPr id="15" name="TextBox 14" descr="n steps">
+                      <a:extLst>
+                        <a:ext uri="{FF2B5EF4-FFF2-40B4-BE49-F238E27FC236}">
+                          <a16:creationId xmlns:a16="http://schemas.microsoft.com/office/drawing/2014/main" id="{CA6A7031-056F-EB6D-642F-809EE4320E9D}"/>
+                        </a:ext>
+                      </a:extLst>
+                    </p:cNvPr>
+                    <p:cNvSpPr txBox="1">
+                      <a:spLocks noRot="1" noChangeAspect="1" noMove="1" noResize="1" noEditPoints="1" noAdjustHandles="1" noChangeArrowheads="1" noChangeShapeType="1" noTextEdit="1"/>
+                    </p:cNvSpPr>
+                    <p:nvPr/>
+                  </p:nvSpPr>
+                  <p:spPr>
+                    <a:xfrm>
+                      <a:off x="10416206" y="1032968"/>
+                      <a:ext cx="1111291" cy="369332"/>
+                    </a:xfrm>
+                    <a:prstGeom prst="rect">
+                      <a:avLst/>
+                    </a:prstGeom>
+                    <a:blipFill>
+                      <a:blip r:embed="rId9"/>
+                      <a:stretch>
+                        <a:fillRect t="-8333" b="-28333"/>
+                      </a:stretch>
+                    </a:blipFill>
+                  </p:spPr>
+                  <p:txBody>
+                    <a:bodyPr/>
+                    <a:lstStyle/>
+                    <a:p>
+                      <a:r>
+                        <a:rPr lang="en-US">
+                          <a:noFill/>
+                        </a:rPr>
+                        <a:t> </a:t>
+                      </a:r>
+                    </a:p>
+                  </p:txBody>
+                </p:sp>
+              </mc:Fallback>
+            </mc:AlternateContent>
+            <p:sp>
+              <p:nvSpPr>
+                <p:cNvPr id="16" name="Right Brace 15">
+                  <a:extLst>
+                    <a:ext uri="{FF2B5EF4-FFF2-40B4-BE49-F238E27FC236}">
+                      <a16:creationId xmlns:a16="http://schemas.microsoft.com/office/drawing/2014/main" id="{DF1F0B09-177D-1C23-8922-13B60D4726FE}"/>
+                    </a:ext>
+                    <a:ext uri="{C183D7F6-B498-43B3-948B-1728B52AA6E4}">
+                      <adec:decorative xmlns:adec="http://schemas.microsoft.com/office/drawing/2017/decorative" val="1"/>
+                    </a:ext>
+                  </a:extLst>
+                </p:cNvPr>
+                <p:cNvSpPr/>
+                <p:nvPr/>
+              </p:nvSpPr>
+              <p:spPr>
+                <a:xfrm rot="16200000">
+                  <a:off x="10847163" y="722444"/>
+                  <a:ext cx="146575" cy="1416969"/>
+                </a:xfrm>
+                <a:prstGeom prst="rightBrace">
+                  <a:avLst/>
+                </a:prstGeom>
+              </p:spPr>
+              <p:style>
+                <a:lnRef idx="2">
+                  <a:schemeClr val="accent1"/>
+                </a:lnRef>
+                <a:fillRef idx="0">
+                  <a:schemeClr val="accent1"/>
+                </a:fillRef>
+                <a:effectRef idx="1">
+                  <a:schemeClr val="accent1"/>
+                </a:effectRef>
+                <a:fontRef idx="minor">
+                  <a:schemeClr val="tx1"/>
+                </a:fontRef>
+              </p:style>
+              <p:txBody>
+                <a:bodyPr rtlCol="0" anchor="ctr"/>
+                <a:lstStyle/>
+                <a:p>
+                  <a:pPr algn="ctr"/>
+                  <a:endParaRPr lang="en-US"/>
+                </a:p>
+              </p:txBody>
+            </p:sp>
+          </p:grpSp>
           <mc:AlternateContent xmlns:mc="http://schemas.openxmlformats.org/markup-compatibility/2006" xmlns:a14="http://schemas.microsoft.com/office/drawing/2010/main">
             <mc:Choice Requires="a14">
               <p:sp>
                 <p:nvSpPr>
-                  <p:cNvPr id="8" name="TextBox 7" descr="Equation: t">
+                  <p:cNvPr id="19" name="TextBox 18" descr="Observed Rs plus V(S sub t)">
                     <a:extLst>
                       <a:ext uri="{FF2B5EF4-FFF2-40B4-BE49-F238E27FC236}">
-                        <a16:creationId xmlns:a16="http://schemas.microsoft.com/office/drawing/2014/main" id="{44A9B8B8-C293-91A1-01EB-1F759EBE74C9}"/>
+                        <a16:creationId xmlns:a16="http://schemas.microsoft.com/office/drawing/2014/main" id="{ABD183B9-C0A7-1967-D463-484C00285B8B}"/>
                       </a:ext>
                     </a:extLst>
                   </p:cNvPr>
@@ -20909,8 +21356,8 @@
                 </p:nvSpPr>
                 <p:spPr>
                   <a:xfrm>
-                    <a:off x="11437576" y="1577515"/>
-                    <a:ext cx="376929" cy="369332"/>
+                    <a:off x="10355638" y="5218276"/>
+                    <a:ext cx="1996323" cy="307777"/>
                   </a:xfrm>
                   <a:prstGeom prst="rect">
                     <a:avLst/>
@@ -20923,20 +21370,79 @@
                   </a:bodyPr>
                   <a:lstStyle/>
                   <a:p>
-                    <a:pPr/>
+                    <a:r>
+                      <a:rPr lang="en-US" sz="1400" dirty="0"/>
+                      <a:t>Observed </a:t>
+                    </a:r>
                     <a14:m>
-                      <m:oMathPara xmlns:m="http://schemas.openxmlformats.org/officeDocument/2006/math">
-                        <m:oMath>
-                          <m:r>
-                            <a:rPr lang="en-US" b="0" i="1" smtClean="0">
-                              <a:latin typeface="Cambria Math" panose="02040503050406030204" pitchFamily="18" charset="0"/>
-                            </a:rPr>
-                            <m:t>𝑡</m:t>
-                          </m:r>
-                        </m:oMath>
-                      </m:oMathPara>
+                      <m:oMath xmlns:m="http://schemas.openxmlformats.org/officeDocument/2006/math">
+                        <m:r>
+                          <a:rPr lang="en-US" sz="1400" b="0" i="1" smtClean="0">
+                            <a:latin typeface="Cambria Math" panose="02040503050406030204" pitchFamily="18" charset="0"/>
+                          </a:rPr>
+                          <m:t>𝑅</m:t>
+                        </m:r>
+                        <m:r>
+                          <m:rPr>
+                            <m:sty m:val="p"/>
+                          </m:rPr>
+                          <a:rPr lang="en-US" sz="1400" b="0" i="0" smtClean="0">
+                            <a:latin typeface="Cambria Math" panose="02040503050406030204" pitchFamily="18" charset="0"/>
+                          </a:rPr>
+                          <m:t>s</m:t>
+                        </m:r>
+                        <m:r>
+                          <a:rPr lang="en-US" sz="1400" b="0" i="1" smtClean="0">
+                            <a:latin typeface="Cambria Math" panose="02040503050406030204" pitchFamily="18" charset="0"/>
+                          </a:rPr>
+                          <m:t>+</m:t>
+                        </m:r>
+                        <m:r>
+                          <a:rPr lang="en-US" sz="1400" b="0" i="1" smtClean="0">
+                            <a:latin typeface="Cambria Math" panose="02040503050406030204" pitchFamily="18" charset="0"/>
+                          </a:rPr>
+                          <m:t>𝑉</m:t>
+                        </m:r>
+                        <m:r>
+                          <a:rPr lang="en-US" sz="1400" b="0" i="1" smtClean="0">
+                            <a:latin typeface="Cambria Math" panose="02040503050406030204" pitchFamily="18" charset="0"/>
+                          </a:rPr>
+                          <m:t>(</m:t>
+                        </m:r>
+                        <m:sSub>
+                          <m:sSubPr>
+                            <m:ctrlPr>
+                              <a:rPr lang="en-US" sz="1400" b="0" i="1" smtClean="0">
+                                <a:latin typeface="Cambria Math" panose="02040503050406030204" pitchFamily="18" charset="0"/>
+                              </a:rPr>
+                            </m:ctrlPr>
+                          </m:sSubPr>
+                          <m:e>
+                            <m:r>
+                              <a:rPr lang="en-US" sz="1400" b="0" i="1" smtClean="0">
+                                <a:latin typeface="Cambria Math" panose="02040503050406030204" pitchFamily="18" charset="0"/>
+                              </a:rPr>
+                              <m:t>𝑆</m:t>
+                            </m:r>
+                          </m:e>
+                          <m:sub>
+                            <m:r>
+                              <a:rPr lang="en-US" sz="1400" b="0" i="1" smtClean="0">
+                                <a:latin typeface="Cambria Math" panose="02040503050406030204" pitchFamily="18" charset="0"/>
+                              </a:rPr>
+                              <m:t>𝑡</m:t>
+                            </m:r>
+                          </m:sub>
+                        </m:sSub>
+                        <m:r>
+                          <a:rPr lang="en-US" sz="1400" b="0" i="1" smtClean="0">
+                            <a:latin typeface="Cambria Math" panose="02040503050406030204" pitchFamily="18" charset="0"/>
+                          </a:rPr>
+                          <m:t>)</m:t>
+                        </m:r>
+                      </m:oMath>
                     </a14:m>
-                    <a:endParaRPr lang="en-US" dirty="0"/>
+                    <a:endParaRPr lang="en-US" sz="1400" dirty="0"/>
                   </a:p>
                 </p:txBody>
               </p:sp>
@@ -20944,10 +21450,10 @@
             <mc:Fallback xmlns="">
               <p:sp>
                 <p:nvSpPr>
-                  <p:cNvPr id="8" name="TextBox 7" descr="Equation: t">
+                  <p:cNvPr id="19" name="TextBox 18" descr="Observed Rs plus V(S sub t)">
                     <a:extLst>
                       <a:ext uri="{FF2B5EF4-FFF2-40B4-BE49-F238E27FC236}">
-                        <a16:creationId xmlns:a16="http://schemas.microsoft.com/office/drawing/2014/main" id="{44A9B8B8-C293-91A1-01EB-1F759EBE74C9}"/>
+                        <a16:creationId xmlns:a16="http://schemas.microsoft.com/office/drawing/2014/main" id="{ABD183B9-C0A7-1967-D463-484C00285B8B}"/>
                       </a:ext>
                     </a:extLst>
                   </p:cNvPr>
@@ -20958,16 +21464,16 @@
                 </p:nvSpPr>
                 <p:spPr>
                   <a:xfrm>
-                    <a:off x="11437576" y="1577515"/>
-                    <a:ext cx="376929" cy="369332"/>
+                    <a:off x="10355638" y="5218276"/>
+                    <a:ext cx="1996323" cy="307777"/>
                   </a:xfrm>
                   <a:prstGeom prst="rect">
                     <a:avLst/>
                   </a:prstGeom>
                   <a:blipFill>
-                    <a:blip r:embed="rId7"/>
+                    <a:blip r:embed="rId10"/>
                     <a:stretch>
-                      <a:fillRect/>
+                      <a:fillRect l="-917" t="-3922" b="-19608"/>
                     </a:stretch>
                   </a:blipFill>
                 </p:spPr>
@@ -20986,392 +21492,61 @@
               </p:sp>
             </mc:Fallback>
           </mc:AlternateContent>
-          <mc:AlternateContent xmlns:mc="http://schemas.openxmlformats.org/markup-compatibility/2006" xmlns:a14="http://schemas.microsoft.com/office/drawing/2010/main">
-            <mc:Choice Requires="a14">
-              <p:sp>
-                <p:nvSpPr>
-                  <p:cNvPr id="11" name="TextBox 10" descr="Equation: tau">
-                    <a:extLst>
-                      <a:ext uri="{FF2B5EF4-FFF2-40B4-BE49-F238E27FC236}">
-                        <a16:creationId xmlns:a16="http://schemas.microsoft.com/office/drawing/2014/main" id="{D60D0466-EF57-5F71-0C88-02AB91FDD90D}"/>
-                      </a:ext>
-                    </a:extLst>
-                  </p:cNvPr>
-                  <p:cNvSpPr txBox="1"/>
-                  <p:nvPr/>
-                </p:nvSpPr>
-                <p:spPr>
-                  <a:xfrm>
-                    <a:off x="10044440" y="1577515"/>
-                    <a:ext cx="376929" cy="369332"/>
-                  </a:xfrm>
-                  <a:prstGeom prst="rect">
-                    <a:avLst/>
-                  </a:prstGeom>
-                  <a:noFill/>
-                </p:spPr>
-                <p:txBody>
-                  <a:bodyPr wrap="square" rtlCol="0">
-                    <a:spAutoFit/>
-                  </a:bodyPr>
-                  <a:lstStyle/>
-                  <a:p>
-                    <a:pPr/>
-                    <a14:m>
-                      <m:oMathPara xmlns:m="http://schemas.openxmlformats.org/officeDocument/2006/math">
-                        <m:oMath>
-                          <m:r>
-                            <a:rPr lang="en-US" b="0" i="1" smtClean="0">
-                              <a:latin typeface="Cambria Math" panose="02040503050406030204" pitchFamily="18" charset="0"/>
-                            </a:rPr>
-                            <m:t>𝜏</m:t>
-                          </m:r>
-                        </m:oMath>
-                      </m:oMathPara>
-                    </a14:m>
-                    <a:endParaRPr lang="en-US" dirty="0"/>
-                  </a:p>
-                </p:txBody>
-              </p:sp>
-            </mc:Choice>
-            <mc:Fallback xmlns="">
-              <p:sp>
-                <p:nvSpPr>
-                  <p:cNvPr id="11" name="TextBox 10" descr="Equation: tau">
-                    <a:extLst>
-                      <a:ext uri="{FF2B5EF4-FFF2-40B4-BE49-F238E27FC236}">
-                        <a16:creationId xmlns:a16="http://schemas.microsoft.com/office/drawing/2014/main" id="{D60D0466-EF57-5F71-0C88-02AB91FDD90D}"/>
-                      </a:ext>
-                    </a:extLst>
-                  </p:cNvPr>
-                  <p:cNvSpPr txBox="1">
-                    <a:spLocks noRot="1" noChangeAspect="1" noMove="1" noResize="1" noEditPoints="1" noAdjustHandles="1" noChangeArrowheads="1" noChangeShapeType="1" noTextEdit="1"/>
-                  </p:cNvSpPr>
-                  <p:nvPr/>
-                </p:nvSpPr>
-                <p:spPr>
-                  <a:xfrm>
-                    <a:off x="10044440" y="1577515"/>
-                    <a:ext cx="376929" cy="369332"/>
-                  </a:xfrm>
-                  <a:prstGeom prst="rect">
-                    <a:avLst/>
-                  </a:prstGeom>
-                  <a:blipFill>
-                    <a:blip r:embed="rId8"/>
-                    <a:stretch>
-                      <a:fillRect/>
-                    </a:stretch>
-                  </a:blipFill>
-                </p:spPr>
-                <p:txBody>
-                  <a:bodyPr/>
-                  <a:lstStyle/>
-                  <a:p>
-                    <a:r>
-                      <a:rPr lang="en-US">
-                        <a:noFill/>
-                      </a:rPr>
-                      <a:t> </a:t>
-                    </a:r>
-                  </a:p>
-                </p:txBody>
-              </p:sp>
-            </mc:Fallback>
-          </mc:AlternateContent>
-          <mc:AlternateContent xmlns:mc="http://schemas.openxmlformats.org/markup-compatibility/2006" xmlns:a14="http://schemas.microsoft.com/office/drawing/2010/main">
-            <mc:Choice Requires="a14">
-              <p:sp>
-                <p:nvSpPr>
-                  <p:cNvPr id="15" name="TextBox 14" descr="n steps">
-                    <a:extLst>
-                      <a:ext uri="{FF2B5EF4-FFF2-40B4-BE49-F238E27FC236}">
-                        <a16:creationId xmlns:a16="http://schemas.microsoft.com/office/drawing/2014/main" id="{CA6A7031-056F-EB6D-642F-809EE4320E9D}"/>
-                      </a:ext>
-                    </a:extLst>
-                  </p:cNvPr>
-                  <p:cNvSpPr txBox="1"/>
-                  <p:nvPr/>
-                </p:nvSpPr>
-                <p:spPr>
-                  <a:xfrm>
-                    <a:off x="10416206" y="1032968"/>
-                    <a:ext cx="1111291" cy="369332"/>
-                  </a:xfrm>
-                  <a:prstGeom prst="rect">
-                    <a:avLst/>
-                  </a:prstGeom>
-                  <a:noFill/>
-                </p:spPr>
-                <p:txBody>
-                  <a:bodyPr wrap="square" rtlCol="0">
-                    <a:spAutoFit/>
-                  </a:bodyPr>
-                  <a:lstStyle/>
-                  <a:p>
-                    <a14:m>
-                      <m:oMath xmlns:m="http://schemas.openxmlformats.org/officeDocument/2006/math">
-                        <m:r>
-                          <a:rPr lang="en-US" b="0" i="1" smtClean="0">
-                            <a:latin typeface="Cambria Math" panose="02040503050406030204" pitchFamily="18" charset="0"/>
-                          </a:rPr>
-                          <m:t>𝑛</m:t>
-                        </m:r>
-                      </m:oMath>
-                    </a14:m>
-                    <a:r>
-                      <a:rPr lang="en-US" dirty="0"/>
-                      <a:t> steps</a:t>
-                    </a:r>
-                  </a:p>
-                </p:txBody>
-              </p:sp>
-            </mc:Choice>
-            <mc:Fallback xmlns="">
-              <p:sp>
-                <p:nvSpPr>
-                  <p:cNvPr id="15" name="TextBox 14" descr="n steps">
-                    <a:extLst>
-                      <a:ext uri="{FF2B5EF4-FFF2-40B4-BE49-F238E27FC236}">
-                        <a16:creationId xmlns:a16="http://schemas.microsoft.com/office/drawing/2014/main" id="{CA6A7031-056F-EB6D-642F-809EE4320E9D}"/>
-                      </a:ext>
-                    </a:extLst>
-                  </p:cNvPr>
-                  <p:cNvSpPr txBox="1">
-                    <a:spLocks noRot="1" noChangeAspect="1" noMove="1" noResize="1" noEditPoints="1" noAdjustHandles="1" noChangeArrowheads="1" noChangeShapeType="1" noTextEdit="1"/>
-                  </p:cNvSpPr>
-                  <p:nvPr/>
-                </p:nvSpPr>
-                <p:spPr>
-                  <a:xfrm>
-                    <a:off x="10416206" y="1032968"/>
-                    <a:ext cx="1111291" cy="369332"/>
-                  </a:xfrm>
-                  <a:prstGeom prst="rect">
-                    <a:avLst/>
-                  </a:prstGeom>
-                  <a:blipFill>
-                    <a:blip r:embed="rId9"/>
-                    <a:stretch>
-                      <a:fillRect t="-8333" b="-28333"/>
-                    </a:stretch>
-                  </a:blipFill>
-                </p:spPr>
-                <p:txBody>
-                  <a:bodyPr/>
-                  <a:lstStyle/>
-                  <a:p>
-                    <a:r>
-                      <a:rPr lang="en-US">
-                        <a:noFill/>
-                      </a:rPr>
-                      <a:t> </a:t>
-                    </a:r>
-                  </a:p>
-                </p:txBody>
-              </p:sp>
-            </mc:Fallback>
-          </mc:AlternateContent>
-          <p:sp>
-            <p:nvSpPr>
-              <p:cNvPr id="16" name="Right Brace 15">
-                <a:extLst>
-                  <a:ext uri="{FF2B5EF4-FFF2-40B4-BE49-F238E27FC236}">
-                    <a16:creationId xmlns:a16="http://schemas.microsoft.com/office/drawing/2014/main" id="{DF1F0B09-177D-1C23-8922-13B60D4726FE}"/>
-                  </a:ext>
-                  <a:ext uri="{C183D7F6-B498-43B3-948B-1728B52AA6E4}">
-                    <adec:decorative xmlns:adec="http://schemas.microsoft.com/office/drawing/2017/decorative" val="1"/>
-                  </a:ext>
-                </a:extLst>
-              </p:cNvPr>
-              <p:cNvSpPr/>
-              <p:nvPr/>
-            </p:nvSpPr>
-            <p:spPr>
-              <a:xfrm rot="16200000">
-                <a:off x="10847163" y="722444"/>
-                <a:ext cx="146575" cy="1416969"/>
-              </a:xfrm>
-              <a:prstGeom prst="rightBrace">
-                <a:avLst/>
-              </a:prstGeom>
-            </p:spPr>
-            <p:style>
-              <a:lnRef idx="2">
-                <a:schemeClr val="accent1"/>
-              </a:lnRef>
-              <a:fillRef idx="0">
-                <a:schemeClr val="accent1"/>
-              </a:fillRef>
-              <a:effectRef idx="1">
-                <a:schemeClr val="accent1"/>
-              </a:effectRef>
-              <a:fontRef idx="minor">
-                <a:schemeClr val="tx1"/>
-              </a:fontRef>
-            </p:style>
-            <p:txBody>
-              <a:bodyPr rtlCol="0" anchor="ctr"/>
-              <a:lstStyle/>
-              <a:p>
-                <a:pPr algn="ctr"/>
-                <a:endParaRPr lang="en-US"/>
-              </a:p>
-            </p:txBody>
-          </p:sp>
         </p:grpSp>
-        <mc:AlternateContent xmlns:mc="http://schemas.openxmlformats.org/markup-compatibility/2006" xmlns:a14="http://schemas.microsoft.com/office/drawing/2010/main">
-          <mc:Choice Requires="a14">
-            <p:sp>
-              <p:nvSpPr>
-                <p:cNvPr id="19" name="TextBox 18" descr="Observed Rs plus V(S sub t)">
-                  <a:extLst>
-                    <a:ext uri="{FF2B5EF4-FFF2-40B4-BE49-F238E27FC236}">
-                      <a16:creationId xmlns:a16="http://schemas.microsoft.com/office/drawing/2014/main" id="{ABD183B9-C0A7-1967-D463-484C00285B8B}"/>
-                    </a:ext>
-                  </a:extLst>
-                </p:cNvPr>
-                <p:cNvSpPr txBox="1"/>
-                <p:nvPr/>
-              </p:nvSpPr>
-              <p:spPr>
-                <a:xfrm>
-                  <a:off x="10355638" y="5218276"/>
-                  <a:ext cx="1996323" cy="307777"/>
-                </a:xfrm>
-                <a:prstGeom prst="rect">
-                  <a:avLst/>
-                </a:prstGeom>
-                <a:noFill/>
-              </p:spPr>
-              <p:txBody>
-                <a:bodyPr wrap="square" rtlCol="0">
-                  <a:spAutoFit/>
-                </a:bodyPr>
-                <a:lstStyle/>
-                <a:p>
-                  <a:r>
-                    <a:rPr lang="en-US" sz="1400" dirty="0"/>
-                    <a:t>Observed </a:t>
-                  </a:r>
-                  <a14:m>
-                    <m:oMath xmlns:m="http://schemas.openxmlformats.org/officeDocument/2006/math">
-                      <m:r>
-                        <a:rPr lang="en-US" sz="1400" b="0" i="1" smtClean="0">
-                          <a:latin typeface="Cambria Math" panose="02040503050406030204" pitchFamily="18" charset="0"/>
-                        </a:rPr>
-                        <m:t>𝑅</m:t>
-                      </m:r>
-                      <m:r>
-                        <m:rPr>
-                          <m:sty m:val="p"/>
-                        </m:rPr>
-                        <a:rPr lang="en-US" sz="1400" b="0" i="0" smtClean="0">
-                          <a:latin typeface="Cambria Math" panose="02040503050406030204" pitchFamily="18" charset="0"/>
-                        </a:rPr>
-                        <m:t>s</m:t>
-                      </m:r>
-                      <m:r>
-                        <a:rPr lang="en-US" sz="1400" b="0" i="1" smtClean="0">
-                          <a:latin typeface="Cambria Math" panose="02040503050406030204" pitchFamily="18" charset="0"/>
-                        </a:rPr>
-                        <m:t>+</m:t>
-                      </m:r>
-                      <m:r>
-                        <a:rPr lang="en-US" sz="1400" b="0" i="1" smtClean="0">
-                          <a:latin typeface="Cambria Math" panose="02040503050406030204" pitchFamily="18" charset="0"/>
-                        </a:rPr>
-                        <m:t>𝑉</m:t>
-                      </m:r>
-                      <m:r>
-                        <a:rPr lang="en-US" sz="1400" b="0" i="1" smtClean="0">
-                          <a:latin typeface="Cambria Math" panose="02040503050406030204" pitchFamily="18" charset="0"/>
-                        </a:rPr>
-                        <m:t>(</m:t>
-                      </m:r>
-                      <m:sSub>
-                        <m:sSubPr>
-                          <m:ctrlPr>
-                            <a:rPr lang="en-US" sz="1400" b="0" i="1" smtClean="0">
-                              <a:latin typeface="Cambria Math" panose="02040503050406030204" pitchFamily="18" charset="0"/>
-                            </a:rPr>
-                          </m:ctrlPr>
-                        </m:sSubPr>
-                        <m:e>
-                          <m:r>
-                            <a:rPr lang="en-US" sz="1400" b="0" i="1" smtClean="0">
-                              <a:latin typeface="Cambria Math" panose="02040503050406030204" pitchFamily="18" charset="0"/>
-                            </a:rPr>
-                            <m:t>𝑆</m:t>
-                          </m:r>
-                        </m:e>
-                        <m:sub>
-                          <m:r>
-                            <a:rPr lang="en-US" sz="1400" b="0" i="1" smtClean="0">
-                              <a:latin typeface="Cambria Math" panose="02040503050406030204" pitchFamily="18" charset="0"/>
-                            </a:rPr>
-                            <m:t>𝑡</m:t>
-                          </m:r>
-                        </m:sub>
-                      </m:sSub>
-                      <m:r>
-                        <a:rPr lang="en-US" sz="1400" b="0" i="1" smtClean="0">
-                          <a:latin typeface="Cambria Math" panose="02040503050406030204" pitchFamily="18" charset="0"/>
-                        </a:rPr>
-                        <m:t>)</m:t>
-                      </m:r>
-                    </m:oMath>
-                  </a14:m>
-                  <a:endParaRPr lang="en-US" sz="1400" dirty="0"/>
-                </a:p>
-              </p:txBody>
-            </p:sp>
-          </mc:Choice>
-          <mc:Fallback xmlns="">
-            <p:sp>
-              <p:nvSpPr>
-                <p:cNvPr id="19" name="TextBox 18" descr="Observed Rs plus V(S sub t)">
-                  <a:extLst>
-                    <a:ext uri="{FF2B5EF4-FFF2-40B4-BE49-F238E27FC236}">
-                      <a16:creationId xmlns:a16="http://schemas.microsoft.com/office/drawing/2014/main" id="{ABD183B9-C0A7-1967-D463-484C00285B8B}"/>
-                    </a:ext>
-                  </a:extLst>
-                </p:cNvPr>
-                <p:cNvSpPr txBox="1">
-                  <a:spLocks noRot="1" noChangeAspect="1" noMove="1" noResize="1" noEditPoints="1" noAdjustHandles="1" noChangeArrowheads="1" noChangeShapeType="1" noTextEdit="1"/>
-                </p:cNvSpPr>
-                <p:nvPr/>
-              </p:nvSpPr>
-              <p:spPr>
-                <a:xfrm>
-                  <a:off x="10355638" y="5218276"/>
-                  <a:ext cx="1996323" cy="307777"/>
-                </a:xfrm>
-                <a:prstGeom prst="rect">
-                  <a:avLst/>
-                </a:prstGeom>
-                <a:blipFill>
-                  <a:blip r:embed="rId10"/>
-                  <a:stretch>
-                    <a:fillRect l="-917" t="-3922" b="-19608"/>
-                  </a:stretch>
-                </a:blipFill>
-              </p:spPr>
-              <p:txBody>
-                <a:bodyPr/>
-                <a:lstStyle/>
-                <a:p>
-                  <a:r>
-                    <a:rPr lang="en-US">
-                      <a:noFill/>
-                    </a:rPr>
-                    <a:t> </a:t>
-                  </a:r>
-                </a:p>
-              </p:txBody>
-            </p:sp>
-          </mc:Fallback>
-        </mc:AlternateContent>
+        <p:sp>
+          <p:nvSpPr>
+            <p:cNvPr id="3" name="Rectangle 2">
+              <a:extLst>
+                <a:ext uri="{FF2B5EF4-FFF2-40B4-BE49-F238E27FC236}">
+                  <a16:creationId xmlns:a16="http://schemas.microsoft.com/office/drawing/2014/main" id="{3B0A3EC7-0C60-EBDF-04C7-F6EB9211F932}"/>
+                </a:ext>
+              </a:extLst>
+            </p:cNvPr>
+            <p:cNvSpPr/>
+            <p:nvPr/>
+          </p:nvSpPr>
+          <p:spPr>
+            <a:xfrm>
+              <a:off x="7130642" y="2748974"/>
+              <a:ext cx="2546059" cy="1328076"/>
+            </a:xfrm>
+            <a:prstGeom prst="rect">
+              <a:avLst/>
+            </a:prstGeom>
+            <a:noFill/>
+            <a:ln w="9525" cap="flat" cmpd="sng" algn="ctr">
+              <a:solidFill>
+                <a:schemeClr val="dk1"/>
+              </a:solidFill>
+              <a:prstDash val="solid"/>
+              <a:round/>
+              <a:headEnd type="none" w="med" len="med"/>
+              <a:tailEnd type="none" w="med" len="med"/>
+            </a:ln>
+          </p:spPr>
+          <p:style>
+            <a:lnRef idx="0">
+              <a:scrgbClr r="0" g="0" b="0"/>
+            </a:lnRef>
+            <a:fillRef idx="0">
+              <a:scrgbClr r="0" g="0" b="0"/>
+            </a:fillRef>
+            <a:effectRef idx="0">
+              <a:scrgbClr r="0" g="0" b="0"/>
+            </a:effectRef>
+            <a:fontRef idx="minor">
+              <a:schemeClr val="dk1"/>
+            </a:fontRef>
+          </p:style>
+          <p:txBody>
+            <a:bodyPr rtlCol="0" anchor="ctr"/>
+            <a:lstStyle/>
+            <a:p>
+              <a:pPr algn="ctr"/>
+              <a:endParaRPr lang="en-US"/>
+            </a:p>
+          </p:txBody>
+        </p:sp>
       </p:grpSp>
     </p:spTree>
     <p:extLst>

--- a/slides/Lecture_Chapter07.pptx
+++ b/slides/Lecture_Chapter07.pptx
@@ -22,7 +22,8 @@
     <p:sldId id="389" r:id="rId16"/>
     <p:sldId id="390" r:id="rId17"/>
     <p:sldId id="395" r:id="rId18"/>
-    <p:sldId id="397" r:id="rId19"/>
+    <p:sldId id="482" r:id="rId19"/>
+    <p:sldId id="397" r:id="rId20"/>
   </p:sldIdLst>
   <p:sldSz cx="12192000" cy="6858000"/>
   <p:notesSz cx="6858000" cy="9144000"/>
@@ -159,6 +160,7 @@
             <p14:sldId id="389"/>
             <p14:sldId id="390"/>
             <p14:sldId id="395"/>
+            <p14:sldId id="482"/>
             <p14:sldId id="397"/>
           </p14:sldIdLst>
         </p14:section>
@@ -7003,8 +7005,8 @@
             </a:prstGeom>
           </p:spPr>
         </p:pic>
-        <mc:AlternateContent xmlns:mc="http://schemas.openxmlformats.org/markup-compatibility/2006">
-          <mc:Choice xmlns:a14="http://schemas.microsoft.com/office/drawing/2010/main" Requires="a14">
+        <mc:AlternateContent xmlns:mc="http://schemas.openxmlformats.org/markup-compatibility/2006" xmlns:a14="http://schemas.microsoft.com/office/drawing/2010/main">
+          <mc:Choice Requires="a14">
             <p:sp>
               <p:nvSpPr>
                 <p:cNvPr id="6" name="Speech Bubble: Rectangle with Corners Rounded 5" descr="pi is given">
@@ -7069,7 +7071,7 @@
               </p:txBody>
             </p:sp>
           </mc:Choice>
-          <mc:Fallback>
+          <mc:Fallback xmlns="">
             <p:sp>
               <p:nvSpPr>
                 <p:cNvPr id="6" name="Speech Bubble: Rectangle with Corners Rounded 5" descr="pi is given">
@@ -7118,8 +7120,8 @@
             </p:sp>
           </mc:Fallback>
         </mc:AlternateContent>
-        <mc:AlternateContent xmlns:mc="http://schemas.openxmlformats.org/markup-compatibility/2006">
-          <mc:Choice xmlns:a14="http://schemas.microsoft.com/office/drawing/2010/main" Requires="a14">
+        <mc:AlternateContent xmlns:mc="http://schemas.openxmlformats.org/markup-compatibility/2006" xmlns:a14="http://schemas.microsoft.com/office/drawing/2010/main">
+          <mc:Choice Requires="a14">
             <p:sp>
               <p:nvSpPr>
                 <p:cNvPr id="7" name="Speech Bubble: Rectangle with Corners Rounded 6" descr="Update V">
@@ -7185,7 +7187,7 @@
               </p:txBody>
             </p:sp>
           </mc:Choice>
-          <mc:Fallback>
+          <mc:Fallback xmlns="">
             <p:sp>
               <p:nvSpPr>
                 <p:cNvPr id="7" name="Speech Bubble: Rectangle with Corners Rounded 6" descr="Update V">
@@ -7337,8 +7339,8 @@
             <a:chExt cx="7944649" cy="2316214"/>
           </a:xfrm>
         </p:grpSpPr>
-        <mc:AlternateContent xmlns:mc="http://schemas.openxmlformats.org/markup-compatibility/2006">
-          <mc:Choice xmlns:a14="http://schemas.microsoft.com/office/drawing/2010/main" Requires="a14">
+        <mc:AlternateContent xmlns:mc="http://schemas.openxmlformats.org/markup-compatibility/2006" xmlns:a14="http://schemas.microsoft.com/office/drawing/2010/main">
+          <mc:Choice Requires="a14">
             <p:sp>
               <p:nvSpPr>
                 <p:cNvPr id="4" name="Speech Bubble: Rectangle with Corners Rounded 3" descr="Update Q and pi">
@@ -7418,7 +7420,7 @@
               </p:txBody>
             </p:sp>
           </mc:Choice>
-          <mc:Fallback>
+          <mc:Fallback xmlns="">
             <p:sp>
               <p:nvSpPr>
                 <p:cNvPr id="4" name="Speech Bubble: Rectangle with Corners Rounded 3" descr="Update Q and pi">
@@ -7467,8 +7469,8 @@
             </p:sp>
           </mc:Fallback>
         </mc:AlternateContent>
-        <mc:AlternateContent xmlns:mc="http://schemas.openxmlformats.org/markup-compatibility/2006">
-          <mc:Choice xmlns:a14="http://schemas.microsoft.com/office/drawing/2010/main" Requires="a14">
+        <mc:AlternateContent xmlns:mc="http://schemas.openxmlformats.org/markup-compatibility/2006" xmlns:a14="http://schemas.microsoft.com/office/drawing/2010/main">
+          <mc:Choice Requires="a14">
             <p:sp>
               <p:nvSpPr>
                 <p:cNvPr id="9" name="Speech Bubble: Rectangle with Corners Rounded 8" descr="On-policy: Select next action from the current pi">
@@ -7534,7 +7536,7 @@
               </p:txBody>
             </p:sp>
           </mc:Choice>
-          <mc:Fallback>
+          <mc:Fallback xmlns="">
             <p:sp>
               <p:nvSpPr>
                 <p:cNvPr id="9" name="Speech Bubble: Rectangle with Corners Rounded 8" descr="On-policy: Select next action from the current pi">
@@ -8023,7 +8025,12 @@
                 <p:ph idx="1"/>
               </p:nvPr>
             </p:nvSpPr>
-            <p:spPr/>
+            <p:spPr>
+              <a:xfrm>
+                <a:off x="838200" y="1397330"/>
+                <a:ext cx="10515600" cy="5003470"/>
+              </a:xfrm>
+            </p:spPr>
             <p:txBody>
               <a:bodyPr>
                 <a:normAutofit fontScale="70000" lnSpcReduction="20000"/>
@@ -8074,7 +8081,7 @@
                 </a:r>
                 <a:r>
                   <a:rPr lang="en-US" dirty="0"/>
-                  <a:t>: Use importance sampling ratio as a weight for updates</a:t>
+                  <a:t>: Use importance sampling ratio as a weight for updates (like in off-policy MC)</a:t>
                 </a:r>
               </a:p>
               <a:p>
@@ -8806,9 +8813,12 @@
                 <a:br>
                   <a:rPr lang="en-US" dirty="0"/>
                 </a:br>
-                <a:r>
+                <a:br>
                   <a:rPr lang="en-US" dirty="0"/>
-                  <a:t>Updating the behavior policy </a:t>
+                </a:br>
+                <a:r>
+                  <a:rPr lang="en-US" dirty="0"/>
+                  <a:t>Using a behavior policy </a:t>
                 </a:r>
                 <a14:m>
                   <m:oMath xmlns:m="http://schemas.openxmlformats.org/officeDocument/2006/math">
@@ -8881,7 +8891,7 @@
                 </a14:m>
                 <a:r>
                   <a:rPr lang="en-US" dirty="0"/>
-                  <a:t> helps.</a:t>
+                  <a:t> helps to produce useful observations.</a:t>
                 </a:r>
               </a:p>
               <a:p>
@@ -8911,10 +8921,14 @@
               </p:nvPr>
             </p:nvSpPr>
             <p:spPr>
+              <a:xfrm>
+                <a:off x="838200" y="1397330"/>
+                <a:ext cx="10515600" cy="5003470"/>
+              </a:xfrm>
               <a:blipFill>
                 <a:blip r:embed="rId3"/>
                 <a:stretch>
-                  <a:fillRect l="-522" t="-2168"/>
+                  <a:fillRect l="-522" t="-2071" b="-1218"/>
                 </a:stretch>
               </a:blipFill>
             </p:spPr>
@@ -9100,12 +9114,14 @@
         </p:nvSpPr>
         <p:spPr/>
         <p:txBody>
-          <a:bodyPr/>
+          <a:bodyPr>
+            <a:normAutofit fontScale="90000"/>
+          </a:bodyPr>
           <a:lstStyle/>
           <a:p>
             <a:r>
               <a:rPr lang="en-US" dirty="0"/>
-              <a:t>Alg. Comparing On-Policy with Off-Policy</a:t>
+              <a:t>Alg. Comparing On-Policy with Off-Policy Sarsa</a:t>
             </a:r>
           </a:p>
         </p:txBody>
@@ -9914,8 +9930,8 @@
           </a:p>
         </p:txBody>
       </p:sp>
-      <mc:AlternateContent xmlns:mc="http://schemas.openxmlformats.org/markup-compatibility/2006">
-        <mc:Choice xmlns:a14="http://schemas.microsoft.com/office/drawing/2010/main" Requires="a14">
+      <mc:AlternateContent xmlns:mc="http://schemas.openxmlformats.org/markup-compatibility/2006" xmlns:a14="http://schemas.microsoft.com/office/drawing/2010/main">
+        <mc:Choice Requires="a14">
           <p:sp>
             <p:nvSpPr>
               <p:cNvPr id="22" name="Speech Bubble: Rectangle with Corners Rounded 21" descr="We could update b equals epsilon minus greedy(pi)">
@@ -10061,7 +10077,7 @@
             </p:txBody>
           </p:sp>
         </mc:Choice>
-        <mc:Fallback>
+        <mc:Fallback xmlns="">
           <p:sp>
             <p:nvSpPr>
               <p:cNvPr id="22" name="Speech Bubble: Rectangle with Corners Rounded 21" descr="We could update b equals epsilon minus greedy(pi)">
@@ -10124,6 +10140,1229 @@
 </file>
 
 <file path=ppt/slides/slide18.xml><?xml version="1.0" encoding="utf-8"?>
+<p:sld xmlns:a="http://schemas.openxmlformats.org/drawingml/2006/main" xmlns:r="http://schemas.openxmlformats.org/officeDocument/2006/relationships" xmlns:p="http://schemas.openxmlformats.org/presentationml/2006/main">
+  <p:cSld>
+    <p:spTree>
+      <p:nvGrpSpPr>
+        <p:cNvPr id="1" name=""/>
+        <p:cNvGrpSpPr/>
+        <p:nvPr/>
+      </p:nvGrpSpPr>
+      <p:grpSpPr>
+        <a:xfrm>
+          <a:off x="0" y="0"/>
+          <a:ext cx="0" cy="0"/>
+          <a:chOff x="0" y="0"/>
+          <a:chExt cx="0" cy="0"/>
+        </a:xfrm>
+      </p:grpSpPr>
+      <mc:AlternateContent xmlns:mc="http://schemas.openxmlformats.org/markup-compatibility/2006" xmlns:a14="http://schemas.microsoft.com/office/drawing/2010/main">
+        <mc:Choice Requires="a14">
+          <p:sp>
+            <p:nvSpPr>
+              <p:cNvPr id="2" name="Title 1">
+                <a:extLst>
+                  <a:ext uri="{FF2B5EF4-FFF2-40B4-BE49-F238E27FC236}">
+                    <a16:creationId xmlns:a16="http://schemas.microsoft.com/office/drawing/2014/main" id="{946B2ECD-522B-977E-1964-6E48D26B84D8}"/>
+                  </a:ext>
+                </a:extLst>
+              </p:cNvPr>
+              <p:cNvSpPr>
+                <a:spLocks noGrp="1"/>
+              </p:cNvSpPr>
+              <p:nvPr>
+                <p:ph type="title"/>
+              </p:nvPr>
+            </p:nvSpPr>
+            <p:spPr/>
+            <p:txBody>
+              <a:bodyPr/>
+              <a:lstStyle/>
+              <a:p>
+                <a14:m>
+                  <m:oMath xmlns:m="http://schemas.openxmlformats.org/officeDocument/2006/math">
+                    <m:r>
+                      <a:rPr lang="en-US" b="0" i="1" smtClean="0">
+                        <a:latin typeface="Cambria Math" panose="02040503050406030204" pitchFamily="18" charset="0"/>
+                      </a:rPr>
+                      <m:t>𝑛</m:t>
+                    </m:r>
+                  </m:oMath>
+                </a14:m>
+                <a:r>
+                  <a:rPr lang="en-US" dirty="0"/>
+                  <a:t>-step Q-Learning</a:t>
+                </a:r>
+              </a:p>
+            </p:txBody>
+          </p:sp>
+        </mc:Choice>
+        <mc:Fallback xmlns="">
+          <p:sp>
+            <p:nvSpPr>
+              <p:cNvPr id="2" name="Title 1">
+                <a:extLst>
+                  <a:ext uri="{FF2B5EF4-FFF2-40B4-BE49-F238E27FC236}">
+                    <a16:creationId xmlns:a16="http://schemas.microsoft.com/office/drawing/2014/main" id="{946B2ECD-522B-977E-1964-6E48D26B84D8}"/>
+                  </a:ext>
+                </a:extLst>
+              </p:cNvPr>
+              <p:cNvSpPr>
+                <a:spLocks noGrp="1" noRot="1" noChangeAspect="1" noMove="1" noResize="1" noEditPoints="1" noAdjustHandles="1" noChangeArrowheads="1" noChangeShapeType="1" noTextEdit="1"/>
+              </p:cNvSpPr>
+              <p:nvPr>
+                <p:ph type="title"/>
+              </p:nvPr>
+            </p:nvSpPr>
+            <p:spPr>
+              <a:blipFill>
+                <a:blip r:embed="rId2"/>
+                <a:stretch>
+                  <a:fillRect t="-20161" b="-35484"/>
+                </a:stretch>
+              </a:blipFill>
+            </p:spPr>
+            <p:txBody>
+              <a:bodyPr/>
+              <a:lstStyle/>
+              <a:p>
+                <a:r>
+                  <a:rPr lang="en-US">
+                    <a:noFill/>
+                  </a:rPr>
+                  <a:t> </a:t>
+                </a:r>
+              </a:p>
+            </p:txBody>
+          </p:sp>
+        </mc:Fallback>
+      </mc:AlternateContent>
+      <mc:AlternateContent xmlns:mc="http://schemas.openxmlformats.org/markup-compatibility/2006">
+        <mc:Choice xmlns:a14="http://schemas.microsoft.com/office/drawing/2010/main" Requires="a14">
+          <p:sp>
+            <p:nvSpPr>
+              <p:cNvPr id="3" name="Content Placeholder 2">
+                <a:extLst>
+                  <a:ext uri="{FF2B5EF4-FFF2-40B4-BE49-F238E27FC236}">
+                    <a16:creationId xmlns:a16="http://schemas.microsoft.com/office/drawing/2014/main" id="{DF8737CF-E4BA-0983-733D-3F8104162B8B}"/>
+                  </a:ext>
+                </a:extLst>
+              </p:cNvPr>
+              <p:cNvSpPr>
+                <a:spLocks noGrp="1"/>
+              </p:cNvSpPr>
+              <p:nvPr>
+                <p:ph idx="1"/>
+              </p:nvPr>
+            </p:nvSpPr>
+            <p:spPr/>
+            <p:txBody>
+              <a:bodyPr>
+                <a:normAutofit fontScale="92500" lnSpcReduction="20000"/>
+              </a:bodyPr>
+              <a:lstStyle/>
+              <a:p>
+                <a:r>
+                  <a:rPr lang="en-US" dirty="0"/>
+                  <a:t>Off-policy Q-learning with </a:t>
+                </a:r>
+                <a14:m>
+                  <m:oMath xmlns:m="http://schemas.openxmlformats.org/officeDocument/2006/math">
+                    <m:r>
+                      <a:rPr lang="en-US" b="0" i="1" smtClean="0">
+                        <a:latin typeface="Cambria Math" panose="02040503050406030204" pitchFamily="18" charset="0"/>
+                      </a:rPr>
+                      <m:t>𝑛</m:t>
+                    </m:r>
+                  </m:oMath>
+                </a14:m>
+                <a:r>
+                  <a:rPr lang="en-US" dirty="0"/>
+                  <a:t>-step bootstrapping needs correction.</a:t>
+                </a:r>
+                <a:br>
+                  <a:rPr lang="en-US" dirty="0"/>
+                </a:br>
+                <a:br>
+                  <a:rPr lang="en-US" i="1" dirty="0">
+                    <a:latin typeface="Cambria Math" panose="02040503050406030204" pitchFamily="18" charset="0"/>
+                  </a:rPr>
+                </a:br>
+                <a:br>
+                  <a:rPr lang="en-US" i="1" dirty="0">
+                    <a:latin typeface="Cambria Math" panose="02040503050406030204" pitchFamily="18" charset="0"/>
+                  </a:rPr>
+                </a:br>
+                <a14:m>
+                  <m:oMath xmlns:m="http://schemas.openxmlformats.org/officeDocument/2006/math">
+                    <m:sSub>
+                      <m:sSubPr>
+                        <m:ctrlPr>
+                          <a:rPr lang="en-US" i="1">
+                            <a:latin typeface="Cambria Math" panose="02040503050406030204" pitchFamily="18" charset="0"/>
+                          </a:rPr>
+                        </m:ctrlPr>
+                      </m:sSubPr>
+                      <m:e>
+                        <m:r>
+                          <a:rPr lang="en-US" i="1">
+                            <a:latin typeface="Cambria Math" panose="02040503050406030204" pitchFamily="18" charset="0"/>
+                          </a:rPr>
+                          <m:t>𝐺</m:t>
+                        </m:r>
+                      </m:e>
+                      <m:sub>
+                        <m:r>
+                          <a:rPr lang="en-US" i="1">
+                            <a:latin typeface="Cambria Math" panose="02040503050406030204" pitchFamily="18" charset="0"/>
+                          </a:rPr>
+                          <m:t>𝑡</m:t>
+                        </m:r>
+                        <m:r>
+                          <a:rPr lang="en-US" i="1">
+                            <a:latin typeface="Cambria Math" panose="02040503050406030204" pitchFamily="18" charset="0"/>
+                          </a:rPr>
+                          <m:t>:</m:t>
+                        </m:r>
+                        <m:r>
+                          <a:rPr lang="en-US" i="1">
+                            <a:latin typeface="Cambria Math" panose="02040503050406030204" pitchFamily="18" charset="0"/>
+                          </a:rPr>
+                          <m:t>𝑡</m:t>
+                        </m:r>
+                        <m:r>
+                          <a:rPr lang="en-US" i="1">
+                            <a:latin typeface="Cambria Math" panose="02040503050406030204" pitchFamily="18" charset="0"/>
+                          </a:rPr>
+                          <m:t>+</m:t>
+                        </m:r>
+                        <m:r>
+                          <a:rPr lang="en-US" i="1">
+                            <a:latin typeface="Cambria Math" panose="02040503050406030204" pitchFamily="18" charset="0"/>
+                          </a:rPr>
+                          <m:t>𝑛</m:t>
+                        </m:r>
+                      </m:sub>
+                    </m:sSub>
+                    <m:r>
+                      <a:rPr lang="en-US" i="1">
+                        <a:latin typeface="Cambria Math" panose="02040503050406030204" pitchFamily="18" charset="0"/>
+                      </a:rPr>
+                      <m:t>=</m:t>
+                    </m:r>
+                    <m:sSub>
+                      <m:sSubPr>
+                        <m:ctrlPr>
+                          <a:rPr lang="en-US" i="1">
+                            <a:latin typeface="Cambria Math" panose="02040503050406030204" pitchFamily="18" charset="0"/>
+                          </a:rPr>
+                        </m:ctrlPr>
+                      </m:sSubPr>
+                      <m:e>
+                        <m:r>
+                          <a:rPr lang="en-US" i="1">
+                            <a:latin typeface="Cambria Math" panose="02040503050406030204" pitchFamily="18" charset="0"/>
+                          </a:rPr>
+                          <m:t>𝑅</m:t>
+                        </m:r>
+                      </m:e>
+                      <m:sub>
+                        <m:r>
+                          <a:rPr lang="en-US" i="1">
+                            <a:latin typeface="Cambria Math" panose="02040503050406030204" pitchFamily="18" charset="0"/>
+                          </a:rPr>
+                          <m:t>𝑡</m:t>
+                        </m:r>
+                        <m:r>
+                          <a:rPr lang="en-US" i="1">
+                            <a:latin typeface="Cambria Math" panose="02040503050406030204" pitchFamily="18" charset="0"/>
+                          </a:rPr>
+                          <m:t>+1</m:t>
+                        </m:r>
+                      </m:sub>
+                    </m:sSub>
+                    <m:r>
+                      <a:rPr lang="en-US" i="1">
+                        <a:latin typeface="Cambria Math" panose="02040503050406030204" pitchFamily="18" charset="0"/>
+                      </a:rPr>
+                      <m:t>+</m:t>
+                    </m:r>
+                    <m:r>
+                      <a:rPr lang="en-US" i="1">
+                        <a:latin typeface="Cambria Math" panose="02040503050406030204" pitchFamily="18" charset="0"/>
+                      </a:rPr>
+                      <m:t>𝛾</m:t>
+                    </m:r>
+                    <m:sSub>
+                      <m:sSubPr>
+                        <m:ctrlPr>
+                          <a:rPr lang="en-US" i="1">
+                            <a:latin typeface="Cambria Math" panose="02040503050406030204" pitchFamily="18" charset="0"/>
+                          </a:rPr>
+                        </m:ctrlPr>
+                      </m:sSubPr>
+                      <m:e>
+                        <m:r>
+                          <a:rPr lang="en-US" i="1">
+                            <a:latin typeface="Cambria Math" panose="02040503050406030204" pitchFamily="18" charset="0"/>
+                          </a:rPr>
+                          <m:t>𝑅</m:t>
+                        </m:r>
+                      </m:e>
+                      <m:sub>
+                        <m:r>
+                          <a:rPr lang="en-US" i="1">
+                            <a:latin typeface="Cambria Math" panose="02040503050406030204" pitchFamily="18" charset="0"/>
+                          </a:rPr>
+                          <m:t>𝑡</m:t>
+                        </m:r>
+                        <m:r>
+                          <a:rPr lang="en-US" i="1">
+                            <a:latin typeface="Cambria Math" panose="02040503050406030204" pitchFamily="18" charset="0"/>
+                          </a:rPr>
+                          <m:t>+2</m:t>
+                        </m:r>
+                      </m:sub>
+                    </m:sSub>
+                    <m:r>
+                      <a:rPr lang="en-US" i="1">
+                        <a:latin typeface="Cambria Math" panose="02040503050406030204" pitchFamily="18" charset="0"/>
+                      </a:rPr>
+                      <m:t>+…+</m:t>
+                    </m:r>
+                    <m:sSup>
+                      <m:sSupPr>
+                        <m:ctrlPr>
+                          <a:rPr lang="en-US" i="1">
+                            <a:latin typeface="Cambria Math" panose="02040503050406030204" pitchFamily="18" charset="0"/>
+                          </a:rPr>
+                        </m:ctrlPr>
+                      </m:sSupPr>
+                      <m:e>
+                        <m:r>
+                          <a:rPr lang="en-US" i="1">
+                            <a:latin typeface="Cambria Math" panose="02040503050406030204" pitchFamily="18" charset="0"/>
+                          </a:rPr>
+                          <m:t>𝛾</m:t>
+                        </m:r>
+                      </m:e>
+                      <m:sup>
+                        <m:r>
+                          <a:rPr lang="en-US" i="1">
+                            <a:latin typeface="Cambria Math" panose="02040503050406030204" pitchFamily="18" charset="0"/>
+                          </a:rPr>
+                          <m:t>𝑛</m:t>
+                        </m:r>
+                        <m:r>
+                          <a:rPr lang="en-US" i="1">
+                            <a:latin typeface="Cambria Math" panose="02040503050406030204" pitchFamily="18" charset="0"/>
+                          </a:rPr>
+                          <m:t>−1</m:t>
+                        </m:r>
+                      </m:sup>
+                    </m:sSup>
+                    <m:sSub>
+                      <m:sSubPr>
+                        <m:ctrlPr>
+                          <a:rPr lang="en-US" i="1">
+                            <a:latin typeface="Cambria Math" panose="02040503050406030204" pitchFamily="18" charset="0"/>
+                          </a:rPr>
+                        </m:ctrlPr>
+                      </m:sSubPr>
+                      <m:e>
+                        <m:r>
+                          <a:rPr lang="en-US" i="1">
+                            <a:latin typeface="Cambria Math" panose="02040503050406030204" pitchFamily="18" charset="0"/>
+                          </a:rPr>
+                          <m:t>𝑅</m:t>
+                        </m:r>
+                      </m:e>
+                      <m:sub>
+                        <m:r>
+                          <a:rPr lang="en-US" i="1">
+                            <a:latin typeface="Cambria Math" panose="02040503050406030204" pitchFamily="18" charset="0"/>
+                          </a:rPr>
+                          <m:t>𝑡</m:t>
+                        </m:r>
+                        <m:r>
+                          <a:rPr lang="en-US" i="1">
+                            <a:latin typeface="Cambria Math" panose="02040503050406030204" pitchFamily="18" charset="0"/>
+                          </a:rPr>
+                          <m:t>+</m:t>
+                        </m:r>
+                        <m:r>
+                          <a:rPr lang="en-US" i="1">
+                            <a:latin typeface="Cambria Math" panose="02040503050406030204" pitchFamily="18" charset="0"/>
+                          </a:rPr>
+                          <m:t>𝑛</m:t>
+                        </m:r>
+                      </m:sub>
+                    </m:sSub>
+                    <m:r>
+                      <a:rPr lang="en-US" i="1">
+                        <a:latin typeface="Cambria Math" panose="02040503050406030204" pitchFamily="18" charset="0"/>
+                      </a:rPr>
+                      <m:t>+</m:t>
+                    </m:r>
+                    <m:sSup>
+                      <m:sSupPr>
+                        <m:ctrlPr>
+                          <a:rPr lang="en-US" i="1">
+                            <a:latin typeface="Cambria Math" panose="02040503050406030204" pitchFamily="18" charset="0"/>
+                          </a:rPr>
+                        </m:ctrlPr>
+                      </m:sSupPr>
+                      <m:e>
+                        <m:r>
+                          <a:rPr lang="en-US" i="1">
+                            <a:latin typeface="Cambria Math" panose="02040503050406030204" pitchFamily="18" charset="0"/>
+                          </a:rPr>
+                          <m:t>𝛾</m:t>
+                        </m:r>
+                      </m:e>
+                      <m:sup>
+                        <m:r>
+                          <a:rPr lang="en-US" i="1">
+                            <a:latin typeface="Cambria Math" panose="02040503050406030204" pitchFamily="18" charset="0"/>
+                          </a:rPr>
+                          <m:t>𝑛</m:t>
+                        </m:r>
+                      </m:sup>
+                    </m:sSup>
+                    <m:func>
+                      <m:funcPr>
+                        <m:ctrlPr>
+                          <a:rPr lang="en-US" b="0" i="1" smtClean="0">
+                            <a:latin typeface="Cambria Math" panose="02040503050406030204" pitchFamily="18" charset="0"/>
+                          </a:rPr>
+                        </m:ctrlPr>
+                      </m:funcPr>
+                      <m:fName>
+                        <m:limLow>
+                          <m:limLowPr>
+                            <m:ctrlPr>
+                              <a:rPr lang="en-US" b="0" i="0" smtClean="0">
+                                <a:latin typeface="Cambria Math" panose="02040503050406030204" pitchFamily="18" charset="0"/>
+                              </a:rPr>
+                            </m:ctrlPr>
+                          </m:limLowPr>
+                          <m:e>
+                            <m:r>
+                              <m:rPr>
+                                <m:sty m:val="p"/>
+                              </m:rPr>
+                              <a:rPr lang="en-US" b="0" i="0" smtClean="0">
+                                <a:latin typeface="Cambria Math" panose="02040503050406030204" pitchFamily="18" charset="0"/>
+                              </a:rPr>
+                              <m:t>max</m:t>
+                            </m:r>
+                          </m:e>
+                          <m:lim>
+                            <m:r>
+                              <a:rPr lang="en-US" b="0" i="1" smtClean="0">
+                                <a:latin typeface="Cambria Math" panose="02040503050406030204" pitchFamily="18" charset="0"/>
+                              </a:rPr>
+                              <m:t>𝑎</m:t>
+                            </m:r>
+                          </m:lim>
+                        </m:limLow>
+                      </m:fName>
+                      <m:e>
+                        <m:r>
+                          <a:rPr lang="en-US" i="1">
+                            <a:latin typeface="Cambria Math" panose="02040503050406030204" pitchFamily="18" charset="0"/>
+                          </a:rPr>
+                          <m:t>𝑄</m:t>
+                        </m:r>
+                        <m:d>
+                          <m:dPr>
+                            <m:ctrlPr>
+                              <a:rPr lang="en-US" i="1">
+                                <a:latin typeface="Cambria Math" panose="02040503050406030204" pitchFamily="18" charset="0"/>
+                              </a:rPr>
+                            </m:ctrlPr>
+                          </m:dPr>
+                          <m:e>
+                            <m:sSub>
+                              <m:sSubPr>
+                                <m:ctrlPr>
+                                  <a:rPr lang="en-US" i="1">
+                                    <a:latin typeface="Cambria Math" panose="02040503050406030204" pitchFamily="18" charset="0"/>
+                                  </a:rPr>
+                                </m:ctrlPr>
+                              </m:sSubPr>
+                              <m:e>
+                                <m:r>
+                                  <a:rPr lang="en-US" i="1">
+                                    <a:latin typeface="Cambria Math" panose="02040503050406030204" pitchFamily="18" charset="0"/>
+                                  </a:rPr>
+                                  <m:t>𝑆</m:t>
+                                </m:r>
+                              </m:e>
+                              <m:sub>
+                                <m:r>
+                                  <a:rPr lang="en-US" i="1">
+                                    <a:latin typeface="Cambria Math" panose="02040503050406030204" pitchFamily="18" charset="0"/>
+                                  </a:rPr>
+                                  <m:t>𝑡</m:t>
+                                </m:r>
+                                <m:r>
+                                  <a:rPr lang="en-US" i="1">
+                                    <a:latin typeface="Cambria Math" panose="02040503050406030204" pitchFamily="18" charset="0"/>
+                                  </a:rPr>
+                                  <m:t>+</m:t>
+                                </m:r>
+                                <m:r>
+                                  <a:rPr lang="en-US" i="1">
+                                    <a:latin typeface="Cambria Math" panose="02040503050406030204" pitchFamily="18" charset="0"/>
+                                  </a:rPr>
+                                  <m:t>𝑛</m:t>
+                                </m:r>
+                              </m:sub>
+                            </m:sSub>
+                            <m:r>
+                              <a:rPr lang="en-US" i="1">
+                                <a:latin typeface="Cambria Math" panose="02040503050406030204" pitchFamily="18" charset="0"/>
+                              </a:rPr>
+                              <m:t>,</m:t>
+                            </m:r>
+                            <m:r>
+                              <a:rPr lang="en-US" b="0" i="1" smtClean="0">
+                                <a:latin typeface="Cambria Math" panose="02040503050406030204" pitchFamily="18" charset="0"/>
+                              </a:rPr>
+                              <m:t>𝑎</m:t>
+                            </m:r>
+                            <m:r>
+                              <a:rPr lang="en-US" i="1" smtClean="0">
+                                <a:latin typeface="Cambria Math" panose="02040503050406030204" pitchFamily="18" charset="0"/>
+                              </a:rPr>
+                              <m:t> </m:t>
+                            </m:r>
+                          </m:e>
+                        </m:d>
+                      </m:e>
+                    </m:func>
+                  </m:oMath>
+                </a14:m>
+                <a:endParaRPr lang="en-US" dirty="0"/>
+              </a:p>
+              <a:p>
+                <a:endParaRPr lang="en-US" dirty="0"/>
+              </a:p>
+              <a:p>
+                <a:endParaRPr lang="en-US" dirty="0"/>
+              </a:p>
+              <a:p>
+                <a:r>
+                  <a:rPr lang="en-US" dirty="0"/>
+                  <a:t>The first action/reward are fine since we will use it to update </a:t>
+                </a:r>
+                <a14:m>
+                  <m:oMath xmlns:m="http://schemas.openxmlformats.org/officeDocument/2006/math">
+                    <m:r>
+                      <a:rPr lang="en-US" i="1" dirty="0" smtClean="0">
+                        <a:latin typeface="Cambria Math" panose="02040503050406030204" pitchFamily="18" charset="0"/>
+                      </a:rPr>
+                      <m:t>𝑄</m:t>
+                    </m:r>
+                    <m:r>
+                      <a:rPr lang="en-US" i="1" dirty="0" smtClean="0">
+                        <a:latin typeface="Cambria Math" panose="02040503050406030204" pitchFamily="18" charset="0"/>
+                      </a:rPr>
+                      <m:t>(</m:t>
+                    </m:r>
+                    <m:r>
+                      <a:rPr lang="en-US" i="1" dirty="0" err="1" smtClean="0">
+                        <a:latin typeface="Cambria Math" panose="02040503050406030204" pitchFamily="18" charset="0"/>
+                      </a:rPr>
+                      <m:t>𝑠</m:t>
+                    </m:r>
+                    <m:r>
+                      <a:rPr lang="en-US" i="1" dirty="0" err="1" smtClean="0">
+                        <a:latin typeface="Cambria Math" panose="02040503050406030204" pitchFamily="18" charset="0"/>
+                      </a:rPr>
+                      <m:t>,</m:t>
+                    </m:r>
+                    <m:r>
+                      <a:rPr lang="en-US" i="1" dirty="0" err="1" smtClean="0">
+                        <a:latin typeface="Cambria Math" panose="02040503050406030204" pitchFamily="18" charset="0"/>
+                      </a:rPr>
+                      <m:t>𝑎</m:t>
+                    </m:r>
+                    <m:r>
+                      <a:rPr lang="en-US" i="1" dirty="0" smtClean="0">
+                        <a:latin typeface="Cambria Math" panose="02040503050406030204" pitchFamily="18" charset="0"/>
+                      </a:rPr>
+                      <m:t>)</m:t>
+                    </m:r>
+                  </m:oMath>
+                </a14:m>
+                <a:r>
+                  <a:rPr lang="en-US" dirty="0"/>
+                  <a:t>. </a:t>
+                </a:r>
+                <a14:m>
+                  <m:oMath xmlns:m="http://schemas.openxmlformats.org/officeDocument/2006/math">
+                    <m:sSub>
+                      <m:sSubPr>
+                        <m:ctrlPr>
+                          <a:rPr lang="en-US" i="1">
+                            <a:latin typeface="Cambria Math" panose="02040503050406030204" pitchFamily="18" charset="0"/>
+                          </a:rPr>
+                        </m:ctrlPr>
+                      </m:sSubPr>
+                      <m:e>
+                        <m:r>
+                          <a:rPr lang="en-US" i="1">
+                            <a:latin typeface="Cambria Math" panose="02040503050406030204" pitchFamily="18" charset="0"/>
+                          </a:rPr>
+                          <m:t>𝑅</m:t>
+                        </m:r>
+                      </m:e>
+                      <m:sub>
+                        <m:r>
+                          <a:rPr lang="en-US" i="1">
+                            <a:latin typeface="Cambria Math" panose="02040503050406030204" pitchFamily="18" charset="0"/>
+                          </a:rPr>
+                          <m:t>𝑡</m:t>
+                        </m:r>
+                        <m:r>
+                          <a:rPr lang="en-US" i="1">
+                            <a:latin typeface="Cambria Math" panose="02040503050406030204" pitchFamily="18" charset="0"/>
+                          </a:rPr>
+                          <m:t>+2</m:t>
+                        </m:r>
+                      </m:sub>
+                    </m:sSub>
+                  </m:oMath>
+                </a14:m>
+                <a:r>
+                  <a:rPr lang="en-US" dirty="0"/>
+                  <a:t> to </a:t>
+                </a:r>
+                <a14:m>
+                  <m:oMath xmlns:m="http://schemas.openxmlformats.org/officeDocument/2006/math">
+                    <m:sSub>
+                      <m:sSubPr>
+                        <m:ctrlPr>
+                          <a:rPr lang="en-US" i="1">
+                            <a:latin typeface="Cambria Math" panose="02040503050406030204" pitchFamily="18" charset="0"/>
+                          </a:rPr>
+                        </m:ctrlPr>
+                      </m:sSubPr>
+                      <m:e>
+                        <m:r>
+                          <a:rPr lang="en-US" i="1">
+                            <a:latin typeface="Cambria Math" panose="02040503050406030204" pitchFamily="18" charset="0"/>
+                          </a:rPr>
+                          <m:t>𝑅</m:t>
+                        </m:r>
+                      </m:e>
+                      <m:sub>
+                        <m:r>
+                          <a:rPr lang="en-US" i="1">
+                            <a:latin typeface="Cambria Math" panose="02040503050406030204" pitchFamily="18" charset="0"/>
+                          </a:rPr>
+                          <m:t>𝑡</m:t>
+                        </m:r>
+                        <m:r>
+                          <a:rPr lang="en-US" i="1">
+                            <a:latin typeface="Cambria Math" panose="02040503050406030204" pitchFamily="18" charset="0"/>
+                          </a:rPr>
+                          <m:t>+</m:t>
+                        </m:r>
+                        <m:r>
+                          <a:rPr lang="en-US" i="1">
+                            <a:latin typeface="Cambria Math" panose="02040503050406030204" pitchFamily="18" charset="0"/>
+                          </a:rPr>
+                          <m:t>𝑛</m:t>
+                        </m:r>
+                      </m:sub>
+                    </m:sSub>
+                  </m:oMath>
+                </a14:m>
+                <a:r>
+                  <a:rPr lang="en-US" dirty="0"/>
+                  <a:t> and </a:t>
+                </a:r>
+                <a14:m>
+                  <m:oMath xmlns:m="http://schemas.openxmlformats.org/officeDocument/2006/math">
+                    <m:sSub>
+                      <m:sSubPr>
+                        <m:ctrlPr>
+                          <a:rPr lang="en-US" b="0" i="1" smtClean="0">
+                            <a:latin typeface="Cambria Math" panose="02040503050406030204" pitchFamily="18" charset="0"/>
+                          </a:rPr>
+                        </m:ctrlPr>
+                      </m:sSubPr>
+                      <m:e>
+                        <m:r>
+                          <a:rPr lang="en-US" b="0" i="1" smtClean="0">
+                            <a:latin typeface="Cambria Math" panose="02040503050406030204" pitchFamily="18" charset="0"/>
+                          </a:rPr>
+                          <m:t>𝑆</m:t>
+                        </m:r>
+                      </m:e>
+                      <m:sub>
+                        <m:r>
+                          <a:rPr lang="en-US" b="0" i="1" smtClean="0">
+                            <a:latin typeface="Cambria Math" panose="02040503050406030204" pitchFamily="18" charset="0"/>
+                          </a:rPr>
+                          <m:t>𝑡</m:t>
+                        </m:r>
+                        <m:r>
+                          <a:rPr lang="en-US" b="0" i="1" smtClean="0">
+                            <a:latin typeface="Cambria Math" panose="02040503050406030204" pitchFamily="18" charset="0"/>
+                          </a:rPr>
+                          <m:t>+</m:t>
+                        </m:r>
+                        <m:r>
+                          <a:rPr lang="en-US" b="0" i="1" smtClean="0">
+                            <a:latin typeface="Cambria Math" panose="02040503050406030204" pitchFamily="18" charset="0"/>
+                          </a:rPr>
+                          <m:t>𝑛</m:t>
+                        </m:r>
+                      </m:sub>
+                    </m:sSub>
+                    <m:r>
+                      <a:rPr lang="en-US" b="0" i="1" smtClean="0">
+                        <a:latin typeface="Cambria Math" panose="02040503050406030204" pitchFamily="18" charset="0"/>
+                      </a:rPr>
+                      <m:t> </m:t>
+                    </m:r>
+                  </m:oMath>
+                </a14:m>
+                <a:r>
+                  <a:rPr lang="en-US" dirty="0"/>
+                  <a:t>need to be corrected!</a:t>
+                </a:r>
+              </a:p>
+              <a:p>
+                <a:endParaRPr lang="en-US" dirty="0"/>
+              </a:p>
+              <a:p>
+                <a:r>
+                  <a:rPr lang="en-US" dirty="0"/>
+                  <a:t>Options: </a:t>
+                </a:r>
+              </a:p>
+              <a:p>
+                <a:pPr lvl="1"/>
+                <a:r>
+                  <a:rPr lang="en-US" dirty="0"/>
+                  <a:t>Only use updates when the all actions chosen by </a:t>
+                </a:r>
+                <a14:m>
+                  <m:oMath xmlns:m="http://schemas.openxmlformats.org/officeDocument/2006/math">
+                    <m:r>
+                      <a:rPr lang="en-US" b="0" i="1" smtClean="0">
+                        <a:latin typeface="Cambria Math" panose="02040503050406030204" pitchFamily="18" charset="0"/>
+                      </a:rPr>
+                      <m:t>𝑏</m:t>
+                    </m:r>
+                  </m:oMath>
+                </a14:m>
+                <a:r>
+                  <a:rPr lang="en-US" dirty="0"/>
+                  <a:t> match the target policy </a:t>
+                </a:r>
+                <a14:m>
+                  <m:oMath xmlns:m="http://schemas.openxmlformats.org/officeDocument/2006/math">
+                    <m:r>
+                      <a:rPr lang="en-US" b="0" i="1" smtClean="0">
+                        <a:latin typeface="Cambria Math" panose="02040503050406030204" pitchFamily="18" charset="0"/>
+                      </a:rPr>
+                      <m:t>𝜋</m:t>
+                    </m:r>
+                  </m:oMath>
+                </a14:m>
+                <a:r>
+                  <a:rPr lang="en-US" dirty="0"/>
+                  <a:t>.  </a:t>
+                </a:r>
+                <a:br>
+                  <a:rPr lang="en-US" dirty="0"/>
+                </a:br>
+                <a:r>
+                  <a:rPr lang="en-US" dirty="0"/>
+                  <a:t>This is very sample inefficient.</a:t>
+                </a:r>
+              </a:p>
+              <a:p>
+                <a:pPr lvl="1"/>
+                <a:r>
+                  <a:rPr lang="en-US" dirty="0"/>
+                  <a:t>Use importance sampling to correct </a:t>
+                </a:r>
+                <a14:m>
+                  <m:oMath xmlns:m="http://schemas.openxmlformats.org/officeDocument/2006/math">
+                    <m:sSub>
+                      <m:sSubPr>
+                        <m:ctrlPr>
+                          <a:rPr lang="en-US" i="1">
+                            <a:latin typeface="Cambria Math" panose="02040503050406030204" pitchFamily="18" charset="0"/>
+                          </a:rPr>
+                        </m:ctrlPr>
+                      </m:sSubPr>
+                      <m:e>
+                        <m:r>
+                          <a:rPr lang="en-US" i="1">
+                            <a:latin typeface="Cambria Math" panose="02040503050406030204" pitchFamily="18" charset="0"/>
+                          </a:rPr>
+                          <m:t>𝑅</m:t>
+                        </m:r>
+                      </m:e>
+                      <m:sub>
+                        <m:r>
+                          <a:rPr lang="en-US" i="1">
+                            <a:latin typeface="Cambria Math" panose="02040503050406030204" pitchFamily="18" charset="0"/>
+                          </a:rPr>
+                          <m:t>𝑡</m:t>
+                        </m:r>
+                        <m:r>
+                          <a:rPr lang="en-US" i="1">
+                            <a:latin typeface="Cambria Math" panose="02040503050406030204" pitchFamily="18" charset="0"/>
+                          </a:rPr>
+                          <m:t>+2</m:t>
+                        </m:r>
+                      </m:sub>
+                    </m:sSub>
+                  </m:oMath>
+                </a14:m>
+                <a:r>
+                  <a:rPr lang="en-US" dirty="0"/>
+                  <a:t> to </a:t>
+                </a:r>
+                <a14:m>
+                  <m:oMath xmlns:m="http://schemas.openxmlformats.org/officeDocument/2006/math">
+                    <m:sSub>
+                      <m:sSubPr>
+                        <m:ctrlPr>
+                          <a:rPr lang="en-US" i="1">
+                            <a:latin typeface="Cambria Math" panose="02040503050406030204" pitchFamily="18" charset="0"/>
+                          </a:rPr>
+                        </m:ctrlPr>
+                      </m:sSubPr>
+                      <m:e>
+                        <m:r>
+                          <a:rPr lang="en-US" i="1">
+                            <a:latin typeface="Cambria Math" panose="02040503050406030204" pitchFamily="18" charset="0"/>
+                          </a:rPr>
+                          <m:t>𝑅</m:t>
+                        </m:r>
+                      </m:e>
+                      <m:sub>
+                        <m:r>
+                          <a:rPr lang="en-US" i="1">
+                            <a:latin typeface="Cambria Math" panose="02040503050406030204" pitchFamily="18" charset="0"/>
+                          </a:rPr>
+                          <m:t>𝑡</m:t>
+                        </m:r>
+                        <m:r>
+                          <a:rPr lang="en-US" i="1">
+                            <a:latin typeface="Cambria Math" panose="02040503050406030204" pitchFamily="18" charset="0"/>
+                          </a:rPr>
+                          <m:t>+</m:t>
+                        </m:r>
+                        <m:r>
+                          <a:rPr lang="en-US" i="1">
+                            <a:latin typeface="Cambria Math" panose="02040503050406030204" pitchFamily="18" charset="0"/>
+                          </a:rPr>
+                          <m:t>𝑛</m:t>
+                        </m:r>
+                      </m:sub>
+                    </m:sSub>
+                  </m:oMath>
+                </a14:m>
+                <a:r>
+                  <a:rPr lang="en-US" dirty="0"/>
+                  <a:t> and </a:t>
+                </a:r>
+                <a14:m>
+                  <m:oMath xmlns:m="http://schemas.openxmlformats.org/officeDocument/2006/math">
+                    <m:sSub>
+                      <m:sSubPr>
+                        <m:ctrlPr>
+                          <a:rPr lang="en-US" b="0" i="1" smtClean="0">
+                            <a:latin typeface="Cambria Math" panose="02040503050406030204" pitchFamily="18" charset="0"/>
+                          </a:rPr>
+                        </m:ctrlPr>
+                      </m:sSubPr>
+                      <m:e>
+                        <m:r>
+                          <a:rPr lang="en-US" b="0" i="1" smtClean="0">
+                            <a:latin typeface="Cambria Math" panose="02040503050406030204" pitchFamily="18" charset="0"/>
+                          </a:rPr>
+                          <m:t>𝑆</m:t>
+                        </m:r>
+                      </m:e>
+                      <m:sub>
+                        <m:r>
+                          <a:rPr lang="en-US" b="0" i="1" smtClean="0">
+                            <a:latin typeface="Cambria Math" panose="02040503050406030204" pitchFamily="18" charset="0"/>
+                          </a:rPr>
+                          <m:t>𝑡</m:t>
+                        </m:r>
+                        <m:r>
+                          <a:rPr lang="en-US" b="0" i="1" smtClean="0">
+                            <a:latin typeface="Cambria Math" panose="02040503050406030204" pitchFamily="18" charset="0"/>
+                          </a:rPr>
+                          <m:t>+</m:t>
+                        </m:r>
+                        <m:r>
+                          <a:rPr lang="en-US" b="0" i="1" smtClean="0">
+                            <a:latin typeface="Cambria Math" panose="02040503050406030204" pitchFamily="18" charset="0"/>
+                          </a:rPr>
+                          <m:t>𝑛</m:t>
+                        </m:r>
+                      </m:sub>
+                    </m:sSub>
+                  </m:oMath>
+                </a14:m>
+                <a:r>
+                  <a:rPr lang="en-US" dirty="0"/>
+                  <a:t>. </a:t>
+                </a:r>
+                <a:br>
+                  <a:rPr lang="en-US" dirty="0"/>
+                </a:br>
+                <a:r>
+                  <a:rPr lang="en-US" dirty="0"/>
+                  <a:t>This </a:t>
+                </a:r>
+                <a:r>
+                  <a:rPr lang="en-US"/>
+                  <a:t>introduces large </a:t>
+                </a:r>
+                <a:r>
+                  <a:rPr lang="en-US" dirty="0"/>
+                  <a:t>variance.</a:t>
+                </a:r>
+              </a:p>
+              <a:p>
+                <a:pPr lvl="1"/>
+                <a:endParaRPr lang="en-US" dirty="0"/>
+              </a:p>
+            </p:txBody>
+          </p:sp>
+        </mc:Choice>
+        <mc:Fallback>
+          <p:sp>
+            <p:nvSpPr>
+              <p:cNvPr id="3" name="Content Placeholder 2">
+                <a:extLst>
+                  <a:ext uri="{FF2B5EF4-FFF2-40B4-BE49-F238E27FC236}">
+                    <a16:creationId xmlns:a16="http://schemas.microsoft.com/office/drawing/2014/main" id="{DF8737CF-E4BA-0983-733D-3F8104162B8B}"/>
+                  </a:ext>
+                </a:extLst>
+              </p:cNvPr>
+              <p:cNvSpPr>
+                <a:spLocks noGrp="1" noRot="1" noChangeAspect="1" noMove="1" noResize="1" noEditPoints="1" noAdjustHandles="1" noChangeArrowheads="1" noChangeShapeType="1" noTextEdit="1"/>
+              </p:cNvSpPr>
+              <p:nvPr>
+                <p:ph idx="1"/>
+              </p:nvPr>
+            </p:nvSpPr>
+            <p:spPr>
+              <a:blipFill>
+                <a:blip r:embed="rId3"/>
+                <a:stretch>
+                  <a:fillRect l="-928" t="-3189" b="-510"/>
+                </a:stretch>
+              </a:blipFill>
+            </p:spPr>
+            <p:txBody>
+              <a:bodyPr/>
+              <a:lstStyle/>
+              <a:p>
+                <a:r>
+                  <a:rPr lang="en-US">
+                    <a:noFill/>
+                  </a:rPr>
+                  <a:t> </a:t>
+                </a:r>
+              </a:p>
+            </p:txBody>
+          </p:sp>
+        </mc:Fallback>
+      </mc:AlternateContent>
+      <p:grpSp>
+        <p:nvGrpSpPr>
+          <p:cNvPr id="18" name="Group 17" descr="The rewards are from following the behavioral policy and the bootstrapped value is from the target policy.">
+            <a:extLst>
+              <a:ext uri="{FF2B5EF4-FFF2-40B4-BE49-F238E27FC236}">
+                <a16:creationId xmlns:a16="http://schemas.microsoft.com/office/drawing/2014/main" id="{9EBB9F56-6A6C-3946-87F2-7839654E90ED}"/>
+              </a:ext>
+            </a:extLst>
+          </p:cNvPr>
+          <p:cNvGrpSpPr/>
+          <p:nvPr/>
+        </p:nvGrpSpPr>
+        <p:grpSpPr>
+          <a:xfrm>
+            <a:off x="3016526" y="2733946"/>
+            <a:ext cx="7404653" cy="516138"/>
+            <a:chOff x="2537261" y="3099729"/>
+            <a:chExt cx="8313899" cy="516138"/>
+          </a:xfrm>
+        </p:grpSpPr>
+        <p:sp>
+          <p:nvSpPr>
+            <p:cNvPr id="5" name="Right Brace 4">
+              <a:extLst>
+                <a:ext uri="{FF2B5EF4-FFF2-40B4-BE49-F238E27FC236}">
+                  <a16:creationId xmlns:a16="http://schemas.microsoft.com/office/drawing/2014/main" id="{9A86C093-1578-A534-E667-9866B054AC89}"/>
+                </a:ext>
+              </a:extLst>
+            </p:cNvPr>
+            <p:cNvSpPr/>
+            <p:nvPr/>
+          </p:nvSpPr>
+          <p:spPr>
+            <a:xfrm rot="5400000">
+              <a:off x="4928627" y="708363"/>
+              <a:ext cx="188156" cy="4970887"/>
+            </a:xfrm>
+            <a:prstGeom prst="rightBrace">
+              <a:avLst/>
+            </a:prstGeom>
+          </p:spPr>
+          <p:style>
+            <a:lnRef idx="2">
+              <a:schemeClr val="accent1"/>
+            </a:lnRef>
+            <a:fillRef idx="0">
+              <a:schemeClr val="accent1"/>
+            </a:fillRef>
+            <a:effectRef idx="1">
+              <a:schemeClr val="accent1"/>
+            </a:effectRef>
+            <a:fontRef idx="minor">
+              <a:schemeClr val="tx1"/>
+            </a:fontRef>
+          </p:style>
+          <p:txBody>
+            <a:bodyPr rtlCol="0" anchor="ctr"/>
+            <a:lstStyle/>
+            <a:p>
+              <a:pPr algn="ctr"/>
+              <a:endParaRPr lang="en-US" dirty="0"/>
+            </a:p>
+          </p:txBody>
+        </p:sp>
+        <p:sp>
+          <p:nvSpPr>
+            <p:cNvPr id="6" name="TextBox 5">
+              <a:extLst>
+                <a:ext uri="{FF2B5EF4-FFF2-40B4-BE49-F238E27FC236}">
+                  <a16:creationId xmlns:a16="http://schemas.microsoft.com/office/drawing/2014/main" id="{A4668E29-8F0F-BE9B-C3A1-C915B55B3E2D}"/>
+                </a:ext>
+              </a:extLst>
+            </p:cNvPr>
+            <p:cNvSpPr txBox="1"/>
+            <p:nvPr/>
+          </p:nvSpPr>
+          <p:spPr>
+            <a:xfrm>
+              <a:off x="3586263" y="3246535"/>
+              <a:ext cx="2913109" cy="369332"/>
+            </a:xfrm>
+            <a:prstGeom prst="rect">
+              <a:avLst/>
+            </a:prstGeom>
+            <a:noFill/>
+          </p:spPr>
+          <p:txBody>
+            <a:bodyPr wrap="square" rtlCol="0">
+              <a:spAutoFit/>
+            </a:bodyPr>
+            <a:lstStyle/>
+            <a:p>
+              <a:r>
+                <a:rPr lang="en-US" dirty="0">
+                  <a:solidFill>
+                    <a:schemeClr val="accent1"/>
+                  </a:solidFill>
+                </a:rPr>
+                <a:t>from the behavior policy</a:t>
+              </a:r>
+            </a:p>
+          </p:txBody>
+        </p:sp>
+        <p:sp>
+          <p:nvSpPr>
+            <p:cNvPr id="8" name="TextBox 7">
+              <a:extLst>
+                <a:ext uri="{FF2B5EF4-FFF2-40B4-BE49-F238E27FC236}">
+                  <a16:creationId xmlns:a16="http://schemas.microsoft.com/office/drawing/2014/main" id="{578FA630-45A6-3552-9B71-6FCEB096CEE9}"/>
+                </a:ext>
+              </a:extLst>
+            </p:cNvPr>
+            <p:cNvSpPr txBox="1"/>
+            <p:nvPr/>
+          </p:nvSpPr>
+          <p:spPr>
+            <a:xfrm>
+              <a:off x="8204433" y="3187813"/>
+              <a:ext cx="2646727" cy="369332"/>
+            </a:xfrm>
+            <a:prstGeom prst="rect">
+              <a:avLst/>
+            </a:prstGeom>
+            <a:noFill/>
+          </p:spPr>
+          <p:txBody>
+            <a:bodyPr wrap="square" rtlCol="0">
+              <a:spAutoFit/>
+            </a:bodyPr>
+            <a:lstStyle/>
+            <a:p>
+              <a:pPr algn="ctr"/>
+              <a:r>
+                <a:rPr lang="en-US" dirty="0">
+                  <a:solidFill>
+                    <a:schemeClr val="accent1"/>
+                  </a:solidFill>
+                </a:rPr>
+                <a:t>from the target policy</a:t>
+              </a:r>
+            </a:p>
+          </p:txBody>
+        </p:sp>
+        <p:sp>
+          <p:nvSpPr>
+            <p:cNvPr id="12" name="Right Brace 11">
+              <a:extLst>
+                <a:ext uri="{FF2B5EF4-FFF2-40B4-BE49-F238E27FC236}">
+                  <a16:creationId xmlns:a16="http://schemas.microsoft.com/office/drawing/2014/main" id="{8DA81D98-AF06-115F-2613-48C35602845A}"/>
+                </a:ext>
+              </a:extLst>
+            </p:cNvPr>
+            <p:cNvSpPr/>
+            <p:nvPr/>
+          </p:nvSpPr>
+          <p:spPr>
+            <a:xfrm rot="5400000">
+              <a:off x="9132167" y="1778515"/>
+              <a:ext cx="112544" cy="2823496"/>
+            </a:xfrm>
+            <a:prstGeom prst="rightBrace">
+              <a:avLst/>
+            </a:prstGeom>
+          </p:spPr>
+          <p:style>
+            <a:lnRef idx="2">
+              <a:schemeClr val="accent1"/>
+            </a:lnRef>
+            <a:fillRef idx="0">
+              <a:schemeClr val="accent1"/>
+            </a:fillRef>
+            <a:effectRef idx="1">
+              <a:schemeClr val="accent1"/>
+            </a:effectRef>
+            <a:fontRef idx="minor">
+              <a:schemeClr val="tx1"/>
+            </a:fontRef>
+          </p:style>
+          <p:txBody>
+            <a:bodyPr rtlCol="0" anchor="ctr"/>
+            <a:lstStyle/>
+            <a:p>
+              <a:pPr algn="ctr"/>
+              <a:endParaRPr lang="en-US" dirty="0"/>
+            </a:p>
+          </p:txBody>
+        </p:sp>
+      </p:grpSp>
+    </p:spTree>
+    <p:extLst>
+      <p:ext uri="{BB962C8B-B14F-4D97-AF65-F5344CB8AC3E}">
+        <p14:creationId xmlns:p14="http://schemas.microsoft.com/office/powerpoint/2010/main" val="834727154"/>
+      </p:ext>
+    </p:extLst>
+  </p:cSld>
+  <p:clrMapOvr>
+    <a:masterClrMapping/>
+  </p:clrMapOvr>
+  <p:timing>
+    <p:tnLst>
+      <p:par>
+        <p:cTn id="1" dur="indefinite" restart="never" nodeType="tmRoot">
+          <p:childTnLst>
+            <p:seq concurrent="1" nextAc="seek">
+              <p:cTn id="2" dur="indefinite" nodeType="mainSeq">
+                <p:childTnLst>
+                  <p:par>
+                    <p:cTn id="3" fill="hold">
+                      <p:stCondLst>
+                        <p:cond delay="indefinite"/>
+                      </p:stCondLst>
+                      <p:childTnLst>
+                        <p:par>
+                          <p:cTn id="4" fill="hold">
+                            <p:stCondLst>
+                              <p:cond delay="0"/>
+                            </p:stCondLst>
+                            <p:childTnLst>
+                              <p:par>
+                                <p:cTn id="5" presetID="1" presetClass="entr" presetSubtype="0" fill="hold" nodeType="clickEffect">
+                                  <p:stCondLst>
+                                    <p:cond delay="0"/>
+                                  </p:stCondLst>
+                                  <p:childTnLst>
+                                    <p:set>
+                                      <p:cBhvr>
+                                        <p:cTn id="6" dur="1" fill="hold">
+                                          <p:stCondLst>
+                                            <p:cond delay="0"/>
+                                          </p:stCondLst>
+                                        </p:cTn>
+                                        <p:tgtEl>
+                                          <p:spTgt spid="18"/>
+                                        </p:tgtEl>
+                                        <p:attrNameLst>
+                                          <p:attrName>style.visibility</p:attrName>
+                                        </p:attrNameLst>
+                                      </p:cBhvr>
+                                      <p:to>
+                                        <p:strVal val="visible"/>
+                                      </p:to>
+                                    </p:set>
+                                  </p:childTnLst>
+                                </p:cTn>
+                              </p:par>
+                            </p:childTnLst>
+                          </p:cTn>
+                        </p:par>
+                      </p:childTnLst>
+                    </p:cTn>
+                  </p:par>
+                </p:childTnLst>
+              </p:cTn>
+              <p:prevCondLst>
+                <p:cond evt="onPrev" delay="0">
+                  <p:tgtEl>
+                    <p:sldTgt/>
+                  </p:tgtEl>
+                </p:cond>
+              </p:prevCondLst>
+              <p:nextCondLst>
+                <p:cond evt="onNext" delay="0">
+                  <p:tgtEl>
+                    <p:sldTgt/>
+                  </p:tgtEl>
+                </p:cond>
+              </p:nextCondLst>
+            </p:seq>
+          </p:childTnLst>
+        </p:cTn>
+      </p:par>
+    </p:tnLst>
+  </p:timing>
+</p:sld>
+</file>
+
+<file path=ppt/slides/slide19.xml><?xml version="1.0" encoding="utf-8"?>
 <p:sld xmlns:a="http://schemas.openxmlformats.org/drawingml/2006/main" xmlns:r="http://schemas.openxmlformats.org/officeDocument/2006/relationships" xmlns:p="http://schemas.openxmlformats.org/presentationml/2006/main">
   <p:cSld>
     <p:bg>
@@ -10300,8 +11539,8 @@
           </a:extLst>
         </p:spPr>
       </p:pic>
-      <mc:AlternateContent xmlns:mc="http://schemas.openxmlformats.org/markup-compatibility/2006">
-        <mc:Choice xmlns:a14="http://schemas.microsoft.com/office/drawing/2010/main" Requires="a14">
+      <mc:AlternateContent xmlns:mc="http://schemas.openxmlformats.org/markup-compatibility/2006" xmlns:a14="http://schemas.microsoft.com/office/drawing/2010/main">
+        <mc:Choice Requires="a14">
           <p:sp>
             <p:nvSpPr>
               <p:cNvPr id="3" name="Content Placeholder 2" descr="n -step methods let us choose the amount of bootstrapping from 1-step to no bootstrapping (MC). Advantage over one-step methods:. Learning: Looking more steps ahead speeds up learning, especially for sparse rewards. Error reduction: Significantly reduces the bootstrapping error (bias) at the cost of increased variance. An intermediate amount of bootstrapping typically performs better in terms of the variance/bias tradeoff than the one-step and MC extremes. n is application-dependent and can be tuned. Drawback:. Delay: Updates are delayed n -step since future events (rewards and states) are needed. Computation: More computation per time step and higher memory needs than one-step methods. Eligibility traces address the delay and computation drawbacks. We will cover these methods later">
@@ -10321,7 +11560,7 @@
             <p:spPr>
               <a:xfrm>
                 <a:off x="6207456" y="482600"/>
-                <a:ext cx="5628944" cy="5965092"/>
+                <a:ext cx="5628944" cy="6134100"/>
               </a:xfrm>
             </p:spPr>
             <p:txBody>
@@ -10462,14 +11701,10 @@
                 <a:pPr lvl="1"/>
                 <a:r>
                   <a:rPr lang="en-US" sz="1800" b="1" dirty="0"/>
-                  <a:t>Delayed </a:t>
-                </a:r>
-                <a:r>
-                  <a:rPr lang="en-US" sz="1800" b="1"/>
-                  <a:t>Updates</a:t>
-                </a:r>
-                <a:r>
-                  <a:rPr lang="en-US" sz="1800"/>
+                  <a:t>Delayed Updates</a:t>
+                </a:r>
+                <a:r>
+                  <a:rPr lang="en-US" sz="1800" dirty="0"/>
                   <a:t>: delayed </a:t>
                 </a:r>
                 <a14:m>
@@ -10511,12 +11746,6 @@
                   <a:rPr lang="en-US" sz="1700" dirty="0"/>
                   <a:t>address the delay and computation drawbacks, but they don’t work well with DRL. We will cover these methods later.</a:t>
                 </a:r>
-              </a:p>
-              <a:p>
-                <a:pPr marL="457200" lvl="1" indent="0">
-                  <a:buNone/>
-                </a:pPr>
-                <a:endParaRPr lang="en-US" sz="1700" dirty="0"/>
               </a:p>
               <a:p>
                 <a:endParaRPr lang="en-US" sz="1400" dirty="0"/>
@@ -10524,7 +11753,7 @@
             </p:txBody>
           </p:sp>
         </mc:Choice>
-        <mc:Fallback>
+        <mc:Fallback xmlns="">
           <p:sp>
             <p:nvSpPr>
               <p:cNvPr id="3" name="Content Placeholder 2" descr="n -step methods let us choose the amount of bootstrapping from 1-step to no bootstrapping (MC). Advantage over one-step methods:. Learning: Looking more steps ahead speeds up learning, especially for sparse rewards. Error reduction: Significantly reduces the bootstrapping error (bias) at the cost of increased variance. An intermediate amount of bootstrapping typically performs better in terms of the variance/bias tradeoff than the one-step and MC extremes. n is application-dependent and can be tuned. Drawback:. Delay: Updates are delayed n -step since future events (rewards and states) are needed. Computation: More computation per time step and higher memory needs than one-step methods. Eligibility traces address the delay and computation drawbacks. We will cover these methods later">
@@ -10544,12 +11773,12 @@
             <p:spPr>
               <a:xfrm>
                 <a:off x="6207456" y="482600"/>
-                <a:ext cx="5628944" cy="5965092"/>
+                <a:ext cx="5628944" cy="6134100"/>
               </a:xfrm>
               <a:blipFill>
                 <a:blip r:embed="rId3"/>
                 <a:stretch>
-                  <a:fillRect l="-649" t="-5209"/>
+                  <a:fillRect l="-649" t="-1590"/>
                 </a:stretch>
               </a:blipFill>
             </p:spPr>
@@ -20395,8 +21624,8 @@
           </a:p>
         </p:txBody>
       </p:sp>
-      <mc:AlternateContent xmlns:mc="http://schemas.openxmlformats.org/markup-compatibility/2006">
-        <mc:Choice xmlns:a14="http://schemas.microsoft.com/office/drawing/2010/main" Requires="a14">
+      <mc:AlternateContent xmlns:mc="http://schemas.openxmlformats.org/markup-compatibility/2006" xmlns:a14="http://schemas.microsoft.com/office/drawing/2010/main">
+        <mc:Choice Requires="a14">
           <p:sp>
             <p:nvSpPr>
               <p:cNvPr id="12" name="Speech Bubble: Rectangle with Corners Rounded 11">
@@ -20477,7 +21706,7 @@
             </p:txBody>
           </p:sp>
         </mc:Choice>
-        <mc:Fallback>
+        <mc:Fallback xmlns="">
           <p:sp>
             <p:nvSpPr>
               <p:cNvPr id="12" name="Speech Bubble: Rectangle with Corners Rounded 11">
@@ -20529,8 +21758,8 @@
           </p:sp>
         </mc:Fallback>
       </mc:AlternateContent>
-      <mc:AlternateContent xmlns:mc="http://schemas.openxmlformats.org/markup-compatibility/2006">
-        <mc:Choice xmlns:a14="http://schemas.microsoft.com/office/drawing/2010/main" Requires="a14">
+      <mc:AlternateContent xmlns:mc="http://schemas.openxmlformats.org/markup-compatibility/2006" xmlns:a14="http://schemas.microsoft.com/office/drawing/2010/main">
+        <mc:Choice Requires="a14">
           <p:sp>
             <p:nvSpPr>
               <p:cNvPr id="13" name="Speech Bubble: Rectangle with Corners Rounded 12">
@@ -20728,7 +21957,7 @@
             </p:txBody>
           </p:sp>
         </mc:Choice>
-        <mc:Fallback>
+        <mc:Fallback xmlns="">
           <p:sp>
             <p:nvSpPr>
               <p:cNvPr id="13" name="Speech Bubble: Rectangle with Corners Rounded 12">
@@ -20780,8 +22009,8 @@
           </p:sp>
         </mc:Fallback>
       </mc:AlternateContent>
-      <mc:AlternateContent xmlns:mc="http://schemas.openxmlformats.org/markup-compatibility/2006">
-        <mc:Choice xmlns:a14="http://schemas.microsoft.com/office/drawing/2010/main" Requires="a14">
+      <mc:AlternateContent xmlns:mc="http://schemas.openxmlformats.org/markup-compatibility/2006" xmlns:a14="http://schemas.microsoft.com/office/drawing/2010/main">
+        <mc:Choice Requires="a14">
           <p:sp>
             <p:nvSpPr>
               <p:cNvPr id="14" name="Speech Bubble: Rectangle with Corners Rounded 13">
@@ -20853,7 +22082,7 @@
             </p:txBody>
           </p:sp>
         </mc:Choice>
-        <mc:Fallback>
+        <mc:Fallback xmlns="">
           <p:sp>
             <p:nvSpPr>
               <p:cNvPr id="14" name="Speech Bubble: Rectangle with Corners Rounded 13">
@@ -20907,7 +22136,7 @@
       </mc:AlternateContent>
       <p:grpSp>
         <p:nvGrpSpPr>
-          <p:cNvPr id="4" name="Group 3">
+          <p:cNvPr id="4" name="Group 3" descr="t is the current time step. tau is the timestep that gets updated.">
             <a:extLst>
               <a:ext uri="{FF2B5EF4-FFF2-40B4-BE49-F238E27FC236}">
                 <a16:creationId xmlns:a16="http://schemas.microsoft.com/office/drawing/2014/main" id="{AF682137-4399-D068-602B-53B27612B383}"/>

--- a/slides/Lecture_Chapter07.pptx
+++ b/slides/Lecture_Chapter07.pptx
@@ -14,16 +14,18 @@
     <p:sldId id="386" r:id="rId8"/>
     <p:sldId id="387" r:id="rId9"/>
     <p:sldId id="481" r:id="rId10"/>
-    <p:sldId id="480" r:id="rId11"/>
-    <p:sldId id="392" r:id="rId12"/>
-    <p:sldId id="391" r:id="rId13"/>
-    <p:sldId id="394" r:id="rId14"/>
-    <p:sldId id="393" r:id="rId15"/>
-    <p:sldId id="389" r:id="rId16"/>
-    <p:sldId id="390" r:id="rId17"/>
-    <p:sldId id="395" r:id="rId18"/>
-    <p:sldId id="482" r:id="rId19"/>
-    <p:sldId id="397" r:id="rId20"/>
+    <p:sldId id="392" r:id="rId11"/>
+    <p:sldId id="391" r:id="rId12"/>
+    <p:sldId id="394" r:id="rId13"/>
+    <p:sldId id="393" r:id="rId14"/>
+    <p:sldId id="389" r:id="rId15"/>
+    <p:sldId id="390" r:id="rId16"/>
+    <p:sldId id="395" r:id="rId17"/>
+    <p:sldId id="482" r:id="rId18"/>
+    <p:sldId id="485" r:id="rId19"/>
+    <p:sldId id="483" r:id="rId20"/>
+    <p:sldId id="484" r:id="rId21"/>
+    <p:sldId id="397" r:id="rId22"/>
   </p:sldIdLst>
   <p:sldSz cx="12192000" cy="6858000"/>
   <p:notesSz cx="6858000" cy="9144000"/>
@@ -144,7 +146,6 @@
             <p14:sldId id="386"/>
             <p14:sldId id="387"/>
             <p14:sldId id="481"/>
-            <p14:sldId id="480"/>
           </p14:sldIdLst>
         </p14:section>
         <p14:section name="On-Policy Control" id="{6A91EB9B-FC66-4409-8B96-60AEBB5F5225}">
@@ -161,6 +162,13 @@
             <p14:sldId id="390"/>
             <p14:sldId id="395"/>
             <p14:sldId id="482"/>
+          </p14:sldIdLst>
+        </p14:section>
+        <p14:section name="Revisiting Bias vs. Variance" id="{A5B4CEC4-55F2-4BF1-8072-B7A1BD255BDF}">
+          <p14:sldIdLst>
+            <p14:sldId id="485"/>
+            <p14:sldId id="483"/>
+            <p14:sldId id="484"/>
             <p14:sldId id="397"/>
           </p14:sldIdLst>
         </p14:section>
@@ -320,7 +328,7 @@
           <a:p>
             <a:fld id="{3E22BF2E-04DA-469E-97C5-BB68A0368813}" type="datetimeFigureOut">
               <a:rPr lang="en-US" smtClean="0"/>
-              <a:t>10/19/2026</a:t>
+              <a:t>10/27/2026</a:t>
             </a:fld>
             <a:endParaRPr lang="en-US"/>
           </a:p>
@@ -518,7 +526,7 @@
           <a:p>
             <a:fld id="{3E22BF2E-04DA-469E-97C5-BB68A0368813}" type="datetimeFigureOut">
               <a:rPr lang="en-US" smtClean="0"/>
-              <a:t>10/19/2026</a:t>
+              <a:t>10/27/2026</a:t>
             </a:fld>
             <a:endParaRPr lang="en-US"/>
           </a:p>
@@ -726,7 +734,7 @@
           <a:p>
             <a:fld id="{3E22BF2E-04DA-469E-97C5-BB68A0368813}" type="datetimeFigureOut">
               <a:rPr lang="en-US" smtClean="0"/>
-              <a:t>10/19/2026</a:t>
+              <a:t>10/27/2026</a:t>
             </a:fld>
             <a:endParaRPr lang="en-US"/>
           </a:p>
@@ -934,7 +942,7 @@
           <a:p>
             <a:fld id="{3E22BF2E-04DA-469E-97C5-BB68A0368813}" type="datetimeFigureOut">
               <a:rPr lang="en-US" smtClean="0"/>
-              <a:t>10/19/2026</a:t>
+              <a:t>10/27/2026</a:t>
             </a:fld>
             <a:endParaRPr lang="en-US"/>
           </a:p>
@@ -1209,7 +1217,7 @@
           <a:p>
             <a:fld id="{3E22BF2E-04DA-469E-97C5-BB68A0368813}" type="datetimeFigureOut">
               <a:rPr lang="en-US" smtClean="0"/>
-              <a:t>10/19/2026</a:t>
+              <a:t>10/27/2026</a:t>
             </a:fld>
             <a:endParaRPr lang="en-US"/>
           </a:p>
@@ -1474,7 +1482,7 @@
           <a:p>
             <a:fld id="{3E22BF2E-04DA-469E-97C5-BB68A0368813}" type="datetimeFigureOut">
               <a:rPr lang="en-US" smtClean="0"/>
-              <a:t>10/19/2026</a:t>
+              <a:t>10/27/2026</a:t>
             </a:fld>
             <a:endParaRPr lang="en-US"/>
           </a:p>
@@ -1886,7 +1894,7 @@
           <a:p>
             <a:fld id="{3E22BF2E-04DA-469E-97C5-BB68A0368813}" type="datetimeFigureOut">
               <a:rPr lang="en-US" smtClean="0"/>
-              <a:t>10/19/2026</a:t>
+              <a:t>10/27/2026</a:t>
             </a:fld>
             <a:endParaRPr lang="en-US"/>
           </a:p>
@@ -2027,7 +2035,7 @@
           <a:p>
             <a:fld id="{3E22BF2E-04DA-469E-97C5-BB68A0368813}" type="datetimeFigureOut">
               <a:rPr lang="en-US" smtClean="0"/>
-              <a:t>10/19/2026</a:t>
+              <a:t>10/27/2026</a:t>
             </a:fld>
             <a:endParaRPr lang="en-US"/>
           </a:p>
@@ -2140,7 +2148,7 @@
           <a:p>
             <a:fld id="{3E22BF2E-04DA-469E-97C5-BB68A0368813}" type="datetimeFigureOut">
               <a:rPr lang="en-US" smtClean="0"/>
-              <a:t>10/19/2026</a:t>
+              <a:t>10/27/2026</a:t>
             </a:fld>
             <a:endParaRPr lang="en-US"/>
           </a:p>
@@ -2451,7 +2459,7 @@
           <a:p>
             <a:fld id="{3E22BF2E-04DA-469E-97C5-BB68A0368813}" type="datetimeFigureOut">
               <a:rPr lang="en-US" smtClean="0"/>
-              <a:t>10/19/2026</a:t>
+              <a:t>10/27/2026</a:t>
             </a:fld>
             <a:endParaRPr lang="en-US"/>
           </a:p>
@@ -2739,7 +2747,7 @@
           <a:p>
             <a:fld id="{3E22BF2E-04DA-469E-97C5-BB68A0368813}" type="datetimeFigureOut">
               <a:rPr lang="en-US" smtClean="0"/>
-              <a:t>10/19/2026</a:t>
+              <a:t>10/27/2026</a:t>
             </a:fld>
             <a:endParaRPr lang="en-US"/>
           </a:p>
@@ -2980,7 +2988,7 @@
           <a:p>
             <a:fld id="{3E22BF2E-04DA-469E-97C5-BB68A0368813}" type="datetimeFigureOut">
               <a:rPr lang="en-US" smtClean="0"/>
-              <a:t>10/19/2026</a:t>
+              <a:t>10/27/2026</a:t>
             </a:fld>
             <a:endParaRPr lang="en-US"/>
           </a:p>
@@ -4190,513 +4198,6 @@
           <a:chExt cx="0" cy="0"/>
         </a:xfrm>
       </p:grpSpPr>
-      <p:sp>
-        <p:nvSpPr>
-          <p:cNvPr id="2" name="Title 1">
-            <a:extLst>
-              <a:ext uri="{FF2B5EF4-FFF2-40B4-BE49-F238E27FC236}">
-                <a16:creationId xmlns:a16="http://schemas.microsoft.com/office/drawing/2014/main" id="{568BE528-C1DE-F2F1-563E-D757ECA4F863}"/>
-              </a:ext>
-            </a:extLst>
-          </p:cNvPr>
-          <p:cNvSpPr>
-            <a:spLocks noGrp="1"/>
-          </p:cNvSpPr>
-          <p:nvPr>
-            <p:ph type="title"/>
-          </p:nvPr>
-        </p:nvSpPr>
-        <p:spPr/>
-        <p:txBody>
-          <a:bodyPr>
-            <a:normAutofit/>
-          </a:bodyPr>
-          <a:lstStyle/>
-          <a:p>
-            <a:r>
-              <a:rPr lang="en-US" dirty="0"/>
-              <a:t>Bias-Variance Tradeoff in RL</a:t>
-            </a:r>
-          </a:p>
-        </p:txBody>
-      </p:sp>
-      <p:graphicFrame>
-        <p:nvGraphicFramePr>
-          <p:cNvPr id="4" name="Table 3" descr="Table with 4 rows and 3 columns. Column headers: Method, Bias of Estimate, Variance of Estimate. Row 1: MC, No bias: G sub t is an unbiased sample, High: difference between sample returns; falls with sample size. Row 2: n -step, Increased bias, Reduced. Row 3: TD, High bias: G sub t is bootstrapped; falls when getting close to the optimal value function, Low: only one reward is sampled.">
-            <a:extLst>
-              <a:ext uri="{FF2B5EF4-FFF2-40B4-BE49-F238E27FC236}">
-                <a16:creationId xmlns:a16="http://schemas.microsoft.com/office/drawing/2014/main" id="{312CB263-077E-07CB-B5DD-A047F28225DD}"/>
-              </a:ext>
-            </a:extLst>
-          </p:cNvPr>
-          <p:cNvGraphicFramePr>
-            <a:graphicFrameLocks noGrp="1"/>
-          </p:cNvGraphicFramePr>
-          <p:nvPr>
-            <p:extLst>
-              <p:ext uri="{D42A27DB-BD31-4B8C-83A1-F6EECF244321}">
-                <p14:modId xmlns:p14="http://schemas.microsoft.com/office/powerpoint/2010/main" val="4212467832"/>
-              </p:ext>
-            </p:extLst>
-          </p:nvPr>
-        </p:nvGraphicFramePr>
-        <p:xfrm>
-          <a:off x="1070490" y="3753134"/>
-          <a:ext cx="10051019" cy="2470245"/>
-        </p:xfrm>
-        <a:graphic>
-          <a:graphicData uri="http://schemas.openxmlformats.org/drawingml/2006/table">
-            <a:tbl>
-              <a:tblPr firstRow="1" bandRow="1">
-                <a:tableStyleId>{5C22544A-7EE6-4342-B048-85BDC9FD1C3A}</a:tableStyleId>
-              </a:tblPr>
-              <a:tblGrid>
-                <a:gridCol w="1324390">
-                  <a:extLst>
-                    <a:ext uri="{9D8B030D-6E8A-4147-A177-3AD203B41FA5}">
-                      <a16:colId xmlns:a16="http://schemas.microsoft.com/office/drawing/2014/main" val="585080336"/>
-                    </a:ext>
-                  </a:extLst>
-                </a:gridCol>
-                <a:gridCol w="4664531">
-                  <a:extLst>
-                    <a:ext uri="{9D8B030D-6E8A-4147-A177-3AD203B41FA5}">
-                      <a16:colId xmlns:a16="http://schemas.microsoft.com/office/drawing/2014/main" val="1752107938"/>
-                    </a:ext>
-                  </a:extLst>
-                </a:gridCol>
-                <a:gridCol w="4062098">
-                  <a:extLst>
-                    <a:ext uri="{9D8B030D-6E8A-4147-A177-3AD203B41FA5}">
-                      <a16:colId xmlns:a16="http://schemas.microsoft.com/office/drawing/2014/main" val="3538857757"/>
-                    </a:ext>
-                  </a:extLst>
-                </a:gridCol>
-              </a:tblGrid>
-              <a:tr h="418041">
-                <a:tc>
-                  <a:txBody>
-                    <a:bodyPr/>
-                    <a:lstStyle/>
-                    <a:p>
-                      <a:r>
-                        <a:rPr lang="en-US" sz="2000" dirty="0"/>
-                        <a:t>Method</a:t>
-                      </a:r>
-                    </a:p>
-                  </a:txBody>
-                  <a:tcPr/>
-                </a:tc>
-                <a:tc>
-                  <a:txBody>
-                    <a:bodyPr/>
-                    <a:lstStyle/>
-                    <a:p>
-                      <a:r>
-                        <a:rPr lang="en-US" sz="2000" dirty="0"/>
-                        <a:t>Bias</a:t>
-                      </a:r>
-                    </a:p>
-                  </a:txBody>
-                  <a:tcPr/>
-                </a:tc>
-                <a:tc>
-                  <a:txBody>
-                    <a:bodyPr/>
-                    <a:lstStyle/>
-                    <a:p>
-                      <a:r>
-                        <a:rPr lang="en-US" sz="2000" dirty="0"/>
-                        <a:t>Variance</a:t>
-                      </a:r>
-                    </a:p>
-                  </a:txBody>
-                  <a:tcPr/>
-                </a:tc>
-                <a:extLst>
-                  <a:ext uri="{0D108BD9-81ED-4DB2-BD59-A6C34878D82A}">
-                    <a16:rowId xmlns:a16="http://schemas.microsoft.com/office/drawing/2014/main" val="4062016133"/>
-                  </a:ext>
-                </a:extLst>
-              </a:tr>
-              <a:tr h="1330132">
-                <a:tc>
-                  <a:txBody>
-                    <a:bodyPr/>
-                    <a:lstStyle/>
-                    <a:p>
-                      <a:pPr marL="0" marR="0" lvl="0" indent="0" algn="l" defTabSz="914400" rtl="0" eaLnBrk="1" fontAlgn="auto" latinLnBrk="0" hangingPunct="1">
-                        <a:lnSpc>
-                          <a:spcPct val="100000"/>
-                        </a:lnSpc>
-                        <a:spcBef>
-                          <a:spcPts val="0"/>
-                        </a:spcBef>
-                        <a:spcAft>
-                          <a:spcPts val="0"/>
-                        </a:spcAft>
-                        <a:buClrTx/>
-                        <a:buSzTx/>
-                        <a:buFontTx/>
-                        <a:buNone/>
-                        <a:tabLst/>
-                        <a:defRPr/>
-                      </a:pPr>
-                      <a:r>
-                        <a:rPr lang="en-US" sz="2000" dirty="0"/>
-                        <a:t>MC</a:t>
-                      </a:r>
-                    </a:p>
-                  </a:txBody>
-                  <a:tcPr/>
-                </a:tc>
-                <a:tc>
-                  <a:txBody>
-                    <a:bodyPr/>
-                    <a:lstStyle/>
-                    <a:p>
-                      <a:pPr marL="0" marR="0" lvl="0" indent="0" algn="l" defTabSz="914400" rtl="0" eaLnBrk="1" fontAlgn="auto" latinLnBrk="0" hangingPunct="1">
-                        <a:lnSpc>
-                          <a:spcPct val="100000"/>
-                        </a:lnSpc>
-                        <a:spcBef>
-                          <a:spcPts val="0"/>
-                        </a:spcBef>
-                        <a:spcAft>
-                          <a:spcPts val="0"/>
-                        </a:spcAft>
-                        <a:buClrTx/>
-                        <a:buSzTx/>
-                        <a:buFontTx/>
-                        <a:buNone/>
-                        <a:tabLst/>
-                        <a:defRPr/>
-                      </a:pPr>
-                      <a:r>
-                        <a:rPr lang="en-US" sz="2000" b="1" dirty="0"/>
-                        <a:t>Unbiased – </a:t>
-                      </a:r>
-                      <a:r>
-                        <a:rPr lang="en-US" sz="2000" dirty="0"/>
-                        <a:t>only uses actual observed rewards.</a:t>
-                      </a:r>
-                    </a:p>
-                  </a:txBody>
-                  <a:tcPr/>
-                </a:tc>
-                <a:tc>
-                  <a:txBody>
-                    <a:bodyPr/>
-                    <a:lstStyle/>
-                    <a:p>
-                      <a:pPr marL="0" marR="0" lvl="0" indent="0" algn="l" defTabSz="914400" rtl="0" eaLnBrk="1" fontAlgn="auto" latinLnBrk="0" hangingPunct="1">
-                        <a:lnSpc>
-                          <a:spcPct val="100000"/>
-                        </a:lnSpc>
-                        <a:spcBef>
-                          <a:spcPts val="0"/>
-                        </a:spcBef>
-                        <a:spcAft>
-                          <a:spcPts val="0"/>
-                        </a:spcAft>
-                        <a:buClrTx/>
-                        <a:buSzTx/>
-                        <a:buFontTx/>
-                        <a:buNone/>
-                        <a:tabLst/>
-                        <a:defRPr/>
-                      </a:pPr>
-                      <a:r>
-                        <a:rPr lang="en-US" sz="2000" b="1" dirty="0"/>
-                        <a:t>High - </a:t>
-                      </a:r>
-                      <a:r>
-                        <a:rPr lang="en-US" sz="2000" dirty="0"/>
-                        <a:t>accumulating rewards across long, stochastic trajectories creates massive fluctuations.</a:t>
-                      </a:r>
-                      <a:endParaRPr lang="en-US" sz="2000" b="1" dirty="0"/>
-                    </a:p>
-                  </a:txBody>
-                  <a:tcPr/>
-                </a:tc>
-                <a:extLst>
-                  <a:ext uri="{0D108BD9-81ED-4DB2-BD59-A6C34878D82A}">
-                    <a16:rowId xmlns:a16="http://schemas.microsoft.com/office/drawing/2014/main" val="1308207269"/>
-                  </a:ext>
-                </a:extLst>
-              </a:tr>
-              <a:tr h="722072">
-                <a:tc>
-                  <a:txBody>
-                    <a:bodyPr/>
-                    <a:lstStyle/>
-                    <a:p>
-                      <a:pPr marL="0" marR="0" lvl="0" indent="0" algn="l" defTabSz="914400" rtl="0" eaLnBrk="1" fontAlgn="auto" latinLnBrk="0" hangingPunct="1">
-                        <a:lnSpc>
-                          <a:spcPct val="100000"/>
-                        </a:lnSpc>
-                        <a:spcBef>
-                          <a:spcPts val="0"/>
-                        </a:spcBef>
-                        <a:spcAft>
-                          <a:spcPts val="0"/>
-                        </a:spcAft>
-                        <a:buClrTx/>
-                        <a:buSzTx/>
-                        <a:buFontTx/>
-                        <a:buNone/>
-                        <a:tabLst/>
-                        <a:defRPr/>
-                      </a:pPr>
-                      <a:r>
-                        <a:rPr lang="en-US" sz="2000" dirty="0"/>
-                        <a:t>TD</a:t>
-                      </a:r>
-                    </a:p>
-                  </a:txBody>
-                  <a:tcPr/>
-                </a:tc>
-                <a:tc>
-                  <a:txBody>
-                    <a:bodyPr/>
-                    <a:lstStyle/>
-                    <a:p>
-                      <a:pPr marL="0" marR="0" lvl="0" indent="0" algn="l" defTabSz="914400" rtl="0" eaLnBrk="1" fontAlgn="auto" latinLnBrk="0" hangingPunct="1">
-                        <a:lnSpc>
-                          <a:spcPct val="100000"/>
-                        </a:lnSpc>
-                        <a:spcBef>
-                          <a:spcPts val="0"/>
-                        </a:spcBef>
-                        <a:spcAft>
-                          <a:spcPts val="0"/>
-                        </a:spcAft>
-                        <a:buClrTx/>
-                        <a:buSzTx/>
-                        <a:buFontTx/>
-                        <a:buNone/>
-                        <a:tabLst/>
-                        <a:defRPr/>
-                      </a:pPr>
-                      <a:r>
-                        <a:rPr lang="en-US" sz="2000" b="1" dirty="0"/>
-                        <a:t>High - </a:t>
-                      </a:r>
-                      <a:r>
-                        <a:rPr lang="en-US" sz="2000" b="0" dirty="0"/>
-                        <a:t> bootstrapping uses </a:t>
-                      </a:r>
-                      <a:r>
-                        <a:rPr lang="en-US" sz="2000" dirty="0"/>
-                        <a:t>outdated value estimates for the next states</a:t>
-                      </a:r>
-                    </a:p>
-                  </a:txBody>
-                  <a:tcPr/>
-                </a:tc>
-                <a:tc>
-                  <a:txBody>
-                    <a:bodyPr/>
-                    <a:lstStyle/>
-                    <a:p>
-                      <a:pPr marL="0" marR="0" lvl="0" indent="0" algn="l" defTabSz="914400" rtl="0" eaLnBrk="1" fontAlgn="auto" latinLnBrk="0" hangingPunct="1">
-                        <a:lnSpc>
-                          <a:spcPct val="100000"/>
-                        </a:lnSpc>
-                        <a:spcBef>
-                          <a:spcPts val="0"/>
-                        </a:spcBef>
-                        <a:spcAft>
-                          <a:spcPts val="0"/>
-                        </a:spcAft>
-                        <a:buClrTx/>
-                        <a:buSzTx/>
-                        <a:buFontTx/>
-                        <a:buNone/>
-                        <a:tabLst/>
-                        <a:defRPr/>
-                      </a:pPr>
-                      <a:r>
-                        <a:rPr lang="en-US" sz="2000" b="1" dirty="0"/>
-                        <a:t>Lower - </a:t>
-                      </a:r>
-                      <a:r>
-                        <a:rPr lang="en-US" sz="2000" dirty="0"/>
-                        <a:t>looking only one step ahead shrinks the variance</a:t>
-                      </a:r>
-                    </a:p>
-                  </a:txBody>
-                  <a:tcPr/>
-                </a:tc>
-                <a:extLst>
-                  <a:ext uri="{0D108BD9-81ED-4DB2-BD59-A6C34878D82A}">
-                    <a16:rowId xmlns:a16="http://schemas.microsoft.com/office/drawing/2014/main" val="952062867"/>
-                  </a:ext>
-                </a:extLst>
-              </a:tr>
-            </a:tbl>
-          </a:graphicData>
-        </a:graphic>
-      </p:graphicFrame>
-      <p:sp>
-        <p:nvSpPr>
-          <p:cNvPr id="9" name="Content Placeholder 8">
-            <a:extLst>
-              <a:ext uri="{FF2B5EF4-FFF2-40B4-BE49-F238E27FC236}">
-                <a16:creationId xmlns:a16="http://schemas.microsoft.com/office/drawing/2014/main" id="{918BCD2A-BFE6-F180-0184-EE2B45D90BAE}"/>
-              </a:ext>
-            </a:extLst>
-          </p:cNvPr>
-          <p:cNvSpPr>
-            <a:spLocks noGrp="1"/>
-          </p:cNvSpPr>
-          <p:nvPr>
-            <p:ph idx="1"/>
-          </p:nvPr>
-        </p:nvSpPr>
-        <p:spPr>
-          <a:xfrm>
-            <a:off x="838200" y="1397331"/>
-            <a:ext cx="10515600" cy="2355803"/>
-          </a:xfrm>
-        </p:spPr>
-        <p:txBody>
-          <a:bodyPr>
-            <a:normAutofit fontScale="92500" lnSpcReduction="20000"/>
-          </a:bodyPr>
-          <a:lstStyle/>
-          <a:p>
-            <a:pPr lvl="0"/>
-            <a:r>
-              <a:rPr lang="en-US" b="1" dirty="0"/>
-              <a:t>Bias:</a:t>
-            </a:r>
-            <a:r>
-              <a:rPr lang="en-US" dirty="0"/>
-              <a:t> The error that occurs when an estimator systematically deviates from the true expected value. High bias means the target relies on a guess or bootstrapped estimate rather than actual ground truth. </a:t>
-            </a:r>
-          </a:p>
-          <a:p>
-            <a:pPr lvl="0"/>
-            <a:r>
-              <a:rPr lang="en-US" b="1" dirty="0"/>
-              <a:t>Variance:</a:t>
-            </a:r>
-            <a:r>
-              <a:rPr lang="en-US" dirty="0"/>
-              <a:t> How much the value or return estimate fluctuates due to the randomness (stochasticity) of trajectories, actions, and environments. High variance means a small change in sample episodes leads to wildly different updates.</a:t>
-            </a:r>
-          </a:p>
-          <a:p>
-            <a:endParaRPr lang="en-US" dirty="0"/>
-          </a:p>
-        </p:txBody>
-      </p:sp>
-    </p:spTree>
-    <p:extLst>
-      <p:ext uri="{BB962C8B-B14F-4D97-AF65-F5344CB8AC3E}">
-        <p14:creationId xmlns:p14="http://schemas.microsoft.com/office/powerpoint/2010/main" val="960111673"/>
-      </p:ext>
-    </p:extLst>
-  </p:cSld>
-  <p:clrMapOvr>
-    <a:masterClrMapping/>
-  </p:clrMapOvr>
-  <p:timing>
-    <p:tnLst>
-      <p:par>
-        <p:cTn id="1" dur="indefinite" restart="never" nodeType="tmRoot">
-          <p:childTnLst>
-            <p:seq concurrent="1" nextAc="seek">
-              <p:cTn id="2" dur="indefinite" nodeType="mainSeq">
-                <p:childTnLst>
-                  <p:par>
-                    <p:cTn id="3" fill="hold">
-                      <p:stCondLst>
-                        <p:cond delay="indefinite"/>
-                      </p:stCondLst>
-                      <p:childTnLst>
-                        <p:par>
-                          <p:cTn id="4" fill="hold">
-                            <p:stCondLst>
-                              <p:cond delay="0"/>
-                            </p:stCondLst>
-                            <p:childTnLst>
-                              <p:par>
-                                <p:cTn id="5" presetID="1" presetClass="entr" presetSubtype="0" fill="hold" nodeType="clickEffect">
-                                  <p:stCondLst>
-                                    <p:cond delay="0"/>
-                                  </p:stCondLst>
-                                  <p:childTnLst>
-                                    <p:set>
-                                      <p:cBhvr>
-                                        <p:cTn id="6" dur="1" fill="hold">
-                                          <p:stCondLst>
-                                            <p:cond delay="0"/>
-                                          </p:stCondLst>
-                                        </p:cTn>
-                                        <p:tgtEl>
-                                          <p:spTgt spid="4"/>
-                                        </p:tgtEl>
-                                        <p:attrNameLst>
-                                          <p:attrName>style.visibility</p:attrName>
-                                        </p:attrNameLst>
-                                      </p:cBhvr>
-                                      <p:to>
-                                        <p:strVal val="visible"/>
-                                      </p:to>
-                                    </p:set>
-                                  </p:childTnLst>
-                                </p:cTn>
-                              </p:par>
-                            </p:childTnLst>
-                          </p:cTn>
-                        </p:par>
-                      </p:childTnLst>
-                    </p:cTn>
-                  </p:par>
-                </p:childTnLst>
-              </p:cTn>
-              <p:prevCondLst>
-                <p:cond evt="onPrev" delay="0">
-                  <p:tgtEl>
-                    <p:sldTgt/>
-                  </p:tgtEl>
-                </p:cond>
-              </p:prevCondLst>
-              <p:nextCondLst>
-                <p:cond evt="onNext" delay="0">
-                  <p:tgtEl>
-                    <p:sldTgt/>
-                  </p:tgtEl>
-                </p:cond>
-              </p:nextCondLst>
-            </p:seq>
-          </p:childTnLst>
-        </p:cTn>
-      </p:par>
-    </p:tnLst>
-  </p:timing>
-</p:sld>
-</file>
-
-<file path=ppt/slides/slide11.xml><?xml version="1.0" encoding="utf-8"?>
-<p:sld xmlns:a="http://schemas.openxmlformats.org/drawingml/2006/main" xmlns:r="http://schemas.openxmlformats.org/officeDocument/2006/relationships" xmlns:p="http://schemas.openxmlformats.org/presentationml/2006/main">
-  <p:cSld>
-    <p:spTree>
-      <p:nvGrpSpPr>
-        <p:cNvPr id="1" name=""/>
-        <p:cNvGrpSpPr/>
-        <p:nvPr/>
-      </p:nvGrpSpPr>
-      <p:grpSpPr>
-        <a:xfrm>
-          <a:off x="0" y="0"/>
-          <a:ext cx="0" cy="0"/>
-          <a:chOff x="0" y="0"/>
-          <a:chExt cx="0" cy="0"/>
-        </a:xfrm>
-      </p:grpSpPr>
       <mc:AlternateContent xmlns:mc="http://schemas.openxmlformats.org/markup-compatibility/2006" xmlns:a14="http://schemas.microsoft.com/office/drawing/2010/main">
         <mc:Choice Requires="a14">
           <p:sp>
@@ -4876,7 +4377,7 @@
 </p:sld>
 </file>
 
-<file path=ppt/slides/slide12.xml><?xml version="1.0" encoding="utf-8"?>
+<file path=ppt/slides/slide11.xml><?xml version="1.0" encoding="utf-8"?>
 <p:sld xmlns:a="http://schemas.openxmlformats.org/drawingml/2006/main" xmlns:r="http://schemas.openxmlformats.org/officeDocument/2006/relationships" xmlns:p="http://schemas.openxmlformats.org/presentationml/2006/main">
   <p:cSld>
     <p:spTree>
@@ -6611,7 +6112,7 @@
 </p:sld>
 </file>
 
-<file path=ppt/slides/slide13.xml><?xml version="1.0" encoding="utf-8"?>
+<file path=ppt/slides/slide12.xml><?xml version="1.0" encoding="utf-8"?>
 <p:sld xmlns:a="http://schemas.openxmlformats.org/drawingml/2006/main" xmlns:r="http://schemas.openxmlformats.org/officeDocument/2006/relationships" xmlns:p="http://schemas.openxmlformats.org/presentationml/2006/main">
   <p:cSld>
     <p:spTree>
@@ -6851,7 +6352,7 @@
 </p:sld>
 </file>
 
-<file path=ppt/slides/slide14.xml><?xml version="1.0" encoding="utf-8"?>
+<file path=ppt/slides/slide13.xml><?xml version="1.0" encoding="utf-8"?>
 <p:sld xmlns:a="http://schemas.openxmlformats.org/drawingml/2006/main" xmlns:r="http://schemas.openxmlformats.org/officeDocument/2006/relationships" xmlns:p="http://schemas.openxmlformats.org/presentationml/2006/main">
   <p:cSld>
     <p:spTree>
@@ -7770,7 +7271,7 @@
 </p:sld>
 </file>
 
-<file path=ppt/slides/slide15.xml><?xml version="1.0" encoding="utf-8"?>
+<file path=ppt/slides/slide14.xml><?xml version="1.0" encoding="utf-8"?>
 <p:sld xmlns:a="http://schemas.openxmlformats.org/drawingml/2006/main" xmlns:r="http://schemas.openxmlformats.org/officeDocument/2006/relationships" xmlns:p="http://schemas.openxmlformats.org/presentationml/2006/main">
   <p:cSld>
     <p:spTree>
@@ -7909,7 +7410,7 @@
 </p:sld>
 </file>
 
-<file path=ppt/slides/slide16.xml><?xml version="1.0" encoding="utf-8"?>
+<file path=ppt/slides/slide15.xml><?xml version="1.0" encoding="utf-8"?>
 <p:sld xmlns:a="http://schemas.openxmlformats.org/drawingml/2006/main" xmlns:r="http://schemas.openxmlformats.org/officeDocument/2006/relationships" xmlns:p="http://schemas.openxmlformats.org/presentationml/2006/main">
   <p:cSld>
     <p:spTree>
@@ -9079,7 +8580,7 @@
 </p:sld>
 </file>
 
-<file path=ppt/slides/slide17.xml><?xml version="1.0" encoding="utf-8"?>
+<file path=ppt/slides/slide16.xml><?xml version="1.0" encoding="utf-8"?>
 <p:sld xmlns:a="http://schemas.openxmlformats.org/drawingml/2006/main" xmlns:r="http://schemas.openxmlformats.org/officeDocument/2006/relationships" xmlns:p="http://schemas.openxmlformats.org/presentationml/2006/main">
   <p:cSld>
     <p:spTree>
@@ -10139,7 +9640,7 @@
 </p:sld>
 </file>
 
-<file path=ppt/slides/slide18.xml><?xml version="1.0" encoding="utf-8"?>
+<file path=ppt/slides/slide17.xml><?xml version="1.0" encoding="utf-8"?>
 <p:sld xmlns:a="http://schemas.openxmlformats.org/drawingml/2006/main" xmlns:r="http://schemas.openxmlformats.org/officeDocument/2006/relationships" xmlns:p="http://schemas.openxmlformats.org/presentationml/2006/main">
   <p:cSld>
     <p:spTree>
@@ -10237,8 +9738,8 @@
           </p:sp>
         </mc:Fallback>
       </mc:AlternateContent>
-      <mc:AlternateContent xmlns:mc="http://schemas.openxmlformats.org/markup-compatibility/2006">
-        <mc:Choice xmlns:a14="http://schemas.microsoft.com/office/drawing/2010/main" Requires="a14">
+      <mc:AlternateContent xmlns:mc="http://schemas.openxmlformats.org/markup-compatibility/2006" xmlns:a14="http://schemas.microsoft.com/office/drawing/2010/main">
+        <mc:Choice Requires="a14">
           <p:sp>
             <p:nvSpPr>
               <p:cNvPr id="3" name="Content Placeholder 2">
@@ -11046,7 +10547,7 @@
             </p:txBody>
           </p:sp>
         </mc:Choice>
-        <mc:Fallback>
+        <mc:Fallback xmlns="">
           <p:sp>
             <p:nvSpPr>
               <p:cNvPr id="3" name="Content Placeholder 2">
@@ -11362,7 +10863,4484 @@
 </p:sld>
 </file>
 
+<file path=ppt/slides/slide18.xml><?xml version="1.0" encoding="utf-8"?>
+<p:sld xmlns:a="http://schemas.openxmlformats.org/drawingml/2006/main" xmlns:r="http://schemas.openxmlformats.org/officeDocument/2006/relationships" xmlns:p="http://schemas.openxmlformats.org/presentationml/2006/main">
+  <p:cSld>
+    <p:spTree>
+      <p:nvGrpSpPr>
+        <p:cNvPr id="1" name="">
+          <a:extLst>
+            <a:ext uri="{FF2B5EF4-FFF2-40B4-BE49-F238E27FC236}">
+              <a16:creationId xmlns:a16="http://schemas.microsoft.com/office/drawing/2014/main" id="{42F06799-D70D-0479-00D4-CAFD7F6AE9CF}"/>
+            </a:ext>
+          </a:extLst>
+        </p:cNvPr>
+        <p:cNvGrpSpPr/>
+        <p:nvPr/>
+      </p:nvGrpSpPr>
+      <p:grpSpPr>
+        <a:xfrm>
+          <a:off x="0" y="0"/>
+          <a:ext cx="0" cy="0"/>
+          <a:chOff x="0" y="0"/>
+          <a:chExt cx="0" cy="0"/>
+        </a:xfrm>
+      </p:grpSpPr>
+      <p:sp>
+        <p:nvSpPr>
+          <p:cNvPr id="4" name="Title 3" descr="n -step Off-Policy Control">
+            <a:extLst>
+              <a:ext uri="{FF2B5EF4-FFF2-40B4-BE49-F238E27FC236}">
+                <a16:creationId xmlns:a16="http://schemas.microsoft.com/office/drawing/2014/main" id="{8138D10E-888D-72A7-5275-6D5A9A2FC0C7}"/>
+              </a:ext>
+            </a:extLst>
+          </p:cNvPr>
+          <p:cNvSpPr>
+            <a:spLocks noGrp="1"/>
+          </p:cNvSpPr>
+          <p:nvPr>
+            <p:ph type="title"/>
+          </p:nvPr>
+        </p:nvSpPr>
+        <p:spPr/>
+        <p:txBody>
+          <a:bodyPr/>
+          <a:lstStyle/>
+          <a:p>
+            <a:r>
+              <a:rPr lang="en-US" dirty="0"/>
+              <a:t>Revisiting Bias vs. Variance</a:t>
+            </a:r>
+          </a:p>
+        </p:txBody>
+      </p:sp>
+      <p:sp>
+        <p:nvSpPr>
+          <p:cNvPr id="5" name="Text Placeholder 4">
+            <a:extLst>
+              <a:ext uri="{FF2B5EF4-FFF2-40B4-BE49-F238E27FC236}">
+                <a16:creationId xmlns:a16="http://schemas.microsoft.com/office/drawing/2014/main" id="{40062B5E-E38D-52DC-ACB6-0B4432166D00}"/>
+              </a:ext>
+            </a:extLst>
+          </p:cNvPr>
+          <p:cNvSpPr>
+            <a:spLocks noGrp="1"/>
+          </p:cNvSpPr>
+          <p:nvPr>
+            <p:ph type="body" idx="1"/>
+          </p:nvPr>
+        </p:nvSpPr>
+        <p:spPr/>
+        <p:txBody>
+          <a:bodyPr/>
+          <a:lstStyle/>
+          <a:p>
+            <a:r>
+              <a:rPr lang="en-US" dirty="0"/>
+              <a:t>What is the effect on learning in RL</a:t>
+            </a:r>
+          </a:p>
+        </p:txBody>
+      </p:sp>
+    </p:spTree>
+    <p:extLst>
+      <p:ext uri="{BB962C8B-B14F-4D97-AF65-F5344CB8AC3E}">
+        <p14:creationId xmlns:p14="http://schemas.microsoft.com/office/powerpoint/2010/main" val="3338538420"/>
+      </p:ext>
+    </p:extLst>
+  </p:cSld>
+  <p:clrMapOvr>
+    <a:masterClrMapping/>
+  </p:clrMapOvr>
+</p:sld>
+</file>
+
 <file path=ppt/slides/slide19.xml><?xml version="1.0" encoding="utf-8"?>
+<p:sld xmlns:a="http://schemas.openxmlformats.org/drawingml/2006/main" xmlns:r="http://schemas.openxmlformats.org/officeDocument/2006/relationships" xmlns:p="http://schemas.openxmlformats.org/presentationml/2006/main">
+  <p:cSld>
+    <p:spTree>
+      <p:nvGrpSpPr>
+        <p:cNvPr id="1" name=""/>
+        <p:cNvGrpSpPr/>
+        <p:nvPr/>
+      </p:nvGrpSpPr>
+      <p:grpSpPr>
+        <a:xfrm>
+          <a:off x="0" y="0"/>
+          <a:ext cx="0" cy="0"/>
+          <a:chOff x="0" y="0"/>
+          <a:chExt cx="0" cy="0"/>
+        </a:xfrm>
+      </p:grpSpPr>
+      <p:sp>
+        <p:nvSpPr>
+          <p:cNvPr id="2" name="Title 1">
+            <a:extLst>
+              <a:ext uri="{FF2B5EF4-FFF2-40B4-BE49-F238E27FC236}">
+                <a16:creationId xmlns:a16="http://schemas.microsoft.com/office/drawing/2014/main" id="{350CDC74-4A2B-C865-B7BE-7A31B529EE94}"/>
+              </a:ext>
+            </a:extLst>
+          </p:cNvPr>
+          <p:cNvSpPr>
+            <a:spLocks noGrp="1"/>
+          </p:cNvSpPr>
+          <p:nvPr>
+            <p:ph type="title"/>
+          </p:nvPr>
+        </p:nvSpPr>
+        <p:spPr>
+          <a:xfrm>
+            <a:off x="838200" y="365126"/>
+            <a:ext cx="6839968" cy="759072"/>
+          </a:xfrm>
+        </p:spPr>
+        <p:txBody>
+          <a:bodyPr>
+            <a:normAutofit/>
+          </a:bodyPr>
+          <a:lstStyle/>
+          <a:p>
+            <a:r>
+              <a:rPr lang="en-US" dirty="0"/>
+              <a:t>Reminder: Bias vs. Variance</a:t>
+            </a:r>
+          </a:p>
+        </p:txBody>
+      </p:sp>
+      <mc:AlternateContent xmlns:mc="http://schemas.openxmlformats.org/markup-compatibility/2006">
+        <mc:Choice xmlns:a14="http://schemas.microsoft.com/office/drawing/2010/main" Requires="a14">
+          <p:sp>
+            <p:nvSpPr>
+              <p:cNvPr id="3" name="Content Placeholder 2">
+                <a:extLst>
+                  <a:ext uri="{FF2B5EF4-FFF2-40B4-BE49-F238E27FC236}">
+                    <a16:creationId xmlns:a16="http://schemas.microsoft.com/office/drawing/2014/main" id="{EAD9E4D6-295B-FA7C-A396-0028F5B79E26}"/>
+                  </a:ext>
+                </a:extLst>
+              </p:cNvPr>
+              <p:cNvSpPr>
+                <a:spLocks noGrp="1"/>
+              </p:cNvSpPr>
+              <p:nvPr>
+                <p:ph idx="1"/>
+              </p:nvPr>
+            </p:nvSpPr>
+            <p:spPr>
+              <a:xfrm>
+                <a:off x="838200" y="1213465"/>
+                <a:ext cx="6921617" cy="5499391"/>
+              </a:xfrm>
+            </p:spPr>
+            <p:txBody>
+              <a:bodyPr>
+                <a:noAutofit/>
+              </a:bodyPr>
+              <a:lstStyle/>
+              <a:p>
+                <a:pPr marL="0" indent="0">
+                  <a:buNone/>
+                </a:pPr>
+                <a:r>
+                  <a:rPr lang="en-US" sz="1400" b="1" dirty="0"/>
+                  <a:t>Convergence</a:t>
+                </a:r>
+                <a:r>
+                  <a:rPr lang="en-US" sz="1400" dirty="0"/>
+                  <a:t>: Will learning eventually stabilize at a </a:t>
+                </a:r>
+                <a:r>
+                  <a:rPr lang="en-US" sz="1400" b="1" dirty="0"/>
+                  <a:t>fixed solution</a:t>
+                </a:r>
+                <a:r>
+                  <a:rPr lang="en-US" sz="1400" dirty="0"/>
+                  <a:t>?</a:t>
+                </a:r>
+                <a:endParaRPr lang="en-US" sz="1400" b="1" dirty="0"/>
+              </a:p>
+              <a:p>
+                <a:pPr marL="0" indent="0">
+                  <a:buNone/>
+                </a:pPr>
+                <a:r>
+                  <a:rPr lang="en-US" sz="1400" b="1" dirty="0"/>
+                  <a:t>Optimality</a:t>
+                </a:r>
+                <a:r>
+                  <a:rPr lang="en-US" sz="1400" dirty="0"/>
+                  <a:t>:  Does the algorithm converge to the true optimal policy/value function?</a:t>
+                </a:r>
+              </a:p>
+              <a:p>
+                <a:pPr marL="0" indent="0">
+                  <a:buNone/>
+                </a:pPr>
+                <a:endParaRPr lang="en-US" sz="1400" dirty="0"/>
+              </a:p>
+              <a:p>
+                <a:pPr marL="0" indent="0">
+                  <a:buNone/>
+                </a:pPr>
+                <a:r>
+                  <a:rPr lang="en-US" sz="1400" b="1" dirty="0"/>
+                  <a:t>Affected by:</a:t>
+                </a:r>
+                <a:endParaRPr lang="en-US" sz="1400" dirty="0"/>
+              </a:p>
+              <a:p>
+                <a:r>
+                  <a:rPr lang="en-US" sz="1400" b="1" dirty="0"/>
+                  <a:t>Bias: </a:t>
+                </a:r>
+                <a:r>
+                  <a:rPr lang="en-US" sz="1400" dirty="0"/>
+                  <a:t>systematic error  </a:t>
+                </a:r>
+                <a:br>
+                  <a:rPr lang="en-US" sz="1400" dirty="0"/>
+                </a:br>
+                <a:r>
+                  <a:rPr lang="en-US" sz="1400" dirty="0"/>
+                  <a:t>Do we move towards the </a:t>
+                </a:r>
+                <a:r>
+                  <a:rPr lang="en-US" sz="1400" b="1" dirty="0"/>
+                  <a:t>optimal solution</a:t>
+                </a:r>
+                <a:r>
+                  <a:rPr lang="en-US" sz="1400" dirty="0"/>
+                  <a:t>? Estimation and approximation may introduce bias.</a:t>
+                </a:r>
+                <a:endParaRPr lang="en-US" sz="1400" b="1" dirty="0"/>
+              </a:p>
+              <a:p>
+                <a:r>
+                  <a:rPr lang="en-US" sz="1400" b="1" dirty="0"/>
+                  <a:t>Variance: </a:t>
+                </a:r>
+                <a:r>
+                  <a:rPr lang="en-US" sz="1400" dirty="0"/>
+                  <a:t>difference in found solutions</a:t>
+                </a:r>
+                <a:br>
+                  <a:rPr lang="en-US" sz="1400" dirty="0"/>
+                </a:br>
+                <a:r>
+                  <a:rPr lang="en-US" sz="1400" dirty="0"/>
+                  <a:t>ML: The result of randomness (sampling the training data and in the algorithm)</a:t>
+                </a:r>
+                <a:br>
+                  <a:rPr lang="en-US" sz="1400" dirty="0"/>
+                </a:br>
+                <a:r>
+                  <a:rPr lang="en-US" sz="1400" dirty="0"/>
+                  <a:t>RL: Sampling + training data is not fixed. Observations and rewards depend on the agent’s current actions (i.e., behavior policy).</a:t>
+                </a:r>
+                <a:br>
+                  <a:rPr lang="en-US" sz="1400" dirty="0"/>
+                </a:br>
+                <a:endParaRPr lang="en-US" sz="1400" dirty="0"/>
+              </a:p>
+              <a:p>
+                <a:pPr marL="0" indent="0">
+                  <a:buNone/>
+                </a:pPr>
+                <a:r>
+                  <a:rPr lang="en-US" sz="1400" dirty="0"/>
+                  <a:t>General error components:</a:t>
+                </a:r>
+                <a:br>
+                  <a:rPr lang="en-US" sz="1400" dirty="0"/>
+                </a:br>
+                <a:br>
+                  <a:rPr lang="en-US" sz="1400" i="1" dirty="0">
+                    <a:latin typeface="Cambria Math" panose="02040503050406030204" pitchFamily="18" charset="0"/>
+                  </a:rPr>
+                </a:br>
+                <a14:m>
+                  <m:oMathPara xmlns:m="http://schemas.openxmlformats.org/officeDocument/2006/math">
+                    <m:oMath>
+                      <m:r>
+                        <a:rPr lang="en-US" sz="1400" i="1" dirty="0">
+                          <a:latin typeface="Cambria Math" panose="02040503050406030204" pitchFamily="18" charset="0"/>
+                        </a:rPr>
+                        <m:t>𝑇𝑜𝑡𝑎𝑙</m:t>
+                      </m:r>
+                      <m:r>
+                        <a:rPr lang="en-US" sz="1400" i="1" dirty="0">
+                          <a:latin typeface="Cambria Math" panose="02040503050406030204" pitchFamily="18" charset="0"/>
+                        </a:rPr>
+                        <m:t> </m:t>
+                      </m:r>
+                      <m:r>
+                        <a:rPr lang="en-US" sz="1400" i="1" dirty="0">
+                          <a:latin typeface="Cambria Math" panose="02040503050406030204" pitchFamily="18" charset="0"/>
+                        </a:rPr>
+                        <m:t>𝑠𝑞𝑢𝑎𝑟𝑒𝑑</m:t>
+                      </m:r>
+                      <m:r>
+                        <a:rPr lang="en-US" sz="1400" i="1" dirty="0">
+                          <a:latin typeface="Cambria Math" panose="02040503050406030204" pitchFamily="18" charset="0"/>
+                        </a:rPr>
+                        <m:t> </m:t>
+                      </m:r>
+                      <m:r>
+                        <a:rPr lang="en-US" sz="1400" i="1" dirty="0">
+                          <a:latin typeface="Cambria Math" panose="02040503050406030204" pitchFamily="18" charset="0"/>
+                        </a:rPr>
+                        <m:t>𝑒𝑟𝑟𝑜𝑟</m:t>
+                      </m:r>
+                      <m:r>
+                        <a:rPr lang="en-US" sz="1400" i="1" dirty="0">
+                          <a:latin typeface="Cambria Math" panose="02040503050406030204" pitchFamily="18" charset="0"/>
+                        </a:rPr>
+                        <m:t> = </m:t>
+                      </m:r>
+                      <m:r>
+                        <a:rPr lang="en-US" sz="1400" i="1" dirty="0">
+                          <a:latin typeface="Cambria Math" panose="02040503050406030204" pitchFamily="18" charset="0"/>
+                        </a:rPr>
+                        <m:t>𝑏𝑖𝑎</m:t>
+                      </m:r>
+                      <m:sSup>
+                        <m:sSupPr>
+                          <m:ctrlPr>
+                            <a:rPr lang="en-US" sz="1400" i="1" dirty="0">
+                              <a:latin typeface="Cambria Math" panose="02040503050406030204" pitchFamily="18" charset="0"/>
+                            </a:rPr>
+                          </m:ctrlPr>
+                        </m:sSupPr>
+                        <m:e>
+                          <m:r>
+                            <a:rPr lang="en-US" sz="1400" i="1" dirty="0">
+                              <a:latin typeface="Cambria Math" panose="02040503050406030204" pitchFamily="18" charset="0"/>
+                            </a:rPr>
+                            <m:t>𝑠</m:t>
+                          </m:r>
+                        </m:e>
+                        <m:sup>
+                          <m:r>
+                            <a:rPr lang="en-US" sz="1400" i="1" dirty="0">
+                              <a:latin typeface="Cambria Math" panose="02040503050406030204" pitchFamily="18" charset="0"/>
+                            </a:rPr>
+                            <m:t>2</m:t>
+                          </m:r>
+                        </m:sup>
+                      </m:sSup>
+                      <m:r>
+                        <a:rPr lang="en-US" sz="1400" i="1" dirty="0">
+                          <a:latin typeface="Cambria Math" panose="02040503050406030204" pitchFamily="18" charset="0"/>
+                        </a:rPr>
+                        <m:t> + </m:t>
+                      </m:r>
+                      <m:r>
+                        <a:rPr lang="en-US" sz="1400" i="1" dirty="0">
+                          <a:latin typeface="Cambria Math" panose="02040503050406030204" pitchFamily="18" charset="0"/>
+                        </a:rPr>
+                        <m:t>𝑣𝑎𝑟𝑖𝑎𝑛𝑐𝑒</m:t>
+                      </m:r>
+                      <m:r>
+                        <a:rPr lang="en-US" sz="1400" i="1" dirty="0">
+                          <a:latin typeface="Cambria Math" panose="02040503050406030204" pitchFamily="18" charset="0"/>
+                        </a:rPr>
+                        <m:t> + </m:t>
+                      </m:r>
+                      <m:r>
+                        <a:rPr lang="en-US" sz="1400" i="1" dirty="0">
+                          <a:latin typeface="Cambria Math" panose="02040503050406030204" pitchFamily="18" charset="0"/>
+                        </a:rPr>
+                        <m:t>𝑖𝑟𝑟𝑒𝑑𝑢𝑐𝑖𝑏𝑙𝑒</m:t>
+                      </m:r>
+                      <m:r>
+                        <a:rPr lang="en-US" sz="1400" i="1" dirty="0">
+                          <a:latin typeface="Cambria Math" panose="02040503050406030204" pitchFamily="18" charset="0"/>
+                        </a:rPr>
+                        <m:t> </m:t>
+                      </m:r>
+                      <m:r>
+                        <a:rPr lang="en-US" sz="1400" i="1" dirty="0">
+                          <a:latin typeface="Cambria Math" panose="02040503050406030204" pitchFamily="18" charset="0"/>
+                        </a:rPr>
+                        <m:t>𝑒𝑟𝑟𝑜</m:t>
+                      </m:r>
+                      <m:sSup>
+                        <m:sSupPr>
+                          <m:ctrlPr>
+                            <a:rPr lang="en-US" sz="1400" i="1" dirty="0">
+                              <a:latin typeface="Cambria Math" panose="02040503050406030204" pitchFamily="18" charset="0"/>
+                            </a:rPr>
+                          </m:ctrlPr>
+                        </m:sSupPr>
+                        <m:e>
+                          <m:r>
+                            <a:rPr lang="en-US" sz="1400" i="1" dirty="0">
+                              <a:latin typeface="Cambria Math" panose="02040503050406030204" pitchFamily="18" charset="0"/>
+                            </a:rPr>
+                            <m:t>𝑟</m:t>
+                          </m:r>
+                        </m:e>
+                        <m:sup>
+                          <m:r>
+                            <a:rPr lang="en-US" sz="1400" i="1" dirty="0">
+                              <a:latin typeface="Cambria Math" panose="02040503050406030204" pitchFamily="18" charset="0"/>
+                            </a:rPr>
+                            <m:t>2</m:t>
+                          </m:r>
+                        </m:sup>
+                      </m:sSup>
+                    </m:oMath>
+                  </m:oMathPara>
+                </a14:m>
+                <a:br>
+                  <a:rPr lang="en-US" sz="1400" dirty="0"/>
+                </a:br>
+                <a:endParaRPr lang="en-US" sz="1400" dirty="0"/>
+              </a:p>
+              <a:p>
+                <a:pPr marL="0" indent="0">
+                  <a:buNone/>
+                </a:pPr>
+                <a:endParaRPr lang="en-US" sz="1400" dirty="0"/>
+              </a:p>
+              <a:p>
+                <a:pPr marL="0" indent="0">
+                  <a:spcBef>
+                    <a:spcPts val="0"/>
+                  </a:spcBef>
+                  <a:buNone/>
+                </a:pPr>
+                <a:r>
+                  <a:rPr lang="en-US" sz="1400" dirty="0"/>
+                  <a:t>RL algorithm keeps learning, so variance and bias may change over time. Questions:</a:t>
+                </a:r>
+              </a:p>
+              <a:p>
+                <a:pPr>
+                  <a:lnSpc>
+                    <a:spcPct val="100000"/>
+                  </a:lnSpc>
+                  <a:spcBef>
+                    <a:spcPts val="0"/>
+                  </a:spcBef>
+                </a:pPr>
+                <a:r>
+                  <a:rPr lang="en-US" sz="1400" dirty="0"/>
+                  <a:t>Does it </a:t>
+                </a:r>
+                <a:r>
+                  <a:rPr lang="en-US" sz="1400" b="1" dirty="0"/>
+                  <a:t>converge</a:t>
+                </a:r>
+                <a:r>
+                  <a:rPr lang="en-US" sz="1400" dirty="0"/>
+                  <a:t> or exhibit </a:t>
+                </a:r>
+                <a:r>
+                  <a:rPr lang="en-US" sz="1400" b="1" dirty="0"/>
+                  <a:t>instability</a:t>
+                </a:r>
+                <a:r>
+                  <a:rPr lang="en-US" sz="1400" dirty="0"/>
+                  <a:t>? Does it converge to the optimum?</a:t>
+                </a:r>
+              </a:p>
+              <a:p>
+                <a:pPr>
+                  <a:lnSpc>
+                    <a:spcPct val="100000"/>
+                  </a:lnSpc>
+                  <a:spcBef>
+                    <a:spcPts val="0"/>
+                  </a:spcBef>
+                </a:pPr>
+                <a:r>
+                  <a:rPr lang="en-US" sz="1400" dirty="0"/>
+                  <a:t>How fast does it converge? Depends mostly on variance and how fast bias can be reduced.</a:t>
+                </a:r>
+              </a:p>
+            </p:txBody>
+          </p:sp>
+        </mc:Choice>
+        <mc:Fallback>
+          <p:sp>
+            <p:nvSpPr>
+              <p:cNvPr id="3" name="Content Placeholder 2">
+                <a:extLst>
+                  <a:ext uri="{FF2B5EF4-FFF2-40B4-BE49-F238E27FC236}">
+                    <a16:creationId xmlns:a16="http://schemas.microsoft.com/office/drawing/2014/main" id="{EAD9E4D6-295B-FA7C-A396-0028F5B79E26}"/>
+                  </a:ext>
+                </a:extLst>
+              </p:cNvPr>
+              <p:cNvSpPr>
+                <a:spLocks noGrp="1" noRot="1" noChangeAspect="1" noMove="1" noResize="1" noEditPoints="1" noAdjustHandles="1" noChangeArrowheads="1" noChangeShapeType="1" noTextEdit="1"/>
+              </p:cNvSpPr>
+              <p:nvPr>
+                <p:ph idx="1"/>
+              </p:nvPr>
+            </p:nvSpPr>
+            <p:spPr>
+              <a:xfrm>
+                <a:off x="838200" y="1213465"/>
+                <a:ext cx="6921617" cy="5499391"/>
+              </a:xfrm>
+              <a:blipFill>
+                <a:blip r:embed="rId2"/>
+                <a:stretch>
+                  <a:fillRect l="-264" t="-554"/>
+                </a:stretch>
+              </a:blipFill>
+            </p:spPr>
+            <p:txBody>
+              <a:bodyPr/>
+              <a:lstStyle/>
+              <a:p>
+                <a:r>
+                  <a:rPr lang="en-US">
+                    <a:noFill/>
+                  </a:rPr>
+                  <a:t> </a:t>
+                </a:r>
+              </a:p>
+            </p:txBody>
+          </p:sp>
+        </mc:Fallback>
+      </mc:AlternateContent>
+      <p:grpSp>
+        <p:nvGrpSpPr>
+          <p:cNvPr id="44" name="Group 43" descr="Number line: the algorithm's solution is offset from the optimal solution by the algorithm bias.">
+            <a:extLst>
+              <a:ext uri="{FF2B5EF4-FFF2-40B4-BE49-F238E27FC236}">
+                <a16:creationId xmlns:a16="http://schemas.microsoft.com/office/drawing/2014/main" id="{26AE6C30-9641-629B-C816-35FD3721715E}"/>
+              </a:ext>
+            </a:extLst>
+          </p:cNvPr>
+          <p:cNvGrpSpPr/>
+          <p:nvPr/>
+        </p:nvGrpSpPr>
+        <p:grpSpPr>
+          <a:xfrm>
+            <a:off x="7759817" y="572800"/>
+            <a:ext cx="3996654" cy="1010643"/>
+            <a:chOff x="7759817" y="1040465"/>
+            <a:chExt cx="3996654" cy="1010643"/>
+          </a:xfrm>
+        </p:grpSpPr>
+        <p:cxnSp>
+          <p:nvCxnSpPr>
+            <p:cNvPr id="5" name="Straight Arrow Connector 4">
+              <a:extLst>
+                <a:ext uri="{FF2B5EF4-FFF2-40B4-BE49-F238E27FC236}">
+                  <a16:creationId xmlns:a16="http://schemas.microsoft.com/office/drawing/2014/main" id="{BEC91BFF-7CB3-2377-AE6C-06B594A08427}"/>
+                </a:ext>
+              </a:extLst>
+            </p:cNvPr>
+            <p:cNvCxnSpPr>
+              <a:cxnSpLocks/>
+            </p:cNvCxnSpPr>
+            <p:nvPr/>
+          </p:nvCxnSpPr>
+          <p:spPr>
+            <a:xfrm>
+              <a:off x="7759817" y="2015627"/>
+              <a:ext cx="3744372" cy="4195"/>
+            </a:xfrm>
+            <a:prstGeom prst="straightConnector1">
+              <a:avLst/>
+            </a:prstGeom>
+            <a:ln>
+              <a:tailEnd type="triangle"/>
+            </a:ln>
+          </p:spPr>
+          <p:style>
+            <a:lnRef idx="2">
+              <a:schemeClr val="dk1"/>
+            </a:lnRef>
+            <a:fillRef idx="0">
+              <a:schemeClr val="dk1"/>
+            </a:fillRef>
+            <a:effectRef idx="1">
+              <a:schemeClr val="dk1"/>
+            </a:effectRef>
+            <a:fontRef idx="minor">
+              <a:schemeClr val="tx1"/>
+            </a:fontRef>
+          </p:style>
+        </p:cxnSp>
+        <p:sp>
+          <p:nvSpPr>
+            <p:cNvPr id="6" name="Oval 5">
+              <a:extLst>
+                <a:ext uri="{FF2B5EF4-FFF2-40B4-BE49-F238E27FC236}">
+                  <a16:creationId xmlns:a16="http://schemas.microsoft.com/office/drawing/2014/main" id="{AAE79028-CBA0-53E3-48F8-74F12CA0608C}"/>
+                </a:ext>
+              </a:extLst>
+            </p:cNvPr>
+            <p:cNvSpPr/>
+            <p:nvPr/>
+          </p:nvSpPr>
+          <p:spPr>
+            <a:xfrm>
+              <a:off x="10993359" y="1992385"/>
+              <a:ext cx="71307" cy="58723"/>
+            </a:xfrm>
+            <a:prstGeom prst="ellipse">
+              <a:avLst/>
+            </a:prstGeom>
+          </p:spPr>
+          <p:style>
+            <a:lnRef idx="2">
+              <a:schemeClr val="dk1">
+                <a:shade val="15000"/>
+              </a:schemeClr>
+            </a:lnRef>
+            <a:fillRef idx="1">
+              <a:schemeClr val="dk1"/>
+            </a:fillRef>
+            <a:effectRef idx="0">
+              <a:schemeClr val="dk1"/>
+            </a:effectRef>
+            <a:fontRef idx="minor">
+              <a:schemeClr val="lt1"/>
+            </a:fontRef>
+          </p:style>
+          <p:txBody>
+            <a:bodyPr rtlCol="0" anchor="ctr"/>
+            <a:lstStyle/>
+            <a:p>
+              <a:pPr algn="ctr"/>
+              <a:endParaRPr lang="en-US"/>
+            </a:p>
+          </p:txBody>
+        </p:sp>
+        <p:sp>
+          <p:nvSpPr>
+            <p:cNvPr id="8" name="Oval 7">
+              <a:extLst>
+                <a:ext uri="{FF2B5EF4-FFF2-40B4-BE49-F238E27FC236}">
+                  <a16:creationId xmlns:a16="http://schemas.microsoft.com/office/drawing/2014/main" id="{88C086E3-557E-A6C8-3944-425B9FB75304}"/>
+                </a:ext>
+              </a:extLst>
+            </p:cNvPr>
+            <p:cNvSpPr/>
+            <p:nvPr/>
+          </p:nvSpPr>
+          <p:spPr>
+            <a:xfrm>
+              <a:off x="9097860" y="1992385"/>
+              <a:ext cx="71307" cy="58723"/>
+            </a:xfrm>
+            <a:prstGeom prst="ellipse">
+              <a:avLst/>
+            </a:prstGeom>
+          </p:spPr>
+          <p:style>
+            <a:lnRef idx="2">
+              <a:schemeClr val="accent2">
+                <a:shade val="15000"/>
+              </a:schemeClr>
+            </a:lnRef>
+            <a:fillRef idx="1">
+              <a:schemeClr val="accent2"/>
+            </a:fillRef>
+            <a:effectRef idx="0">
+              <a:schemeClr val="accent2"/>
+            </a:effectRef>
+            <a:fontRef idx="minor">
+              <a:schemeClr val="lt1"/>
+            </a:fontRef>
+          </p:style>
+          <p:txBody>
+            <a:bodyPr rtlCol="0" anchor="ctr"/>
+            <a:lstStyle/>
+            <a:p>
+              <a:pPr algn="ctr"/>
+              <a:endParaRPr lang="en-US"/>
+            </a:p>
+          </p:txBody>
+        </p:sp>
+        <p:sp>
+          <p:nvSpPr>
+            <p:cNvPr id="20" name="TextBox 19">
+              <a:extLst>
+                <a:ext uri="{FF2B5EF4-FFF2-40B4-BE49-F238E27FC236}">
+                  <a16:creationId xmlns:a16="http://schemas.microsoft.com/office/drawing/2014/main" id="{F3FDA67D-FF21-8DF6-515E-61D2209EC433}"/>
+                </a:ext>
+              </a:extLst>
+            </p:cNvPr>
+            <p:cNvSpPr txBox="1"/>
+            <p:nvPr/>
+          </p:nvSpPr>
+          <p:spPr>
+            <a:xfrm>
+              <a:off x="10904956" y="1040465"/>
+              <a:ext cx="851515" cy="523220"/>
+            </a:xfrm>
+            <a:prstGeom prst="rect">
+              <a:avLst/>
+            </a:prstGeom>
+            <a:noFill/>
+          </p:spPr>
+          <p:txBody>
+            <a:bodyPr wrap="none" rtlCol="0">
+              <a:spAutoFit/>
+            </a:bodyPr>
+            <a:lstStyle/>
+            <a:p>
+              <a:r>
+                <a:rPr lang="en-US" sz="1400" dirty="0"/>
+                <a:t>Optimal </a:t>
+              </a:r>
+              <a:br>
+                <a:rPr lang="en-US" sz="1400" dirty="0"/>
+              </a:br>
+              <a:r>
+                <a:rPr lang="en-US" sz="1400" dirty="0"/>
+                <a:t>solution</a:t>
+              </a:r>
+            </a:p>
+          </p:txBody>
+        </p:sp>
+        <p:sp>
+          <p:nvSpPr>
+            <p:cNvPr id="25" name="TextBox 24">
+              <a:extLst>
+                <a:ext uri="{FF2B5EF4-FFF2-40B4-BE49-F238E27FC236}">
+                  <a16:creationId xmlns:a16="http://schemas.microsoft.com/office/drawing/2014/main" id="{472B8758-7882-1213-4630-01954B74EBE4}"/>
+                </a:ext>
+              </a:extLst>
+            </p:cNvPr>
+            <p:cNvSpPr txBox="1"/>
+            <p:nvPr/>
+          </p:nvSpPr>
+          <p:spPr>
+            <a:xfrm>
+              <a:off x="7759817" y="1183378"/>
+              <a:ext cx="1090427" cy="523220"/>
+            </a:xfrm>
+            <a:prstGeom prst="rect">
+              <a:avLst/>
+            </a:prstGeom>
+            <a:noFill/>
+          </p:spPr>
+          <p:txBody>
+            <a:bodyPr wrap="none" rtlCol="0">
+              <a:spAutoFit/>
+            </a:bodyPr>
+            <a:lstStyle/>
+            <a:p>
+              <a:pPr algn="ctr"/>
+              <a:r>
+                <a:rPr lang="en-US" sz="1400" dirty="0"/>
+                <a:t>Algorithm’s </a:t>
+              </a:r>
+              <a:br>
+                <a:rPr lang="en-US" sz="1400" dirty="0"/>
+              </a:br>
+              <a:r>
+                <a:rPr lang="en-US" sz="1400" dirty="0"/>
+                <a:t>solution</a:t>
+              </a:r>
+            </a:p>
+          </p:txBody>
+        </p:sp>
+        <p:cxnSp>
+          <p:nvCxnSpPr>
+            <p:cNvPr id="27" name="Straight Arrow Connector 26">
+              <a:extLst>
+                <a:ext uri="{FF2B5EF4-FFF2-40B4-BE49-F238E27FC236}">
+                  <a16:creationId xmlns:a16="http://schemas.microsoft.com/office/drawing/2014/main" id="{C31A381E-1F00-9121-F4F2-42271FF88E6D}"/>
+                </a:ext>
+              </a:extLst>
+            </p:cNvPr>
+            <p:cNvCxnSpPr/>
+            <p:nvPr/>
+          </p:nvCxnSpPr>
+          <p:spPr>
+            <a:xfrm>
+              <a:off x="8565160" y="1706598"/>
+              <a:ext cx="420598" cy="213292"/>
+            </a:xfrm>
+            <a:prstGeom prst="straightConnector1">
+              <a:avLst/>
+            </a:prstGeom>
+            <a:ln>
+              <a:tailEnd type="triangle"/>
+            </a:ln>
+          </p:spPr>
+          <p:style>
+            <a:lnRef idx="2">
+              <a:schemeClr val="accent2"/>
+            </a:lnRef>
+            <a:fillRef idx="0">
+              <a:schemeClr val="accent2"/>
+            </a:fillRef>
+            <a:effectRef idx="1">
+              <a:schemeClr val="accent2"/>
+            </a:effectRef>
+            <a:fontRef idx="minor">
+              <a:schemeClr val="tx1"/>
+            </a:fontRef>
+          </p:style>
+        </p:cxnSp>
+        <p:cxnSp>
+          <p:nvCxnSpPr>
+            <p:cNvPr id="42" name="Straight Arrow Connector 41">
+              <a:extLst>
+                <a:ext uri="{FF2B5EF4-FFF2-40B4-BE49-F238E27FC236}">
+                  <a16:creationId xmlns:a16="http://schemas.microsoft.com/office/drawing/2014/main" id="{0F884BBF-3410-E5F0-1213-21AFA49C4E8A}"/>
+                </a:ext>
+              </a:extLst>
+            </p:cNvPr>
+            <p:cNvCxnSpPr>
+              <a:stCxn id="20" idx="2"/>
+            </p:cNvCxnSpPr>
+            <p:nvPr/>
+          </p:nvCxnSpPr>
+          <p:spPr>
+            <a:xfrm flipH="1">
+              <a:off x="11064666" y="1563685"/>
+              <a:ext cx="266048" cy="356205"/>
+            </a:xfrm>
+            <a:prstGeom prst="straightConnector1">
+              <a:avLst/>
+            </a:prstGeom>
+            <a:ln>
+              <a:tailEnd type="triangle"/>
+            </a:ln>
+          </p:spPr>
+          <p:style>
+            <a:lnRef idx="2">
+              <a:schemeClr val="dk1"/>
+            </a:lnRef>
+            <a:fillRef idx="0">
+              <a:schemeClr val="dk1"/>
+            </a:fillRef>
+            <a:effectRef idx="1">
+              <a:schemeClr val="dk1"/>
+            </a:effectRef>
+            <a:fontRef idx="minor">
+              <a:schemeClr val="tx1"/>
+            </a:fontRef>
+          </p:style>
+        </p:cxnSp>
+      </p:grpSp>
+      <p:grpSp>
+        <p:nvGrpSpPr>
+          <p:cNvPr id="45" name="Group 44" descr="Variance shown as a spread around the algorithm's solution.">
+            <a:extLst>
+              <a:ext uri="{FF2B5EF4-FFF2-40B4-BE49-F238E27FC236}">
+                <a16:creationId xmlns:a16="http://schemas.microsoft.com/office/drawing/2014/main" id="{A870D0FA-F2FE-5E06-CBBC-5AB0B0213F0F}"/>
+              </a:ext>
+            </a:extLst>
+          </p:cNvPr>
+          <p:cNvGrpSpPr/>
+          <p:nvPr/>
+        </p:nvGrpSpPr>
+        <p:grpSpPr>
+          <a:xfrm>
+            <a:off x="9169167" y="998596"/>
+            <a:ext cx="1824191" cy="453629"/>
+            <a:chOff x="9169167" y="1466261"/>
+            <a:chExt cx="1824191" cy="453629"/>
+          </a:xfrm>
+        </p:grpSpPr>
+        <p:sp>
+          <p:nvSpPr>
+            <p:cNvPr id="9" name="Right Brace 8">
+              <a:extLst>
+                <a:ext uri="{FF2B5EF4-FFF2-40B4-BE49-F238E27FC236}">
+                  <a16:creationId xmlns:a16="http://schemas.microsoft.com/office/drawing/2014/main" id="{A567D5B5-1069-6B0F-6CD7-DA230B4EB66C}"/>
+                </a:ext>
+              </a:extLst>
+            </p:cNvPr>
+            <p:cNvSpPr/>
+            <p:nvPr/>
+          </p:nvSpPr>
+          <p:spPr>
+            <a:xfrm rot="16200000">
+              <a:off x="10005849" y="932380"/>
+              <a:ext cx="150828" cy="1824191"/>
+            </a:xfrm>
+            <a:prstGeom prst="rightBrace">
+              <a:avLst/>
+            </a:prstGeom>
+          </p:spPr>
+          <p:style>
+            <a:lnRef idx="2">
+              <a:schemeClr val="accent2"/>
+            </a:lnRef>
+            <a:fillRef idx="0">
+              <a:schemeClr val="accent2"/>
+            </a:fillRef>
+            <a:effectRef idx="1">
+              <a:schemeClr val="accent2"/>
+            </a:effectRef>
+            <a:fontRef idx="minor">
+              <a:schemeClr val="tx1"/>
+            </a:fontRef>
+          </p:style>
+          <p:txBody>
+            <a:bodyPr rtlCol="0" anchor="ctr"/>
+            <a:lstStyle/>
+            <a:p>
+              <a:pPr algn="ctr"/>
+              <a:endParaRPr lang="en-US"/>
+            </a:p>
+          </p:txBody>
+        </p:sp>
+        <p:sp>
+          <p:nvSpPr>
+            <p:cNvPr id="14" name="TextBox 13">
+              <a:extLst>
+                <a:ext uri="{FF2B5EF4-FFF2-40B4-BE49-F238E27FC236}">
+                  <a16:creationId xmlns:a16="http://schemas.microsoft.com/office/drawing/2014/main" id="{663142A9-84CE-825A-9E05-EA379DDC604E}"/>
+                </a:ext>
+              </a:extLst>
+            </p:cNvPr>
+            <p:cNvSpPr txBox="1"/>
+            <p:nvPr/>
+          </p:nvSpPr>
+          <p:spPr>
+            <a:xfrm>
+              <a:off x="9431758" y="1466261"/>
+              <a:ext cx="1299010" cy="307777"/>
+            </a:xfrm>
+            <a:prstGeom prst="rect">
+              <a:avLst/>
+            </a:prstGeom>
+            <a:noFill/>
+          </p:spPr>
+          <p:txBody>
+            <a:bodyPr wrap="none" rtlCol="0">
+              <a:spAutoFit/>
+            </a:bodyPr>
+            <a:lstStyle/>
+            <a:p>
+              <a:r>
+                <a:rPr lang="en-US" sz="1400" dirty="0"/>
+                <a:t>Algorithm bias</a:t>
+              </a:r>
+            </a:p>
+          </p:txBody>
+        </p:sp>
+      </p:grpSp>
+      <p:grpSp>
+        <p:nvGrpSpPr>
+          <p:cNvPr id="46" name="Group 45" descr="Variance is made up of sample randomness, changing data and irreducible error from a stochastic environment.">
+            <a:extLst>
+              <a:ext uri="{FF2B5EF4-FFF2-40B4-BE49-F238E27FC236}">
+                <a16:creationId xmlns:a16="http://schemas.microsoft.com/office/drawing/2014/main" id="{DEE726BB-4FBC-94A8-61B7-49B1D3FA9421}"/>
+              </a:ext>
+            </a:extLst>
+          </p:cNvPr>
+          <p:cNvGrpSpPr/>
+          <p:nvPr/>
+        </p:nvGrpSpPr>
+        <p:grpSpPr>
+          <a:xfrm>
+            <a:off x="7678168" y="1678581"/>
+            <a:ext cx="3628653" cy="1536451"/>
+            <a:chOff x="7678168" y="2146246"/>
+            <a:chExt cx="3628653" cy="1536451"/>
+          </a:xfrm>
+        </p:grpSpPr>
+        <p:cxnSp>
+          <p:nvCxnSpPr>
+            <p:cNvPr id="11" name="Straight Connector 10">
+              <a:extLst>
+                <a:ext uri="{FF2B5EF4-FFF2-40B4-BE49-F238E27FC236}">
+                  <a16:creationId xmlns:a16="http://schemas.microsoft.com/office/drawing/2014/main" id="{1886CE63-A49C-A21C-779D-1DB8B2BB05B8}"/>
+                </a:ext>
+              </a:extLst>
+            </p:cNvPr>
+            <p:cNvCxnSpPr>
+              <a:cxnSpLocks/>
+            </p:cNvCxnSpPr>
+            <p:nvPr/>
+          </p:nvCxnSpPr>
+          <p:spPr>
+            <a:xfrm>
+              <a:off x="7678168" y="2146246"/>
+              <a:ext cx="2454967" cy="0"/>
+            </a:xfrm>
+            <a:prstGeom prst="line">
+              <a:avLst/>
+            </a:prstGeom>
+            <a:ln>
+              <a:headEnd type="arrow" w="med" len="med"/>
+              <a:tailEnd type="arrow" w="med" len="med"/>
+            </a:ln>
+          </p:spPr>
+          <p:style>
+            <a:lnRef idx="2">
+              <a:schemeClr val="accent2"/>
+            </a:lnRef>
+            <a:fillRef idx="0">
+              <a:schemeClr val="accent2"/>
+            </a:fillRef>
+            <a:effectRef idx="1">
+              <a:schemeClr val="accent2"/>
+            </a:effectRef>
+            <a:fontRef idx="minor">
+              <a:schemeClr val="tx1"/>
+            </a:fontRef>
+          </p:style>
+        </p:cxnSp>
+        <p:sp>
+          <p:nvSpPr>
+            <p:cNvPr id="12" name="TextBox 11">
+              <a:extLst>
+                <a:ext uri="{FF2B5EF4-FFF2-40B4-BE49-F238E27FC236}">
+                  <a16:creationId xmlns:a16="http://schemas.microsoft.com/office/drawing/2014/main" id="{1EAFB6E6-D693-46C8-15CF-288442AA339D}"/>
+                </a:ext>
+              </a:extLst>
+            </p:cNvPr>
+            <p:cNvSpPr txBox="1"/>
+            <p:nvPr/>
+          </p:nvSpPr>
+          <p:spPr>
+            <a:xfrm>
+              <a:off x="8701151" y="2154850"/>
+              <a:ext cx="949684" cy="307777"/>
+            </a:xfrm>
+            <a:prstGeom prst="rect">
+              <a:avLst/>
+            </a:prstGeom>
+            <a:noFill/>
+          </p:spPr>
+          <p:txBody>
+            <a:bodyPr wrap="none" rtlCol="0">
+              <a:spAutoFit/>
+            </a:bodyPr>
+            <a:lstStyle/>
+            <a:p>
+              <a:r>
+                <a:rPr lang="en-US" sz="1400" dirty="0"/>
+                <a:t>Variability</a:t>
+              </a:r>
+            </a:p>
+          </p:txBody>
+        </p:sp>
+        <p:cxnSp>
+          <p:nvCxnSpPr>
+            <p:cNvPr id="15" name="Straight Connector 14">
+              <a:extLst>
+                <a:ext uri="{FF2B5EF4-FFF2-40B4-BE49-F238E27FC236}">
+                  <a16:creationId xmlns:a16="http://schemas.microsoft.com/office/drawing/2014/main" id="{636686F8-26C0-B1F6-0745-81063A557FE3}"/>
+                </a:ext>
+              </a:extLst>
+            </p:cNvPr>
+            <p:cNvCxnSpPr>
+              <a:cxnSpLocks/>
+            </p:cNvCxnSpPr>
+            <p:nvPr/>
+          </p:nvCxnSpPr>
+          <p:spPr>
+            <a:xfrm>
+              <a:off x="8862683" y="3318349"/>
+              <a:ext cx="673916" cy="0"/>
+            </a:xfrm>
+            <a:prstGeom prst="line">
+              <a:avLst/>
+            </a:prstGeom>
+            <a:ln>
+              <a:headEnd type="arrow" w="med" len="med"/>
+              <a:tailEnd type="arrow" w="med" len="med"/>
+            </a:ln>
+          </p:spPr>
+          <p:style>
+            <a:lnRef idx="2">
+              <a:schemeClr val="accent1"/>
+            </a:lnRef>
+            <a:fillRef idx="0">
+              <a:schemeClr val="accent1"/>
+            </a:fillRef>
+            <a:effectRef idx="1">
+              <a:schemeClr val="accent1"/>
+            </a:effectRef>
+            <a:fontRef idx="minor">
+              <a:schemeClr val="tx1"/>
+            </a:fontRef>
+          </p:style>
+        </p:cxnSp>
+        <p:sp>
+          <p:nvSpPr>
+            <p:cNvPr id="18" name="TextBox 17">
+              <a:extLst>
+                <a:ext uri="{FF2B5EF4-FFF2-40B4-BE49-F238E27FC236}">
+                  <a16:creationId xmlns:a16="http://schemas.microsoft.com/office/drawing/2014/main" id="{FE3642C1-5AC9-0016-C46F-99088DB56A1F}"/>
+                </a:ext>
+              </a:extLst>
+            </p:cNvPr>
+            <p:cNvSpPr txBox="1"/>
+            <p:nvPr/>
+          </p:nvSpPr>
+          <p:spPr>
+            <a:xfrm>
+              <a:off x="9187202" y="3159477"/>
+              <a:ext cx="2119619" cy="523220"/>
+            </a:xfrm>
+            <a:prstGeom prst="rect">
+              <a:avLst/>
+            </a:prstGeom>
+            <a:noFill/>
+          </p:spPr>
+          <p:txBody>
+            <a:bodyPr wrap="none" rtlCol="0">
+              <a:spAutoFit/>
+            </a:bodyPr>
+            <a:lstStyle/>
+            <a:p>
+              <a:pPr algn="ctr"/>
+              <a:r>
+                <a:rPr lang="en-US" sz="1400" dirty="0"/>
+                <a:t>Irreducible error </a:t>
+              </a:r>
+              <a:br>
+                <a:rPr lang="en-US" sz="1400" dirty="0"/>
+              </a:br>
+              <a:r>
+                <a:rPr lang="en-US" sz="1400" dirty="0"/>
+                <a:t>(stochastic environment)</a:t>
+              </a:r>
+            </a:p>
+          </p:txBody>
+        </p:sp>
+        <p:sp>
+          <p:nvSpPr>
+            <p:cNvPr id="22" name="TextBox 21">
+              <a:extLst>
+                <a:ext uri="{FF2B5EF4-FFF2-40B4-BE49-F238E27FC236}">
+                  <a16:creationId xmlns:a16="http://schemas.microsoft.com/office/drawing/2014/main" id="{DCC5B531-9E90-FF45-5622-95E6E5C32852}"/>
+                </a:ext>
+              </a:extLst>
+            </p:cNvPr>
+            <p:cNvSpPr txBox="1"/>
+            <p:nvPr/>
+          </p:nvSpPr>
+          <p:spPr>
+            <a:xfrm>
+              <a:off x="9038454" y="2951119"/>
+              <a:ext cx="308098" cy="369332"/>
+            </a:xfrm>
+            <a:prstGeom prst="rect">
+              <a:avLst/>
+            </a:prstGeom>
+            <a:noFill/>
+          </p:spPr>
+          <p:txBody>
+            <a:bodyPr wrap="none" rtlCol="0">
+              <a:spAutoFit/>
+            </a:bodyPr>
+            <a:lstStyle/>
+            <a:p>
+              <a:r>
+                <a:rPr lang="en-US" dirty="0"/>
+                <a:t>+</a:t>
+              </a:r>
+            </a:p>
+          </p:txBody>
+        </p:sp>
+        <p:cxnSp>
+          <p:nvCxnSpPr>
+            <p:cNvPr id="28" name="Straight Connector 27">
+              <a:extLst>
+                <a:ext uri="{FF2B5EF4-FFF2-40B4-BE49-F238E27FC236}">
+                  <a16:creationId xmlns:a16="http://schemas.microsoft.com/office/drawing/2014/main" id="{9EAC564B-F1C7-199E-5B83-438527B4E0AD}"/>
+                </a:ext>
+              </a:extLst>
+            </p:cNvPr>
+            <p:cNvCxnSpPr>
+              <a:cxnSpLocks/>
+            </p:cNvCxnSpPr>
+            <p:nvPr/>
+          </p:nvCxnSpPr>
+          <p:spPr>
+            <a:xfrm>
+              <a:off x="8900533" y="2671307"/>
+              <a:ext cx="531225" cy="0"/>
+            </a:xfrm>
+            <a:prstGeom prst="line">
+              <a:avLst/>
+            </a:prstGeom>
+            <a:ln>
+              <a:headEnd type="arrow" w="med" len="med"/>
+              <a:tailEnd type="arrow" w="med" len="med"/>
+            </a:ln>
+          </p:spPr>
+          <p:style>
+            <a:lnRef idx="2">
+              <a:schemeClr val="accent3"/>
+            </a:lnRef>
+            <a:fillRef idx="0">
+              <a:schemeClr val="accent3"/>
+            </a:fillRef>
+            <a:effectRef idx="1">
+              <a:schemeClr val="accent3"/>
+            </a:effectRef>
+            <a:fontRef idx="minor">
+              <a:schemeClr val="tx1"/>
+            </a:fontRef>
+          </p:style>
+        </p:cxnSp>
+        <p:sp>
+          <p:nvSpPr>
+            <p:cNvPr id="31" name="TextBox 30">
+              <a:extLst>
+                <a:ext uri="{FF2B5EF4-FFF2-40B4-BE49-F238E27FC236}">
+                  <a16:creationId xmlns:a16="http://schemas.microsoft.com/office/drawing/2014/main" id="{C24D58D3-7658-4D97-7824-A4CD55FF5292}"/>
+                </a:ext>
+              </a:extLst>
+            </p:cNvPr>
+            <p:cNvSpPr txBox="1"/>
+            <p:nvPr/>
+          </p:nvSpPr>
+          <p:spPr>
+            <a:xfrm rot="5400000" flipH="1">
+              <a:off x="9021845" y="2312166"/>
+              <a:ext cx="288599" cy="369332"/>
+            </a:xfrm>
+            <a:prstGeom prst="rect">
+              <a:avLst/>
+            </a:prstGeom>
+            <a:noFill/>
+          </p:spPr>
+          <p:txBody>
+            <a:bodyPr wrap="square" rtlCol="0">
+              <a:spAutoFit/>
+            </a:bodyPr>
+            <a:lstStyle/>
+            <a:p>
+              <a:r>
+                <a:rPr lang="en-US" dirty="0"/>
+                <a:t>=</a:t>
+              </a:r>
+            </a:p>
+          </p:txBody>
+        </p:sp>
+        <p:cxnSp>
+          <p:nvCxnSpPr>
+            <p:cNvPr id="32" name="Straight Connector 31">
+              <a:extLst>
+                <a:ext uri="{FF2B5EF4-FFF2-40B4-BE49-F238E27FC236}">
+                  <a16:creationId xmlns:a16="http://schemas.microsoft.com/office/drawing/2014/main" id="{6FA3F4F7-6372-9530-C6B2-684F8D32688A}"/>
+                </a:ext>
+              </a:extLst>
+            </p:cNvPr>
+            <p:cNvCxnSpPr>
+              <a:cxnSpLocks/>
+            </p:cNvCxnSpPr>
+            <p:nvPr/>
+          </p:nvCxnSpPr>
+          <p:spPr>
+            <a:xfrm>
+              <a:off x="8383163" y="2942537"/>
+              <a:ext cx="1174494" cy="0"/>
+            </a:xfrm>
+            <a:prstGeom prst="line">
+              <a:avLst/>
+            </a:prstGeom>
+            <a:ln>
+              <a:headEnd type="arrow" w="med" len="med"/>
+              <a:tailEnd type="arrow" w="med" len="med"/>
+            </a:ln>
+          </p:spPr>
+          <p:style>
+            <a:lnRef idx="2">
+              <a:schemeClr val="accent3"/>
+            </a:lnRef>
+            <a:fillRef idx="0">
+              <a:schemeClr val="accent3"/>
+            </a:fillRef>
+            <a:effectRef idx="1">
+              <a:schemeClr val="accent3"/>
+            </a:effectRef>
+            <a:fontRef idx="minor">
+              <a:schemeClr val="tx1"/>
+            </a:fontRef>
+          </p:style>
+        </p:cxnSp>
+        <p:sp>
+          <p:nvSpPr>
+            <p:cNvPr id="36" name="TextBox 35">
+              <a:extLst>
+                <a:ext uri="{FF2B5EF4-FFF2-40B4-BE49-F238E27FC236}">
+                  <a16:creationId xmlns:a16="http://schemas.microsoft.com/office/drawing/2014/main" id="{E4812472-4F63-2627-BF75-DCD3B5B9BB62}"/>
+                </a:ext>
+              </a:extLst>
+            </p:cNvPr>
+            <p:cNvSpPr txBox="1"/>
+            <p:nvPr/>
+          </p:nvSpPr>
+          <p:spPr>
+            <a:xfrm>
+              <a:off x="9030052" y="2637589"/>
+              <a:ext cx="308098" cy="369332"/>
+            </a:xfrm>
+            <a:prstGeom prst="rect">
+              <a:avLst/>
+            </a:prstGeom>
+            <a:noFill/>
+          </p:spPr>
+          <p:txBody>
+            <a:bodyPr wrap="none" rtlCol="0">
+              <a:spAutoFit/>
+            </a:bodyPr>
+            <a:lstStyle/>
+            <a:p>
+              <a:r>
+                <a:rPr lang="en-US" dirty="0"/>
+                <a:t>+</a:t>
+              </a:r>
+            </a:p>
+          </p:txBody>
+        </p:sp>
+        <p:sp>
+          <p:nvSpPr>
+            <p:cNvPr id="38" name="TextBox 37">
+              <a:extLst>
+                <a:ext uri="{FF2B5EF4-FFF2-40B4-BE49-F238E27FC236}">
+                  <a16:creationId xmlns:a16="http://schemas.microsoft.com/office/drawing/2014/main" id="{CB35D8BF-7233-EF13-C203-4AAEF1DBF7BA}"/>
+                </a:ext>
+              </a:extLst>
+            </p:cNvPr>
+            <p:cNvSpPr txBox="1"/>
+            <p:nvPr/>
+          </p:nvSpPr>
+          <p:spPr>
+            <a:xfrm>
+              <a:off x="9424174" y="2495593"/>
+              <a:ext cx="1785553" cy="307777"/>
+            </a:xfrm>
+            <a:prstGeom prst="rect">
+              <a:avLst/>
+            </a:prstGeom>
+            <a:noFill/>
+          </p:spPr>
+          <p:txBody>
+            <a:bodyPr wrap="none" rtlCol="0">
+              <a:spAutoFit/>
+            </a:bodyPr>
+            <a:lstStyle/>
+            <a:p>
+              <a:pPr algn="ctr"/>
+              <a:r>
+                <a:rPr lang="en-US" sz="1400" dirty="0"/>
+                <a:t>Sample randomness</a:t>
+              </a:r>
+            </a:p>
+          </p:txBody>
+        </p:sp>
+        <p:sp>
+          <p:nvSpPr>
+            <p:cNvPr id="40" name="TextBox 39">
+              <a:extLst>
+                <a:ext uri="{FF2B5EF4-FFF2-40B4-BE49-F238E27FC236}">
+                  <a16:creationId xmlns:a16="http://schemas.microsoft.com/office/drawing/2014/main" id="{0931220C-A11F-53AF-0FFE-0B5349A97CA4}"/>
+                </a:ext>
+              </a:extLst>
+            </p:cNvPr>
+            <p:cNvSpPr txBox="1"/>
+            <p:nvPr/>
+          </p:nvSpPr>
+          <p:spPr>
+            <a:xfrm>
+              <a:off x="9539223" y="2808179"/>
+              <a:ext cx="1342932" cy="307777"/>
+            </a:xfrm>
+            <a:prstGeom prst="rect">
+              <a:avLst/>
+            </a:prstGeom>
+            <a:noFill/>
+          </p:spPr>
+          <p:txBody>
+            <a:bodyPr wrap="none" rtlCol="0">
+              <a:spAutoFit/>
+            </a:bodyPr>
+            <a:lstStyle/>
+            <a:p>
+              <a:pPr algn="ctr"/>
+              <a:r>
+                <a:rPr lang="en-US" sz="1400" dirty="0"/>
+                <a:t>Changing data</a:t>
+              </a:r>
+            </a:p>
+          </p:txBody>
+        </p:sp>
+      </p:grpSp>
+      <p:grpSp>
+        <p:nvGrpSpPr>
+          <p:cNvPr id="106" name="Group 105" descr="After convergence: the algorithm's solution is still offset from the optimal solution by the algorithm bias. Variance now comes from sample randomness and irreducible error only, because changing data drops out with a fixed policy.">
+            <a:extLst>
+              <a:ext uri="{FF2B5EF4-FFF2-40B4-BE49-F238E27FC236}">
+                <a16:creationId xmlns:a16="http://schemas.microsoft.com/office/drawing/2014/main" id="{F6AE2BA4-3D61-9E9A-9281-330034E5A0F7}"/>
+              </a:ext>
+            </a:extLst>
+          </p:cNvPr>
+          <p:cNvGrpSpPr/>
+          <p:nvPr/>
+        </p:nvGrpSpPr>
+        <p:grpSpPr>
+          <a:xfrm>
+            <a:off x="7756072" y="3591756"/>
+            <a:ext cx="4266122" cy="2915729"/>
+            <a:chOff x="7756072" y="3591756"/>
+            <a:chExt cx="4266122" cy="2915729"/>
+          </a:xfrm>
+        </p:grpSpPr>
+        <p:grpSp>
+          <p:nvGrpSpPr>
+            <p:cNvPr id="75" name="Group 74">
+              <a:extLst>
+                <a:ext uri="{FF2B5EF4-FFF2-40B4-BE49-F238E27FC236}">
+                  <a16:creationId xmlns:a16="http://schemas.microsoft.com/office/drawing/2014/main" id="{DBD5C3F5-A278-9917-3A89-AD695411935A}"/>
+                </a:ext>
+              </a:extLst>
+            </p:cNvPr>
+            <p:cNvGrpSpPr/>
+            <p:nvPr/>
+          </p:nvGrpSpPr>
+          <p:grpSpPr>
+            <a:xfrm>
+              <a:off x="7756072" y="3591756"/>
+              <a:ext cx="4182396" cy="2915729"/>
+              <a:chOff x="7756072" y="3591756"/>
+              <a:chExt cx="4182396" cy="2915729"/>
+            </a:xfrm>
+          </p:grpSpPr>
+          <p:grpSp>
+            <p:nvGrpSpPr>
+              <p:cNvPr id="47" name="Group 46">
+                <a:extLst>
+                  <a:ext uri="{FF2B5EF4-FFF2-40B4-BE49-F238E27FC236}">
+                    <a16:creationId xmlns:a16="http://schemas.microsoft.com/office/drawing/2014/main" id="{F4D838CF-2EA3-E8AD-FB2B-A98C28243113}"/>
+                  </a:ext>
+                </a:extLst>
+              </p:cNvPr>
+              <p:cNvGrpSpPr/>
+              <p:nvPr/>
+            </p:nvGrpSpPr>
+            <p:grpSpPr>
+              <a:xfrm>
+                <a:off x="9351164" y="4291049"/>
+                <a:ext cx="1824191" cy="453629"/>
+                <a:chOff x="9169167" y="1466261"/>
+                <a:chExt cx="1824191" cy="453629"/>
+              </a:xfrm>
+            </p:grpSpPr>
+            <p:sp>
+              <p:nvSpPr>
+                <p:cNvPr id="48" name="Right Brace 47">
+                  <a:extLst>
+                    <a:ext uri="{FF2B5EF4-FFF2-40B4-BE49-F238E27FC236}">
+                      <a16:creationId xmlns:a16="http://schemas.microsoft.com/office/drawing/2014/main" id="{6C350FF2-FF00-1E70-49A8-A01A13ACE00D}"/>
+                    </a:ext>
+                  </a:extLst>
+                </p:cNvPr>
+                <p:cNvSpPr/>
+                <p:nvPr/>
+              </p:nvSpPr>
+              <p:spPr>
+                <a:xfrm rot="16200000">
+                  <a:off x="10005849" y="932380"/>
+                  <a:ext cx="150828" cy="1824191"/>
+                </a:xfrm>
+                <a:prstGeom prst="rightBrace">
+                  <a:avLst/>
+                </a:prstGeom>
+              </p:spPr>
+              <p:style>
+                <a:lnRef idx="2">
+                  <a:schemeClr val="accent2"/>
+                </a:lnRef>
+                <a:fillRef idx="0">
+                  <a:schemeClr val="accent2"/>
+                </a:fillRef>
+                <a:effectRef idx="1">
+                  <a:schemeClr val="accent2"/>
+                </a:effectRef>
+                <a:fontRef idx="minor">
+                  <a:schemeClr val="tx1"/>
+                </a:fontRef>
+              </p:style>
+              <p:txBody>
+                <a:bodyPr rtlCol="0" anchor="ctr"/>
+                <a:lstStyle/>
+                <a:p>
+                  <a:pPr algn="ctr"/>
+                  <a:endParaRPr lang="en-US"/>
+                </a:p>
+              </p:txBody>
+            </p:sp>
+            <p:sp>
+              <p:nvSpPr>
+                <p:cNvPr id="49" name="TextBox 48">
+                  <a:extLst>
+                    <a:ext uri="{FF2B5EF4-FFF2-40B4-BE49-F238E27FC236}">
+                      <a16:creationId xmlns:a16="http://schemas.microsoft.com/office/drawing/2014/main" id="{324695C4-6170-F2FC-407E-C1D083D281B6}"/>
+                    </a:ext>
+                  </a:extLst>
+                </p:cNvPr>
+                <p:cNvSpPr txBox="1"/>
+                <p:nvPr/>
+              </p:nvSpPr>
+              <p:spPr>
+                <a:xfrm>
+                  <a:off x="9431758" y="1466261"/>
+                  <a:ext cx="1299010" cy="307777"/>
+                </a:xfrm>
+                <a:prstGeom prst="rect">
+                  <a:avLst/>
+                </a:prstGeom>
+                <a:noFill/>
+              </p:spPr>
+              <p:txBody>
+                <a:bodyPr wrap="none" rtlCol="0">
+                  <a:spAutoFit/>
+                </a:bodyPr>
+                <a:lstStyle/>
+                <a:p>
+                  <a:r>
+                    <a:rPr lang="en-US" sz="1400" dirty="0"/>
+                    <a:t>Algorithm bias</a:t>
+                  </a:r>
+                </a:p>
+              </p:txBody>
+            </p:sp>
+          </p:grpSp>
+          <p:grpSp>
+            <p:nvGrpSpPr>
+              <p:cNvPr id="50" name="Group 49">
+                <a:extLst>
+                  <a:ext uri="{FF2B5EF4-FFF2-40B4-BE49-F238E27FC236}">
+                    <a16:creationId xmlns:a16="http://schemas.microsoft.com/office/drawing/2014/main" id="{D765BBAE-0A2C-131E-423F-4CEE5BF572C4}"/>
+                  </a:ext>
+                </a:extLst>
+              </p:cNvPr>
+              <p:cNvGrpSpPr/>
+              <p:nvPr/>
+            </p:nvGrpSpPr>
+            <p:grpSpPr>
+              <a:xfrm>
+                <a:off x="8949276" y="4959786"/>
+                <a:ext cx="2539542" cy="1547699"/>
+                <a:chOff x="8767279" y="2134998"/>
+                <a:chExt cx="2539542" cy="1547699"/>
+              </a:xfrm>
+            </p:grpSpPr>
+            <p:cxnSp>
+              <p:nvCxnSpPr>
+                <p:cNvPr id="51" name="Straight Connector 50">
+                  <a:extLst>
+                    <a:ext uri="{FF2B5EF4-FFF2-40B4-BE49-F238E27FC236}">
+                      <a16:creationId xmlns:a16="http://schemas.microsoft.com/office/drawing/2014/main" id="{203F3DC3-3454-B7CE-93E6-96A0ACD92C1B}"/>
+                    </a:ext>
+                  </a:extLst>
+                </p:cNvPr>
+                <p:cNvCxnSpPr>
+                  <a:cxnSpLocks/>
+                </p:cNvCxnSpPr>
+                <p:nvPr/>
+              </p:nvCxnSpPr>
+              <p:spPr>
+                <a:xfrm>
+                  <a:off x="8848055" y="2134998"/>
+                  <a:ext cx="601951" cy="0"/>
+                </a:xfrm>
+                <a:prstGeom prst="line">
+                  <a:avLst/>
+                </a:prstGeom>
+                <a:ln>
+                  <a:headEnd type="arrow" w="med" len="med"/>
+                  <a:tailEnd type="arrow" w="med" len="med"/>
+                </a:ln>
+              </p:spPr>
+              <p:style>
+                <a:lnRef idx="2">
+                  <a:schemeClr val="accent2"/>
+                </a:lnRef>
+                <a:fillRef idx="0">
+                  <a:schemeClr val="accent2"/>
+                </a:fillRef>
+                <a:effectRef idx="1">
+                  <a:schemeClr val="accent2"/>
+                </a:effectRef>
+                <a:fontRef idx="minor">
+                  <a:schemeClr val="tx1"/>
+                </a:fontRef>
+              </p:style>
+            </p:cxnSp>
+            <p:sp>
+              <p:nvSpPr>
+                <p:cNvPr id="52" name="TextBox 51">
+                  <a:extLst>
+                    <a:ext uri="{FF2B5EF4-FFF2-40B4-BE49-F238E27FC236}">
+                      <a16:creationId xmlns:a16="http://schemas.microsoft.com/office/drawing/2014/main" id="{2E61EEA2-EE43-6B71-472B-BB9278020441}"/>
+                    </a:ext>
+                  </a:extLst>
+                </p:cNvPr>
+                <p:cNvSpPr txBox="1"/>
+                <p:nvPr/>
+              </p:nvSpPr>
+              <p:spPr>
+                <a:xfrm>
+                  <a:off x="8767279" y="2146246"/>
+                  <a:ext cx="949684" cy="307777"/>
+                </a:xfrm>
+                <a:prstGeom prst="rect">
+                  <a:avLst/>
+                </a:prstGeom>
+                <a:noFill/>
+              </p:spPr>
+              <p:txBody>
+                <a:bodyPr wrap="none" rtlCol="0">
+                  <a:spAutoFit/>
+                </a:bodyPr>
+                <a:lstStyle/>
+                <a:p>
+                  <a:r>
+                    <a:rPr lang="en-US" sz="1400" dirty="0"/>
+                    <a:t>Variability</a:t>
+                  </a:r>
+                </a:p>
+              </p:txBody>
+            </p:sp>
+            <p:cxnSp>
+              <p:nvCxnSpPr>
+                <p:cNvPr id="53" name="Straight Connector 52">
+                  <a:extLst>
+                    <a:ext uri="{FF2B5EF4-FFF2-40B4-BE49-F238E27FC236}">
+                      <a16:creationId xmlns:a16="http://schemas.microsoft.com/office/drawing/2014/main" id="{BBF7921F-7B28-C026-5812-6EF119080305}"/>
+                    </a:ext>
+                  </a:extLst>
+                </p:cNvPr>
+                <p:cNvCxnSpPr>
+                  <a:cxnSpLocks/>
+                </p:cNvCxnSpPr>
+                <p:nvPr/>
+              </p:nvCxnSpPr>
+              <p:spPr>
+                <a:xfrm>
+                  <a:off x="8862683" y="3318349"/>
+                  <a:ext cx="673916" cy="0"/>
+                </a:xfrm>
+                <a:prstGeom prst="line">
+                  <a:avLst/>
+                </a:prstGeom>
+                <a:ln>
+                  <a:headEnd type="arrow" w="med" len="med"/>
+                  <a:tailEnd type="arrow" w="med" len="med"/>
+                </a:ln>
+              </p:spPr>
+              <p:style>
+                <a:lnRef idx="2">
+                  <a:schemeClr val="accent1"/>
+                </a:lnRef>
+                <a:fillRef idx="0">
+                  <a:schemeClr val="accent1"/>
+                </a:fillRef>
+                <a:effectRef idx="1">
+                  <a:schemeClr val="accent1"/>
+                </a:effectRef>
+                <a:fontRef idx="minor">
+                  <a:schemeClr val="tx1"/>
+                </a:fontRef>
+              </p:style>
+            </p:cxnSp>
+            <p:sp>
+              <p:nvSpPr>
+                <p:cNvPr id="54" name="TextBox 53">
+                  <a:extLst>
+                    <a:ext uri="{FF2B5EF4-FFF2-40B4-BE49-F238E27FC236}">
+                      <a16:creationId xmlns:a16="http://schemas.microsoft.com/office/drawing/2014/main" id="{51714559-7538-77A3-F934-C0778FAABCA1}"/>
+                    </a:ext>
+                  </a:extLst>
+                </p:cNvPr>
+                <p:cNvSpPr txBox="1"/>
+                <p:nvPr/>
+              </p:nvSpPr>
+              <p:spPr>
+                <a:xfrm>
+                  <a:off x="9187202" y="3159477"/>
+                  <a:ext cx="2119619" cy="523220"/>
+                </a:xfrm>
+                <a:prstGeom prst="rect">
+                  <a:avLst/>
+                </a:prstGeom>
+                <a:noFill/>
+              </p:spPr>
+              <p:txBody>
+                <a:bodyPr wrap="none" rtlCol="0">
+                  <a:spAutoFit/>
+                </a:bodyPr>
+                <a:lstStyle/>
+                <a:p>
+                  <a:pPr algn="ctr"/>
+                  <a:r>
+                    <a:rPr lang="en-US" sz="1400" dirty="0"/>
+                    <a:t>Irreducible error </a:t>
+                  </a:r>
+                  <a:br>
+                    <a:rPr lang="en-US" sz="1400" dirty="0"/>
+                  </a:br>
+                  <a:r>
+                    <a:rPr lang="en-US" sz="1400" dirty="0"/>
+                    <a:t>(stochastic environment)</a:t>
+                  </a:r>
+                </a:p>
+              </p:txBody>
+            </p:sp>
+            <p:sp>
+              <p:nvSpPr>
+                <p:cNvPr id="55" name="TextBox 54">
+                  <a:extLst>
+                    <a:ext uri="{FF2B5EF4-FFF2-40B4-BE49-F238E27FC236}">
+                      <a16:creationId xmlns:a16="http://schemas.microsoft.com/office/drawing/2014/main" id="{9DEB8724-CBCC-4B97-0128-8C9C3CB95D99}"/>
+                    </a:ext>
+                  </a:extLst>
+                </p:cNvPr>
+                <p:cNvSpPr txBox="1"/>
+                <p:nvPr/>
+              </p:nvSpPr>
+              <p:spPr>
+                <a:xfrm>
+                  <a:off x="9038454" y="2951119"/>
+                  <a:ext cx="308098" cy="369332"/>
+                </a:xfrm>
+                <a:prstGeom prst="rect">
+                  <a:avLst/>
+                </a:prstGeom>
+                <a:noFill/>
+              </p:spPr>
+              <p:txBody>
+                <a:bodyPr wrap="none" rtlCol="0">
+                  <a:spAutoFit/>
+                </a:bodyPr>
+                <a:lstStyle/>
+                <a:p>
+                  <a:r>
+                    <a:rPr lang="en-US" dirty="0"/>
+                    <a:t>+</a:t>
+                  </a:r>
+                </a:p>
+              </p:txBody>
+            </p:sp>
+            <p:sp>
+              <p:nvSpPr>
+                <p:cNvPr id="57" name="TextBox 56">
+                  <a:extLst>
+                    <a:ext uri="{FF2B5EF4-FFF2-40B4-BE49-F238E27FC236}">
+                      <a16:creationId xmlns:a16="http://schemas.microsoft.com/office/drawing/2014/main" id="{CA88B0B7-E21F-C4F4-07B1-BAC0D019F101}"/>
+                    </a:ext>
+                  </a:extLst>
+                </p:cNvPr>
+                <p:cNvSpPr txBox="1"/>
+                <p:nvPr/>
+              </p:nvSpPr>
+              <p:spPr>
+                <a:xfrm rot="5400000" flipH="1">
+                  <a:off x="9021845" y="2312166"/>
+                  <a:ext cx="288599" cy="369332"/>
+                </a:xfrm>
+                <a:prstGeom prst="rect">
+                  <a:avLst/>
+                </a:prstGeom>
+                <a:noFill/>
+              </p:spPr>
+              <p:txBody>
+                <a:bodyPr wrap="square" rtlCol="0">
+                  <a:spAutoFit/>
+                </a:bodyPr>
+                <a:lstStyle/>
+                <a:p>
+                  <a:r>
+                    <a:rPr lang="en-US" dirty="0"/>
+                    <a:t>=</a:t>
+                  </a:r>
+                </a:p>
+              </p:txBody>
+            </p:sp>
+            <p:sp>
+              <p:nvSpPr>
+                <p:cNvPr id="59" name="TextBox 58">
+                  <a:extLst>
+                    <a:ext uri="{FF2B5EF4-FFF2-40B4-BE49-F238E27FC236}">
+                      <a16:creationId xmlns:a16="http://schemas.microsoft.com/office/drawing/2014/main" id="{0AA2B4C5-2039-C0DA-EF8A-515E18624637}"/>
+                    </a:ext>
+                  </a:extLst>
+                </p:cNvPr>
+                <p:cNvSpPr txBox="1"/>
+                <p:nvPr/>
+              </p:nvSpPr>
+              <p:spPr>
+                <a:xfrm>
+                  <a:off x="8954685" y="2533974"/>
+                  <a:ext cx="461665" cy="555601"/>
+                </a:xfrm>
+                <a:prstGeom prst="rect">
+                  <a:avLst/>
+                </a:prstGeom>
+                <a:noFill/>
+              </p:spPr>
+              <p:txBody>
+                <a:bodyPr vert="vert270" wrap="none" rtlCol="0">
+                  <a:spAutoFit/>
+                </a:bodyPr>
+                <a:lstStyle/>
+                <a:p>
+                  <a:r>
+                    <a:rPr lang="en-US" dirty="0"/>
+                    <a:t>0 + 0</a:t>
+                  </a:r>
+                </a:p>
+              </p:txBody>
+            </p:sp>
+            <p:sp>
+              <p:nvSpPr>
+                <p:cNvPr id="60" name="TextBox 59">
+                  <a:extLst>
+                    <a:ext uri="{FF2B5EF4-FFF2-40B4-BE49-F238E27FC236}">
+                      <a16:creationId xmlns:a16="http://schemas.microsoft.com/office/drawing/2014/main" id="{BDD484E1-93F3-3878-F4E9-E160E4655152}"/>
+                    </a:ext>
+                  </a:extLst>
+                </p:cNvPr>
+                <p:cNvSpPr txBox="1"/>
+                <p:nvPr/>
+              </p:nvSpPr>
+              <p:spPr>
+                <a:xfrm>
+                  <a:off x="9424174" y="2495593"/>
+                  <a:ext cx="1785553" cy="307777"/>
+                </a:xfrm>
+                <a:prstGeom prst="rect">
+                  <a:avLst/>
+                </a:prstGeom>
+                <a:noFill/>
+              </p:spPr>
+              <p:txBody>
+                <a:bodyPr wrap="none" rtlCol="0">
+                  <a:spAutoFit/>
+                </a:bodyPr>
+                <a:lstStyle/>
+                <a:p>
+                  <a:pPr algn="ctr"/>
+                  <a:r>
+                    <a:rPr lang="en-US" sz="1400" dirty="0"/>
+                    <a:t>Sample randomness</a:t>
+                  </a:r>
+                </a:p>
+              </p:txBody>
+            </p:sp>
+            <p:sp>
+              <p:nvSpPr>
+                <p:cNvPr id="61" name="TextBox 60">
+                  <a:extLst>
+                    <a:ext uri="{FF2B5EF4-FFF2-40B4-BE49-F238E27FC236}">
+                      <a16:creationId xmlns:a16="http://schemas.microsoft.com/office/drawing/2014/main" id="{7F110627-1534-D906-C53E-D37CFBF89F4F}"/>
+                    </a:ext>
+                  </a:extLst>
+                </p:cNvPr>
+                <p:cNvSpPr txBox="1"/>
+                <p:nvPr/>
+              </p:nvSpPr>
+              <p:spPr>
+                <a:xfrm>
+                  <a:off x="9557657" y="2808179"/>
+                  <a:ext cx="1306063" cy="307777"/>
+                </a:xfrm>
+                <a:prstGeom prst="rect">
+                  <a:avLst/>
+                </a:prstGeom>
+                <a:noFill/>
+              </p:spPr>
+              <p:txBody>
+                <a:bodyPr wrap="none" rtlCol="0">
+                  <a:spAutoFit/>
+                </a:bodyPr>
+                <a:lstStyle/>
+                <a:p>
+                  <a:pPr algn="ctr"/>
+                  <a:r>
+                    <a:rPr lang="en-US" sz="1400" dirty="0"/>
+                    <a:t>Changing data</a:t>
+                  </a:r>
+                </a:p>
+              </p:txBody>
+            </p:sp>
+          </p:grpSp>
+          <p:grpSp>
+            <p:nvGrpSpPr>
+              <p:cNvPr id="62" name="Group 61">
+                <a:extLst>
+                  <a:ext uri="{FF2B5EF4-FFF2-40B4-BE49-F238E27FC236}">
+                    <a16:creationId xmlns:a16="http://schemas.microsoft.com/office/drawing/2014/main" id="{A347D323-830B-EF36-F342-622860B84E8B}"/>
+                  </a:ext>
+                </a:extLst>
+              </p:cNvPr>
+              <p:cNvGrpSpPr/>
+              <p:nvPr/>
+            </p:nvGrpSpPr>
+            <p:grpSpPr>
+              <a:xfrm>
+                <a:off x="7941814" y="3865253"/>
+                <a:ext cx="3996654" cy="1010643"/>
+                <a:chOff x="7759817" y="1040465"/>
+                <a:chExt cx="3996654" cy="1010643"/>
+              </a:xfrm>
+            </p:grpSpPr>
+            <p:cxnSp>
+              <p:nvCxnSpPr>
+                <p:cNvPr id="63" name="Straight Arrow Connector 62">
+                  <a:extLst>
+                    <a:ext uri="{FF2B5EF4-FFF2-40B4-BE49-F238E27FC236}">
+                      <a16:creationId xmlns:a16="http://schemas.microsoft.com/office/drawing/2014/main" id="{93FC02E1-C912-CF63-EC49-9D12DA28EC13}"/>
+                    </a:ext>
+                  </a:extLst>
+                </p:cNvPr>
+                <p:cNvCxnSpPr>
+                  <a:cxnSpLocks/>
+                </p:cNvCxnSpPr>
+                <p:nvPr/>
+              </p:nvCxnSpPr>
+              <p:spPr>
+                <a:xfrm>
+                  <a:off x="7759817" y="2015627"/>
+                  <a:ext cx="3744372" cy="4195"/>
+                </a:xfrm>
+                <a:prstGeom prst="straightConnector1">
+                  <a:avLst/>
+                </a:prstGeom>
+                <a:ln>
+                  <a:tailEnd type="triangle"/>
+                </a:ln>
+              </p:spPr>
+              <p:style>
+                <a:lnRef idx="2">
+                  <a:schemeClr val="dk1"/>
+                </a:lnRef>
+                <a:fillRef idx="0">
+                  <a:schemeClr val="dk1"/>
+                </a:fillRef>
+                <a:effectRef idx="1">
+                  <a:schemeClr val="dk1"/>
+                </a:effectRef>
+                <a:fontRef idx="minor">
+                  <a:schemeClr val="tx1"/>
+                </a:fontRef>
+              </p:style>
+            </p:cxnSp>
+            <p:sp>
+              <p:nvSpPr>
+                <p:cNvPr id="64" name="Oval 63">
+                  <a:extLst>
+                    <a:ext uri="{FF2B5EF4-FFF2-40B4-BE49-F238E27FC236}">
+                      <a16:creationId xmlns:a16="http://schemas.microsoft.com/office/drawing/2014/main" id="{E55B72BE-770C-CAE1-FB15-AC36F936391C}"/>
+                    </a:ext>
+                  </a:extLst>
+                </p:cNvPr>
+                <p:cNvSpPr/>
+                <p:nvPr/>
+              </p:nvSpPr>
+              <p:spPr>
+                <a:xfrm>
+                  <a:off x="10993359" y="1992385"/>
+                  <a:ext cx="71307" cy="58723"/>
+                </a:xfrm>
+                <a:prstGeom prst="ellipse">
+                  <a:avLst/>
+                </a:prstGeom>
+              </p:spPr>
+              <p:style>
+                <a:lnRef idx="2">
+                  <a:schemeClr val="dk1">
+                    <a:shade val="15000"/>
+                  </a:schemeClr>
+                </a:lnRef>
+                <a:fillRef idx="1">
+                  <a:schemeClr val="dk1"/>
+                </a:fillRef>
+                <a:effectRef idx="0">
+                  <a:schemeClr val="dk1"/>
+                </a:effectRef>
+                <a:fontRef idx="minor">
+                  <a:schemeClr val="lt1"/>
+                </a:fontRef>
+              </p:style>
+              <p:txBody>
+                <a:bodyPr rtlCol="0" anchor="ctr"/>
+                <a:lstStyle/>
+                <a:p>
+                  <a:pPr algn="ctr"/>
+                  <a:endParaRPr lang="en-US"/>
+                </a:p>
+              </p:txBody>
+            </p:sp>
+            <p:sp>
+              <p:nvSpPr>
+                <p:cNvPr id="65" name="Oval 64">
+                  <a:extLst>
+                    <a:ext uri="{FF2B5EF4-FFF2-40B4-BE49-F238E27FC236}">
+                      <a16:creationId xmlns:a16="http://schemas.microsoft.com/office/drawing/2014/main" id="{9016288A-9559-64A1-6681-707D7FF335F5}"/>
+                    </a:ext>
+                  </a:extLst>
+                </p:cNvPr>
+                <p:cNvSpPr/>
+                <p:nvPr/>
+              </p:nvSpPr>
+              <p:spPr>
+                <a:xfrm>
+                  <a:off x="9097860" y="1992385"/>
+                  <a:ext cx="71307" cy="58723"/>
+                </a:xfrm>
+                <a:prstGeom prst="ellipse">
+                  <a:avLst/>
+                </a:prstGeom>
+              </p:spPr>
+              <p:style>
+                <a:lnRef idx="2">
+                  <a:schemeClr val="accent2">
+                    <a:shade val="15000"/>
+                  </a:schemeClr>
+                </a:lnRef>
+                <a:fillRef idx="1">
+                  <a:schemeClr val="accent2"/>
+                </a:fillRef>
+                <a:effectRef idx="0">
+                  <a:schemeClr val="accent2"/>
+                </a:effectRef>
+                <a:fontRef idx="minor">
+                  <a:schemeClr val="lt1"/>
+                </a:fontRef>
+              </p:style>
+              <p:txBody>
+                <a:bodyPr rtlCol="0" anchor="ctr"/>
+                <a:lstStyle/>
+                <a:p>
+                  <a:pPr algn="ctr"/>
+                  <a:endParaRPr lang="en-US"/>
+                </a:p>
+              </p:txBody>
+            </p:sp>
+            <p:sp>
+              <p:nvSpPr>
+                <p:cNvPr id="66" name="TextBox 65">
+                  <a:extLst>
+                    <a:ext uri="{FF2B5EF4-FFF2-40B4-BE49-F238E27FC236}">
+                      <a16:creationId xmlns:a16="http://schemas.microsoft.com/office/drawing/2014/main" id="{04894F10-0414-D6D9-186A-CC1ADF594C95}"/>
+                    </a:ext>
+                  </a:extLst>
+                </p:cNvPr>
+                <p:cNvSpPr txBox="1"/>
+                <p:nvPr/>
+              </p:nvSpPr>
+              <p:spPr>
+                <a:xfrm>
+                  <a:off x="10904956" y="1040465"/>
+                  <a:ext cx="851515" cy="523220"/>
+                </a:xfrm>
+                <a:prstGeom prst="rect">
+                  <a:avLst/>
+                </a:prstGeom>
+                <a:noFill/>
+              </p:spPr>
+              <p:txBody>
+                <a:bodyPr wrap="none" rtlCol="0">
+                  <a:spAutoFit/>
+                </a:bodyPr>
+                <a:lstStyle/>
+                <a:p>
+                  <a:r>
+                    <a:rPr lang="en-US" sz="1400" dirty="0"/>
+                    <a:t>Optimal </a:t>
+                  </a:r>
+                  <a:br>
+                    <a:rPr lang="en-US" sz="1400" dirty="0"/>
+                  </a:br>
+                  <a:r>
+                    <a:rPr lang="en-US" sz="1400" dirty="0"/>
+                    <a:t>solution</a:t>
+                  </a:r>
+                </a:p>
+              </p:txBody>
+            </p:sp>
+            <p:sp>
+              <p:nvSpPr>
+                <p:cNvPr id="67" name="TextBox 66">
+                  <a:extLst>
+                    <a:ext uri="{FF2B5EF4-FFF2-40B4-BE49-F238E27FC236}">
+                      <a16:creationId xmlns:a16="http://schemas.microsoft.com/office/drawing/2014/main" id="{23436912-08B6-60C2-4FDF-F40C748CB1D8}"/>
+                    </a:ext>
+                  </a:extLst>
+                </p:cNvPr>
+                <p:cNvSpPr txBox="1"/>
+                <p:nvPr/>
+              </p:nvSpPr>
+              <p:spPr>
+                <a:xfrm>
+                  <a:off x="7759817" y="1183378"/>
+                  <a:ext cx="1090427" cy="523220"/>
+                </a:xfrm>
+                <a:prstGeom prst="rect">
+                  <a:avLst/>
+                </a:prstGeom>
+                <a:noFill/>
+              </p:spPr>
+              <p:txBody>
+                <a:bodyPr wrap="none" rtlCol="0">
+                  <a:spAutoFit/>
+                </a:bodyPr>
+                <a:lstStyle/>
+                <a:p>
+                  <a:pPr algn="ctr"/>
+                  <a:r>
+                    <a:rPr lang="en-US" sz="1400" dirty="0"/>
+                    <a:t>Algorithm’s </a:t>
+                  </a:r>
+                  <a:br>
+                    <a:rPr lang="en-US" sz="1400" dirty="0"/>
+                  </a:br>
+                  <a:r>
+                    <a:rPr lang="en-US" sz="1400" dirty="0"/>
+                    <a:t>solution</a:t>
+                  </a:r>
+                </a:p>
+              </p:txBody>
+            </p:sp>
+            <p:cxnSp>
+              <p:nvCxnSpPr>
+                <p:cNvPr id="68" name="Straight Arrow Connector 67">
+                  <a:extLst>
+                    <a:ext uri="{FF2B5EF4-FFF2-40B4-BE49-F238E27FC236}">
+                      <a16:creationId xmlns:a16="http://schemas.microsoft.com/office/drawing/2014/main" id="{A0B4ADDF-BBA2-699C-CB20-587CE9090FAC}"/>
+                    </a:ext>
+                  </a:extLst>
+                </p:cNvPr>
+                <p:cNvCxnSpPr/>
+                <p:nvPr/>
+              </p:nvCxnSpPr>
+              <p:spPr>
+                <a:xfrm>
+                  <a:off x="8565160" y="1706598"/>
+                  <a:ext cx="420598" cy="213292"/>
+                </a:xfrm>
+                <a:prstGeom prst="straightConnector1">
+                  <a:avLst/>
+                </a:prstGeom>
+                <a:ln>
+                  <a:tailEnd type="triangle"/>
+                </a:ln>
+              </p:spPr>
+              <p:style>
+                <a:lnRef idx="2">
+                  <a:schemeClr val="accent2"/>
+                </a:lnRef>
+                <a:fillRef idx="0">
+                  <a:schemeClr val="accent2"/>
+                </a:fillRef>
+                <a:effectRef idx="1">
+                  <a:schemeClr val="accent2"/>
+                </a:effectRef>
+                <a:fontRef idx="minor">
+                  <a:schemeClr val="tx1"/>
+                </a:fontRef>
+              </p:style>
+            </p:cxnSp>
+            <p:cxnSp>
+              <p:nvCxnSpPr>
+                <p:cNvPr id="69" name="Straight Arrow Connector 68">
+                  <a:extLst>
+                    <a:ext uri="{FF2B5EF4-FFF2-40B4-BE49-F238E27FC236}">
+                      <a16:creationId xmlns:a16="http://schemas.microsoft.com/office/drawing/2014/main" id="{861D48FC-A6E2-2A66-26BB-0DC0B8BEA469}"/>
+                    </a:ext>
+                  </a:extLst>
+                </p:cNvPr>
+                <p:cNvCxnSpPr>
+                  <a:stCxn id="66" idx="2"/>
+                </p:cNvCxnSpPr>
+                <p:nvPr/>
+              </p:nvCxnSpPr>
+              <p:spPr>
+                <a:xfrm flipH="1">
+                  <a:off x="11064666" y="1563685"/>
+                  <a:ext cx="266048" cy="356205"/>
+                </a:xfrm>
+                <a:prstGeom prst="straightConnector1">
+                  <a:avLst/>
+                </a:prstGeom>
+                <a:ln>
+                  <a:tailEnd type="triangle"/>
+                </a:ln>
+              </p:spPr>
+              <p:style>
+                <a:lnRef idx="2">
+                  <a:schemeClr val="dk1"/>
+                </a:lnRef>
+                <a:fillRef idx="0">
+                  <a:schemeClr val="dk1"/>
+                </a:fillRef>
+                <a:effectRef idx="1">
+                  <a:schemeClr val="dk1"/>
+                </a:effectRef>
+                <a:fontRef idx="minor">
+                  <a:schemeClr val="tx1"/>
+                </a:fontRef>
+              </p:style>
+            </p:cxnSp>
+          </p:grpSp>
+          <p:sp>
+            <p:nvSpPr>
+              <p:cNvPr id="70" name="TextBox 69">
+                <a:extLst>
+                  <a:ext uri="{FF2B5EF4-FFF2-40B4-BE49-F238E27FC236}">
+                    <a16:creationId xmlns:a16="http://schemas.microsoft.com/office/drawing/2014/main" id="{BF372A64-12A6-D17D-A28A-92A101FE2384}"/>
+                  </a:ext>
+                </a:extLst>
+              </p:cNvPr>
+              <p:cNvSpPr txBox="1"/>
+              <p:nvPr/>
+            </p:nvSpPr>
+            <p:spPr>
+              <a:xfrm>
+                <a:off x="7756072" y="3591756"/>
+                <a:ext cx="2022413" cy="369332"/>
+              </a:xfrm>
+              <a:prstGeom prst="rect">
+                <a:avLst/>
+              </a:prstGeom>
+              <a:noFill/>
+            </p:spPr>
+            <p:txBody>
+              <a:bodyPr wrap="none" rtlCol="0">
+                <a:spAutoFit/>
+              </a:bodyPr>
+              <a:lstStyle/>
+              <a:p>
+                <a:r>
+                  <a:rPr lang="en-US" dirty="0"/>
+                  <a:t>After Convergence</a:t>
+                </a:r>
+              </a:p>
+            </p:txBody>
+          </p:sp>
+        </p:grpSp>
+        <p:sp>
+          <p:nvSpPr>
+            <p:cNvPr id="77" name="Right Brace 76">
+              <a:extLst>
+                <a:ext uri="{FF2B5EF4-FFF2-40B4-BE49-F238E27FC236}">
+                  <a16:creationId xmlns:a16="http://schemas.microsoft.com/office/drawing/2014/main" id="{6DDB3966-4503-773A-0120-B6BC84DFCA45}"/>
+                </a:ext>
+              </a:extLst>
+            </p:cNvPr>
+            <p:cNvSpPr/>
+            <p:nvPr/>
+          </p:nvSpPr>
+          <p:spPr>
+            <a:xfrm>
+              <a:off x="11306821" y="5320381"/>
+              <a:ext cx="84903" cy="663884"/>
+            </a:xfrm>
+            <a:prstGeom prst="rightBrace">
+              <a:avLst/>
+            </a:prstGeom>
+          </p:spPr>
+          <p:style>
+            <a:lnRef idx="2">
+              <a:schemeClr val="accent2"/>
+            </a:lnRef>
+            <a:fillRef idx="0">
+              <a:schemeClr val="accent2"/>
+            </a:fillRef>
+            <a:effectRef idx="1">
+              <a:schemeClr val="accent2"/>
+            </a:effectRef>
+            <a:fontRef idx="minor">
+              <a:schemeClr val="tx1"/>
+            </a:fontRef>
+          </p:style>
+          <p:txBody>
+            <a:bodyPr rtlCol="0" anchor="ctr"/>
+            <a:lstStyle/>
+            <a:p>
+              <a:pPr algn="ctr"/>
+              <a:endParaRPr lang="en-US"/>
+            </a:p>
+          </p:txBody>
+        </p:sp>
+        <p:sp>
+          <p:nvSpPr>
+            <p:cNvPr id="79" name="TextBox 78">
+              <a:extLst>
+                <a:ext uri="{FF2B5EF4-FFF2-40B4-BE49-F238E27FC236}">
+                  <a16:creationId xmlns:a16="http://schemas.microsoft.com/office/drawing/2014/main" id="{03344ECB-6393-F769-B3E5-03E4F923445A}"/>
+                </a:ext>
+              </a:extLst>
+            </p:cNvPr>
+            <p:cNvSpPr txBox="1"/>
+            <p:nvPr/>
+          </p:nvSpPr>
+          <p:spPr>
+            <a:xfrm>
+              <a:off x="11376619" y="5400552"/>
+              <a:ext cx="645575" cy="523220"/>
+            </a:xfrm>
+            <a:prstGeom prst="rect">
+              <a:avLst/>
+            </a:prstGeom>
+            <a:noFill/>
+          </p:spPr>
+          <p:txBody>
+            <a:bodyPr wrap="square" rtlCol="0">
+              <a:spAutoFit/>
+            </a:bodyPr>
+            <a:lstStyle/>
+            <a:p>
+              <a:pPr algn="ctr"/>
+              <a:r>
+                <a:rPr lang="en-US" sz="1400" dirty="0"/>
+                <a:t>Fixed Policy</a:t>
+              </a:r>
+            </a:p>
+          </p:txBody>
+        </p:sp>
+      </p:grpSp>
+    </p:spTree>
+    <p:extLst>
+      <p:ext uri="{BB962C8B-B14F-4D97-AF65-F5344CB8AC3E}">
+        <p14:creationId xmlns:p14="http://schemas.microsoft.com/office/powerpoint/2010/main" val="1778073472"/>
+      </p:ext>
+    </p:extLst>
+  </p:cSld>
+  <p:clrMapOvr>
+    <a:masterClrMapping/>
+  </p:clrMapOvr>
+  <p:timing>
+    <p:tnLst>
+      <p:par>
+        <p:cTn id="1" dur="indefinite" restart="never" nodeType="tmRoot">
+          <p:childTnLst>
+            <p:seq concurrent="1" nextAc="seek">
+              <p:cTn id="2" dur="indefinite" nodeType="mainSeq">
+                <p:childTnLst>
+                  <p:par>
+                    <p:cTn id="3" fill="hold">
+                      <p:stCondLst>
+                        <p:cond delay="indefinite"/>
+                      </p:stCondLst>
+                      <p:childTnLst>
+                        <p:par>
+                          <p:cTn id="4" fill="hold">
+                            <p:stCondLst>
+                              <p:cond delay="0"/>
+                            </p:stCondLst>
+                            <p:childTnLst>
+                              <p:par>
+                                <p:cTn id="5" presetID="1" presetClass="entr" presetSubtype="0" fill="hold" grpId="0" nodeType="clickEffect">
+                                  <p:stCondLst>
+                                    <p:cond delay="0"/>
+                                  </p:stCondLst>
+                                  <p:childTnLst>
+                                    <p:set>
+                                      <p:cBhvr>
+                                        <p:cTn id="6" dur="1" fill="hold">
+                                          <p:stCondLst>
+                                            <p:cond delay="0"/>
+                                          </p:stCondLst>
+                                        </p:cTn>
+                                        <p:tgtEl>
+                                          <p:spTgt spid="3">
+                                            <p:txEl>
+                                              <p:pRg st="0" end="0"/>
+                                            </p:txEl>
+                                          </p:spTgt>
+                                        </p:tgtEl>
+                                        <p:attrNameLst>
+                                          <p:attrName>style.visibility</p:attrName>
+                                        </p:attrNameLst>
+                                      </p:cBhvr>
+                                      <p:to>
+                                        <p:strVal val="visible"/>
+                                      </p:to>
+                                    </p:set>
+                                  </p:childTnLst>
+                                </p:cTn>
+                              </p:par>
+                              <p:par>
+                                <p:cTn id="7" presetID="1" presetClass="entr" presetSubtype="0" fill="hold" grpId="0" nodeType="withEffect">
+                                  <p:stCondLst>
+                                    <p:cond delay="0"/>
+                                  </p:stCondLst>
+                                  <p:childTnLst>
+                                    <p:set>
+                                      <p:cBhvr>
+                                        <p:cTn id="8" dur="1" fill="hold">
+                                          <p:stCondLst>
+                                            <p:cond delay="0"/>
+                                          </p:stCondLst>
+                                        </p:cTn>
+                                        <p:tgtEl>
+                                          <p:spTgt spid="3">
+                                            <p:txEl>
+                                              <p:pRg st="1" end="1"/>
+                                            </p:txEl>
+                                          </p:spTgt>
+                                        </p:tgtEl>
+                                        <p:attrNameLst>
+                                          <p:attrName>style.visibility</p:attrName>
+                                        </p:attrNameLst>
+                                      </p:cBhvr>
+                                      <p:to>
+                                        <p:strVal val="visible"/>
+                                      </p:to>
+                                    </p:set>
+                                  </p:childTnLst>
+                                </p:cTn>
+                              </p:par>
+                              <p:par>
+                                <p:cTn id="9" presetID="1" presetClass="entr" presetSubtype="0" fill="hold" nodeType="withEffect">
+                                  <p:stCondLst>
+                                    <p:cond delay="0"/>
+                                  </p:stCondLst>
+                                  <p:childTnLst>
+                                    <p:set>
+                                      <p:cBhvr>
+                                        <p:cTn id="10" dur="1" fill="hold">
+                                          <p:stCondLst>
+                                            <p:cond delay="0"/>
+                                          </p:stCondLst>
+                                        </p:cTn>
+                                        <p:tgtEl>
+                                          <p:spTgt spid="44"/>
+                                        </p:tgtEl>
+                                        <p:attrNameLst>
+                                          <p:attrName>style.visibility</p:attrName>
+                                        </p:attrNameLst>
+                                      </p:cBhvr>
+                                      <p:to>
+                                        <p:strVal val="visible"/>
+                                      </p:to>
+                                    </p:set>
+                                  </p:childTnLst>
+                                </p:cTn>
+                              </p:par>
+                            </p:childTnLst>
+                          </p:cTn>
+                        </p:par>
+                      </p:childTnLst>
+                    </p:cTn>
+                  </p:par>
+                  <p:par>
+                    <p:cTn id="11" fill="hold">
+                      <p:stCondLst>
+                        <p:cond delay="indefinite"/>
+                      </p:stCondLst>
+                      <p:childTnLst>
+                        <p:par>
+                          <p:cTn id="12" fill="hold">
+                            <p:stCondLst>
+                              <p:cond delay="0"/>
+                            </p:stCondLst>
+                            <p:childTnLst>
+                              <p:par>
+                                <p:cTn id="13" presetID="1" presetClass="entr" presetSubtype="0" fill="hold" grpId="0" nodeType="clickEffect">
+                                  <p:stCondLst>
+                                    <p:cond delay="0"/>
+                                  </p:stCondLst>
+                                  <p:childTnLst>
+                                    <p:set>
+                                      <p:cBhvr>
+                                        <p:cTn id="14" dur="1" fill="hold">
+                                          <p:stCondLst>
+                                            <p:cond delay="0"/>
+                                          </p:stCondLst>
+                                        </p:cTn>
+                                        <p:tgtEl>
+                                          <p:spTgt spid="3">
+                                            <p:txEl>
+                                              <p:pRg st="3" end="3"/>
+                                            </p:txEl>
+                                          </p:spTgt>
+                                        </p:tgtEl>
+                                        <p:attrNameLst>
+                                          <p:attrName>style.visibility</p:attrName>
+                                        </p:attrNameLst>
+                                      </p:cBhvr>
+                                      <p:to>
+                                        <p:strVal val="visible"/>
+                                      </p:to>
+                                    </p:set>
+                                  </p:childTnLst>
+                                </p:cTn>
+                              </p:par>
+                            </p:childTnLst>
+                          </p:cTn>
+                        </p:par>
+                      </p:childTnLst>
+                    </p:cTn>
+                  </p:par>
+                  <p:par>
+                    <p:cTn id="15" fill="hold">
+                      <p:stCondLst>
+                        <p:cond delay="indefinite"/>
+                      </p:stCondLst>
+                      <p:childTnLst>
+                        <p:par>
+                          <p:cTn id="16" fill="hold">
+                            <p:stCondLst>
+                              <p:cond delay="0"/>
+                            </p:stCondLst>
+                            <p:childTnLst>
+                              <p:par>
+                                <p:cTn id="17" presetID="1" presetClass="entr" presetSubtype="0" fill="hold" grpId="0" nodeType="clickEffect">
+                                  <p:stCondLst>
+                                    <p:cond delay="0"/>
+                                  </p:stCondLst>
+                                  <p:childTnLst>
+                                    <p:set>
+                                      <p:cBhvr>
+                                        <p:cTn id="18" dur="1" fill="hold">
+                                          <p:stCondLst>
+                                            <p:cond delay="0"/>
+                                          </p:stCondLst>
+                                        </p:cTn>
+                                        <p:tgtEl>
+                                          <p:spTgt spid="3">
+                                            <p:txEl>
+                                              <p:pRg st="4" end="4"/>
+                                            </p:txEl>
+                                          </p:spTgt>
+                                        </p:tgtEl>
+                                        <p:attrNameLst>
+                                          <p:attrName>style.visibility</p:attrName>
+                                        </p:attrNameLst>
+                                      </p:cBhvr>
+                                      <p:to>
+                                        <p:strVal val="visible"/>
+                                      </p:to>
+                                    </p:set>
+                                  </p:childTnLst>
+                                </p:cTn>
+                              </p:par>
+                              <p:par>
+                                <p:cTn id="19" presetID="1" presetClass="entr" presetSubtype="0" fill="hold" nodeType="withEffect">
+                                  <p:stCondLst>
+                                    <p:cond delay="0"/>
+                                  </p:stCondLst>
+                                  <p:childTnLst>
+                                    <p:set>
+                                      <p:cBhvr>
+                                        <p:cTn id="20" dur="1" fill="hold">
+                                          <p:stCondLst>
+                                            <p:cond delay="0"/>
+                                          </p:stCondLst>
+                                        </p:cTn>
+                                        <p:tgtEl>
+                                          <p:spTgt spid="45"/>
+                                        </p:tgtEl>
+                                        <p:attrNameLst>
+                                          <p:attrName>style.visibility</p:attrName>
+                                        </p:attrNameLst>
+                                      </p:cBhvr>
+                                      <p:to>
+                                        <p:strVal val="visible"/>
+                                      </p:to>
+                                    </p:set>
+                                  </p:childTnLst>
+                                </p:cTn>
+                              </p:par>
+                            </p:childTnLst>
+                          </p:cTn>
+                        </p:par>
+                      </p:childTnLst>
+                    </p:cTn>
+                  </p:par>
+                  <p:par>
+                    <p:cTn id="21" fill="hold">
+                      <p:stCondLst>
+                        <p:cond delay="indefinite"/>
+                      </p:stCondLst>
+                      <p:childTnLst>
+                        <p:par>
+                          <p:cTn id="22" fill="hold">
+                            <p:stCondLst>
+                              <p:cond delay="0"/>
+                            </p:stCondLst>
+                            <p:childTnLst>
+                              <p:par>
+                                <p:cTn id="23" presetID="1" presetClass="entr" presetSubtype="0" fill="hold" grpId="0" nodeType="clickEffect">
+                                  <p:stCondLst>
+                                    <p:cond delay="0"/>
+                                  </p:stCondLst>
+                                  <p:childTnLst>
+                                    <p:set>
+                                      <p:cBhvr>
+                                        <p:cTn id="24" dur="1" fill="hold">
+                                          <p:stCondLst>
+                                            <p:cond delay="0"/>
+                                          </p:stCondLst>
+                                        </p:cTn>
+                                        <p:tgtEl>
+                                          <p:spTgt spid="3">
+                                            <p:txEl>
+                                              <p:pRg st="5" end="5"/>
+                                            </p:txEl>
+                                          </p:spTgt>
+                                        </p:tgtEl>
+                                        <p:attrNameLst>
+                                          <p:attrName>style.visibility</p:attrName>
+                                        </p:attrNameLst>
+                                      </p:cBhvr>
+                                      <p:to>
+                                        <p:strVal val="visible"/>
+                                      </p:to>
+                                    </p:set>
+                                  </p:childTnLst>
+                                </p:cTn>
+                              </p:par>
+                              <p:par>
+                                <p:cTn id="25" presetID="1" presetClass="entr" presetSubtype="0" fill="hold" nodeType="withEffect">
+                                  <p:stCondLst>
+                                    <p:cond delay="0"/>
+                                  </p:stCondLst>
+                                  <p:childTnLst>
+                                    <p:set>
+                                      <p:cBhvr>
+                                        <p:cTn id="26" dur="1" fill="hold">
+                                          <p:stCondLst>
+                                            <p:cond delay="0"/>
+                                          </p:stCondLst>
+                                        </p:cTn>
+                                        <p:tgtEl>
+                                          <p:spTgt spid="46"/>
+                                        </p:tgtEl>
+                                        <p:attrNameLst>
+                                          <p:attrName>style.visibility</p:attrName>
+                                        </p:attrNameLst>
+                                      </p:cBhvr>
+                                      <p:to>
+                                        <p:strVal val="visible"/>
+                                      </p:to>
+                                    </p:set>
+                                  </p:childTnLst>
+                                </p:cTn>
+                              </p:par>
+                            </p:childTnLst>
+                          </p:cTn>
+                        </p:par>
+                      </p:childTnLst>
+                    </p:cTn>
+                  </p:par>
+                  <p:par>
+                    <p:cTn id="27" fill="hold">
+                      <p:stCondLst>
+                        <p:cond delay="indefinite"/>
+                      </p:stCondLst>
+                      <p:childTnLst>
+                        <p:par>
+                          <p:cTn id="28" fill="hold">
+                            <p:stCondLst>
+                              <p:cond delay="0"/>
+                            </p:stCondLst>
+                            <p:childTnLst>
+                              <p:par>
+                                <p:cTn id="29" presetID="1" presetClass="entr" presetSubtype="0" fill="hold" grpId="0" nodeType="clickEffect">
+                                  <p:stCondLst>
+                                    <p:cond delay="0"/>
+                                  </p:stCondLst>
+                                  <p:childTnLst>
+                                    <p:set>
+                                      <p:cBhvr>
+                                        <p:cTn id="30" dur="1" fill="hold">
+                                          <p:stCondLst>
+                                            <p:cond delay="0"/>
+                                          </p:stCondLst>
+                                        </p:cTn>
+                                        <p:tgtEl>
+                                          <p:spTgt spid="3">
+                                            <p:txEl>
+                                              <p:pRg st="6" end="6"/>
+                                            </p:txEl>
+                                          </p:spTgt>
+                                        </p:tgtEl>
+                                        <p:attrNameLst>
+                                          <p:attrName>style.visibility</p:attrName>
+                                        </p:attrNameLst>
+                                      </p:cBhvr>
+                                      <p:to>
+                                        <p:strVal val="visible"/>
+                                      </p:to>
+                                    </p:set>
+                                  </p:childTnLst>
+                                </p:cTn>
+                              </p:par>
+                            </p:childTnLst>
+                          </p:cTn>
+                        </p:par>
+                      </p:childTnLst>
+                    </p:cTn>
+                  </p:par>
+                  <p:par>
+                    <p:cTn id="31" fill="hold">
+                      <p:stCondLst>
+                        <p:cond delay="indefinite"/>
+                      </p:stCondLst>
+                      <p:childTnLst>
+                        <p:par>
+                          <p:cTn id="32" fill="hold">
+                            <p:stCondLst>
+                              <p:cond delay="0"/>
+                            </p:stCondLst>
+                            <p:childTnLst>
+                              <p:par>
+                                <p:cTn id="33" presetID="1" presetClass="entr" presetSubtype="0" fill="hold" grpId="0" nodeType="clickEffect">
+                                  <p:stCondLst>
+                                    <p:cond delay="0"/>
+                                  </p:stCondLst>
+                                  <p:childTnLst>
+                                    <p:set>
+                                      <p:cBhvr>
+                                        <p:cTn id="34" dur="1" fill="hold">
+                                          <p:stCondLst>
+                                            <p:cond delay="0"/>
+                                          </p:stCondLst>
+                                        </p:cTn>
+                                        <p:tgtEl>
+                                          <p:spTgt spid="3">
+                                            <p:txEl>
+                                              <p:pRg st="8" end="8"/>
+                                            </p:txEl>
+                                          </p:spTgt>
+                                        </p:tgtEl>
+                                        <p:attrNameLst>
+                                          <p:attrName>style.visibility</p:attrName>
+                                        </p:attrNameLst>
+                                      </p:cBhvr>
+                                      <p:to>
+                                        <p:strVal val="visible"/>
+                                      </p:to>
+                                    </p:set>
+                                  </p:childTnLst>
+                                </p:cTn>
+                              </p:par>
+                              <p:par>
+                                <p:cTn id="35" presetID="1" presetClass="entr" presetSubtype="0" fill="hold" grpId="0" nodeType="withEffect">
+                                  <p:stCondLst>
+                                    <p:cond delay="0"/>
+                                  </p:stCondLst>
+                                  <p:childTnLst>
+                                    <p:set>
+                                      <p:cBhvr>
+                                        <p:cTn id="36" dur="1" fill="hold">
+                                          <p:stCondLst>
+                                            <p:cond delay="0"/>
+                                          </p:stCondLst>
+                                        </p:cTn>
+                                        <p:tgtEl>
+                                          <p:spTgt spid="3">
+                                            <p:txEl>
+                                              <p:pRg st="9" end="9"/>
+                                            </p:txEl>
+                                          </p:spTgt>
+                                        </p:tgtEl>
+                                        <p:attrNameLst>
+                                          <p:attrName>style.visibility</p:attrName>
+                                        </p:attrNameLst>
+                                      </p:cBhvr>
+                                      <p:to>
+                                        <p:strVal val="visible"/>
+                                      </p:to>
+                                    </p:set>
+                                  </p:childTnLst>
+                                </p:cTn>
+                              </p:par>
+                              <p:par>
+                                <p:cTn id="37" presetID="1" presetClass="entr" presetSubtype="0" fill="hold" grpId="0" nodeType="withEffect">
+                                  <p:stCondLst>
+                                    <p:cond delay="0"/>
+                                  </p:stCondLst>
+                                  <p:childTnLst>
+                                    <p:set>
+                                      <p:cBhvr>
+                                        <p:cTn id="38" dur="1" fill="hold">
+                                          <p:stCondLst>
+                                            <p:cond delay="0"/>
+                                          </p:stCondLst>
+                                        </p:cTn>
+                                        <p:tgtEl>
+                                          <p:spTgt spid="3">
+                                            <p:txEl>
+                                              <p:pRg st="10" end="10"/>
+                                            </p:txEl>
+                                          </p:spTgt>
+                                        </p:tgtEl>
+                                        <p:attrNameLst>
+                                          <p:attrName>style.visibility</p:attrName>
+                                        </p:attrNameLst>
+                                      </p:cBhvr>
+                                      <p:to>
+                                        <p:strVal val="visible"/>
+                                      </p:to>
+                                    </p:set>
+                                  </p:childTnLst>
+                                </p:cTn>
+                              </p:par>
+                            </p:childTnLst>
+                          </p:cTn>
+                        </p:par>
+                      </p:childTnLst>
+                    </p:cTn>
+                  </p:par>
+                  <p:par>
+                    <p:cTn id="39" fill="hold">
+                      <p:stCondLst>
+                        <p:cond delay="indefinite"/>
+                      </p:stCondLst>
+                      <p:childTnLst>
+                        <p:par>
+                          <p:cTn id="40" fill="hold">
+                            <p:stCondLst>
+                              <p:cond delay="0"/>
+                            </p:stCondLst>
+                            <p:childTnLst>
+                              <p:par>
+                                <p:cTn id="41" presetID="1" presetClass="entr" presetSubtype="0" fill="hold" nodeType="clickEffect">
+                                  <p:stCondLst>
+                                    <p:cond delay="0"/>
+                                  </p:stCondLst>
+                                  <p:childTnLst>
+                                    <p:set>
+                                      <p:cBhvr>
+                                        <p:cTn id="42" dur="1" fill="hold">
+                                          <p:stCondLst>
+                                            <p:cond delay="0"/>
+                                          </p:stCondLst>
+                                        </p:cTn>
+                                        <p:tgtEl>
+                                          <p:spTgt spid="106"/>
+                                        </p:tgtEl>
+                                        <p:attrNameLst>
+                                          <p:attrName>style.visibility</p:attrName>
+                                        </p:attrNameLst>
+                                      </p:cBhvr>
+                                      <p:to>
+                                        <p:strVal val="visible"/>
+                                      </p:to>
+                                    </p:set>
+                                  </p:childTnLst>
+                                </p:cTn>
+                              </p:par>
+                            </p:childTnLst>
+                          </p:cTn>
+                        </p:par>
+                      </p:childTnLst>
+                    </p:cTn>
+                  </p:par>
+                </p:childTnLst>
+              </p:cTn>
+              <p:prevCondLst>
+                <p:cond evt="onPrev" delay="0">
+                  <p:tgtEl>
+                    <p:sldTgt/>
+                  </p:tgtEl>
+                </p:cond>
+              </p:prevCondLst>
+              <p:nextCondLst>
+                <p:cond evt="onNext" delay="0">
+                  <p:tgtEl>
+                    <p:sldTgt/>
+                  </p:tgtEl>
+                </p:cond>
+              </p:nextCondLst>
+            </p:seq>
+          </p:childTnLst>
+        </p:cTn>
+      </p:par>
+    </p:tnLst>
+    <p:bldLst>
+      <p:bldP spid="3" grpId="0" uiExpand="1" build="p"/>
+    </p:bldLst>
+  </p:timing>
+</p:sld>
+</file>
+
+<file path=ppt/slides/slide2.xml><?xml version="1.0" encoding="utf-8"?>
+<p:sld xmlns:a="http://schemas.openxmlformats.org/drawingml/2006/main" xmlns:r="http://schemas.openxmlformats.org/officeDocument/2006/relationships" xmlns:p="http://schemas.openxmlformats.org/presentationml/2006/main">
+  <p:cSld>
+    <p:spTree>
+      <p:nvGrpSpPr>
+        <p:cNvPr id="1" name=""/>
+        <p:cNvGrpSpPr/>
+        <p:nvPr/>
+      </p:nvGrpSpPr>
+      <p:grpSpPr>
+        <a:xfrm>
+          <a:off x="0" y="0"/>
+          <a:ext cx="0" cy="0"/>
+          <a:chOff x="0" y="0"/>
+          <a:chExt cx="0" cy="0"/>
+        </a:xfrm>
+      </p:grpSpPr>
+      <p:sp>
+        <p:nvSpPr>
+          <p:cNvPr id="2" name="Title 1">
+            <a:extLst>
+              <a:ext uri="{FF2B5EF4-FFF2-40B4-BE49-F238E27FC236}">
+                <a16:creationId xmlns:a16="http://schemas.microsoft.com/office/drawing/2014/main" id="{9E7A3493-2ED6-DF09-F569-7F3DCA81AB18}"/>
+              </a:ext>
+            </a:extLst>
+          </p:cNvPr>
+          <p:cNvSpPr>
+            <a:spLocks noGrp="1"/>
+          </p:cNvSpPr>
+          <p:nvPr>
+            <p:ph type="title"/>
+          </p:nvPr>
+        </p:nvSpPr>
+        <p:spPr/>
+        <p:txBody>
+          <a:bodyPr/>
+          <a:lstStyle/>
+          <a:p>
+            <a:r>
+              <a:rPr lang="en-US" dirty="0"/>
+              <a:t>Topics of this Course</a:t>
+            </a:r>
+          </a:p>
+        </p:txBody>
+      </p:sp>
+      <p:sp>
+        <p:nvSpPr>
+          <p:cNvPr id="3" name="Content Placeholder 2">
+            <a:extLst>
+              <a:ext uri="{FF2B5EF4-FFF2-40B4-BE49-F238E27FC236}">
+                <a16:creationId xmlns:a16="http://schemas.microsoft.com/office/drawing/2014/main" id="{8F95E019-92A5-79AC-D777-59B4926F61AA}"/>
+              </a:ext>
+            </a:extLst>
+          </p:cNvPr>
+          <p:cNvSpPr>
+            <a:spLocks noGrp="1"/>
+          </p:cNvSpPr>
+          <p:nvPr>
+            <p:ph idx="1"/>
+          </p:nvPr>
+        </p:nvSpPr>
+        <p:spPr/>
+        <p:txBody>
+          <a:bodyPr>
+            <a:normAutofit fontScale="85000" lnSpcReduction="20000"/>
+          </a:bodyPr>
+          <a:lstStyle/>
+          <a:p>
+            <a:r>
+              <a:rPr lang="en-US" dirty="0"/>
+              <a:t>Introduction to reinforcement learning</a:t>
+            </a:r>
+          </a:p>
+          <a:p>
+            <a:r>
+              <a:rPr lang="en-US" dirty="0"/>
+              <a:t>Markov decision processes</a:t>
+            </a:r>
+          </a:p>
+          <a:p>
+            <a:r>
+              <a:rPr lang="en-US" b="1" dirty="0"/>
+              <a:t>Part I: Tabular Methods</a:t>
+            </a:r>
+          </a:p>
+          <a:p>
+            <a:pPr lvl="1"/>
+            <a:r>
+              <a:rPr lang="en-US" dirty="0"/>
+              <a:t>Dynamic programming</a:t>
+            </a:r>
+          </a:p>
+          <a:p>
+            <a:pPr lvl="1"/>
+            <a:r>
+              <a:rPr lang="en-US" dirty="0"/>
+              <a:t>Monte Carlo methods</a:t>
+            </a:r>
+          </a:p>
+          <a:p>
+            <a:pPr lvl="1"/>
+            <a:r>
+              <a:rPr lang="en-US" dirty="0"/>
+              <a:t>Temporal-difference learning</a:t>
+            </a:r>
+          </a:p>
+          <a:p>
+            <a:pPr lvl="1"/>
+            <a:r>
+              <a:rPr lang="en-US" b="1" dirty="0"/>
+              <a:t>Multi-step bootstrapping</a:t>
+            </a:r>
+          </a:p>
+          <a:p>
+            <a:pPr lvl="1"/>
+            <a:r>
+              <a:rPr lang="en-US" dirty="0"/>
+              <a:t>Planning and learning with tabular methods</a:t>
+            </a:r>
+          </a:p>
+          <a:p>
+            <a:r>
+              <a:rPr lang="en-US" dirty="0"/>
+              <a:t>Part II: Approximate Solution Methods</a:t>
+            </a:r>
+          </a:p>
+          <a:p>
+            <a:pPr lvl="1"/>
+            <a:r>
+              <a:rPr lang="en-US" dirty="0"/>
+              <a:t>Prediction and Control using Approximation</a:t>
+            </a:r>
+          </a:p>
+          <a:p>
+            <a:pPr lvl="1"/>
+            <a:r>
+              <a:rPr lang="en-US" dirty="0"/>
+              <a:t>Eligibility Traces</a:t>
+            </a:r>
+          </a:p>
+          <a:p>
+            <a:pPr lvl="1"/>
+            <a:r>
+              <a:rPr lang="en-US" dirty="0"/>
+              <a:t>Policy Gradient Methods</a:t>
+            </a:r>
+          </a:p>
+          <a:p>
+            <a:r>
+              <a:rPr lang="en-US" dirty="0"/>
+              <a:t>Part III: Modern RL Methods</a:t>
+            </a:r>
+          </a:p>
+          <a:p>
+            <a:pPr lvl="1"/>
+            <a:r>
+              <a:rPr lang="en-US" dirty="0"/>
+              <a:t>Deep Reinforcement Learning</a:t>
+            </a:r>
+          </a:p>
+          <a:p>
+            <a:pPr lvl="1"/>
+            <a:r>
+              <a:rPr lang="en-US" dirty="0"/>
+              <a:t>Current Applications</a:t>
+            </a:r>
+          </a:p>
+        </p:txBody>
+      </p:sp>
+    </p:spTree>
+    <p:extLst>
+      <p:ext uri="{BB962C8B-B14F-4D97-AF65-F5344CB8AC3E}">
+        <p14:creationId xmlns:p14="http://schemas.microsoft.com/office/powerpoint/2010/main" val="3653367536"/>
+      </p:ext>
+    </p:extLst>
+  </p:cSld>
+  <p:clrMapOvr>
+    <a:masterClrMapping/>
+  </p:clrMapOvr>
+</p:sld>
+</file>
+
+<file path=ppt/slides/slide20.xml><?xml version="1.0" encoding="utf-8"?>
+<p:sld xmlns:a="http://schemas.openxmlformats.org/drawingml/2006/main" xmlns:r="http://schemas.openxmlformats.org/officeDocument/2006/relationships" xmlns:p="http://schemas.openxmlformats.org/presentationml/2006/main">
+  <p:cSld>
+    <p:spTree>
+      <p:nvGrpSpPr>
+        <p:cNvPr id="1" name=""/>
+        <p:cNvGrpSpPr/>
+        <p:nvPr/>
+      </p:nvGrpSpPr>
+      <p:grpSpPr>
+        <a:xfrm>
+          <a:off x="0" y="0"/>
+          <a:ext cx="0" cy="0"/>
+          <a:chOff x="0" y="0"/>
+          <a:chExt cx="0" cy="0"/>
+        </a:xfrm>
+      </p:grpSpPr>
+      <p:sp>
+        <p:nvSpPr>
+          <p:cNvPr id="2" name="Title 1">
+            <a:extLst>
+              <a:ext uri="{FF2B5EF4-FFF2-40B4-BE49-F238E27FC236}">
+                <a16:creationId xmlns:a16="http://schemas.microsoft.com/office/drawing/2014/main" id="{6E522FB7-2636-B8E7-0186-D65F8EC66CE8}"/>
+              </a:ext>
+            </a:extLst>
+          </p:cNvPr>
+          <p:cNvSpPr>
+            <a:spLocks noGrp="1"/>
+          </p:cNvSpPr>
+          <p:nvPr>
+            <p:ph type="title"/>
+          </p:nvPr>
+        </p:nvSpPr>
+        <p:spPr/>
+        <p:txBody>
+          <a:bodyPr/>
+          <a:lstStyle/>
+          <a:p>
+            <a:r>
+              <a:rPr lang="en-US" dirty="0"/>
+              <a:t>Effect of Algorithmic Choices</a:t>
+            </a:r>
+          </a:p>
+        </p:txBody>
+      </p:sp>
+      <p:sp>
+        <p:nvSpPr>
+          <p:cNvPr id="3" name="Content Placeholder 2">
+            <a:extLst>
+              <a:ext uri="{FF2B5EF4-FFF2-40B4-BE49-F238E27FC236}">
+                <a16:creationId xmlns:a16="http://schemas.microsoft.com/office/drawing/2014/main" id="{B2A3A6FC-6672-55AB-A342-6DABA947D70E}"/>
+              </a:ext>
+            </a:extLst>
+          </p:cNvPr>
+          <p:cNvSpPr>
+            <a:spLocks noGrp="1"/>
+          </p:cNvSpPr>
+          <p:nvPr>
+            <p:ph idx="1"/>
+          </p:nvPr>
+        </p:nvSpPr>
+        <p:spPr>
+          <a:xfrm>
+            <a:off x="838200" y="1397330"/>
+            <a:ext cx="6647297" cy="4814684"/>
+          </a:xfrm>
+        </p:spPr>
+        <p:txBody>
+          <a:bodyPr>
+            <a:normAutofit fontScale="55000" lnSpcReduction="20000"/>
+          </a:bodyPr>
+          <a:lstStyle/>
+          <a:p>
+            <a:pPr marL="0" indent="0">
+              <a:buNone/>
+            </a:pPr>
+            <a:r>
+              <a:rPr lang="en-US" b="1" dirty="0"/>
+              <a:t>Control</a:t>
+            </a:r>
+            <a:endParaRPr lang="en-US" dirty="0"/>
+          </a:p>
+          <a:p>
+            <a:r>
+              <a:rPr lang="en-US" b="1" dirty="0"/>
+              <a:t>Variance from changing data </a:t>
+            </a:r>
+            <a:r>
+              <a:rPr lang="en-US" dirty="0"/>
+              <a:t>because we change the policy during learning.</a:t>
+            </a:r>
+          </a:p>
+          <a:p>
+            <a:r>
+              <a:rPr lang="en-US" dirty="0"/>
+              <a:t>Makes learning challenging and may lead to instability.</a:t>
+            </a:r>
+          </a:p>
+          <a:p>
+            <a:r>
+              <a:rPr lang="en-US" dirty="0"/>
+              <a:t>If the algorithm convergences, then the policy stops changing and the Variance from changing data becomes 0</a:t>
+            </a:r>
+          </a:p>
+          <a:p>
+            <a:endParaRPr lang="en-US" dirty="0"/>
+          </a:p>
+          <a:p>
+            <a:pPr marL="0" indent="0">
+              <a:buNone/>
+            </a:pPr>
+            <a:r>
+              <a:rPr lang="en-US" b="1" dirty="0"/>
+              <a:t>MC Methods</a:t>
+            </a:r>
+            <a:endParaRPr lang="en-US" dirty="0"/>
+          </a:p>
+          <a:p>
+            <a:r>
+              <a:rPr lang="en-US" b="1" dirty="0"/>
+              <a:t>No Bias </a:t>
+            </a:r>
+            <a:r>
+              <a:rPr lang="en-US" dirty="0"/>
+              <a:t>because it averages many unbiased returns.</a:t>
+            </a:r>
+          </a:p>
+          <a:p>
+            <a:r>
+              <a:rPr lang="en-US" b="1" dirty="0"/>
+              <a:t>Large sample variance </a:t>
+            </a:r>
+            <a:r>
+              <a:rPr lang="en-US" dirty="0"/>
+              <a:t>from sampling whole episodes: Makes learning slow</a:t>
+            </a:r>
+          </a:p>
+          <a:p>
+            <a:endParaRPr lang="en-US" dirty="0"/>
+          </a:p>
+          <a:p>
+            <a:pPr marL="0" indent="0">
+              <a:buNone/>
+            </a:pPr>
+            <a:r>
+              <a:rPr lang="en-US" b="1" dirty="0"/>
+              <a:t>TD Methods</a:t>
+            </a:r>
+            <a:endParaRPr lang="en-US" dirty="0"/>
+          </a:p>
+          <a:p>
+            <a:r>
+              <a:rPr lang="en-US" b="1" dirty="0"/>
+              <a:t>Bias </a:t>
+            </a:r>
+            <a:r>
+              <a:rPr lang="en-US" dirty="0"/>
+              <a:t>created by bootstrapping  which might go away after convergence.</a:t>
+            </a:r>
+          </a:p>
+          <a:p>
+            <a:r>
+              <a:rPr lang="en-US" b="1" dirty="0"/>
+              <a:t>lower sample variance </a:t>
+            </a:r>
+            <a:r>
+              <a:rPr lang="en-US" dirty="0"/>
+              <a:t>because bootstrapping only sample one reward at a time: Learns faster.</a:t>
+            </a:r>
+          </a:p>
+          <a:p>
+            <a:endParaRPr lang="en-US" dirty="0"/>
+          </a:p>
+          <a:p>
+            <a:pPr marL="0" indent="0">
+              <a:buNone/>
+            </a:pPr>
+            <a:r>
+              <a:rPr lang="en-US" b="1" dirty="0"/>
+              <a:t>N-step Methods</a:t>
+            </a:r>
+            <a:r>
+              <a:rPr lang="en-US" dirty="0"/>
+              <a:t>: In between MC and TD</a:t>
+            </a:r>
+          </a:p>
+          <a:p>
+            <a:endParaRPr lang="en-US" dirty="0"/>
+          </a:p>
+          <a:p>
+            <a:endParaRPr lang="en-US" dirty="0"/>
+          </a:p>
+        </p:txBody>
+      </p:sp>
+      <p:grpSp>
+        <p:nvGrpSpPr>
+          <p:cNvPr id="27" name="Group 26">
+            <a:extLst>
+              <a:ext uri="{FF2B5EF4-FFF2-40B4-BE49-F238E27FC236}">
+                <a16:creationId xmlns:a16="http://schemas.microsoft.com/office/drawing/2014/main" id="{2B83F4D1-C925-BA9C-4939-39A3DA81918F}"/>
+              </a:ext>
+              <a:ext uri="{C183D7F6-B498-43B3-948B-1728B52AA6E4}">
+                <adec:decorative xmlns:adec="http://schemas.microsoft.com/office/drawing/2017/decorative" val="1"/>
+              </a:ext>
+            </a:extLst>
+          </p:cNvPr>
+          <p:cNvGrpSpPr/>
+          <p:nvPr/>
+        </p:nvGrpSpPr>
+        <p:grpSpPr>
+          <a:xfrm>
+            <a:off x="7597486" y="1319112"/>
+            <a:ext cx="4078303" cy="2642232"/>
+            <a:chOff x="7678168" y="572800"/>
+            <a:chExt cx="4078303" cy="2642232"/>
+          </a:xfrm>
+        </p:grpSpPr>
+        <p:grpSp>
+          <p:nvGrpSpPr>
+            <p:cNvPr id="4" name="Group 3" descr="Number line: the algorithm's solution is offset from the optimal solution by the algorithm bias.">
+              <a:extLst>
+                <a:ext uri="{FF2B5EF4-FFF2-40B4-BE49-F238E27FC236}">
+                  <a16:creationId xmlns:a16="http://schemas.microsoft.com/office/drawing/2014/main" id="{45117B80-F820-7E36-EB7C-A72632F1C28E}"/>
+                </a:ext>
+              </a:extLst>
+            </p:cNvPr>
+            <p:cNvGrpSpPr/>
+            <p:nvPr/>
+          </p:nvGrpSpPr>
+          <p:grpSpPr>
+            <a:xfrm>
+              <a:off x="7759817" y="572800"/>
+              <a:ext cx="3996654" cy="1010643"/>
+              <a:chOff x="7759817" y="1040465"/>
+              <a:chExt cx="3996654" cy="1010643"/>
+            </a:xfrm>
+          </p:grpSpPr>
+          <p:cxnSp>
+            <p:nvCxnSpPr>
+              <p:cNvPr id="5" name="Straight Arrow Connector 4">
+                <a:extLst>
+                  <a:ext uri="{FF2B5EF4-FFF2-40B4-BE49-F238E27FC236}">
+                    <a16:creationId xmlns:a16="http://schemas.microsoft.com/office/drawing/2014/main" id="{178C55D7-B8A1-81F5-A15C-BD548CF456CF}"/>
+                  </a:ext>
+                </a:extLst>
+              </p:cNvPr>
+              <p:cNvCxnSpPr>
+                <a:cxnSpLocks/>
+              </p:cNvCxnSpPr>
+              <p:nvPr/>
+            </p:nvCxnSpPr>
+            <p:spPr>
+              <a:xfrm>
+                <a:off x="7759817" y="2015627"/>
+                <a:ext cx="3744372" cy="4195"/>
+              </a:xfrm>
+              <a:prstGeom prst="straightConnector1">
+                <a:avLst/>
+              </a:prstGeom>
+              <a:ln>
+                <a:tailEnd type="triangle"/>
+              </a:ln>
+            </p:spPr>
+            <p:style>
+              <a:lnRef idx="2">
+                <a:schemeClr val="dk1"/>
+              </a:lnRef>
+              <a:fillRef idx="0">
+                <a:schemeClr val="dk1"/>
+              </a:fillRef>
+              <a:effectRef idx="1">
+                <a:schemeClr val="dk1"/>
+              </a:effectRef>
+              <a:fontRef idx="minor">
+                <a:schemeClr val="tx1"/>
+              </a:fontRef>
+            </p:style>
+          </p:cxnSp>
+          <p:sp>
+            <p:nvSpPr>
+              <p:cNvPr id="6" name="Oval 5">
+                <a:extLst>
+                  <a:ext uri="{FF2B5EF4-FFF2-40B4-BE49-F238E27FC236}">
+                    <a16:creationId xmlns:a16="http://schemas.microsoft.com/office/drawing/2014/main" id="{D2B89A95-B6C5-228D-36BA-10940756C774}"/>
+                  </a:ext>
+                </a:extLst>
+              </p:cNvPr>
+              <p:cNvSpPr/>
+              <p:nvPr/>
+            </p:nvSpPr>
+            <p:spPr>
+              <a:xfrm>
+                <a:off x="10993359" y="1992385"/>
+                <a:ext cx="71307" cy="58723"/>
+              </a:xfrm>
+              <a:prstGeom prst="ellipse">
+                <a:avLst/>
+              </a:prstGeom>
+            </p:spPr>
+            <p:style>
+              <a:lnRef idx="2">
+                <a:schemeClr val="dk1">
+                  <a:shade val="15000"/>
+                </a:schemeClr>
+              </a:lnRef>
+              <a:fillRef idx="1">
+                <a:schemeClr val="dk1"/>
+              </a:fillRef>
+              <a:effectRef idx="0">
+                <a:schemeClr val="dk1"/>
+              </a:effectRef>
+              <a:fontRef idx="minor">
+                <a:schemeClr val="lt1"/>
+              </a:fontRef>
+            </p:style>
+            <p:txBody>
+              <a:bodyPr rtlCol="0" anchor="ctr"/>
+              <a:lstStyle/>
+              <a:p>
+                <a:pPr algn="ctr"/>
+                <a:endParaRPr lang="en-US"/>
+              </a:p>
+            </p:txBody>
+          </p:sp>
+          <p:sp>
+            <p:nvSpPr>
+              <p:cNvPr id="7" name="Oval 6">
+                <a:extLst>
+                  <a:ext uri="{FF2B5EF4-FFF2-40B4-BE49-F238E27FC236}">
+                    <a16:creationId xmlns:a16="http://schemas.microsoft.com/office/drawing/2014/main" id="{9F1665ED-C817-8FA9-33D4-A202120B00F4}"/>
+                  </a:ext>
+                </a:extLst>
+              </p:cNvPr>
+              <p:cNvSpPr/>
+              <p:nvPr/>
+            </p:nvSpPr>
+            <p:spPr>
+              <a:xfrm>
+                <a:off x="9097860" y="1992385"/>
+                <a:ext cx="71307" cy="58723"/>
+              </a:xfrm>
+              <a:prstGeom prst="ellipse">
+                <a:avLst/>
+              </a:prstGeom>
+            </p:spPr>
+            <p:style>
+              <a:lnRef idx="2">
+                <a:schemeClr val="accent2">
+                  <a:shade val="15000"/>
+                </a:schemeClr>
+              </a:lnRef>
+              <a:fillRef idx="1">
+                <a:schemeClr val="accent2"/>
+              </a:fillRef>
+              <a:effectRef idx="0">
+                <a:schemeClr val="accent2"/>
+              </a:effectRef>
+              <a:fontRef idx="minor">
+                <a:schemeClr val="lt1"/>
+              </a:fontRef>
+            </p:style>
+            <p:txBody>
+              <a:bodyPr rtlCol="0" anchor="ctr"/>
+              <a:lstStyle/>
+              <a:p>
+                <a:pPr algn="ctr"/>
+                <a:endParaRPr lang="en-US"/>
+              </a:p>
+            </p:txBody>
+          </p:sp>
+          <p:sp>
+            <p:nvSpPr>
+              <p:cNvPr id="8" name="TextBox 7">
+                <a:extLst>
+                  <a:ext uri="{FF2B5EF4-FFF2-40B4-BE49-F238E27FC236}">
+                    <a16:creationId xmlns:a16="http://schemas.microsoft.com/office/drawing/2014/main" id="{06FB35AF-0913-08A5-D535-D24A80B33FE6}"/>
+                  </a:ext>
+                </a:extLst>
+              </p:cNvPr>
+              <p:cNvSpPr txBox="1"/>
+              <p:nvPr/>
+            </p:nvSpPr>
+            <p:spPr>
+              <a:xfrm>
+                <a:off x="10904956" y="1040465"/>
+                <a:ext cx="851515" cy="523220"/>
+              </a:xfrm>
+              <a:prstGeom prst="rect">
+                <a:avLst/>
+              </a:prstGeom>
+              <a:noFill/>
+            </p:spPr>
+            <p:txBody>
+              <a:bodyPr wrap="none" rtlCol="0">
+                <a:spAutoFit/>
+              </a:bodyPr>
+              <a:lstStyle/>
+              <a:p>
+                <a:r>
+                  <a:rPr lang="en-US" sz="1400" dirty="0"/>
+                  <a:t>Optimal </a:t>
+                </a:r>
+                <a:br>
+                  <a:rPr lang="en-US" sz="1400" dirty="0"/>
+                </a:br>
+                <a:r>
+                  <a:rPr lang="en-US" sz="1400" dirty="0"/>
+                  <a:t>solution</a:t>
+                </a:r>
+              </a:p>
+            </p:txBody>
+          </p:sp>
+          <p:sp>
+            <p:nvSpPr>
+              <p:cNvPr id="9" name="TextBox 8">
+                <a:extLst>
+                  <a:ext uri="{FF2B5EF4-FFF2-40B4-BE49-F238E27FC236}">
+                    <a16:creationId xmlns:a16="http://schemas.microsoft.com/office/drawing/2014/main" id="{892AB8CC-22AB-1260-F71B-926FB90FFACE}"/>
+                  </a:ext>
+                </a:extLst>
+              </p:cNvPr>
+              <p:cNvSpPr txBox="1"/>
+              <p:nvPr/>
+            </p:nvSpPr>
+            <p:spPr>
+              <a:xfrm>
+                <a:off x="7759817" y="1183378"/>
+                <a:ext cx="1090427" cy="523220"/>
+              </a:xfrm>
+              <a:prstGeom prst="rect">
+                <a:avLst/>
+              </a:prstGeom>
+              <a:noFill/>
+            </p:spPr>
+            <p:txBody>
+              <a:bodyPr wrap="none" rtlCol="0">
+                <a:spAutoFit/>
+              </a:bodyPr>
+              <a:lstStyle/>
+              <a:p>
+                <a:pPr algn="ctr"/>
+                <a:r>
+                  <a:rPr lang="en-US" sz="1400" dirty="0"/>
+                  <a:t>Algorithm’s </a:t>
+                </a:r>
+                <a:br>
+                  <a:rPr lang="en-US" sz="1400" dirty="0"/>
+                </a:br>
+                <a:r>
+                  <a:rPr lang="en-US" sz="1400" dirty="0"/>
+                  <a:t>solution</a:t>
+                </a:r>
+              </a:p>
+            </p:txBody>
+          </p:sp>
+          <p:cxnSp>
+            <p:nvCxnSpPr>
+              <p:cNvPr id="10" name="Straight Arrow Connector 9">
+                <a:extLst>
+                  <a:ext uri="{FF2B5EF4-FFF2-40B4-BE49-F238E27FC236}">
+                    <a16:creationId xmlns:a16="http://schemas.microsoft.com/office/drawing/2014/main" id="{FEE97ED3-853C-AED5-C60A-1CB772296BDD}"/>
+                  </a:ext>
+                </a:extLst>
+              </p:cNvPr>
+              <p:cNvCxnSpPr/>
+              <p:nvPr/>
+            </p:nvCxnSpPr>
+            <p:spPr>
+              <a:xfrm>
+                <a:off x="8565160" y="1706598"/>
+                <a:ext cx="420598" cy="213292"/>
+              </a:xfrm>
+              <a:prstGeom prst="straightConnector1">
+                <a:avLst/>
+              </a:prstGeom>
+              <a:ln>
+                <a:tailEnd type="triangle"/>
+              </a:ln>
+            </p:spPr>
+            <p:style>
+              <a:lnRef idx="2">
+                <a:schemeClr val="accent2"/>
+              </a:lnRef>
+              <a:fillRef idx="0">
+                <a:schemeClr val="accent2"/>
+              </a:fillRef>
+              <a:effectRef idx="1">
+                <a:schemeClr val="accent2"/>
+              </a:effectRef>
+              <a:fontRef idx="minor">
+                <a:schemeClr val="tx1"/>
+              </a:fontRef>
+            </p:style>
+          </p:cxnSp>
+          <p:cxnSp>
+            <p:nvCxnSpPr>
+              <p:cNvPr id="11" name="Straight Arrow Connector 10">
+                <a:extLst>
+                  <a:ext uri="{FF2B5EF4-FFF2-40B4-BE49-F238E27FC236}">
+                    <a16:creationId xmlns:a16="http://schemas.microsoft.com/office/drawing/2014/main" id="{84373300-259C-F8AD-9D6B-F8A89487BDF4}"/>
+                  </a:ext>
+                </a:extLst>
+              </p:cNvPr>
+              <p:cNvCxnSpPr>
+                <a:stCxn id="8" idx="2"/>
+              </p:cNvCxnSpPr>
+              <p:nvPr/>
+            </p:nvCxnSpPr>
+            <p:spPr>
+              <a:xfrm flipH="1">
+                <a:off x="11064666" y="1563685"/>
+                <a:ext cx="266048" cy="356205"/>
+              </a:xfrm>
+              <a:prstGeom prst="straightConnector1">
+                <a:avLst/>
+              </a:prstGeom>
+              <a:ln>
+                <a:tailEnd type="triangle"/>
+              </a:ln>
+            </p:spPr>
+            <p:style>
+              <a:lnRef idx="2">
+                <a:schemeClr val="dk1"/>
+              </a:lnRef>
+              <a:fillRef idx="0">
+                <a:schemeClr val="dk1"/>
+              </a:fillRef>
+              <a:effectRef idx="1">
+                <a:schemeClr val="dk1"/>
+              </a:effectRef>
+              <a:fontRef idx="minor">
+                <a:schemeClr val="tx1"/>
+              </a:fontRef>
+            </p:style>
+          </p:cxnSp>
+        </p:grpSp>
+        <p:grpSp>
+          <p:nvGrpSpPr>
+            <p:cNvPr id="12" name="Group 11" descr="Variance shown as a spread around the algorithm's solution.">
+              <a:extLst>
+                <a:ext uri="{FF2B5EF4-FFF2-40B4-BE49-F238E27FC236}">
+                  <a16:creationId xmlns:a16="http://schemas.microsoft.com/office/drawing/2014/main" id="{FB9090AC-2F4A-E894-FAF4-3CDD32824595}"/>
+                </a:ext>
+              </a:extLst>
+            </p:cNvPr>
+            <p:cNvGrpSpPr/>
+            <p:nvPr/>
+          </p:nvGrpSpPr>
+          <p:grpSpPr>
+            <a:xfrm>
+              <a:off x="9169167" y="998596"/>
+              <a:ext cx="1824191" cy="453629"/>
+              <a:chOff x="9169167" y="1466261"/>
+              <a:chExt cx="1824191" cy="453629"/>
+            </a:xfrm>
+          </p:grpSpPr>
+          <p:sp>
+            <p:nvSpPr>
+              <p:cNvPr id="13" name="Right Brace 12">
+                <a:extLst>
+                  <a:ext uri="{FF2B5EF4-FFF2-40B4-BE49-F238E27FC236}">
+                    <a16:creationId xmlns:a16="http://schemas.microsoft.com/office/drawing/2014/main" id="{894F7B1D-12BB-1B7A-85BA-3CF230761B1E}"/>
+                  </a:ext>
+                </a:extLst>
+              </p:cNvPr>
+              <p:cNvSpPr/>
+              <p:nvPr/>
+            </p:nvSpPr>
+            <p:spPr>
+              <a:xfrm rot="16200000">
+                <a:off x="10005849" y="932380"/>
+                <a:ext cx="150828" cy="1824191"/>
+              </a:xfrm>
+              <a:prstGeom prst="rightBrace">
+                <a:avLst/>
+              </a:prstGeom>
+            </p:spPr>
+            <p:style>
+              <a:lnRef idx="2">
+                <a:schemeClr val="accent2"/>
+              </a:lnRef>
+              <a:fillRef idx="0">
+                <a:schemeClr val="accent2"/>
+              </a:fillRef>
+              <a:effectRef idx="1">
+                <a:schemeClr val="accent2"/>
+              </a:effectRef>
+              <a:fontRef idx="minor">
+                <a:schemeClr val="tx1"/>
+              </a:fontRef>
+            </p:style>
+            <p:txBody>
+              <a:bodyPr rtlCol="0" anchor="ctr"/>
+              <a:lstStyle/>
+              <a:p>
+                <a:pPr algn="ctr"/>
+                <a:endParaRPr lang="en-US"/>
+              </a:p>
+            </p:txBody>
+          </p:sp>
+          <p:sp>
+            <p:nvSpPr>
+              <p:cNvPr id="14" name="TextBox 13">
+                <a:extLst>
+                  <a:ext uri="{FF2B5EF4-FFF2-40B4-BE49-F238E27FC236}">
+                    <a16:creationId xmlns:a16="http://schemas.microsoft.com/office/drawing/2014/main" id="{4F8C4655-1659-3FCC-7360-35A52C9E465F}"/>
+                  </a:ext>
+                </a:extLst>
+              </p:cNvPr>
+              <p:cNvSpPr txBox="1"/>
+              <p:nvPr/>
+            </p:nvSpPr>
+            <p:spPr>
+              <a:xfrm>
+                <a:off x="9431758" y="1466261"/>
+                <a:ext cx="1299010" cy="307777"/>
+              </a:xfrm>
+              <a:prstGeom prst="rect">
+                <a:avLst/>
+              </a:prstGeom>
+              <a:noFill/>
+            </p:spPr>
+            <p:txBody>
+              <a:bodyPr wrap="none" rtlCol="0">
+                <a:spAutoFit/>
+              </a:bodyPr>
+              <a:lstStyle/>
+              <a:p>
+                <a:r>
+                  <a:rPr lang="en-US" sz="1400" dirty="0"/>
+                  <a:t>Algorithm bias</a:t>
+                </a:r>
+              </a:p>
+            </p:txBody>
+          </p:sp>
+        </p:grpSp>
+        <p:grpSp>
+          <p:nvGrpSpPr>
+            <p:cNvPr id="15" name="Group 14" descr="Variance is made up of sample randomness, changing data and irreducible error from a stochastic environment.">
+              <a:extLst>
+                <a:ext uri="{FF2B5EF4-FFF2-40B4-BE49-F238E27FC236}">
+                  <a16:creationId xmlns:a16="http://schemas.microsoft.com/office/drawing/2014/main" id="{48124638-3CC8-672A-299E-0B4E5D5F60C7}"/>
+                </a:ext>
+              </a:extLst>
+            </p:cNvPr>
+            <p:cNvGrpSpPr/>
+            <p:nvPr/>
+          </p:nvGrpSpPr>
+          <p:grpSpPr>
+            <a:xfrm>
+              <a:off x="7678168" y="1678581"/>
+              <a:ext cx="3628653" cy="1536451"/>
+              <a:chOff x="7678168" y="2146246"/>
+              <a:chExt cx="3628653" cy="1536451"/>
+            </a:xfrm>
+          </p:grpSpPr>
+          <p:cxnSp>
+            <p:nvCxnSpPr>
+              <p:cNvPr id="16" name="Straight Connector 15">
+                <a:extLst>
+                  <a:ext uri="{FF2B5EF4-FFF2-40B4-BE49-F238E27FC236}">
+                    <a16:creationId xmlns:a16="http://schemas.microsoft.com/office/drawing/2014/main" id="{AA8A3E16-0AA6-C1FF-A9D0-E4E91FE3C24A}"/>
+                  </a:ext>
+                </a:extLst>
+              </p:cNvPr>
+              <p:cNvCxnSpPr>
+                <a:cxnSpLocks/>
+              </p:cNvCxnSpPr>
+              <p:nvPr/>
+            </p:nvCxnSpPr>
+            <p:spPr>
+              <a:xfrm>
+                <a:off x="7678168" y="2146246"/>
+                <a:ext cx="2454967" cy="0"/>
+              </a:xfrm>
+              <a:prstGeom prst="line">
+                <a:avLst/>
+              </a:prstGeom>
+              <a:ln>
+                <a:headEnd type="arrow" w="med" len="med"/>
+                <a:tailEnd type="arrow" w="med" len="med"/>
+              </a:ln>
+            </p:spPr>
+            <p:style>
+              <a:lnRef idx="2">
+                <a:schemeClr val="accent2"/>
+              </a:lnRef>
+              <a:fillRef idx="0">
+                <a:schemeClr val="accent2"/>
+              </a:fillRef>
+              <a:effectRef idx="1">
+                <a:schemeClr val="accent2"/>
+              </a:effectRef>
+              <a:fontRef idx="minor">
+                <a:schemeClr val="tx1"/>
+              </a:fontRef>
+            </p:style>
+          </p:cxnSp>
+          <p:sp>
+            <p:nvSpPr>
+              <p:cNvPr id="17" name="TextBox 16">
+                <a:extLst>
+                  <a:ext uri="{FF2B5EF4-FFF2-40B4-BE49-F238E27FC236}">
+                    <a16:creationId xmlns:a16="http://schemas.microsoft.com/office/drawing/2014/main" id="{2577A656-404E-7A70-CF1B-1E5247329728}"/>
+                  </a:ext>
+                </a:extLst>
+              </p:cNvPr>
+              <p:cNvSpPr txBox="1"/>
+              <p:nvPr/>
+            </p:nvSpPr>
+            <p:spPr>
+              <a:xfrm>
+                <a:off x="8701151" y="2154850"/>
+                <a:ext cx="949684" cy="307777"/>
+              </a:xfrm>
+              <a:prstGeom prst="rect">
+                <a:avLst/>
+              </a:prstGeom>
+              <a:noFill/>
+            </p:spPr>
+            <p:txBody>
+              <a:bodyPr wrap="none" rtlCol="0">
+                <a:spAutoFit/>
+              </a:bodyPr>
+              <a:lstStyle/>
+              <a:p>
+                <a:r>
+                  <a:rPr lang="en-US" sz="1400" dirty="0"/>
+                  <a:t>Variability</a:t>
+                </a:r>
+              </a:p>
+            </p:txBody>
+          </p:sp>
+          <p:cxnSp>
+            <p:nvCxnSpPr>
+              <p:cNvPr id="18" name="Straight Connector 17">
+                <a:extLst>
+                  <a:ext uri="{FF2B5EF4-FFF2-40B4-BE49-F238E27FC236}">
+                    <a16:creationId xmlns:a16="http://schemas.microsoft.com/office/drawing/2014/main" id="{FFC82AF7-A589-5522-A477-775CC4B921B5}"/>
+                  </a:ext>
+                </a:extLst>
+              </p:cNvPr>
+              <p:cNvCxnSpPr>
+                <a:cxnSpLocks/>
+              </p:cNvCxnSpPr>
+              <p:nvPr/>
+            </p:nvCxnSpPr>
+            <p:spPr>
+              <a:xfrm>
+                <a:off x="8862683" y="3318349"/>
+                <a:ext cx="673916" cy="0"/>
+              </a:xfrm>
+              <a:prstGeom prst="line">
+                <a:avLst/>
+              </a:prstGeom>
+              <a:ln>
+                <a:headEnd type="arrow" w="med" len="med"/>
+                <a:tailEnd type="arrow" w="med" len="med"/>
+              </a:ln>
+            </p:spPr>
+            <p:style>
+              <a:lnRef idx="2">
+                <a:schemeClr val="accent1"/>
+              </a:lnRef>
+              <a:fillRef idx="0">
+                <a:schemeClr val="accent1"/>
+              </a:fillRef>
+              <a:effectRef idx="1">
+                <a:schemeClr val="accent1"/>
+              </a:effectRef>
+              <a:fontRef idx="minor">
+                <a:schemeClr val="tx1"/>
+              </a:fontRef>
+            </p:style>
+          </p:cxnSp>
+          <p:sp>
+            <p:nvSpPr>
+              <p:cNvPr id="19" name="TextBox 18">
+                <a:extLst>
+                  <a:ext uri="{FF2B5EF4-FFF2-40B4-BE49-F238E27FC236}">
+                    <a16:creationId xmlns:a16="http://schemas.microsoft.com/office/drawing/2014/main" id="{DC692B06-B62E-2458-3313-8866DC2E9447}"/>
+                  </a:ext>
+                </a:extLst>
+              </p:cNvPr>
+              <p:cNvSpPr txBox="1"/>
+              <p:nvPr/>
+            </p:nvSpPr>
+            <p:spPr>
+              <a:xfrm>
+                <a:off x="9187202" y="3159477"/>
+                <a:ext cx="2119619" cy="523220"/>
+              </a:xfrm>
+              <a:prstGeom prst="rect">
+                <a:avLst/>
+              </a:prstGeom>
+              <a:noFill/>
+            </p:spPr>
+            <p:txBody>
+              <a:bodyPr wrap="none" rtlCol="0">
+                <a:spAutoFit/>
+              </a:bodyPr>
+              <a:lstStyle/>
+              <a:p>
+                <a:pPr algn="ctr"/>
+                <a:r>
+                  <a:rPr lang="en-US" sz="1400" dirty="0"/>
+                  <a:t>Irreducible error </a:t>
+                </a:r>
+                <a:br>
+                  <a:rPr lang="en-US" sz="1400" dirty="0"/>
+                </a:br>
+                <a:r>
+                  <a:rPr lang="en-US" sz="1400" dirty="0"/>
+                  <a:t>(stochastic environment)</a:t>
+                </a:r>
+              </a:p>
+            </p:txBody>
+          </p:sp>
+          <p:sp>
+            <p:nvSpPr>
+              <p:cNvPr id="20" name="TextBox 19">
+                <a:extLst>
+                  <a:ext uri="{FF2B5EF4-FFF2-40B4-BE49-F238E27FC236}">
+                    <a16:creationId xmlns:a16="http://schemas.microsoft.com/office/drawing/2014/main" id="{DE1FF47F-2EA2-0342-DB2C-63A570945C9B}"/>
+                  </a:ext>
+                </a:extLst>
+              </p:cNvPr>
+              <p:cNvSpPr txBox="1"/>
+              <p:nvPr/>
+            </p:nvSpPr>
+            <p:spPr>
+              <a:xfrm>
+                <a:off x="9038454" y="2951119"/>
+                <a:ext cx="308098" cy="369332"/>
+              </a:xfrm>
+              <a:prstGeom prst="rect">
+                <a:avLst/>
+              </a:prstGeom>
+              <a:noFill/>
+            </p:spPr>
+            <p:txBody>
+              <a:bodyPr wrap="none" rtlCol="0">
+                <a:spAutoFit/>
+              </a:bodyPr>
+              <a:lstStyle/>
+              <a:p>
+                <a:r>
+                  <a:rPr lang="en-US" dirty="0"/>
+                  <a:t>+</a:t>
+                </a:r>
+              </a:p>
+            </p:txBody>
+          </p:sp>
+          <p:cxnSp>
+            <p:nvCxnSpPr>
+              <p:cNvPr id="21" name="Straight Connector 20">
+                <a:extLst>
+                  <a:ext uri="{FF2B5EF4-FFF2-40B4-BE49-F238E27FC236}">
+                    <a16:creationId xmlns:a16="http://schemas.microsoft.com/office/drawing/2014/main" id="{6C05A0E1-7EB9-476D-4B2D-F1E15E6306CF}"/>
+                  </a:ext>
+                </a:extLst>
+              </p:cNvPr>
+              <p:cNvCxnSpPr>
+                <a:cxnSpLocks/>
+              </p:cNvCxnSpPr>
+              <p:nvPr/>
+            </p:nvCxnSpPr>
+            <p:spPr>
+              <a:xfrm>
+                <a:off x="8900533" y="2671307"/>
+                <a:ext cx="531225" cy="0"/>
+              </a:xfrm>
+              <a:prstGeom prst="line">
+                <a:avLst/>
+              </a:prstGeom>
+              <a:ln>
+                <a:headEnd type="arrow" w="med" len="med"/>
+                <a:tailEnd type="arrow" w="med" len="med"/>
+              </a:ln>
+            </p:spPr>
+            <p:style>
+              <a:lnRef idx="2">
+                <a:schemeClr val="accent3"/>
+              </a:lnRef>
+              <a:fillRef idx="0">
+                <a:schemeClr val="accent3"/>
+              </a:fillRef>
+              <a:effectRef idx="1">
+                <a:schemeClr val="accent3"/>
+              </a:effectRef>
+              <a:fontRef idx="minor">
+                <a:schemeClr val="tx1"/>
+              </a:fontRef>
+            </p:style>
+          </p:cxnSp>
+          <p:sp>
+            <p:nvSpPr>
+              <p:cNvPr id="22" name="TextBox 21">
+                <a:extLst>
+                  <a:ext uri="{FF2B5EF4-FFF2-40B4-BE49-F238E27FC236}">
+                    <a16:creationId xmlns:a16="http://schemas.microsoft.com/office/drawing/2014/main" id="{B51E9AB6-EF7C-6CD6-9D99-DB9C64426D32}"/>
+                  </a:ext>
+                </a:extLst>
+              </p:cNvPr>
+              <p:cNvSpPr txBox="1"/>
+              <p:nvPr/>
+            </p:nvSpPr>
+            <p:spPr>
+              <a:xfrm rot="5400000" flipH="1">
+                <a:off x="9021845" y="2312166"/>
+                <a:ext cx="288599" cy="369332"/>
+              </a:xfrm>
+              <a:prstGeom prst="rect">
+                <a:avLst/>
+              </a:prstGeom>
+              <a:noFill/>
+            </p:spPr>
+            <p:txBody>
+              <a:bodyPr wrap="square" rtlCol="0">
+                <a:spAutoFit/>
+              </a:bodyPr>
+              <a:lstStyle/>
+              <a:p>
+                <a:r>
+                  <a:rPr lang="en-US" dirty="0"/>
+                  <a:t>=</a:t>
+                </a:r>
+              </a:p>
+            </p:txBody>
+          </p:sp>
+          <p:cxnSp>
+            <p:nvCxnSpPr>
+              <p:cNvPr id="23" name="Straight Connector 22">
+                <a:extLst>
+                  <a:ext uri="{FF2B5EF4-FFF2-40B4-BE49-F238E27FC236}">
+                    <a16:creationId xmlns:a16="http://schemas.microsoft.com/office/drawing/2014/main" id="{BCAEF982-2663-F378-757F-D09F09386346}"/>
+                  </a:ext>
+                </a:extLst>
+              </p:cNvPr>
+              <p:cNvCxnSpPr>
+                <a:cxnSpLocks/>
+              </p:cNvCxnSpPr>
+              <p:nvPr/>
+            </p:nvCxnSpPr>
+            <p:spPr>
+              <a:xfrm>
+                <a:off x="8383163" y="2942537"/>
+                <a:ext cx="1174494" cy="0"/>
+              </a:xfrm>
+              <a:prstGeom prst="line">
+                <a:avLst/>
+              </a:prstGeom>
+              <a:ln>
+                <a:headEnd type="arrow" w="med" len="med"/>
+                <a:tailEnd type="arrow" w="med" len="med"/>
+              </a:ln>
+            </p:spPr>
+            <p:style>
+              <a:lnRef idx="2">
+                <a:schemeClr val="accent3"/>
+              </a:lnRef>
+              <a:fillRef idx="0">
+                <a:schemeClr val="accent3"/>
+              </a:fillRef>
+              <a:effectRef idx="1">
+                <a:schemeClr val="accent3"/>
+              </a:effectRef>
+              <a:fontRef idx="minor">
+                <a:schemeClr val="tx1"/>
+              </a:fontRef>
+            </p:style>
+          </p:cxnSp>
+          <p:sp>
+            <p:nvSpPr>
+              <p:cNvPr id="24" name="TextBox 23">
+                <a:extLst>
+                  <a:ext uri="{FF2B5EF4-FFF2-40B4-BE49-F238E27FC236}">
+                    <a16:creationId xmlns:a16="http://schemas.microsoft.com/office/drawing/2014/main" id="{A5CBF46D-DFED-0D97-8E07-535C8D5C61D3}"/>
+                  </a:ext>
+                </a:extLst>
+              </p:cNvPr>
+              <p:cNvSpPr txBox="1"/>
+              <p:nvPr/>
+            </p:nvSpPr>
+            <p:spPr>
+              <a:xfrm>
+                <a:off x="9030052" y="2637589"/>
+                <a:ext cx="308098" cy="369332"/>
+              </a:xfrm>
+              <a:prstGeom prst="rect">
+                <a:avLst/>
+              </a:prstGeom>
+              <a:noFill/>
+            </p:spPr>
+            <p:txBody>
+              <a:bodyPr wrap="none" rtlCol="0">
+                <a:spAutoFit/>
+              </a:bodyPr>
+              <a:lstStyle/>
+              <a:p>
+                <a:r>
+                  <a:rPr lang="en-US" dirty="0"/>
+                  <a:t>+</a:t>
+                </a:r>
+              </a:p>
+            </p:txBody>
+          </p:sp>
+          <p:sp>
+            <p:nvSpPr>
+              <p:cNvPr id="25" name="TextBox 24">
+                <a:extLst>
+                  <a:ext uri="{FF2B5EF4-FFF2-40B4-BE49-F238E27FC236}">
+                    <a16:creationId xmlns:a16="http://schemas.microsoft.com/office/drawing/2014/main" id="{3AADFF5F-022F-DCF0-5936-566634C30D9E}"/>
+                  </a:ext>
+                </a:extLst>
+              </p:cNvPr>
+              <p:cNvSpPr txBox="1"/>
+              <p:nvPr/>
+            </p:nvSpPr>
+            <p:spPr>
+              <a:xfrm>
+                <a:off x="9424174" y="2495593"/>
+                <a:ext cx="1785553" cy="307777"/>
+              </a:xfrm>
+              <a:prstGeom prst="rect">
+                <a:avLst/>
+              </a:prstGeom>
+              <a:noFill/>
+            </p:spPr>
+            <p:txBody>
+              <a:bodyPr wrap="none" rtlCol="0">
+                <a:spAutoFit/>
+              </a:bodyPr>
+              <a:lstStyle/>
+              <a:p>
+                <a:pPr algn="ctr"/>
+                <a:r>
+                  <a:rPr lang="en-US" sz="1400" dirty="0"/>
+                  <a:t>Sample randomness</a:t>
+                </a:r>
+              </a:p>
+            </p:txBody>
+          </p:sp>
+          <p:sp>
+            <p:nvSpPr>
+              <p:cNvPr id="26" name="TextBox 25">
+                <a:extLst>
+                  <a:ext uri="{FF2B5EF4-FFF2-40B4-BE49-F238E27FC236}">
+                    <a16:creationId xmlns:a16="http://schemas.microsoft.com/office/drawing/2014/main" id="{697BA3B2-4538-12FB-2881-37597344BD80}"/>
+                  </a:ext>
+                </a:extLst>
+              </p:cNvPr>
+              <p:cNvSpPr txBox="1"/>
+              <p:nvPr/>
+            </p:nvSpPr>
+            <p:spPr>
+              <a:xfrm>
+                <a:off x="9539223" y="2808179"/>
+                <a:ext cx="1342932" cy="307777"/>
+              </a:xfrm>
+              <a:prstGeom prst="rect">
+                <a:avLst/>
+              </a:prstGeom>
+              <a:noFill/>
+            </p:spPr>
+            <p:txBody>
+              <a:bodyPr wrap="none" rtlCol="0">
+                <a:spAutoFit/>
+              </a:bodyPr>
+              <a:lstStyle/>
+              <a:p>
+                <a:pPr algn="ctr"/>
+                <a:r>
+                  <a:rPr lang="en-US" sz="1400" dirty="0"/>
+                  <a:t>Changing data</a:t>
+                </a:r>
+              </a:p>
+            </p:txBody>
+          </p:sp>
+        </p:grpSp>
+      </p:grpSp>
+    </p:spTree>
+    <p:extLst>
+      <p:ext uri="{BB962C8B-B14F-4D97-AF65-F5344CB8AC3E}">
+        <p14:creationId xmlns:p14="http://schemas.microsoft.com/office/powerpoint/2010/main" val="2004742867"/>
+      </p:ext>
+    </p:extLst>
+  </p:cSld>
+  <p:clrMapOvr>
+    <a:masterClrMapping/>
+  </p:clrMapOvr>
+  <p:timing>
+    <p:tnLst>
+      <p:par>
+        <p:cTn id="1" dur="indefinite" restart="never" nodeType="tmRoot">
+          <p:childTnLst>
+            <p:seq concurrent="1" nextAc="seek">
+              <p:cTn id="2" dur="indefinite" nodeType="mainSeq">
+                <p:childTnLst>
+                  <p:par>
+                    <p:cTn id="3" fill="hold">
+                      <p:stCondLst>
+                        <p:cond delay="indefinite"/>
+                      </p:stCondLst>
+                      <p:childTnLst>
+                        <p:par>
+                          <p:cTn id="4" fill="hold">
+                            <p:stCondLst>
+                              <p:cond delay="0"/>
+                            </p:stCondLst>
+                            <p:childTnLst>
+                              <p:par>
+                                <p:cTn id="5" presetID="1" presetClass="entr" presetSubtype="0" fill="hold" nodeType="clickEffect">
+                                  <p:stCondLst>
+                                    <p:cond delay="0"/>
+                                  </p:stCondLst>
+                                  <p:childTnLst>
+                                    <p:set>
+                                      <p:cBhvr>
+                                        <p:cTn id="6" dur="1" fill="hold">
+                                          <p:stCondLst>
+                                            <p:cond delay="0"/>
+                                          </p:stCondLst>
+                                        </p:cTn>
+                                        <p:tgtEl>
+                                          <p:spTgt spid="3">
+                                            <p:txEl>
+                                              <p:pRg st="5" end="5"/>
+                                            </p:txEl>
+                                          </p:spTgt>
+                                        </p:tgtEl>
+                                        <p:attrNameLst>
+                                          <p:attrName>style.visibility</p:attrName>
+                                        </p:attrNameLst>
+                                      </p:cBhvr>
+                                      <p:to>
+                                        <p:strVal val="visible"/>
+                                      </p:to>
+                                    </p:set>
+                                  </p:childTnLst>
+                                </p:cTn>
+                              </p:par>
+                              <p:par>
+                                <p:cTn id="7" presetID="1" presetClass="entr" presetSubtype="0" fill="hold" nodeType="withEffect">
+                                  <p:stCondLst>
+                                    <p:cond delay="0"/>
+                                  </p:stCondLst>
+                                  <p:childTnLst>
+                                    <p:set>
+                                      <p:cBhvr>
+                                        <p:cTn id="8" dur="1" fill="hold">
+                                          <p:stCondLst>
+                                            <p:cond delay="0"/>
+                                          </p:stCondLst>
+                                        </p:cTn>
+                                        <p:tgtEl>
+                                          <p:spTgt spid="3">
+                                            <p:txEl>
+                                              <p:pRg st="6" end="6"/>
+                                            </p:txEl>
+                                          </p:spTgt>
+                                        </p:tgtEl>
+                                        <p:attrNameLst>
+                                          <p:attrName>style.visibility</p:attrName>
+                                        </p:attrNameLst>
+                                      </p:cBhvr>
+                                      <p:to>
+                                        <p:strVal val="visible"/>
+                                      </p:to>
+                                    </p:set>
+                                  </p:childTnLst>
+                                </p:cTn>
+                              </p:par>
+                              <p:par>
+                                <p:cTn id="9" presetID="1" presetClass="entr" presetSubtype="0" fill="hold" nodeType="withEffect">
+                                  <p:stCondLst>
+                                    <p:cond delay="0"/>
+                                  </p:stCondLst>
+                                  <p:childTnLst>
+                                    <p:set>
+                                      <p:cBhvr>
+                                        <p:cTn id="10" dur="1" fill="hold">
+                                          <p:stCondLst>
+                                            <p:cond delay="0"/>
+                                          </p:stCondLst>
+                                        </p:cTn>
+                                        <p:tgtEl>
+                                          <p:spTgt spid="3">
+                                            <p:txEl>
+                                              <p:pRg st="7" end="7"/>
+                                            </p:txEl>
+                                          </p:spTgt>
+                                        </p:tgtEl>
+                                        <p:attrNameLst>
+                                          <p:attrName>style.visibility</p:attrName>
+                                        </p:attrNameLst>
+                                      </p:cBhvr>
+                                      <p:to>
+                                        <p:strVal val="visible"/>
+                                      </p:to>
+                                    </p:set>
+                                  </p:childTnLst>
+                                </p:cTn>
+                              </p:par>
+                            </p:childTnLst>
+                          </p:cTn>
+                        </p:par>
+                      </p:childTnLst>
+                    </p:cTn>
+                  </p:par>
+                  <p:par>
+                    <p:cTn id="11" fill="hold">
+                      <p:stCondLst>
+                        <p:cond delay="indefinite"/>
+                      </p:stCondLst>
+                      <p:childTnLst>
+                        <p:par>
+                          <p:cTn id="12" fill="hold">
+                            <p:stCondLst>
+                              <p:cond delay="0"/>
+                            </p:stCondLst>
+                            <p:childTnLst>
+                              <p:par>
+                                <p:cTn id="13" presetID="1" presetClass="entr" presetSubtype="0" fill="hold" nodeType="clickEffect">
+                                  <p:stCondLst>
+                                    <p:cond delay="0"/>
+                                  </p:stCondLst>
+                                  <p:childTnLst>
+                                    <p:set>
+                                      <p:cBhvr>
+                                        <p:cTn id="14" dur="1" fill="hold">
+                                          <p:stCondLst>
+                                            <p:cond delay="0"/>
+                                          </p:stCondLst>
+                                        </p:cTn>
+                                        <p:tgtEl>
+                                          <p:spTgt spid="3">
+                                            <p:txEl>
+                                              <p:pRg st="9" end="9"/>
+                                            </p:txEl>
+                                          </p:spTgt>
+                                        </p:tgtEl>
+                                        <p:attrNameLst>
+                                          <p:attrName>style.visibility</p:attrName>
+                                        </p:attrNameLst>
+                                      </p:cBhvr>
+                                      <p:to>
+                                        <p:strVal val="visible"/>
+                                      </p:to>
+                                    </p:set>
+                                  </p:childTnLst>
+                                </p:cTn>
+                              </p:par>
+                              <p:par>
+                                <p:cTn id="15" presetID="1" presetClass="entr" presetSubtype="0" fill="hold" nodeType="withEffect">
+                                  <p:stCondLst>
+                                    <p:cond delay="0"/>
+                                  </p:stCondLst>
+                                  <p:childTnLst>
+                                    <p:set>
+                                      <p:cBhvr>
+                                        <p:cTn id="16" dur="1" fill="hold">
+                                          <p:stCondLst>
+                                            <p:cond delay="0"/>
+                                          </p:stCondLst>
+                                        </p:cTn>
+                                        <p:tgtEl>
+                                          <p:spTgt spid="3">
+                                            <p:txEl>
+                                              <p:pRg st="10" end="10"/>
+                                            </p:txEl>
+                                          </p:spTgt>
+                                        </p:tgtEl>
+                                        <p:attrNameLst>
+                                          <p:attrName>style.visibility</p:attrName>
+                                        </p:attrNameLst>
+                                      </p:cBhvr>
+                                      <p:to>
+                                        <p:strVal val="visible"/>
+                                      </p:to>
+                                    </p:set>
+                                  </p:childTnLst>
+                                </p:cTn>
+                              </p:par>
+                              <p:par>
+                                <p:cTn id="17" presetID="1" presetClass="entr" presetSubtype="0" fill="hold" nodeType="withEffect">
+                                  <p:stCondLst>
+                                    <p:cond delay="0"/>
+                                  </p:stCondLst>
+                                  <p:childTnLst>
+                                    <p:set>
+                                      <p:cBhvr>
+                                        <p:cTn id="18" dur="1" fill="hold">
+                                          <p:stCondLst>
+                                            <p:cond delay="0"/>
+                                          </p:stCondLst>
+                                        </p:cTn>
+                                        <p:tgtEl>
+                                          <p:spTgt spid="3">
+                                            <p:txEl>
+                                              <p:pRg st="11" end="11"/>
+                                            </p:txEl>
+                                          </p:spTgt>
+                                        </p:tgtEl>
+                                        <p:attrNameLst>
+                                          <p:attrName>style.visibility</p:attrName>
+                                        </p:attrNameLst>
+                                      </p:cBhvr>
+                                      <p:to>
+                                        <p:strVal val="visible"/>
+                                      </p:to>
+                                    </p:set>
+                                  </p:childTnLst>
+                                </p:cTn>
+                              </p:par>
+                            </p:childTnLst>
+                          </p:cTn>
+                        </p:par>
+                      </p:childTnLst>
+                    </p:cTn>
+                  </p:par>
+                  <p:par>
+                    <p:cTn id="19" fill="hold">
+                      <p:stCondLst>
+                        <p:cond delay="indefinite"/>
+                      </p:stCondLst>
+                      <p:childTnLst>
+                        <p:par>
+                          <p:cTn id="20" fill="hold">
+                            <p:stCondLst>
+                              <p:cond delay="0"/>
+                            </p:stCondLst>
+                            <p:childTnLst>
+                              <p:par>
+                                <p:cTn id="21" presetID="1" presetClass="entr" presetSubtype="0" fill="hold" nodeType="clickEffect">
+                                  <p:stCondLst>
+                                    <p:cond delay="0"/>
+                                  </p:stCondLst>
+                                  <p:childTnLst>
+                                    <p:set>
+                                      <p:cBhvr>
+                                        <p:cTn id="22" dur="1" fill="hold">
+                                          <p:stCondLst>
+                                            <p:cond delay="0"/>
+                                          </p:stCondLst>
+                                        </p:cTn>
+                                        <p:tgtEl>
+                                          <p:spTgt spid="3">
+                                            <p:txEl>
+                                              <p:pRg st="13" end="13"/>
+                                            </p:txEl>
+                                          </p:spTgt>
+                                        </p:tgtEl>
+                                        <p:attrNameLst>
+                                          <p:attrName>style.visibility</p:attrName>
+                                        </p:attrNameLst>
+                                      </p:cBhvr>
+                                      <p:to>
+                                        <p:strVal val="visible"/>
+                                      </p:to>
+                                    </p:set>
+                                  </p:childTnLst>
+                                </p:cTn>
+                              </p:par>
+                            </p:childTnLst>
+                          </p:cTn>
+                        </p:par>
+                      </p:childTnLst>
+                    </p:cTn>
+                  </p:par>
+                </p:childTnLst>
+              </p:cTn>
+              <p:prevCondLst>
+                <p:cond evt="onPrev" delay="0">
+                  <p:tgtEl>
+                    <p:sldTgt/>
+                  </p:tgtEl>
+                </p:cond>
+              </p:prevCondLst>
+              <p:nextCondLst>
+                <p:cond evt="onNext" delay="0">
+                  <p:tgtEl>
+                    <p:sldTgt/>
+                  </p:tgtEl>
+                </p:cond>
+              </p:nextCondLst>
+            </p:seq>
+          </p:childTnLst>
+        </p:cTn>
+      </p:par>
+    </p:tnLst>
+  </p:timing>
+</p:sld>
+</file>
+
+<file path=ppt/slides/slide21.xml><?xml version="1.0" encoding="utf-8"?>
 <p:sld xmlns:a="http://schemas.openxmlformats.org/drawingml/2006/main" xmlns:r="http://schemas.openxmlformats.org/officeDocument/2006/relationships" xmlns:p="http://schemas.openxmlformats.org/presentationml/2006/main">
   <p:cSld>
     <p:bg>
@@ -11539,8 +15517,8 @@
           </a:extLst>
         </p:spPr>
       </p:pic>
-      <mc:AlternateContent xmlns:mc="http://schemas.openxmlformats.org/markup-compatibility/2006" xmlns:a14="http://schemas.microsoft.com/office/drawing/2010/main">
-        <mc:Choice Requires="a14">
+      <mc:AlternateContent xmlns:mc="http://schemas.openxmlformats.org/markup-compatibility/2006">
+        <mc:Choice xmlns:a14="http://schemas.microsoft.com/office/drawing/2010/main" Requires="a14">
           <p:sp>
             <p:nvSpPr>
               <p:cNvPr id="3" name="Content Placeholder 2" descr="n -step methods let us choose the amount of bootstrapping from 1-step to no bootstrapping (MC). Advantage over one-step methods:. Learning: Looking more steps ahead speeds up learning, especially for sparse rewards. Error reduction: Significantly reduces the bootstrapping error (bias) at the cost of increased variance. An intermediate amount of bootstrapping typically performs better in terms of the variance/bias tradeoff than the one-step and MC extremes. n is application-dependent and can be tuned. Drawback:. Delay: Updates are delayed n -step since future events (rewards and states) are needed. Computation: More computation per time step and higher memory needs than one-step methods. Eligibility traces address the delay and computation drawbacks. We will cover these methods later">
@@ -11623,7 +15601,7 @@
                 </a:r>
                 <a:r>
                   <a:rPr lang="en-US" sz="1800" dirty="0"/>
-                  <a:t>) at the cost of increased </a:t>
+                  <a:t>) at the cost of increased sample </a:t>
                 </a:r>
                 <a:r>
                   <a:rPr lang="en-US" sz="1800" b="1" dirty="0"/>
@@ -11753,7 +15731,7 @@
             </p:txBody>
           </p:sp>
         </mc:Choice>
-        <mc:Fallback xmlns="">
+        <mc:Fallback>
           <p:sp>
             <p:nvSpPr>
               <p:cNvPr id="3" name="Content Placeholder 2" descr="n -step methods let us choose the amount of bootstrapping from 1-step to no bootstrapping (MC). Advantage over one-step methods:. Learning: Looking more steps ahead speeds up learning, especially for sparse rewards. Error reduction: Significantly reduces the bootstrapping error (bias) at the cost of increased variance. An intermediate amount of bootstrapping typically performs better in terms of the variance/bias tradeoff than the one-step and MC extremes. n is application-dependent and can be tuned. Drawback:. Delay: Updates are delayed n -step since future events (rewards and states) are needed. Computation: More computation per time step and higher memory needs than one-step methods. Eligibility traces address the delay and computation drawbacks. We will cover these methods later">
@@ -12121,188 +16099,6 @@
       </p:par>
     </p:tnLst>
   </p:timing>
-</p:sld>
-</file>
-
-<file path=ppt/slides/slide2.xml><?xml version="1.0" encoding="utf-8"?>
-<p:sld xmlns:a="http://schemas.openxmlformats.org/drawingml/2006/main" xmlns:r="http://schemas.openxmlformats.org/officeDocument/2006/relationships" xmlns:p="http://schemas.openxmlformats.org/presentationml/2006/main">
-  <p:cSld>
-    <p:spTree>
-      <p:nvGrpSpPr>
-        <p:cNvPr id="1" name=""/>
-        <p:cNvGrpSpPr/>
-        <p:nvPr/>
-      </p:nvGrpSpPr>
-      <p:grpSpPr>
-        <a:xfrm>
-          <a:off x="0" y="0"/>
-          <a:ext cx="0" cy="0"/>
-          <a:chOff x="0" y="0"/>
-          <a:chExt cx="0" cy="0"/>
-        </a:xfrm>
-      </p:grpSpPr>
-      <p:sp>
-        <p:nvSpPr>
-          <p:cNvPr id="2" name="Title 1">
-            <a:extLst>
-              <a:ext uri="{FF2B5EF4-FFF2-40B4-BE49-F238E27FC236}">
-                <a16:creationId xmlns:a16="http://schemas.microsoft.com/office/drawing/2014/main" id="{9E7A3493-2ED6-DF09-F569-7F3DCA81AB18}"/>
-              </a:ext>
-            </a:extLst>
-          </p:cNvPr>
-          <p:cNvSpPr>
-            <a:spLocks noGrp="1"/>
-          </p:cNvSpPr>
-          <p:nvPr>
-            <p:ph type="title"/>
-          </p:nvPr>
-        </p:nvSpPr>
-        <p:spPr/>
-        <p:txBody>
-          <a:bodyPr/>
-          <a:lstStyle/>
-          <a:p>
-            <a:r>
-              <a:rPr lang="en-US" dirty="0"/>
-              <a:t>Topics of this Course</a:t>
-            </a:r>
-          </a:p>
-        </p:txBody>
-      </p:sp>
-      <p:sp>
-        <p:nvSpPr>
-          <p:cNvPr id="3" name="Content Placeholder 2">
-            <a:extLst>
-              <a:ext uri="{FF2B5EF4-FFF2-40B4-BE49-F238E27FC236}">
-                <a16:creationId xmlns:a16="http://schemas.microsoft.com/office/drawing/2014/main" id="{8F95E019-92A5-79AC-D777-59B4926F61AA}"/>
-              </a:ext>
-            </a:extLst>
-          </p:cNvPr>
-          <p:cNvSpPr>
-            <a:spLocks noGrp="1"/>
-          </p:cNvSpPr>
-          <p:nvPr>
-            <p:ph idx="1"/>
-          </p:nvPr>
-        </p:nvSpPr>
-        <p:spPr/>
-        <p:txBody>
-          <a:bodyPr>
-            <a:normAutofit fontScale="85000" lnSpcReduction="20000"/>
-          </a:bodyPr>
-          <a:lstStyle/>
-          <a:p>
-            <a:r>
-              <a:rPr lang="en-US" dirty="0"/>
-              <a:t>Introduction to reinforcement learning</a:t>
-            </a:r>
-          </a:p>
-          <a:p>
-            <a:r>
-              <a:rPr lang="en-US" dirty="0"/>
-              <a:t>Markov decision processes</a:t>
-            </a:r>
-          </a:p>
-          <a:p>
-            <a:r>
-              <a:rPr lang="en-US" b="1" dirty="0"/>
-              <a:t>Part I: Tabular Methods</a:t>
-            </a:r>
-          </a:p>
-          <a:p>
-            <a:pPr lvl="1"/>
-            <a:r>
-              <a:rPr lang="en-US" dirty="0"/>
-              <a:t>Dynamic programming</a:t>
-            </a:r>
-          </a:p>
-          <a:p>
-            <a:pPr lvl="1"/>
-            <a:r>
-              <a:rPr lang="en-US" dirty="0"/>
-              <a:t>Monte Carlo methods</a:t>
-            </a:r>
-          </a:p>
-          <a:p>
-            <a:pPr lvl="1"/>
-            <a:r>
-              <a:rPr lang="en-US" dirty="0"/>
-              <a:t>Temporal-difference learning</a:t>
-            </a:r>
-          </a:p>
-          <a:p>
-            <a:pPr lvl="1"/>
-            <a:r>
-              <a:rPr lang="en-US" b="1" dirty="0"/>
-              <a:t>Multi-step bootstrapping</a:t>
-            </a:r>
-          </a:p>
-          <a:p>
-            <a:pPr lvl="1"/>
-            <a:r>
-              <a:rPr lang="en-US" dirty="0"/>
-              <a:t>Planning and learning with tabular methods</a:t>
-            </a:r>
-          </a:p>
-          <a:p>
-            <a:r>
-              <a:rPr lang="en-US" dirty="0"/>
-              <a:t>Part II: Approximate Solution Methods</a:t>
-            </a:r>
-          </a:p>
-          <a:p>
-            <a:pPr lvl="1"/>
-            <a:r>
-              <a:rPr lang="en-US" dirty="0"/>
-              <a:t>Prediction and Control using Approximation</a:t>
-            </a:r>
-          </a:p>
-          <a:p>
-            <a:pPr lvl="1"/>
-            <a:r>
-              <a:rPr lang="en-US" dirty="0"/>
-              <a:t>Eligibility Traces</a:t>
-            </a:r>
-          </a:p>
-          <a:p>
-            <a:pPr lvl="1"/>
-            <a:r>
-              <a:rPr lang="en-US" dirty="0"/>
-              <a:t>Policy Gradient Methods</a:t>
-            </a:r>
-          </a:p>
-          <a:p>
-            <a:r>
-              <a:rPr lang="en-US" dirty="0"/>
-              <a:t>Part III: Modern RL Methods</a:t>
-            </a:r>
-          </a:p>
-          <a:p>
-            <a:pPr lvl="1"/>
-            <a:r>
-              <a:rPr lang="en-US" dirty="0"/>
-              <a:t>Deep Reinforcement Learning</a:t>
-            </a:r>
-          </a:p>
-          <a:p>
-            <a:pPr lvl="1"/>
-            <a:r>
-              <a:rPr lang="en-US" dirty="0"/>
-              <a:t>Current Applications</a:t>
-            </a:r>
-          </a:p>
-        </p:txBody>
-      </p:sp>
-    </p:spTree>
-    <p:extLst>
-      <p:ext uri="{BB962C8B-B14F-4D97-AF65-F5344CB8AC3E}">
-        <p14:creationId xmlns:p14="http://schemas.microsoft.com/office/powerpoint/2010/main" val="3653367536"/>
-      </p:ext>
-    </p:extLst>
-  </p:cSld>
-  <p:clrMapOvr>
-    <a:masterClrMapping/>
-  </p:clrMapOvr>
 </p:sld>
 </file>
 
